--- a/presentation/AI_Work_Performance_ENG501.pptx
+++ b/presentation/AI_Work_Performance_ENG501.pptx
@@ -116,7 +116,7 @@
   <p:extLst>
     <p:ext uri="{521415D9-36F7-43E2-AB2F-B90AF26B5E84}">
       <p14:sectionLst xmlns:p14="http://schemas.microsoft.com/office/powerpoint/2010/main">
-        <p14:section name="English (Slides 1-5)" id="{004e458a-44af-3931-f6ed-fd86b64c487d}">
+        <p14:section name="English (Slides 1-5)" id="{3e9537ed-fada-b735-946b-e2a3a12bbb5a}">
           <p14:sldIdLst>
             <p14:sldId id="256"/>
             <p14:sldId id="257"/>
@@ -125,7 +125,7 @@
             <p14:sldId id="260"/>
           </p14:sldIdLst>
         </p14:section>
-        <p14:section name="ภาษาไทย (Slides 6-10)" id="{6b606586-b605-76b5-0ce0-acb8740e89d8}">
+        <p14:section name="ภาษาไทย (Slides 6-10)" id="{e5c3b8c7-e207-c39b-994a-4120ca6ba37f}">
           <p14:sldIdLst>
             <p14:sldId id="261"/>
             <p14:sldId id="262"/>
@@ -1192,7 +1192,7 @@
           <a:p>
             <a:r>
               <a:rPr lang="en-US" dirty="0"/>
-              <a:t/>
+              <a:t>Good morning. Today I will look at one question: how does AI affect productivity, work quality and business performance? I will use two recent field experiments. Article 2 studies consultants at BCG working with GPT-4. Article 5 studies small-business entrepreneurs in Kenya who received a GPT-4 business assistant. First the office, then the marketplace, and finally what the two studies tell us together.</a:t>
             </a:r>
             <a:endParaRPr lang="en-US" dirty="0"/>
           </a:p>
@@ -1280,7 +1280,7 @@
           <a:p>
             <a:r>
               <a:rPr lang="en-US" dirty="0"/>
-              <a:t/>
+              <a:t>เมื่อวางสองงานเคียงกัน บทความที่ 2 แสดงว่าผลิตภาพและคุณภาพของงานความรู้สูงขึ้นภายในพรมแดนของ AI แต่ความถูกต้องลดลงนอกพรมแดน บทความที่ 5 ไม่พบผลเฉลี่ยต่อรายได้และกำไรอย่างชัดเจน และผลลัพธ์ขึ้นกับผลงานตั้งต้นและคำแนะนำที่เลือกนำไปใช้ จุดร่วมคือมนุษย์ที่อยู่ในกระบวนการ AI ส่งผลต่อผลการทำงานจริงได้ แต่ขึ้นอยู่กับความเหมาะสมของงาน พฤติกรรมของผู้ใช้ และวิจารณญาณของมนุษย์ นี่คือเหตุผลที่ผมตั้งชื่อว่า AI เป็นเครื่องมือ ไม่ใช่หลักประกันความสำเร็จ ขอบคุณครับ ยินดีรับคำถาม</a:t>
             </a:r>
             <a:endParaRPr lang="en-US" dirty="0"/>
           </a:p>
@@ -1368,7 +1368,7 @@
           <a:p>
             <a:r>
               <a:rPr lang="en-US" dirty="0"/>
-              <a:t/>
+              <a:t>Article 2 is a field experiment run with Boston Consulting Group. 758 consultants were randomly assigned to one of three conditions: no AI, GPT-4, or GPT-4 plus a short prompt-engineering overview. The authors study productivity, quality, and where AI's abilities end. They call that boundary the jagged technological frontier: AI handles some tasks well but struggles with others that look equally hard. Keep that picture in mind, because the results split exactly along that line.</a:t>
             </a:r>
             <a:endParaRPr lang="en-US" dirty="0"/>
           </a:p>
@@ -1456,7 +1456,7 @@
           <a:p>
             <a:r>
               <a:rPr lang="en-US" dirty="0"/>
-              <a:t/>
+              <a:t>Inside the frontier the gains were large: 12.2% more tasks completed, 25.1% faster, and more than 40% higher quality than the control group. Below-average performers improved by 43% and above-average performers by 17%, each against their own baseline. But for a task chosen to sit outside the frontier, AI users were 19 percentage points less likely to produce a correct solution. Note the unit: that is a gap between two success rates, not a percentage change. The consultants who did well used AI in two ways: Centaurs divided tasks between themselves and the AI, and Cyborgs wove AI into every step. The office result is clear. The next study asks whether it survives contact with a real business.</a:t>
             </a:r>
             <a:endParaRPr lang="en-US" dirty="0"/>
           </a:p>
@@ -1544,7 +1544,7 @@
           <a:p>
             <a:r>
               <a:rPr lang="en-US" dirty="0"/>
-              <a:t/>
+              <a:t>Article 5 moves from consultants to entrepreneurs in Kenya. Half of the small-business owners received a GPT-4-powered business assistant that gave advice; the outcomes were revenue and profit. On average, the researchers could not reject the null hypothesis of no treatment effect. But the average hides two stories. Entrepreneurs who were low performers at baseline did nearly 10% worse with the assistant, while high performers may have benefited by more than 15%. The questions and the AI advice were similar; the difference lay in which advice the entrepreneurs chose to implement. I want to be careful here: these are subgroup averages, not a rule for every individual.</a:t>
             </a:r>
             <a:endParaRPr lang="en-US" dirty="0"/>
           </a:p>
@@ -1632,7 +1632,7 @@
           <a:p>
             <a:r>
               <a:rPr lang="en-US" dirty="0"/>
-              <a:t/>
+              <a:t>Put the two studies side by side. Article 2 shows higher productivity and quality for knowledge work inside AI's frontier, and lower correctness outside it. Article 5 shows no established average effect on revenue and profit, with outcomes that depended on baseline performance and on which recommendations were implemented. The common thread is the human in the loop. AI can influence real performance, but the impact depends on task suitability, user behavior and human judgment. That is why I framed the title as AI being a tool, not a guarantee of success. Thank you, and I welcome your questions.</a:t>
             </a:r>
             <a:endParaRPr lang="en-US" dirty="0"/>
           </a:p>
@@ -1720,7 +1720,7 @@
           <a:p>
             <a:r>
               <a:rPr lang="en-US" dirty="0"/>
-              <a:t/>
+              <a:t>สวัสดีครับ วันนี้ผมจะตอบคำถามเดียวคือ AI ส่งผลต่อผลิตภาพ คุณภาพงาน และผลการดำเนินธุรกิจอย่างไร โดยใช้การทดลองภาคสนามสองชิ้น บทความที่ 2 ศึกษาที่ปรึกษาของ BCG ที่ใช้ GPT-4 ส่วนบทความที่ 5 ศึกษาผู้ประกอบการรายย่อยในเคนยาที่ได้รับผู้ช่วยธุรกิจ GPT-4 เราจะเริ่มจากในสำนักงาน ไปสู่ตลาดจริง แล้วสรุปสิ่งที่สองงานบอกเราร่วมกัน</a:t>
             </a:r>
             <a:endParaRPr lang="en-US" dirty="0"/>
           </a:p>
@@ -1808,7 +1808,7 @@
           <a:p>
             <a:r>
               <a:rPr lang="en-US" dirty="0"/>
-              <a:t/>
+              <a:t>บทความที่ 2 เป็นการทดลองภาคสนามร่วมกับ Boston Consulting Group ที่ปรึกษา 758 คนถูกสุ่มเข้าสามกลุ่ม คือไม่ใช้ AI ใช้ GPT-4 และใช้ GPT-4 พร้อมคำแนะนำการเขียน prompt ผู้วิจัยศึกษาผลิตภาพ คุณภาพ และจุดที่ความสามารถของ AI สิ้นสุด ซึ่งเรียกว่า jagged technological frontier คือ AI ทำงานบางอย่างได้ดี แต่ทำงานอื่นที่ดูยากพอกันได้ไม่ดี ขอให้จำภาพนี้ไว้ เพราะผลการศึกษาแยกตามเส้นนี้พอดี</a:t>
             </a:r>
             <a:endParaRPr lang="en-US" dirty="0"/>
           </a:p>
@@ -1896,7 +1896,7 @@
           <a:p>
             <a:r>
               <a:rPr lang="en-US" dirty="0"/>
-              <a:t/>
+              <a:t>ภายในพรมแดน ผลดีมีขนาดใหญ่ คือทำงานเสร็จเพิ่มขึ้น 12.2% เร็วขึ้น 25.1% และคุณภาพสูงกว่ากลุ่มควบคุมมากกว่า 40% กลุ่มผลงานต่ำกว่าค่าเฉลี่ยดีขึ้น 43% กลุ่มสูงกว่าค่าเฉลี่ยดีขึ้น 17% เทียบกับคะแนนเดิมของตนเอง แต่สำหรับงานที่เลือกให้อยู่นอกพรมแดน ผู้ใช้ AI มีโอกาสได้คำตอบถูกน้อยกว่า 19 จุดร้อยละ สังเกตหน่วยด้วยครับ นี่คือส่วนต่างของอัตราความถูกต้อง ไม่ใช่ร้อยละการเปลี่ยนแปลง ที่ปรึกษาที่ทำได้ดีใช้ AI สองแบบ คือ Centaurs ที่แบ่งงานระหว่างตัวเองกับ AI และ Cyborgs ที่ผสาน AI เข้าไปทุกขั้นตอน ผลในสำนักงานชัดเจน งานถัดไปถามว่าผลนี้จะอยู่รอดเมื่อเจอธุรกิจจริงหรือไม่</a:t>
             </a:r>
             <a:endParaRPr lang="en-US" dirty="0"/>
           </a:p>
@@ -1984,7 +1984,7 @@
           <a:p>
             <a:r>
               <a:rPr lang="en-US" dirty="0"/>
-              <a:t/>
+              <a:t>บทความที่ 5 ย้ายจากที่ปรึกษาไปสู่ผู้ประกอบการในเคนยา เจ้าของธุรกิจขนาดเล็กครึ่งหนึ่งได้รับผู้ช่วยธุรกิจที่ขับเคลื่อนด้วย GPT-4 ซึ่งให้คำแนะนำ ตัวแปรผลลัพธ์คือรายได้และกำไร โดยเฉลี่ยผู้วิจัยไม่สามารถปฏิเสธสมมติฐานว่างที่ว่าไม่มีผลของการทดลอง แต่ค่าเฉลี่ยซ่อนสองเรื่องไว้ ผู้ประกอบการที่ผลงานต่ำตั้งแต่ต้นแย่ลงเกือบ 10% ขณะที่กลุ่มผลงานสูงอาจได้ประโยชน์มากกว่า 15% คำถามและคำแนะนำของ AI ใกล้เคียงกัน ความต่างอยู่ที่คำแนะนำที่ผู้ประกอบการเลือกนำไปปฏิบัติ ขอย้ำว่านี่คือค่าเฉลี่ยของกลุ่มย่อย ไม่ใช่กฎสำหรับทุกคน</a:t>
             </a:r>
             <a:endParaRPr lang="en-US" dirty="0"/>
           </a:p>
@@ -2061,9 +2061,16 @@
   <p:cSld name="TITLE_DARK">
     <p:bg>
       <p:bgPr>
-        <a:solidFill>
-          <a:srgbClr val="1B2A4A"/>
-        </a:solidFill>
+        <a:blipFill dpi="0" rotWithShape="1">
+          <a:blip r:embed="rId1">
+            <a:lum/>
+          </a:blip>
+          <a:srcRect/>
+          <a:stretch>
+            <a:fillRect/>
+          </a:stretch>
+        </a:blipFill>
+        <a:effectLst/>
       </p:bgPr>
     </p:bg>
     <p:spTree>
@@ -2090,8 +2097,8 @@
         </p:nvSpPr>
         <p:spPr>
           <a:xfrm>
-            <a:off x="457200" y="502920"/>
-            <a:ext cx="8229600" cy="914400"/>
+            <a:off x="457200" y="274320"/>
+            <a:ext cx="6309360" cy="1143000"/>
           </a:xfrm>
           <a:prstGeom prst="rect">
             <a:avLst/>
@@ -2104,7 +2111,7 @@
           <a:lstStyle>
             <a:lvl1pPr algn="l" indent="0" marL="0">
               <a:buNone/>
-              <a:defRPr lang="en-US" sz="3400" b="1" dirty="0">
+              <a:defRPr lang="en-US" sz="3200" b="1" dirty="0">
                 <a:solidFill>
                   <a:schemeClr val="bg1"/>
                 </a:solidFill>
@@ -2115,7 +2122,7 @@
             <a:pPr algn="l" indent="0" marL="0">
               <a:buNone/>
             </a:pPr>
-            <a:endParaRPr lang="en-US" sz="3400" dirty="0"/>
+            <a:endParaRPr lang="en-US" sz="3200" dirty="0"/>
           </a:p>
         </p:txBody>
       </p:sp>
@@ -2130,7 +2137,7 @@
         <p:spPr>
           <a:xfrm>
             <a:off x="457200" y="1463040"/>
-            <a:ext cx="8229600" cy="411480"/>
+            <a:ext cx="6309360" cy="365760"/>
           </a:xfrm>
           <a:prstGeom prst="rect">
             <a:avLst/>
@@ -2143,7 +2150,7 @@
           <a:lstStyle>
             <a:lvl1pPr algn="l" indent="0" marL="0">
               <a:buNone/>
-              <a:defRPr lang="en-US" sz="1500" dirty="0">
+              <a:defRPr lang="en-US" sz="1400" dirty="0">
                 <a:solidFill>
                   <a:schemeClr val="accent4"/>
                 </a:solidFill>
@@ -2154,7 +2161,7 @@
             <a:pPr algn="l" indent="0" marL="0">
               <a:buNone/>
             </a:pPr>
-            <a:endParaRPr lang="en-US" sz="1500" dirty="0"/>
+            <a:endParaRPr lang="en-US" sz="1400" dirty="0"/>
           </a:p>
         </p:txBody>
       </p:sp>
@@ -2216,9 +2223,16 @@
   <p:cSld name="CONTENT_EN">
     <p:bg>
       <p:bgPr>
-        <a:solidFill>
-          <a:srgbClr val="FFFFFF"/>
-        </a:solidFill>
+        <a:blipFill dpi="0" rotWithShape="1">
+          <a:blip r:embed="rId1">
+            <a:lum/>
+          </a:blip>
+          <a:srcRect/>
+          <a:stretch>
+            <a:fillRect/>
+          </a:stretch>
+        </a:blipFill>
+        <a:effectLst/>
       </p:bgPr>
     </p:bg>
     <p:spTree>
@@ -2245,8 +2259,8 @@
         </p:nvSpPr>
         <p:spPr>
           <a:xfrm>
-            <a:off x="457200" y="146304"/>
-            <a:ext cx="8229600" cy="237744"/>
+            <a:off x="457200" y="164592"/>
+            <a:ext cx="5943600" cy="237744"/>
           </a:xfrm>
           <a:prstGeom prst="rect">
             <a:avLst/>
@@ -2284,7 +2298,7 @@
         </p:nvSpPr>
         <p:spPr>
           <a:xfrm>
-            <a:off x="457200" y="347472"/>
+            <a:off x="457200" y="365760"/>
             <a:ext cx="8229600" cy="713232"/>
           </a:xfrm>
           <a:prstGeom prst="rect">
@@ -2407,9 +2421,16 @@
   <p:cSld name="CONTENT_TH">
     <p:bg>
       <p:bgPr>
-        <a:solidFill>
-          <a:srgbClr val="FFFFFF"/>
-        </a:solidFill>
+        <a:blipFill dpi="0" rotWithShape="1">
+          <a:blip r:embed="rId1">
+            <a:lum/>
+          </a:blip>
+          <a:srcRect/>
+          <a:stretch>
+            <a:fillRect/>
+          </a:stretch>
+        </a:blipFill>
+        <a:effectLst/>
       </p:bgPr>
     </p:bg>
     <p:spTree>
@@ -2436,8 +2457,8 @@
         </p:nvSpPr>
         <p:spPr>
           <a:xfrm>
-            <a:off x="457200" y="146304"/>
-            <a:ext cx="8229600" cy="237744"/>
+            <a:off x="457200" y="164592"/>
+            <a:ext cx="5943600" cy="237744"/>
           </a:xfrm>
           <a:prstGeom prst="rect">
             <a:avLst/>
@@ -2475,7 +2496,7 @@
         </p:nvSpPr>
         <p:spPr>
           <a:xfrm>
-            <a:off x="457200" y="347472"/>
+            <a:off x="457200" y="365760"/>
             <a:ext cx="8229600" cy="713232"/>
           </a:xfrm>
           <a:prstGeom prst="rect">
@@ -2945,8 +2966,8 @@
         </p:nvSpPr>
         <p:spPr>
           <a:xfrm>
-            <a:off x="457200" y="502920"/>
-            <a:ext cx="8229600" cy="914400"/>
+            <a:off x="457200" y="274320"/>
+            <a:ext cx="6309360" cy="1143000"/>
           </a:xfrm>
           <a:prstGeom prst="rect">
             <a:avLst/>
@@ -2962,14 +2983,14 @@
               <a:buNone/>
             </a:pPr>
             <a:r>
-              <a:rPr lang="en-US" sz="3400" b="1" dirty="0">
+              <a:rPr lang="en-US" sz="3200" b="1" dirty="0">
                 <a:solidFill>
                   <a:schemeClr val="bg1"/>
                 </a:solidFill>
               </a:rPr>
               <a:t>Artificial Intelligence and Work Performance</a:t>
             </a:r>
-            <a:endParaRPr lang="en-US" sz="3400" dirty="0"/>
+            <a:endParaRPr lang="en-US" sz="3200" dirty="0"/>
           </a:p>
         </p:txBody>
       </p:sp>
@@ -2984,7 +3005,7 @@
         <p:spPr>
           <a:xfrm>
             <a:off x="457200" y="1463040"/>
-            <a:ext cx="8229600" cy="411480"/>
+            <a:ext cx="6309360" cy="365760"/>
           </a:xfrm>
           <a:prstGeom prst="rect">
             <a:avLst/>
@@ -3000,27 +3021,51 @@
               <a:buNone/>
             </a:pPr>
             <a:r>
-              <a:rPr lang="en-US" sz="1500" dirty="0">
+              <a:rPr lang="en-US" sz="1400" dirty="0">
                 <a:solidFill>
                   <a:schemeClr val="accent4"/>
                 </a:solidFill>
               </a:rPr>
               <a:t>Evidence from two recent field experiments</a:t>
             </a:r>
-            <a:endParaRPr lang="en-US" sz="1500" dirty="0"/>
-          </a:p>
-        </p:txBody>
-      </p:sp>
-      <p:sp>
-        <p:nvSpPr>
-          <p:cNvPr id="4" name="central question"/>
+            <a:endParaRPr lang="en-US" sz="1400" dirty="0"/>
+          </a:p>
+        </p:txBody>
+      </p:sp>
+      <p:pic>
+        <p:nvPicPr>
+          <p:cNvPr id="4" name="mascot waving" descr="preencoded.png">    </p:cNvPr>
+          <p:cNvPicPr>
+            <a:picLocks noChangeAspect="1"/>
+          </p:cNvPicPr>
+          <p:nvPr/>
+        </p:nvPicPr>
+        <p:blipFill>
+          <a:blip r:embed="rId1"/>
+          <a:stretch>
+            <a:fillRect/>
+          </a:stretch>
+        </p:blipFill>
+        <p:spPr>
+          <a:xfrm>
+            <a:off x="6903720" y="320040"/>
+            <a:ext cx="1920240" cy="1664208"/>
+          </a:xfrm>
+          <a:prstGeom prst="rect">
+            <a:avLst/>
+          </a:prstGeom>
+        </p:spPr>
+      </p:pic>
+      <p:sp>
+        <p:nvSpPr>
+          <p:cNvPr id="5" name="central question"/>
           <p:cNvSpPr txBox="1"/>
           <p:nvPr/>
         </p:nvSpPr>
         <p:spPr>
           <a:xfrm>
-            <a:off x="457200" y="1938528"/>
-            <a:ext cx="8229600" cy="384048"/>
+            <a:off x="457200" y="1920240"/>
+            <a:ext cx="8229600" cy="365760"/>
           </a:xfrm>
           <a:prstGeom prst="rect">
             <a:avLst/>
@@ -3036,39 +3081,39 @@
               <a:buNone/>
             </a:pPr>
             <a:r>
-              <a:rPr lang="en-US" sz="1300" b="1" dirty="0">
-                <a:solidFill>
-                  <a:srgbClr val="C9D6D4"/>
+              <a:rPr lang="en-US" sz="1250" b="1" dirty="0">
+                <a:solidFill>
+                  <a:srgbClr val="BFE6E0"/>
                 </a:solidFill>
               </a:rPr>
               <a:t>Central question: How does AI affect productivity, work quality, and business performance?</a:t>
             </a:r>
-            <a:endParaRPr lang="en-US" sz="1300" dirty="0"/>
-          </a:p>
-        </p:txBody>
-      </p:sp>
-      <p:sp>
-        <p:nvSpPr>
-          <p:cNvPr id="5" name="article card 1"/>
+            <a:endParaRPr lang="en-US" sz="1250" dirty="0"/>
+          </a:p>
+        </p:txBody>
+      </p:sp>
+      <p:sp>
+        <p:nvSpPr>
+          <p:cNvPr id="6" name="article card 1"/>
           <p:cNvSpPr/>
           <p:nvPr/>
         </p:nvSpPr>
         <p:spPr>
           <a:xfrm>
-            <a:off x="457200" y="2468880"/>
-            <a:ext cx="3977640" cy="1463040"/>
+            <a:off x="457200" y="2377440"/>
+            <a:ext cx="3977640" cy="1298448"/>
           </a:xfrm>
           <a:prstGeom prst="roundRect">
             <a:avLst>
-              <a:gd name="adj" fmla="val 5000"/>
+              <a:gd name="adj" fmla="val 7042"/>
             </a:avLst>
           </a:prstGeom>
           <a:solidFill>
-            <a:srgbClr val="3C4D6E"/>
+            <a:srgbClr val="2A3D63"/>
           </a:solidFill>
           <a:ln w="12700">
             <a:solidFill>
-              <a:srgbClr val="3C4D6E"/>
+              <a:srgbClr val="2A3D63"/>
             </a:solidFill>
             <a:prstDash val="solid"/>
           </a:ln>
@@ -3076,13 +3121,13 @@
       </p:sp>
       <p:sp>
         <p:nvSpPr>
-          <p:cNvPr id="6" name="article label"/>
+          <p:cNvPr id="7" name="article label"/>
           <p:cNvSpPr txBox="1"/>
           <p:nvPr/>
         </p:nvSpPr>
         <p:spPr>
           <a:xfrm>
-            <a:off x="658368" y="2596896"/>
+            <a:off x="658368" y="2487168"/>
             <a:ext cx="3575304" cy="219456"/>
           </a:xfrm>
           <a:prstGeom prst="rect">
@@ -3101,7 +3146,7 @@
             <a:r>
               <a:rPr lang="en-US" sz="950" b="1" spc="100" kern="0" dirty="0">
                 <a:solidFill>
-                  <a:srgbClr val="2E8B86"/>
+                  <a:srgbClr val="BFE6E0"/>
                 </a:solidFill>
               </a:rPr>
               <a:t>Article 2</a:t>
@@ -3112,14 +3157,14 @@
       </p:sp>
       <p:sp>
         <p:nvSpPr>
-          <p:cNvPr id="7" name="article title"/>
+          <p:cNvPr id="8" name="article title"/>
           <p:cNvSpPr txBox="1"/>
           <p:nvPr/>
         </p:nvSpPr>
         <p:spPr>
           <a:xfrm>
-            <a:off x="658368" y="2834640"/>
-            <a:ext cx="3575304" cy="713232"/>
+            <a:off x="658368" y="2706624"/>
+            <a:ext cx="3575304" cy="640080"/>
           </a:xfrm>
           <a:prstGeom prst="rect">
             <a:avLst/>
@@ -3135,27 +3180,27 @@
               <a:buNone/>
             </a:pPr>
             <a:r>
-              <a:rPr lang="en-US" sz="1050" b="1" dirty="0">
+              <a:rPr lang="en-US" sz="1000" b="1" dirty="0">
                 <a:solidFill>
                   <a:srgbClr val="FFFFFF"/>
                 </a:solidFill>
               </a:rPr>
               <a:t>Navigating the Jagged Technological Frontier: Field Experimental Evidence of the Effects of AI on Knowledge Worker Productivity and Quality</a:t>
             </a:r>
-            <a:endParaRPr lang="en-US" sz="1050" dirty="0"/>
-          </a:p>
-        </p:txBody>
-      </p:sp>
-      <p:sp>
-        <p:nvSpPr>
-          <p:cNvPr id="8" name="article meta"/>
+            <a:endParaRPr lang="en-US" sz="1000" dirty="0"/>
+          </a:p>
+        </p:txBody>
+      </p:sp>
+      <p:sp>
+        <p:nvSpPr>
+          <p:cNvPr id="9" name="article meta"/>
           <p:cNvSpPr txBox="1"/>
           <p:nvPr/>
         </p:nvSpPr>
         <p:spPr>
           <a:xfrm>
-            <a:off x="658368" y="3547872"/>
-            <a:ext cx="3575304" cy="329184"/>
+            <a:off x="658368" y="3328416"/>
+            <a:ext cx="3575304" cy="310896"/>
           </a:xfrm>
           <a:prstGeom prst="rect">
             <a:avLst/>
@@ -3171,39 +3216,39 @@
               <a:buNone/>
             </a:pPr>
             <a:r>
-              <a:rPr lang="en-US" sz="850" dirty="0">
-                <a:solidFill>
-                  <a:srgbClr val="C9D6D4"/>
+              <a:rPr lang="en-US" sz="800" dirty="0">
+                <a:solidFill>
+                  <a:srgbClr val="BFE6E0"/>
                 </a:solidFill>
               </a:rPr>
               <a:t>Fabrizio Dell'Acqua et al.  |  Harvard Business School Working Paper 24-013, 2023</a:t>
             </a:r>
-            <a:endParaRPr lang="en-US" sz="850" dirty="0"/>
-          </a:p>
-        </p:txBody>
-      </p:sp>
-      <p:sp>
-        <p:nvSpPr>
-          <p:cNvPr id="9" name="article card 2"/>
+            <a:endParaRPr lang="en-US" sz="800" dirty="0"/>
+          </a:p>
+        </p:txBody>
+      </p:sp>
+      <p:sp>
+        <p:nvSpPr>
+          <p:cNvPr id="10" name="article card 2"/>
           <p:cNvSpPr/>
           <p:nvPr/>
         </p:nvSpPr>
         <p:spPr>
           <a:xfrm>
-            <a:off x="4709160" y="2468880"/>
-            <a:ext cx="3977640" cy="1463040"/>
+            <a:off x="4709160" y="2377440"/>
+            <a:ext cx="3977640" cy="1298448"/>
           </a:xfrm>
           <a:prstGeom prst="roundRect">
             <a:avLst>
-              <a:gd name="adj" fmla="val 5000"/>
+              <a:gd name="adj" fmla="val 7042"/>
             </a:avLst>
           </a:prstGeom>
           <a:solidFill>
-            <a:srgbClr val="3C4D6E"/>
+            <a:srgbClr val="2A3D63"/>
           </a:solidFill>
           <a:ln w="12700">
             <a:solidFill>
-              <a:srgbClr val="3C4D6E"/>
+              <a:srgbClr val="2A3D63"/>
             </a:solidFill>
             <a:prstDash val="solid"/>
           </a:ln>
@@ -3211,13 +3256,13 @@
       </p:sp>
       <p:sp>
         <p:nvSpPr>
-          <p:cNvPr id="10" name="article label"/>
+          <p:cNvPr id="11" name="article label"/>
           <p:cNvSpPr txBox="1"/>
           <p:nvPr/>
         </p:nvSpPr>
         <p:spPr>
           <a:xfrm>
-            <a:off x="4910328" y="2596896"/>
+            <a:off x="4910328" y="2487168"/>
             <a:ext cx="3575304" cy="219456"/>
           </a:xfrm>
           <a:prstGeom prst="rect">
@@ -3236,7 +3281,7 @@
             <a:r>
               <a:rPr lang="en-US" sz="950" b="1" spc="100" kern="0" dirty="0">
                 <a:solidFill>
-                  <a:srgbClr val="2E8B86"/>
+                  <a:srgbClr val="BFE6E0"/>
                 </a:solidFill>
               </a:rPr>
               <a:t>Article 5</a:t>
@@ -3247,14 +3292,14 @@
       </p:sp>
       <p:sp>
         <p:nvSpPr>
-          <p:cNvPr id="11" name="article title"/>
+          <p:cNvPr id="12" name="article title"/>
           <p:cNvSpPr txBox="1"/>
           <p:nvPr/>
         </p:nvSpPr>
         <p:spPr>
           <a:xfrm>
-            <a:off x="4910328" y="2834640"/>
-            <a:ext cx="3575304" cy="713232"/>
+            <a:off x="4910328" y="2706624"/>
+            <a:ext cx="3575304" cy="640080"/>
           </a:xfrm>
           <a:prstGeom prst="rect">
             <a:avLst/>
@@ -3270,27 +3315,27 @@
               <a:buNone/>
             </a:pPr>
             <a:r>
-              <a:rPr lang="en-US" sz="1050" b="1" dirty="0">
+              <a:rPr lang="en-US" sz="1000" b="1" dirty="0">
                 <a:solidFill>
                   <a:srgbClr val="FFFFFF"/>
                 </a:solidFill>
               </a:rPr>
               <a:t>The Uneven Impact of Generative Artificial Intelligence on Entrepreneurial Performance: Evidence from a Field Experiment in Kenya</a:t>
             </a:r>
-            <a:endParaRPr lang="en-US" sz="1050" dirty="0"/>
-          </a:p>
-        </p:txBody>
-      </p:sp>
-      <p:sp>
-        <p:nvSpPr>
-          <p:cNvPr id="12" name="article meta"/>
+            <a:endParaRPr lang="en-US" sz="1000" dirty="0"/>
+          </a:p>
+        </p:txBody>
+      </p:sp>
+      <p:sp>
+        <p:nvSpPr>
+          <p:cNvPr id="13" name="article meta"/>
           <p:cNvSpPr txBox="1"/>
           <p:nvPr/>
         </p:nvSpPr>
         <p:spPr>
           <a:xfrm>
-            <a:off x="4910328" y="3547872"/>
-            <a:ext cx="3575304" cy="329184"/>
+            <a:off x="4910328" y="3328416"/>
+            <a:ext cx="3575304" cy="310896"/>
           </a:xfrm>
           <a:prstGeom prst="rect">
             <a:avLst/>
@@ -3306,27 +3351,378 @@
               <a:buNone/>
             </a:pPr>
             <a:r>
-              <a:rPr lang="en-US" sz="850" dirty="0">
-                <a:solidFill>
-                  <a:srgbClr val="C9D6D4"/>
+              <a:rPr lang="en-US" sz="800" dirty="0">
+                <a:solidFill>
+                  <a:srgbClr val="BFE6E0"/>
                 </a:solidFill>
               </a:rPr>
               <a:t>Nicholas G. Otis et al.  |  Management Science, Vol. 72, No. 7, 2026  |  DOI 10.1287/mnsc.2024.06909</a:t>
             </a:r>
-            <a:endParaRPr lang="en-US" sz="850" dirty="0"/>
-          </a:p>
-        </p:txBody>
-      </p:sp>
-      <p:sp>
-        <p:nvSpPr>
-          <p:cNvPr id="13" name="presenter"/>
+            <a:endParaRPr lang="en-US" sz="800" dirty="0"/>
+          </a:p>
+        </p:txBody>
+      </p:sp>
+      <p:sp>
+        <p:nvSpPr>
+          <p:cNvPr id="14" name="roadmap head"/>
           <p:cNvSpPr txBox="1"/>
           <p:nvPr/>
         </p:nvSpPr>
         <p:spPr>
           <a:xfrm>
-            <a:off x="457200" y="4114800"/>
-            <a:ext cx="8229600" cy="502920"/>
+            <a:off x="457200" y="3803904"/>
+            <a:ext cx="1051560" cy="274320"/>
+          </a:xfrm>
+          <a:prstGeom prst="rect">
+            <a:avLst/>
+          </a:prstGeom>
+          <a:noFill/>
+          <a:ln/>
+        </p:spPr>
+        <p:txBody>
+          <a:bodyPr wrap="square" lIns="0" tIns="0" rIns="0" bIns="0" rtlCol="0" anchor="ctr"/>
+          <a:lstStyle/>
+          <a:p>
+            <a:pPr indent="0" marL="0">
+              <a:buNone/>
+            </a:pPr>
+            <a:r>
+              <a:rPr lang="en-US" sz="900" b="1" dirty="0">
+                <a:solidFill>
+                  <a:srgbClr val="BFE6E0"/>
+                </a:solidFill>
+              </a:rPr>
+              <a:t>Today's path</a:t>
+            </a:r>
+            <a:endParaRPr lang="en-US" sz="900" dirty="0"/>
+          </a:p>
+        </p:txBody>
+      </p:sp>
+      <p:sp>
+        <p:nvSpPr>
+          <p:cNvPr id="15" name="roadmap chip 1"/>
+          <p:cNvSpPr/>
+          <p:nvPr/>
+        </p:nvSpPr>
+        <p:spPr>
+          <a:xfrm>
+            <a:off x="1600200" y="3803904"/>
+            <a:ext cx="1344168" cy="274320"/>
+          </a:xfrm>
+          <a:prstGeom prst="roundRect">
+            <a:avLst>
+              <a:gd name="adj" fmla="val 50000"/>
+            </a:avLst>
+          </a:prstGeom>
+          <a:solidFill>
+            <a:srgbClr val="2E8B86"/>
+          </a:solidFill>
+          <a:ln w="12700">
+            <a:solidFill>
+              <a:srgbClr val="2E8B86"/>
+            </a:solidFill>
+            <a:prstDash val="solid"/>
+          </a:ln>
+        </p:spPr>
+      </p:sp>
+      <p:sp>
+        <p:nvSpPr>
+          <p:cNvPr id="16" name="roadmap chip text"/>
+          <p:cNvSpPr txBox="1"/>
+          <p:nvPr/>
+        </p:nvSpPr>
+        <p:spPr>
+          <a:xfrm>
+            <a:off x="1600200" y="3803904"/>
+            <a:ext cx="1344168" cy="274320"/>
+          </a:xfrm>
+          <a:prstGeom prst="rect">
+            <a:avLst/>
+          </a:prstGeom>
+          <a:noFill/>
+          <a:ln/>
+        </p:spPr>
+        <p:txBody>
+          <a:bodyPr wrap="square" lIns="0" tIns="0" rIns="0" bIns="0" rtlCol="0" anchor="ctr"/>
+          <a:lstStyle/>
+          <a:p>
+            <a:pPr algn="ctr" indent="0" marL="0">
+              <a:buNone/>
+            </a:pPr>
+            <a:r>
+              <a:rPr lang="en-US" sz="750" b="1" dirty="0">
+                <a:solidFill>
+                  <a:srgbClr val="FFFFFF"/>
+                </a:solidFill>
+              </a:rPr>
+              <a:t>1  Introduction</a:t>
+            </a:r>
+            <a:endParaRPr lang="en-US" sz="750" dirty="0"/>
+          </a:p>
+        </p:txBody>
+      </p:sp>
+      <p:sp>
+        <p:nvSpPr>
+          <p:cNvPr id="17" name="roadmap chip 2"/>
+          <p:cNvSpPr/>
+          <p:nvPr/>
+        </p:nvSpPr>
+        <p:spPr>
+          <a:xfrm>
+            <a:off x="3035808" y="3803904"/>
+            <a:ext cx="1344168" cy="274320"/>
+          </a:xfrm>
+          <a:prstGeom prst="roundRect">
+            <a:avLst>
+              <a:gd name="adj" fmla="val 50000"/>
+            </a:avLst>
+          </a:prstGeom>
+          <a:solidFill>
+            <a:srgbClr val="2A3D63"/>
+          </a:solidFill>
+          <a:ln w="9525">
+            <a:solidFill>
+              <a:srgbClr val="2E8B86"/>
+            </a:solidFill>
+            <a:prstDash val="solid"/>
+          </a:ln>
+        </p:spPr>
+      </p:sp>
+      <p:sp>
+        <p:nvSpPr>
+          <p:cNvPr id="18" name="roadmap chip text"/>
+          <p:cNvSpPr txBox="1"/>
+          <p:nvPr/>
+        </p:nvSpPr>
+        <p:spPr>
+          <a:xfrm>
+            <a:off x="3035808" y="3803904"/>
+            <a:ext cx="1344168" cy="274320"/>
+          </a:xfrm>
+          <a:prstGeom prst="rect">
+            <a:avLst/>
+          </a:prstGeom>
+          <a:noFill/>
+          <a:ln/>
+        </p:spPr>
+        <p:txBody>
+          <a:bodyPr wrap="square" lIns="0" tIns="0" rIns="0" bIns="0" rtlCol="0" anchor="ctr"/>
+          <a:lstStyle/>
+          <a:p>
+            <a:pPr algn="ctr" indent="0" marL="0">
+              <a:buNone/>
+            </a:pPr>
+            <a:r>
+              <a:rPr lang="en-US" sz="750" b="1" dirty="0">
+                <a:solidFill>
+                  <a:srgbClr val="FFFFFF"/>
+                </a:solidFill>
+              </a:rPr>
+              <a:t>2  Article 2: Method</a:t>
+            </a:r>
+            <a:endParaRPr lang="en-US" sz="750" dirty="0"/>
+          </a:p>
+        </p:txBody>
+      </p:sp>
+      <p:sp>
+        <p:nvSpPr>
+          <p:cNvPr id="19" name="roadmap chip 3"/>
+          <p:cNvSpPr/>
+          <p:nvPr/>
+        </p:nvSpPr>
+        <p:spPr>
+          <a:xfrm>
+            <a:off x="4471416" y="3803904"/>
+            <a:ext cx="1344168" cy="274320"/>
+          </a:xfrm>
+          <a:prstGeom prst="roundRect">
+            <a:avLst>
+              <a:gd name="adj" fmla="val 50000"/>
+            </a:avLst>
+          </a:prstGeom>
+          <a:solidFill>
+            <a:srgbClr val="2A3D63"/>
+          </a:solidFill>
+          <a:ln w="9525">
+            <a:solidFill>
+              <a:srgbClr val="2E8B86"/>
+            </a:solidFill>
+            <a:prstDash val="solid"/>
+          </a:ln>
+        </p:spPr>
+      </p:sp>
+      <p:sp>
+        <p:nvSpPr>
+          <p:cNvPr id="20" name="roadmap chip text"/>
+          <p:cNvSpPr txBox="1"/>
+          <p:nvPr/>
+        </p:nvSpPr>
+        <p:spPr>
+          <a:xfrm>
+            <a:off x="4471416" y="3803904"/>
+            <a:ext cx="1344168" cy="274320"/>
+          </a:xfrm>
+          <a:prstGeom prst="rect">
+            <a:avLst/>
+          </a:prstGeom>
+          <a:noFill/>
+          <a:ln/>
+        </p:spPr>
+        <p:txBody>
+          <a:bodyPr wrap="square" lIns="0" tIns="0" rIns="0" bIns="0" rtlCol="0" anchor="ctr"/>
+          <a:lstStyle/>
+          <a:p>
+            <a:pPr algn="ctr" indent="0" marL="0">
+              <a:buNone/>
+            </a:pPr>
+            <a:r>
+              <a:rPr lang="en-US" sz="750" b="1" dirty="0">
+                <a:solidFill>
+                  <a:srgbClr val="FFFFFF"/>
+                </a:solidFill>
+              </a:rPr>
+              <a:t>3  Article 2: Findings</a:t>
+            </a:r>
+            <a:endParaRPr lang="en-US" sz="750" dirty="0"/>
+          </a:p>
+        </p:txBody>
+      </p:sp>
+      <p:sp>
+        <p:nvSpPr>
+          <p:cNvPr id="21" name="roadmap chip 4"/>
+          <p:cNvSpPr/>
+          <p:nvPr/>
+        </p:nvSpPr>
+        <p:spPr>
+          <a:xfrm>
+            <a:off x="5907024" y="3803904"/>
+            <a:ext cx="1344168" cy="274320"/>
+          </a:xfrm>
+          <a:prstGeom prst="roundRect">
+            <a:avLst>
+              <a:gd name="adj" fmla="val 50000"/>
+            </a:avLst>
+          </a:prstGeom>
+          <a:solidFill>
+            <a:srgbClr val="2A3D63"/>
+          </a:solidFill>
+          <a:ln w="9525">
+            <a:solidFill>
+              <a:srgbClr val="2E8B86"/>
+            </a:solidFill>
+            <a:prstDash val="solid"/>
+          </a:ln>
+        </p:spPr>
+      </p:sp>
+      <p:sp>
+        <p:nvSpPr>
+          <p:cNvPr id="22" name="roadmap chip text"/>
+          <p:cNvSpPr txBox="1"/>
+          <p:nvPr/>
+        </p:nvSpPr>
+        <p:spPr>
+          <a:xfrm>
+            <a:off x="5907024" y="3803904"/>
+            <a:ext cx="1344168" cy="274320"/>
+          </a:xfrm>
+          <a:prstGeom prst="rect">
+            <a:avLst/>
+          </a:prstGeom>
+          <a:noFill/>
+          <a:ln/>
+        </p:spPr>
+        <p:txBody>
+          <a:bodyPr wrap="square" lIns="0" tIns="0" rIns="0" bIns="0" rtlCol="0" anchor="ctr"/>
+          <a:lstStyle/>
+          <a:p>
+            <a:pPr algn="ctr" indent="0" marL="0">
+              <a:buNone/>
+            </a:pPr>
+            <a:r>
+              <a:rPr lang="en-US" sz="750" b="1" dirty="0">
+                <a:solidFill>
+                  <a:srgbClr val="FFFFFF"/>
+                </a:solidFill>
+              </a:rPr>
+              <a:t>4  Article 5: Entrepreneurs</a:t>
+            </a:r>
+            <a:endParaRPr lang="en-US" sz="750" dirty="0"/>
+          </a:p>
+        </p:txBody>
+      </p:sp>
+      <p:sp>
+        <p:nvSpPr>
+          <p:cNvPr id="23" name="roadmap chip 5"/>
+          <p:cNvSpPr/>
+          <p:nvPr/>
+        </p:nvSpPr>
+        <p:spPr>
+          <a:xfrm>
+            <a:off x="7342632" y="3803904"/>
+            <a:ext cx="1344168" cy="274320"/>
+          </a:xfrm>
+          <a:prstGeom prst="roundRect">
+            <a:avLst>
+              <a:gd name="adj" fmla="val 50000"/>
+            </a:avLst>
+          </a:prstGeom>
+          <a:solidFill>
+            <a:srgbClr val="2A3D63"/>
+          </a:solidFill>
+          <a:ln w="9525">
+            <a:solidFill>
+              <a:srgbClr val="2E8B86"/>
+            </a:solidFill>
+            <a:prstDash val="solid"/>
+          </a:ln>
+        </p:spPr>
+      </p:sp>
+      <p:sp>
+        <p:nvSpPr>
+          <p:cNvPr id="24" name="roadmap chip text"/>
+          <p:cNvSpPr txBox="1"/>
+          <p:nvPr/>
+        </p:nvSpPr>
+        <p:spPr>
+          <a:xfrm>
+            <a:off x="7342632" y="3803904"/>
+            <a:ext cx="1344168" cy="274320"/>
+          </a:xfrm>
+          <a:prstGeom prst="rect">
+            <a:avLst/>
+          </a:prstGeom>
+          <a:noFill/>
+          <a:ln/>
+        </p:spPr>
+        <p:txBody>
+          <a:bodyPr wrap="square" lIns="0" tIns="0" rIns="0" bIns="0" rtlCol="0" anchor="ctr"/>
+          <a:lstStyle/>
+          <a:p>
+            <a:pPr algn="ctr" indent="0" marL="0">
+              <a:buNone/>
+            </a:pPr>
+            <a:r>
+              <a:rPr lang="en-US" sz="750" b="1" dirty="0">
+                <a:solidFill>
+                  <a:srgbClr val="FFFFFF"/>
+                </a:solidFill>
+              </a:rPr>
+              <a:t>5  Discussion</a:t>
+            </a:r>
+            <a:endParaRPr lang="en-US" sz="750" dirty="0"/>
+          </a:p>
+        </p:txBody>
+      </p:sp>
+      <p:sp>
+        <p:nvSpPr>
+          <p:cNvPr id="25" name="presenter"/>
+          <p:cNvSpPr txBox="1"/>
+          <p:nvPr/>
+        </p:nvSpPr>
+        <p:spPr>
+          <a:xfrm>
+            <a:off x="457200" y="4224528"/>
+            <a:ext cx="8229600" cy="457200"/>
           </a:xfrm>
           <a:prstGeom prst="rect">
             <a:avLst/>
@@ -3356,9 +3752,9 @@
               <a:buNone/>
             </a:pPr>
             <a:r>
-              <a:rPr lang="en-US" sz="950" dirty="0">
-                <a:solidFill>
-                  <a:srgbClr val="C9D6D4"/>
+              <a:rPr lang="en-US" sz="900" dirty="0">
+                <a:solidFill>
+                  <a:srgbClr val="BFE6E0"/>
                 </a:solidFill>
               </a:rPr>
               <a:t>Student ID 691401708  |  Master of Business Administration (MBA)  |  ENG 501 English for Master's Degree</a:t>
@@ -3447,8 +3843,8 @@
         </p:nvSpPr>
         <p:spPr>
           <a:xfrm>
-            <a:off x="457200" y="146304"/>
-            <a:ext cx="8229600" cy="237744"/>
+            <a:off x="457200" y="164592"/>
+            <a:ext cx="5943600" cy="237744"/>
           </a:xfrm>
           <a:prstGeom prst="rect">
             <a:avLst/>
@@ -3485,7 +3881,7 @@
         </p:nvSpPr>
         <p:spPr>
           <a:xfrm>
-            <a:off x="457200" y="347472"/>
+            <a:off x="457200" y="365760"/>
             <a:ext cx="8229600" cy="713232"/>
           </a:xfrm>
           <a:prstGeom prst="rect">
@@ -3517,19 +3913,117 @@
       </p:sp>
       <p:sp>
         <p:nvSpPr>
-          <p:cNvPr id="4" name="tag finding"/>
+          <p:cNvPr id="4" name="progress dot 1"/>
           <p:cNvSpPr/>
           <p:nvPr/>
         </p:nvSpPr>
         <p:spPr>
           <a:xfrm>
-            <a:off x="457200" y="1115568"/>
-            <a:ext cx="2286000" cy="219456"/>
-          </a:xfrm>
-          <a:prstGeom prst="roundRect">
-            <a:avLst>
-              <a:gd name="adj" fmla="val 50000"/>
-            </a:avLst>
+            <a:off x="7845552" y="228600"/>
+            <a:ext cx="109728" cy="109728"/>
+          </a:xfrm>
+          <a:prstGeom prst="ellipse">
+            <a:avLst/>
+          </a:prstGeom>
+          <a:solidFill>
+            <a:srgbClr val="BFE6E0"/>
+          </a:solidFill>
+          <a:ln w="12700">
+            <a:solidFill>
+              <a:srgbClr val="BFE6E0"/>
+            </a:solidFill>
+            <a:prstDash val="solid"/>
+          </a:ln>
+        </p:spPr>
+      </p:sp>
+      <p:sp>
+        <p:nvSpPr>
+          <p:cNvPr id="5" name="progress dot 2"/>
+          <p:cNvSpPr/>
+          <p:nvPr/>
+        </p:nvSpPr>
+        <p:spPr>
+          <a:xfrm>
+            <a:off x="8028432" y="228600"/>
+            <a:ext cx="109728" cy="109728"/>
+          </a:xfrm>
+          <a:prstGeom prst="ellipse">
+            <a:avLst/>
+          </a:prstGeom>
+          <a:solidFill>
+            <a:srgbClr val="BFE6E0"/>
+          </a:solidFill>
+          <a:ln w="12700">
+            <a:solidFill>
+              <a:srgbClr val="BFE6E0"/>
+            </a:solidFill>
+            <a:prstDash val="solid"/>
+          </a:ln>
+        </p:spPr>
+      </p:sp>
+      <p:sp>
+        <p:nvSpPr>
+          <p:cNvPr id="6" name="progress dot 3"/>
+          <p:cNvSpPr/>
+          <p:nvPr/>
+        </p:nvSpPr>
+        <p:spPr>
+          <a:xfrm>
+            <a:off x="8211312" y="228600"/>
+            <a:ext cx="109728" cy="109728"/>
+          </a:xfrm>
+          <a:prstGeom prst="ellipse">
+            <a:avLst/>
+          </a:prstGeom>
+          <a:solidFill>
+            <a:srgbClr val="BFE6E0"/>
+          </a:solidFill>
+          <a:ln w="12700">
+            <a:solidFill>
+              <a:srgbClr val="BFE6E0"/>
+            </a:solidFill>
+            <a:prstDash val="solid"/>
+          </a:ln>
+        </p:spPr>
+      </p:sp>
+      <p:sp>
+        <p:nvSpPr>
+          <p:cNvPr id="7" name="progress dot 4"/>
+          <p:cNvSpPr/>
+          <p:nvPr/>
+        </p:nvSpPr>
+        <p:spPr>
+          <a:xfrm>
+            <a:off x="8394192" y="228600"/>
+            <a:ext cx="109728" cy="109728"/>
+          </a:xfrm>
+          <a:prstGeom prst="ellipse">
+            <a:avLst/>
+          </a:prstGeom>
+          <a:solidFill>
+            <a:srgbClr val="BFE6E0"/>
+          </a:solidFill>
+          <a:ln w="12700">
+            <a:solidFill>
+              <a:srgbClr val="BFE6E0"/>
+            </a:solidFill>
+            <a:prstDash val="solid"/>
+          </a:ln>
+        </p:spPr>
+      </p:sp>
+      <p:sp>
+        <p:nvSpPr>
+          <p:cNvPr id="8" name="progress dot 5"/>
+          <p:cNvSpPr/>
+          <p:nvPr/>
+        </p:nvSpPr>
+        <p:spPr>
+          <a:xfrm>
+            <a:off x="8577072" y="228600"/>
+            <a:ext cx="109728" cy="109728"/>
+          </a:xfrm>
+          <a:prstGeom prst="ellipse">
+            <a:avLst/>
           </a:prstGeom>
           <a:solidFill>
             <a:srgbClr val="2E8B86"/>
@@ -3544,8 +4038,44 @@
       </p:sp>
       <p:sp>
         <p:nvSpPr>
-          <p:cNvPr id="5" name="tag text"/>
+          <p:cNvPr id="9" name="progress label"/>
           <p:cNvSpPr txBox="1"/>
+          <p:nvPr/>
+        </p:nvSpPr>
+        <p:spPr>
+          <a:xfrm>
+            <a:off x="5742432" y="164592"/>
+            <a:ext cx="2011680" cy="237744"/>
+          </a:xfrm>
+          <a:prstGeom prst="rect">
+            <a:avLst/>
+          </a:prstGeom>
+          <a:noFill/>
+          <a:ln/>
+        </p:spPr>
+        <p:txBody>
+          <a:bodyPr wrap="square" lIns="0" tIns="0" rIns="0" bIns="0" rtlCol="0" anchor="ctr"/>
+          <a:lstStyle/>
+          <a:p>
+            <a:pPr algn="r" indent="0" marL="0">
+              <a:buNone/>
+            </a:pPr>
+            <a:r>
+              <a:rPr lang="en-US" sz="900" dirty="0">
+                <a:solidFill>
+                  <a:schemeClr val="tx2"/>
+                </a:solidFill>
+              </a:rPr>
+              <a:t>อภิปรายผล</a:t>
+            </a:r>
+            <a:endParaRPr lang="en-US" sz="900" dirty="0"/>
+          </a:p>
+        </p:txBody>
+      </p:sp>
+      <p:sp>
+        <p:nvSpPr>
+          <p:cNvPr id="10" name="tag finding"/>
+          <p:cNvSpPr/>
           <p:nvPr/>
         </p:nvSpPr>
         <p:spPr>
@@ -3553,6 +4083,33 @@
             <a:off x="457200" y="1115568"/>
             <a:ext cx="2286000" cy="219456"/>
           </a:xfrm>
+          <a:prstGeom prst="roundRect">
+            <a:avLst>
+              <a:gd name="adj" fmla="val 50000"/>
+            </a:avLst>
+          </a:prstGeom>
+          <a:solidFill>
+            <a:srgbClr val="2E8B86"/>
+          </a:solidFill>
+          <a:ln w="12700">
+            <a:solidFill>
+              <a:srgbClr val="2E8B86"/>
+            </a:solidFill>
+            <a:prstDash val="solid"/>
+          </a:ln>
+        </p:spPr>
+      </p:sp>
+      <p:sp>
+        <p:nvSpPr>
+          <p:cNvPr id="11" name="tag text"/>
+          <p:cNvSpPr txBox="1"/>
+          <p:nvPr/>
+        </p:nvSpPr>
+        <p:spPr>
+          <a:xfrm>
+            <a:off x="457200" y="1115568"/>
+            <a:ext cx="2286000" cy="219456"/>
+          </a:xfrm>
           <a:prstGeom prst="rect">
             <a:avLst/>
           </a:prstGeom>
@@ -3569,7 +4126,7 @@
             <a:r>
               <a:rPr lang="en-US" sz="900" b="1" spc="100" kern="0" dirty="0">
                 <a:solidFill>
-                  <a:schemeClr val="bg1"/>
+                  <a:srgbClr val="FFFFFF"/>
                 </a:solidFill>
               </a:rPr>
               <a:t>ผลการวิจัย (รายงานในบทความ)</a:t>
@@ -3611,7 +4168,7 @@
                     <a:bodyPr/>
                     <a:lstStyle/>
                     <a:p>
-                      <a:pPr algn="l" indent="0" marL="0">
+                      <a:pPr indent="0" marL="0">
                         <a:buNone/>
                       </a:pPr>
                       <a:endParaRPr lang="en-US" sz="1050" dirty="0">
@@ -3668,7 +4225,7 @@
                     <a:bodyPr/>
                     <a:lstStyle/>
                     <a:p>
-                      <a:pPr algn="l" indent="0" marL="0">
+                      <a:pPr indent="0" marL="0">
                         <a:buNone/>
                       </a:pPr>
                       <a:r>
@@ -3736,7 +4293,7 @@
                     <a:bodyPr/>
                     <a:lstStyle/>
                     <a:p>
-                      <a:pPr algn="l" indent="0" marL="0">
+                      <a:pPr indent="0" marL="0">
                         <a:buNone/>
                       </a:pPr>
                       <a:r>
@@ -4424,7 +4981,7 @@
       </p:graphicFrame>
       <p:sp>
         <p:nvSpPr>
-          <p:cNvPr id="7" name="conclusion card"/>
+          <p:cNvPr id="13" name="conclusion card"/>
           <p:cNvSpPr/>
           <p:nvPr/>
         </p:nvSpPr>
@@ -4435,7 +4992,7 @@
           </a:xfrm>
           <a:prstGeom prst="roundRect">
             <a:avLst>
-              <a:gd name="adj" fmla="val 7018"/>
+              <a:gd name="adj" fmla="val 8772"/>
             </a:avLst>
           </a:prstGeom>
           <a:solidFill>
@@ -4447,11 +5004,18 @@
             </a:solidFill>
             <a:prstDash val="solid"/>
           </a:ln>
-        </p:spPr>
-      </p:sp>
-      <p:sp>
-        <p:nvSpPr>
-          <p:cNvPr id="8" name="tag interp"/>
+          <a:effectLst>
+            <a:outerShdw sx="100000" sy="100000" kx="0" ky="0" algn="bl" rotWithShape="0" blurRad="101600" dist="25400" dir="5400000">
+              <a:srgbClr val="1B2A4A">
+                <a:alpha val="12000"/>
+              </a:srgbClr>
+            </a:outerShdw>
+          </a:effectLst>
+        </p:spPr>
+      </p:sp>
+      <p:sp>
+        <p:nvSpPr>
+          <p:cNvPr id="14" name="tag interp"/>
           <p:cNvSpPr/>
           <p:nvPr/>
         </p:nvSpPr>
@@ -4478,7 +5042,7 @@
       </p:sp>
       <p:sp>
         <p:nvSpPr>
-          <p:cNvPr id="9" name="tag text"/>
+          <p:cNvPr id="15" name="tag text"/>
           <p:cNvSpPr txBox="1"/>
           <p:nvPr/>
         </p:nvSpPr>
@@ -4514,7 +5078,7 @@
       </p:sp>
       <p:sp>
         <p:nvSpPr>
-          <p:cNvPr id="10" name="conclusion head"/>
+          <p:cNvPr id="16" name="conclusion head"/>
           <p:cNvSpPr txBox="1"/>
           <p:nvPr/>
         </p:nvSpPr>
@@ -4550,14 +5114,14 @@
       </p:sp>
       <p:sp>
         <p:nvSpPr>
-          <p:cNvPr id="11" name="conclusion"/>
+          <p:cNvPr id="17" name="conclusion"/>
           <p:cNvSpPr txBox="1"/>
           <p:nvPr/>
         </p:nvSpPr>
         <p:spPr>
           <a:xfrm>
-            <a:off x="640080" y="3913632"/>
-            <a:ext cx="3931920" cy="402336"/>
+            <a:off x="640080" y="3895344"/>
+            <a:ext cx="3794760" cy="438912"/>
           </a:xfrm>
           <a:prstGeom prst="rect">
             <a:avLst/>
@@ -4573,20 +5137,20 @@
               <a:buNone/>
             </a:pPr>
             <a:r>
-              <a:rPr lang="en-US" sz="1100" dirty="0">
+              <a:rPr lang="en-US" sz="1000" dirty="0">
                 <a:solidFill>
                   <a:srgbClr val="FFFFFF"/>
                 </a:solidFill>
               </a:rPr>
               <a:t>AI ส่งผลต่อผลการทำงานจริงได้ แต่ผลกระทบขึ้นอยู่กับความเหมาะสมของงาน พฤติกรรมของผู้ใช้ และวิจารณญาณของมนุษย์</a:t>
             </a:r>
-            <a:endParaRPr lang="en-US" sz="1100" dirty="0"/>
+            <a:endParaRPr lang="en-US" sz="1000" dirty="0"/>
           </a:p>
         </p:txBody>
       </p:sp>
       <p:pic>
         <p:nvPicPr>
-          <p:cNvPr id="12" name="icon check" descr="preencoded.png">    </p:cNvPr>
+          <p:cNvPr id="18" name="icon check" descr="preencoded.png">    </p:cNvPr>
           <p:cNvPicPr>
             <a:picLocks noChangeAspect="1"/>
           </p:cNvPicPr>
@@ -4600,7 +5164,7 @@
         </p:blipFill>
         <p:spPr>
           <a:xfrm>
-            <a:off x="4846320" y="3474720"/>
+            <a:off x="4526280" y="3474720"/>
             <a:ext cx="182880" cy="182880"/>
           </a:xfrm>
           <a:prstGeom prst="rect">
@@ -4610,14 +5174,14 @@
       </p:pic>
       <p:sp>
         <p:nvSpPr>
-          <p:cNvPr id="13" name="takeaway 1"/>
+          <p:cNvPr id="19" name="takeaway 1"/>
           <p:cNvSpPr txBox="1"/>
           <p:nvPr/>
         </p:nvSpPr>
         <p:spPr>
           <a:xfrm>
-            <a:off x="5120640" y="3438144"/>
-            <a:ext cx="3383280" cy="256032"/>
+            <a:off x="4800600" y="3438144"/>
+            <a:ext cx="2240280" cy="256032"/>
           </a:xfrm>
           <a:prstGeom prst="rect">
             <a:avLst/>
@@ -4633,20 +5197,20 @@
               <a:buNone/>
             </a:pPr>
             <a:r>
-              <a:rPr lang="en-US" sz="1050" dirty="0">
+              <a:rPr lang="en-US" sz="1000" dirty="0">
                 <a:solidFill>
                   <a:srgbClr val="FFFFFF"/>
                 </a:solidFill>
               </a:rPr>
               <a:t>เลือกงานให้เหมาะกับสิ่งที่ AI ทำได้ดี</a:t>
             </a:r>
-            <a:endParaRPr lang="en-US" sz="1050" dirty="0"/>
+            <a:endParaRPr lang="en-US" sz="1000" dirty="0"/>
           </a:p>
         </p:txBody>
       </p:sp>
       <p:pic>
         <p:nvPicPr>
-          <p:cNvPr id="14" name="icon check" descr="preencoded.png">    </p:cNvPr>
+          <p:cNvPr id="20" name="icon check" descr="preencoded.png">    </p:cNvPr>
           <p:cNvPicPr>
             <a:picLocks noChangeAspect="1"/>
           </p:cNvPicPr>
@@ -4660,7 +5224,7 @@
         </p:blipFill>
         <p:spPr>
           <a:xfrm>
-            <a:off x="4846320" y="3767328"/>
+            <a:off x="4526280" y="3767328"/>
             <a:ext cx="182880" cy="182880"/>
           </a:xfrm>
           <a:prstGeom prst="rect">
@@ -4670,14 +5234,14 @@
       </p:pic>
       <p:sp>
         <p:nvSpPr>
-          <p:cNvPr id="15" name="takeaway 2"/>
+          <p:cNvPr id="21" name="takeaway 2"/>
           <p:cNvSpPr txBox="1"/>
           <p:nvPr/>
         </p:nvSpPr>
         <p:spPr>
           <a:xfrm>
-            <a:off x="5120640" y="3730752"/>
-            <a:ext cx="3383280" cy="256032"/>
+            <a:off x="4800600" y="3730752"/>
+            <a:ext cx="2240280" cy="256032"/>
           </a:xfrm>
           <a:prstGeom prst="rect">
             <a:avLst/>
@@ -4693,20 +5257,20 @@
               <a:buNone/>
             </a:pPr>
             <a:r>
-              <a:rPr lang="en-US" sz="1050" dirty="0">
+              <a:rPr lang="en-US" sz="1000" dirty="0">
                 <a:solidFill>
                   <a:srgbClr val="FFFFFF"/>
                 </a:solidFill>
               </a:rPr>
               <a:t>ประเมินคำแนะนำของ AI อย่างมีวิจารณญาณก่อนนำไปใช้</a:t>
             </a:r>
-            <a:endParaRPr lang="en-US" sz="1050" dirty="0"/>
+            <a:endParaRPr lang="en-US" sz="1000" dirty="0"/>
           </a:p>
         </p:txBody>
       </p:sp>
       <p:pic>
         <p:nvPicPr>
-          <p:cNvPr id="16" name="icon check" descr="preencoded.png">    </p:cNvPr>
+          <p:cNvPr id="22" name="icon check" descr="preencoded.png">    </p:cNvPr>
           <p:cNvPicPr>
             <a:picLocks noChangeAspect="1"/>
           </p:cNvPicPr>
@@ -4720,7 +5284,7 @@
         </p:blipFill>
         <p:spPr>
           <a:xfrm>
-            <a:off x="4846320" y="4059936"/>
+            <a:off x="4526280" y="4059936"/>
             <a:ext cx="182880" cy="182880"/>
           </a:xfrm>
           <a:prstGeom prst="rect">
@@ -4730,14 +5294,14 @@
       </p:pic>
       <p:sp>
         <p:nvSpPr>
-          <p:cNvPr id="17" name="takeaway 3"/>
+          <p:cNvPr id="23" name="takeaway 3"/>
           <p:cNvSpPr txBox="1"/>
           <p:nvPr/>
         </p:nvSpPr>
         <p:spPr>
           <a:xfrm>
-            <a:off x="5120640" y="4023360"/>
-            <a:ext cx="3383280" cy="256032"/>
+            <a:off x="4800600" y="4023360"/>
+            <a:ext cx="2240280" cy="256032"/>
           </a:xfrm>
           <a:prstGeom prst="rect">
             <a:avLst/>
@@ -4753,27 +5317,75 @@
               <a:buNone/>
             </a:pPr>
             <a:r>
-              <a:rPr lang="en-US" sz="1050" dirty="0">
+              <a:rPr lang="en-US" sz="1000" dirty="0">
                 <a:solidFill>
                   <a:srgbClr val="FFFFFF"/>
                 </a:solidFill>
               </a:rPr>
               <a:t>ให้มนุษย์เป็นผู้ตัดสินใจขั้นสุดท้าย</a:t>
             </a:r>
-            <a:endParaRPr lang="en-US" sz="1050" dirty="0"/>
-          </a:p>
-        </p:txBody>
-      </p:sp>
-      <p:sp>
-        <p:nvSpPr>
-          <p:cNvPr id="18" name="reference"/>
+            <a:endParaRPr lang="en-US" sz="1000" dirty="0"/>
+          </a:p>
+        </p:txBody>
+      </p:sp>
+      <p:pic>
+        <p:nvPicPr>
+          <p:cNvPr id="24" name="human handshake" descr="preencoded.png">    </p:cNvPr>
+          <p:cNvPicPr>
+            <a:picLocks noChangeAspect="1"/>
+          </p:cNvPicPr>
+          <p:nvPr/>
+        </p:nvPicPr>
+        <p:blipFill>
+          <a:blip r:embed="rId4"/>
+          <a:stretch>
+            <a:fillRect/>
+          </a:stretch>
+        </p:blipFill>
+        <p:spPr>
+          <a:xfrm>
+            <a:off x="6903720" y="3401568"/>
+            <a:ext cx="868680" cy="914400"/>
+          </a:xfrm>
+          <a:prstGeom prst="rect">
+            <a:avLst/>
+          </a:prstGeom>
+        </p:spPr>
+      </p:pic>
+      <p:pic>
+        <p:nvPicPr>
+          <p:cNvPr id="25" name="mascot handshake" descr="preencoded.png">    </p:cNvPr>
+          <p:cNvPicPr>
+            <a:picLocks noChangeAspect="1"/>
+          </p:cNvPicPr>
+          <p:nvPr/>
+        </p:nvPicPr>
+        <p:blipFill>
+          <a:blip r:embed="rId5"/>
+          <a:stretch>
+            <a:fillRect/>
+          </a:stretch>
+        </p:blipFill>
+        <p:spPr>
+          <a:xfrm>
+            <a:off x="7662672" y="3401568"/>
+            <a:ext cx="932688" cy="914400"/>
+          </a:xfrm>
+          <a:prstGeom prst="rect">
+            <a:avLst/>
+          </a:prstGeom>
+        </p:spPr>
+      </p:pic>
+      <p:sp>
+        <p:nvSpPr>
+          <p:cNvPr id="26" name="reference"/>
           <p:cNvSpPr txBox="1"/>
           <p:nvPr/>
         </p:nvSpPr>
         <p:spPr>
           <a:xfrm>
             <a:off x="457200" y="4425696"/>
-            <a:ext cx="8229600" cy="310896"/>
+            <a:ext cx="5120640" cy="310896"/>
           </a:xfrm>
           <a:prstGeom prst="rect">
             <a:avLst/>
@@ -4797,6 +5409,104 @@
               <a:t>Dell'Acqua et al. (2023), Harvard Business School Working Paper 24-013   |   Otis et al. (2026), Management Science, 72(7), https://doi.org/10.1287/mnsc.2024.06909</a:t>
             </a:r>
             <a:endParaRPr lang="en-US" sz="750" dirty="0"/>
+          </a:p>
+        </p:txBody>
+      </p:sp>
+      <p:sp>
+        <p:nvSpPr>
+          <p:cNvPr id="27" name="bridge card"/>
+          <p:cNvSpPr/>
+          <p:nvPr/>
+        </p:nvSpPr>
+        <p:spPr>
+          <a:xfrm>
+            <a:off x="5760720" y="4407408"/>
+            <a:ext cx="2926080" cy="329184"/>
+          </a:xfrm>
+          <a:prstGeom prst="roundRect">
+            <a:avLst>
+              <a:gd name="adj" fmla="val 27778"/>
+            </a:avLst>
+          </a:prstGeom>
+          <a:solidFill>
+            <a:srgbClr val="BFE6E0"/>
+          </a:solidFill>
+          <a:ln w="12700">
+            <a:solidFill>
+              <a:srgbClr val="BFE6E0"/>
+            </a:solidFill>
+            <a:prstDash val="solid"/>
+          </a:ln>
+        </p:spPr>
+      </p:sp>
+      <p:pic>
+        <p:nvPicPr>
+          <p:cNvPr id="28" name="icon FiArrowRight" descr="preencoded.png">    </p:cNvPr>
+          <p:cNvPicPr>
+            <a:picLocks noChangeAspect="1"/>
+          </p:cNvPicPr>
+          <p:nvPr/>
+        </p:nvPicPr>
+        <p:blipFill>
+          <a:blip r:embed="rId6"/>
+          <a:stretch>
+            <a:fillRect/>
+          </a:stretch>
+        </p:blipFill>
+        <p:spPr>
+          <a:xfrm>
+            <a:off x="8412480" y="4480560"/>
+            <a:ext cx="182880" cy="182880"/>
+          </a:xfrm>
+          <a:prstGeom prst="rect">
+            <a:avLst/>
+          </a:prstGeom>
+        </p:spPr>
+      </p:pic>
+      <p:sp>
+        <p:nvSpPr>
+          <p:cNvPr id="29" name="bridge text"/>
+          <p:cNvSpPr txBox="1"/>
+          <p:nvPr/>
+        </p:nvSpPr>
+        <p:spPr>
+          <a:xfrm>
+            <a:off x="5870448" y="4407408"/>
+            <a:ext cx="2505456" cy="329184"/>
+          </a:xfrm>
+          <a:prstGeom prst="rect">
+            <a:avLst/>
+          </a:prstGeom>
+          <a:noFill/>
+          <a:ln/>
+        </p:spPr>
+        <p:txBody>
+          <a:bodyPr wrap="square" lIns="0" tIns="0" rIns="0" bIns="0" rtlCol="0" anchor="ctr"/>
+          <a:lstStyle/>
+          <a:p>
+            <a:pPr indent="0" marL="0">
+              <a:buNone/>
+            </a:pPr>
+            <a:r>
+              <a:rPr lang="en-US" sz="900" b="1" dirty="0">
+                <a:solidFill>
+                  <a:srgbClr val="2E8B86"/>
+                </a:solidFill>
+              </a:rPr>
+              <a:t>ถัดไป:  </a:t>
+            </a:r>
+            <a:pPr indent="0" marL="0">
+              <a:buNone/>
+            </a:pPr>
+            <a:r>
+              <a:rPr lang="en-US" sz="900" dirty="0">
+                <a:solidFill>
+                  <a:srgbClr val="1B2A4A"/>
+                </a:solidFill>
+              </a:rPr>
+              <a:t>ขอบคุณครับ ยินดีรับคำถาม</a:t>
+            </a:r>
+            <a:endParaRPr lang="en-US" sz="900" dirty="0"/>
           </a:p>
         </p:txBody>
       </p:sp>
@@ -4880,8 +5590,8 @@
         </p:nvSpPr>
         <p:spPr>
           <a:xfrm>
-            <a:off x="457200" y="146304"/>
-            <a:ext cx="8229600" cy="237744"/>
+            <a:off x="457200" y="164592"/>
+            <a:ext cx="5943600" cy="237744"/>
           </a:xfrm>
           <a:prstGeom prst="rect">
             <a:avLst/>
@@ -4918,7 +5628,7 @@
         </p:nvSpPr>
         <p:spPr>
           <a:xfrm>
-            <a:off x="457200" y="347472"/>
+            <a:off x="457200" y="365760"/>
             <a:ext cx="8229600" cy="713232"/>
           </a:xfrm>
           <a:prstGeom prst="rect">
@@ -4950,50 +5660,39 @@
       </p:sp>
       <p:sp>
         <p:nvSpPr>
-          <p:cNvPr id="4" name="byline"/>
-          <p:cNvSpPr txBox="1"/>
-          <p:nvPr/>
-        </p:nvSpPr>
-        <p:spPr>
-          <a:xfrm>
-            <a:off x="457200" y="1060704"/>
-            <a:ext cx="8229600" cy="219456"/>
-          </a:xfrm>
-          <a:prstGeom prst="rect">
-            <a:avLst/>
-          </a:prstGeom>
-          <a:noFill/>
-          <a:ln/>
-        </p:spPr>
-        <p:txBody>
-          <a:bodyPr wrap="square" lIns="0" tIns="0" rIns="0" bIns="0" rtlCol="0" anchor="ctr"/>
-          <a:lstStyle/>
-          <a:p>
-            <a:pPr indent="0" marL="0">
-              <a:buNone/>
-            </a:pPr>
-            <a:r>
-              <a:rPr lang="en-US" sz="900" dirty="0">
-                <a:solidFill>
-                  <a:schemeClr val="tx2"/>
-                </a:solidFill>
-              </a:rPr>
-              <a:t>Fabrizio Dell'Acqua et al.  |  Harvard Business School Working Paper 24-013, 2023</a:t>
-            </a:r>
-            <a:endParaRPr lang="en-US" sz="900" dirty="0"/>
-          </a:p>
-        </p:txBody>
-      </p:sp>
-      <p:sp>
-        <p:nvSpPr>
-          <p:cNvPr id="5" name="icon circle"/>
+          <p:cNvPr id="4" name="progress dot 1"/>
           <p:cNvSpPr/>
           <p:nvPr/>
         </p:nvSpPr>
         <p:spPr>
           <a:xfrm>
-            <a:off x="457200" y="1426464"/>
-            <a:ext cx="384048" cy="384048"/>
+            <a:off x="7845552" y="228600"/>
+            <a:ext cx="109728" cy="109728"/>
+          </a:xfrm>
+          <a:prstGeom prst="ellipse">
+            <a:avLst/>
+          </a:prstGeom>
+          <a:solidFill>
+            <a:srgbClr val="BFE6E0"/>
+          </a:solidFill>
+          <a:ln w="12700">
+            <a:solidFill>
+              <a:srgbClr val="BFE6E0"/>
+            </a:solidFill>
+            <a:prstDash val="solid"/>
+          </a:ln>
+        </p:spPr>
+      </p:sp>
+      <p:sp>
+        <p:nvSpPr>
+          <p:cNvPr id="5" name="progress dot 2"/>
+          <p:cNvSpPr/>
+          <p:nvPr/>
+        </p:nvSpPr>
+        <p:spPr>
+          <a:xfrm>
+            <a:off x="8028432" y="228600"/>
+            <a:ext cx="109728" cy="109728"/>
           </a:xfrm>
           <a:prstGeom prst="ellipse">
             <a:avLst/>
@@ -5009,89 +5708,162 @@
           </a:ln>
         </p:spPr>
       </p:sp>
-      <p:pic>
-        <p:nvPicPr>
-          <p:cNvPr id="6" name="icon FiBriefcase" descr="preencoded.png">    </p:cNvPr>
-          <p:cNvPicPr>
-            <a:picLocks noChangeAspect="1"/>
-          </p:cNvPicPr>
-          <p:nvPr/>
-        </p:nvPicPr>
-        <p:blipFill>
-          <a:blip r:embed="rId1"/>
-          <a:stretch>
-            <a:fillRect/>
-          </a:stretch>
-        </p:blipFill>
-        <p:spPr>
-          <a:xfrm>
-            <a:off x="539496" y="1508760"/>
-            <a:ext cx="219456" cy="219456"/>
-          </a:xfrm>
-          <a:prstGeom prst="rect">
-            <a:avLst/>
-          </a:prstGeom>
-        </p:spPr>
-      </p:pic>
-      <p:sp>
-        <p:nvSpPr>
-          <p:cNvPr id="7" name="fact Research partner"/>
+      <p:sp>
+        <p:nvSpPr>
+          <p:cNvPr id="6" name="progress dot 3"/>
+          <p:cNvSpPr/>
+          <p:nvPr/>
+        </p:nvSpPr>
+        <p:spPr>
+          <a:xfrm>
+            <a:off x="8211312" y="228600"/>
+            <a:ext cx="109728" cy="109728"/>
+          </a:xfrm>
+          <a:prstGeom prst="ellipse">
+            <a:avLst/>
+          </a:prstGeom>
+          <a:solidFill>
+            <a:srgbClr val="D8DEE6"/>
+          </a:solidFill>
+          <a:ln w="12700">
+            <a:solidFill>
+              <a:srgbClr val="D8DEE6"/>
+            </a:solidFill>
+            <a:prstDash val="solid"/>
+          </a:ln>
+        </p:spPr>
+      </p:sp>
+      <p:sp>
+        <p:nvSpPr>
+          <p:cNvPr id="7" name="progress dot 4"/>
+          <p:cNvSpPr/>
+          <p:nvPr/>
+        </p:nvSpPr>
+        <p:spPr>
+          <a:xfrm>
+            <a:off x="8394192" y="228600"/>
+            <a:ext cx="109728" cy="109728"/>
+          </a:xfrm>
+          <a:prstGeom prst="ellipse">
+            <a:avLst/>
+          </a:prstGeom>
+          <a:solidFill>
+            <a:srgbClr val="D8DEE6"/>
+          </a:solidFill>
+          <a:ln w="12700">
+            <a:solidFill>
+              <a:srgbClr val="D8DEE6"/>
+            </a:solidFill>
+            <a:prstDash val="solid"/>
+          </a:ln>
+        </p:spPr>
+      </p:sp>
+      <p:sp>
+        <p:nvSpPr>
+          <p:cNvPr id="8" name="progress dot 5"/>
+          <p:cNvSpPr/>
+          <p:nvPr/>
+        </p:nvSpPr>
+        <p:spPr>
+          <a:xfrm>
+            <a:off x="8577072" y="228600"/>
+            <a:ext cx="109728" cy="109728"/>
+          </a:xfrm>
+          <a:prstGeom prst="ellipse">
+            <a:avLst/>
+          </a:prstGeom>
+          <a:solidFill>
+            <a:srgbClr val="D8DEE6"/>
+          </a:solidFill>
+          <a:ln w="12700">
+            <a:solidFill>
+              <a:srgbClr val="D8DEE6"/>
+            </a:solidFill>
+            <a:prstDash val="solid"/>
+          </a:ln>
+        </p:spPr>
+      </p:sp>
+      <p:sp>
+        <p:nvSpPr>
+          <p:cNvPr id="9" name="progress label"/>
           <p:cNvSpPr txBox="1"/>
           <p:nvPr/>
         </p:nvSpPr>
         <p:spPr>
           <a:xfrm>
-            <a:off x="969264" y="1389888"/>
-            <a:ext cx="3557016" cy="512064"/>
-          </a:xfrm>
-          <a:prstGeom prst="rect">
-            <a:avLst/>
-          </a:prstGeom>
-          <a:noFill/>
-          <a:ln/>
-        </p:spPr>
-        <p:txBody>
-          <a:bodyPr wrap="square" lIns="0" tIns="0" rIns="0" bIns="0" rtlCol="0" anchor="t"/>
+            <a:off x="5742432" y="164592"/>
+            <a:ext cx="2011680" cy="237744"/>
+          </a:xfrm>
+          <a:prstGeom prst="rect">
+            <a:avLst/>
+          </a:prstGeom>
+          <a:noFill/>
+          <a:ln/>
+        </p:spPr>
+        <p:txBody>
+          <a:bodyPr wrap="square" lIns="0" tIns="0" rIns="0" bIns="0" rtlCol="0" anchor="ctr"/>
+          <a:lstStyle/>
+          <a:p>
+            <a:pPr algn="r" indent="0" marL="0">
+              <a:buNone/>
+            </a:pPr>
+            <a:r>
+              <a:rPr lang="en-US" sz="800" dirty="0">
+                <a:solidFill>
+                  <a:schemeClr val="tx2"/>
+                </a:solidFill>
+              </a:rPr>
+              <a:t>Article 2: Method</a:t>
+            </a:r>
+            <a:endParaRPr lang="en-US" sz="800" dirty="0"/>
+          </a:p>
+        </p:txBody>
+      </p:sp>
+      <p:sp>
+        <p:nvSpPr>
+          <p:cNvPr id="10" name="byline"/>
+          <p:cNvSpPr txBox="1"/>
+          <p:nvPr/>
+        </p:nvSpPr>
+        <p:spPr>
+          <a:xfrm>
+            <a:off x="457200" y="1060704"/>
+            <a:ext cx="8229600" cy="219456"/>
+          </a:xfrm>
+          <a:prstGeom prst="rect">
+            <a:avLst/>
+          </a:prstGeom>
+          <a:noFill/>
+          <a:ln/>
+        </p:spPr>
+        <p:txBody>
+          <a:bodyPr wrap="square" lIns="0" tIns="0" rIns="0" bIns="0" rtlCol="0" anchor="ctr"/>
           <a:lstStyle/>
           <a:p>
             <a:pPr indent="0" marL="0">
               <a:buNone/>
             </a:pPr>
             <a:r>
-              <a:rPr lang="en-US" sz="1150" b="1" dirty="0">
-                <a:solidFill>
-                  <a:schemeClr val="tx1"/>
-                </a:solidFill>
-              </a:rPr>
-              <a:t>Research partner</a:t>
-            </a:r>
-            <a:endParaRPr lang="en-US" sz="1150" dirty="0"/>
-          </a:p>
-          <a:p>
-            <a:pPr indent="0" marL="0">
-              <a:buNone/>
-            </a:pPr>
-            <a:r>
-              <a:rPr lang="en-US" sz="1050" dirty="0">
+              <a:rPr lang="en-US" sz="900" dirty="0">
                 <a:solidFill>
                   <a:schemeClr val="tx2"/>
                 </a:solidFill>
               </a:rPr>
-              <a:t>Field experiment conducted with Boston Consulting Group (BCG)</a:t>
-            </a:r>
-            <a:endParaRPr lang="en-US" sz="1150" dirty="0"/>
-          </a:p>
-        </p:txBody>
-      </p:sp>
-      <p:sp>
-        <p:nvSpPr>
-          <p:cNvPr id="8" name="icon circle"/>
+              <a:t>Fabrizio Dell'Acqua et al.  |  Harvard Business School Working Paper 24-013, 2023</a:t>
+            </a:r>
+            <a:endParaRPr lang="en-US" sz="900" dirty="0"/>
+          </a:p>
+        </p:txBody>
+      </p:sp>
+      <p:sp>
+        <p:nvSpPr>
+          <p:cNvPr id="11" name="icon circle"/>
           <p:cNvSpPr/>
           <p:nvPr/>
         </p:nvSpPr>
         <p:spPr>
           <a:xfrm>
-            <a:off x="457200" y="1993392"/>
+            <a:off x="457200" y="1426464"/>
             <a:ext cx="384048" cy="384048"/>
           </a:xfrm>
           <a:prstGeom prst="ellipse">
@@ -5110,21 +5882,21 @@
       </p:sp>
       <p:pic>
         <p:nvPicPr>
-          <p:cNvPr id="9" name="icon FiUsers" descr="preencoded.png">    </p:cNvPr>
+          <p:cNvPr id="12" name="icon FiBriefcase" descr="preencoded.png">    </p:cNvPr>
           <p:cNvPicPr>
             <a:picLocks noChangeAspect="1"/>
           </p:cNvPicPr>
           <p:nvPr/>
         </p:nvPicPr>
         <p:blipFill>
-          <a:blip r:embed="rId2"/>
+          <a:blip r:embed="rId1"/>
           <a:stretch>
             <a:fillRect/>
           </a:stretch>
         </p:blipFill>
         <p:spPr>
           <a:xfrm>
-            <a:off x="539496" y="2075688"/>
+            <a:off x="539496" y="1508760"/>
             <a:ext cx="219456" cy="219456"/>
           </a:xfrm>
           <a:prstGeom prst="rect">
@@ -5134,13 +5906,13 @@
       </p:pic>
       <p:sp>
         <p:nvSpPr>
-          <p:cNvPr id="10" name="fact Participants"/>
+          <p:cNvPr id="13" name="fact Research partner"/>
           <p:cNvSpPr txBox="1"/>
           <p:nvPr/>
         </p:nvSpPr>
         <p:spPr>
           <a:xfrm>
-            <a:off x="969264" y="1956816"/>
+            <a:off x="969264" y="1389888"/>
             <a:ext cx="3557016" cy="512064"/>
           </a:xfrm>
           <a:prstGeom prst="rect">
@@ -5162,7 +5934,7 @@
                   <a:schemeClr val="tx1"/>
                 </a:solidFill>
               </a:rPr>
-              <a:t>Participants</a:t>
+              <a:t>Research partner</a:t>
             </a:r>
             <a:endParaRPr lang="en-US" sz="1150" dirty="0"/>
           </a:p>
@@ -5176,7 +5948,7 @@
                   <a:schemeClr val="tx2"/>
                 </a:solidFill>
               </a:rPr>
-              <a:t>758 consultants took part</a:t>
+              <a:t>Field experiment conducted with Boston Consulting Group (BCG)</a:t>
             </a:r>
             <a:endParaRPr lang="en-US" sz="1150" dirty="0"/>
           </a:p>
@@ -5184,13 +5956,13 @@
       </p:sp>
       <p:sp>
         <p:nvSpPr>
-          <p:cNvPr id="11" name="icon circle"/>
+          <p:cNvPr id="14" name="icon circle"/>
           <p:cNvSpPr/>
           <p:nvPr/>
         </p:nvSpPr>
         <p:spPr>
           <a:xfrm>
-            <a:off x="457200" y="2560320"/>
+            <a:off x="457200" y="1993392"/>
             <a:ext cx="384048" cy="384048"/>
           </a:xfrm>
           <a:prstGeom prst="ellipse">
@@ -5209,7 +5981,106 @@
       </p:sp>
       <p:pic>
         <p:nvPicPr>
-          <p:cNvPr id="12" name="icon FiTarget" descr="preencoded.png">    </p:cNvPr>
+          <p:cNvPr id="15" name="icon FiUsers" descr="preencoded.png">    </p:cNvPr>
+          <p:cNvPicPr>
+            <a:picLocks noChangeAspect="1"/>
+          </p:cNvPicPr>
+          <p:nvPr/>
+        </p:nvPicPr>
+        <p:blipFill>
+          <a:blip r:embed="rId2"/>
+          <a:stretch>
+            <a:fillRect/>
+          </a:stretch>
+        </p:blipFill>
+        <p:spPr>
+          <a:xfrm>
+            <a:off x="539496" y="2075688"/>
+            <a:ext cx="219456" cy="219456"/>
+          </a:xfrm>
+          <a:prstGeom prst="rect">
+            <a:avLst/>
+          </a:prstGeom>
+        </p:spPr>
+      </p:pic>
+      <p:sp>
+        <p:nvSpPr>
+          <p:cNvPr id="16" name="fact Participants"/>
+          <p:cNvSpPr txBox="1"/>
+          <p:nvPr/>
+        </p:nvSpPr>
+        <p:spPr>
+          <a:xfrm>
+            <a:off x="969264" y="1956816"/>
+            <a:ext cx="3557016" cy="512064"/>
+          </a:xfrm>
+          <a:prstGeom prst="rect">
+            <a:avLst/>
+          </a:prstGeom>
+          <a:noFill/>
+          <a:ln/>
+        </p:spPr>
+        <p:txBody>
+          <a:bodyPr wrap="square" lIns="0" tIns="0" rIns="0" bIns="0" rtlCol="0" anchor="t"/>
+          <a:lstStyle/>
+          <a:p>
+            <a:pPr indent="0" marL="0">
+              <a:buNone/>
+            </a:pPr>
+            <a:r>
+              <a:rPr lang="en-US" sz="1150" b="1" dirty="0">
+                <a:solidFill>
+                  <a:schemeClr val="tx1"/>
+                </a:solidFill>
+              </a:rPr>
+              <a:t>Participants</a:t>
+            </a:r>
+            <a:endParaRPr lang="en-US" sz="1150" dirty="0"/>
+          </a:p>
+          <a:p>
+            <a:pPr indent="0" marL="0">
+              <a:buNone/>
+            </a:pPr>
+            <a:r>
+              <a:rPr lang="en-US" sz="1050" dirty="0">
+                <a:solidFill>
+                  <a:schemeClr val="tx2"/>
+                </a:solidFill>
+              </a:rPr>
+              <a:t>758 consultants took part</a:t>
+            </a:r>
+            <a:endParaRPr lang="en-US" sz="1150" dirty="0"/>
+          </a:p>
+        </p:txBody>
+      </p:sp>
+      <p:sp>
+        <p:nvSpPr>
+          <p:cNvPr id="17" name="icon circle"/>
+          <p:cNvSpPr/>
+          <p:nvPr/>
+        </p:nvSpPr>
+        <p:spPr>
+          <a:xfrm>
+            <a:off x="457200" y="2560320"/>
+            <a:ext cx="384048" cy="384048"/>
+          </a:xfrm>
+          <a:prstGeom prst="ellipse">
+            <a:avLst/>
+          </a:prstGeom>
+          <a:solidFill>
+            <a:srgbClr val="2E8B86"/>
+          </a:solidFill>
+          <a:ln w="12700">
+            <a:solidFill>
+              <a:srgbClr val="2E8B86"/>
+            </a:solidFill>
+            <a:prstDash val="solid"/>
+          </a:ln>
+        </p:spPr>
+      </p:sp>
+      <p:pic>
+        <p:nvPicPr>
+          <p:cNvPr id="18" name="icon FiTarget" descr="preencoded.png">    </p:cNvPr>
           <p:cNvPicPr>
             <a:picLocks noChangeAspect="1"/>
           </p:cNvPicPr>
@@ -5233,7 +6104,7 @@
       </p:pic>
       <p:sp>
         <p:nvSpPr>
-          <p:cNvPr id="13" name="fact Research focus"/>
+          <p:cNvPr id="19" name="fact Research focus"/>
           <p:cNvSpPr txBox="1"/>
           <p:nvPr/>
         </p:nvSpPr>
@@ -5283,13 +6154,13 @@
       </p:sp>
       <p:sp>
         <p:nvSpPr>
-          <p:cNvPr id="14" name="conditions head"/>
+          <p:cNvPr id="20" name="conditions head"/>
           <p:cNvSpPr txBox="1"/>
           <p:nvPr/>
         </p:nvSpPr>
         <p:spPr>
           <a:xfrm>
-            <a:off x="457200" y="3182112"/>
+            <a:off x="457200" y="3163824"/>
             <a:ext cx="4069080" cy="237744"/>
           </a:xfrm>
           <a:prstGeom prst="rect">
@@ -5319,18 +6190,18 @@
       </p:sp>
       <p:sp>
         <p:nvSpPr>
-          <p:cNvPr id="15" name="condition 1"/>
+          <p:cNvPr id="21" name="condition 1"/>
           <p:cNvSpPr/>
           <p:nvPr/>
         </p:nvSpPr>
         <p:spPr>
           <a:xfrm>
             <a:off x="457200" y="3456432"/>
-            <a:ext cx="1295400" cy="896112"/>
+            <a:ext cx="1203960" cy="877824"/>
           </a:xfrm>
           <a:prstGeom prst="roundRect">
             <a:avLst>
-              <a:gd name="adj" fmla="val 8163"/>
+              <a:gd name="adj" fmla="val 10417"/>
             </a:avLst>
           </a:prstGeom>
           <a:solidFill>
@@ -5342,11 +6213,18 @@
             </a:solidFill>
             <a:prstDash val="solid"/>
           </a:ln>
-        </p:spPr>
-      </p:sp>
-      <p:sp>
-        <p:nvSpPr>
-          <p:cNvPr id="16" name="condition number"/>
+          <a:effectLst>
+            <a:outerShdw sx="100000" sy="100000" kx="0" ky="0" algn="bl" rotWithShape="0" blurRad="101600" dist="25400" dir="5400000">
+              <a:srgbClr val="1B2A4A">
+                <a:alpha val="12000"/>
+              </a:srgbClr>
+            </a:outerShdw>
+          </a:effectLst>
+        </p:spPr>
+      </p:sp>
+      <p:sp>
+        <p:nvSpPr>
+          <p:cNvPr id="22" name="condition number"/>
           <p:cNvSpPr txBox="1"/>
           <p:nvPr/>
         </p:nvSpPr>
@@ -5382,14 +6260,14 @@
       </p:sp>
       <p:sp>
         <p:nvSpPr>
-          <p:cNvPr id="17" name="condition text"/>
+          <p:cNvPr id="23" name="condition text"/>
           <p:cNvSpPr txBox="1"/>
           <p:nvPr/>
         </p:nvSpPr>
         <p:spPr>
           <a:xfrm>
             <a:off x="548640" y="3767328"/>
-            <a:ext cx="1112520" cy="548640"/>
+            <a:ext cx="1021080" cy="530352"/>
           </a:xfrm>
           <a:prstGeom prst="rect">
             <a:avLst/>
@@ -5405,31 +6283,55 @@
               <a:buNone/>
             </a:pPr>
             <a:r>
-              <a:rPr lang="en-US" sz="950" dirty="0">
+              <a:rPr lang="en-US" sz="900" dirty="0">
                 <a:solidFill>
                   <a:schemeClr val="tx1"/>
                 </a:solidFill>
               </a:rPr>
               <a:t>No AI access</a:t>
             </a:r>
-            <a:endParaRPr lang="en-US" sz="950" dirty="0"/>
-          </a:p>
-        </p:txBody>
-      </p:sp>
-      <p:sp>
-        <p:nvSpPr>
-          <p:cNvPr id="18" name="condition 2"/>
+            <a:endParaRPr lang="en-US" sz="900" dirty="0"/>
+          </a:p>
+        </p:txBody>
+      </p:sp>
+      <p:pic>
+        <p:nvPicPr>
+          <p:cNvPr id="24" name="icon FiChevronRight" descr="preencoded.png">    </p:cNvPr>
+          <p:cNvPicPr>
+            <a:picLocks noChangeAspect="1"/>
+          </p:cNvPicPr>
+          <p:nvPr/>
+        </p:nvPicPr>
+        <p:blipFill>
+          <a:blip r:embed="rId4"/>
+          <a:stretch>
+            <a:fillRect/>
+          </a:stretch>
+        </p:blipFill>
+        <p:spPr>
+          <a:xfrm>
+            <a:off x="1688592" y="3803904"/>
+            <a:ext cx="182880" cy="182880"/>
+          </a:xfrm>
+          <a:prstGeom prst="rect">
+            <a:avLst/>
+          </a:prstGeom>
+        </p:spPr>
+      </p:pic>
+      <p:sp>
+        <p:nvSpPr>
+          <p:cNvPr id="25" name="condition 2"/>
           <p:cNvSpPr/>
           <p:nvPr/>
         </p:nvSpPr>
         <p:spPr>
           <a:xfrm>
-            <a:off x="1844040" y="3456432"/>
-            <a:ext cx="1295400" cy="896112"/>
+            <a:off x="1889760" y="3456432"/>
+            <a:ext cx="1203960" cy="877824"/>
           </a:xfrm>
           <a:prstGeom prst="roundRect">
             <a:avLst>
-              <a:gd name="adj" fmla="val 8163"/>
+              <a:gd name="adj" fmla="val 10417"/>
             </a:avLst>
           </a:prstGeom>
           <a:solidFill>
@@ -5441,17 +6343,24 @@
             </a:solidFill>
             <a:prstDash val="solid"/>
           </a:ln>
-        </p:spPr>
-      </p:sp>
-      <p:sp>
-        <p:nvSpPr>
-          <p:cNvPr id="19" name="condition number"/>
+          <a:effectLst>
+            <a:outerShdw sx="100000" sy="100000" kx="0" ky="0" algn="bl" rotWithShape="0" blurRad="101600" dist="25400" dir="5400000">
+              <a:srgbClr val="1B2A4A">
+                <a:alpha val="12000"/>
+              </a:srgbClr>
+            </a:outerShdw>
+          </a:effectLst>
+        </p:spPr>
+      </p:sp>
+      <p:sp>
+        <p:nvSpPr>
+          <p:cNvPr id="26" name="condition number"/>
           <p:cNvSpPr txBox="1"/>
           <p:nvPr/>
         </p:nvSpPr>
         <p:spPr>
           <a:xfrm>
-            <a:off x="1935480" y="3511296"/>
+            <a:off x="1981200" y="3511296"/>
             <a:ext cx="274320" cy="274320"/>
           </a:xfrm>
           <a:prstGeom prst="rect">
@@ -5470,7 +6379,7 @@
             <a:r>
               <a:rPr lang="en-US" sz="1400" b="1" dirty="0">
                 <a:solidFill>
-                  <a:srgbClr val="C9D6D4"/>
+                  <a:srgbClr val="BFE6E0"/>
                 </a:solidFill>
               </a:rPr>
               <a:t>2</a:t>
@@ -5481,14 +6390,14 @@
       </p:sp>
       <p:sp>
         <p:nvSpPr>
-          <p:cNvPr id="20" name="condition text"/>
+          <p:cNvPr id="27" name="condition text"/>
           <p:cNvSpPr txBox="1"/>
           <p:nvPr/>
         </p:nvSpPr>
         <p:spPr>
           <a:xfrm>
-            <a:off x="1935480" y="3767328"/>
-            <a:ext cx="1112520" cy="548640"/>
+            <a:off x="1981200" y="3767328"/>
+            <a:ext cx="1021080" cy="530352"/>
           </a:xfrm>
           <a:prstGeom prst="rect">
             <a:avLst/>
@@ -5504,31 +6413,55 @@
               <a:buNone/>
             </a:pPr>
             <a:r>
-              <a:rPr lang="en-US" sz="950" dirty="0">
+              <a:rPr lang="en-US" sz="900" dirty="0">
                 <a:solidFill>
                   <a:srgbClr val="FFFFFF"/>
                 </a:solidFill>
               </a:rPr>
               <a:t>GPT-4 access</a:t>
             </a:r>
-            <a:endParaRPr lang="en-US" sz="950" dirty="0"/>
-          </a:p>
-        </p:txBody>
-      </p:sp>
-      <p:sp>
-        <p:nvSpPr>
-          <p:cNvPr id="21" name="condition 3"/>
+            <a:endParaRPr lang="en-US" sz="900" dirty="0"/>
+          </a:p>
+        </p:txBody>
+      </p:sp>
+      <p:pic>
+        <p:nvPicPr>
+          <p:cNvPr id="28" name="icon FiChevronRight" descr="preencoded.png">    </p:cNvPr>
+          <p:cNvPicPr>
+            <a:picLocks noChangeAspect="1"/>
+          </p:cNvPicPr>
+          <p:nvPr/>
+        </p:nvPicPr>
+        <p:blipFill>
+          <a:blip r:embed="rId5"/>
+          <a:stretch>
+            <a:fillRect/>
+          </a:stretch>
+        </p:blipFill>
+        <p:spPr>
+          <a:xfrm>
+            <a:off x="3121152" y="3803904"/>
+            <a:ext cx="182880" cy="182880"/>
+          </a:xfrm>
+          <a:prstGeom prst="rect">
+            <a:avLst/>
+          </a:prstGeom>
+        </p:spPr>
+      </p:pic>
+      <p:sp>
+        <p:nvSpPr>
+          <p:cNvPr id="29" name="condition 3"/>
           <p:cNvSpPr/>
           <p:nvPr/>
         </p:nvSpPr>
         <p:spPr>
           <a:xfrm>
-            <a:off x="3230880" y="3456432"/>
-            <a:ext cx="1295400" cy="896112"/>
+            <a:off x="3322320" y="3456432"/>
+            <a:ext cx="1203960" cy="877824"/>
           </a:xfrm>
           <a:prstGeom prst="roundRect">
             <a:avLst>
-              <a:gd name="adj" fmla="val 8163"/>
+              <a:gd name="adj" fmla="val 10417"/>
             </a:avLst>
           </a:prstGeom>
           <a:solidFill>
@@ -5540,17 +6473,24 @@
             </a:solidFill>
             <a:prstDash val="solid"/>
           </a:ln>
-        </p:spPr>
-      </p:sp>
-      <p:sp>
-        <p:nvSpPr>
-          <p:cNvPr id="22" name="condition number"/>
+          <a:effectLst>
+            <a:outerShdw sx="100000" sy="100000" kx="0" ky="0" algn="bl" rotWithShape="0" blurRad="101600" dist="25400" dir="5400000">
+              <a:srgbClr val="1B2A4A">
+                <a:alpha val="12000"/>
+              </a:srgbClr>
+            </a:outerShdw>
+          </a:effectLst>
+        </p:spPr>
+      </p:sp>
+      <p:sp>
+        <p:nvSpPr>
+          <p:cNvPr id="30" name="condition number"/>
           <p:cNvSpPr txBox="1"/>
           <p:nvPr/>
         </p:nvSpPr>
         <p:spPr>
           <a:xfrm>
-            <a:off x="3322320" y="3511296"/>
+            <a:off x="3413760" y="3511296"/>
             <a:ext cx="274320" cy="274320"/>
           </a:xfrm>
           <a:prstGeom prst="rect">
@@ -5569,7 +6509,7 @@
             <a:r>
               <a:rPr lang="en-US" sz="1400" b="1" dirty="0">
                 <a:solidFill>
-                  <a:srgbClr val="C9D6D4"/>
+                  <a:srgbClr val="BFE6E0"/>
                 </a:solidFill>
               </a:rPr>
               <a:t>3</a:t>
@@ -5580,14 +6520,14 @@
       </p:sp>
       <p:sp>
         <p:nvSpPr>
-          <p:cNvPr id="23" name="condition text"/>
+          <p:cNvPr id="31" name="condition text"/>
           <p:cNvSpPr txBox="1"/>
           <p:nvPr/>
         </p:nvSpPr>
         <p:spPr>
           <a:xfrm>
-            <a:off x="3322320" y="3767328"/>
-            <a:ext cx="1112520" cy="548640"/>
+            <a:off x="3413760" y="3767328"/>
+            <a:ext cx="1021080" cy="530352"/>
           </a:xfrm>
           <a:prstGeom prst="rect">
             <a:avLst/>
@@ -5603,31 +6543,31 @@
               <a:buNone/>
             </a:pPr>
             <a:r>
-              <a:rPr lang="en-US" sz="950" dirty="0">
+              <a:rPr lang="en-US" sz="900" dirty="0">
                 <a:solidFill>
                   <a:srgbClr val="FFFFFF"/>
                 </a:solidFill>
               </a:rPr>
               <a:t>GPT-4 access with prompt engineering guidance</a:t>
             </a:r>
-            <a:endParaRPr lang="en-US" sz="950" dirty="0"/>
-          </a:p>
-        </p:txBody>
-      </p:sp>
-      <p:sp>
-        <p:nvSpPr>
-          <p:cNvPr id="24" name="concept card"/>
+            <a:endParaRPr lang="en-US" sz="900" dirty="0"/>
+          </a:p>
+        </p:txBody>
+      </p:sp>
+      <p:sp>
+        <p:nvSpPr>
+          <p:cNvPr id="32" name="concept card"/>
           <p:cNvSpPr/>
           <p:nvPr/>
         </p:nvSpPr>
         <p:spPr>
           <a:xfrm>
-            <a:off x="4846320" y="1426464"/>
-            <a:ext cx="3840480" cy="2907792"/>
+            <a:off x="4846320" y="1371600"/>
+            <a:ext cx="3840480" cy="2962656"/>
           </a:xfrm>
           <a:prstGeom prst="roundRect">
             <a:avLst>
-              <a:gd name="adj" fmla="val 2516"/>
+              <a:gd name="adj" fmla="val 3086"/>
             </a:avLst>
           </a:prstGeom>
           <a:solidFill>
@@ -5639,17 +6579,24 @@
             </a:solidFill>
             <a:prstDash val="solid"/>
           </a:ln>
-        </p:spPr>
-      </p:sp>
-      <p:sp>
-        <p:nvSpPr>
-          <p:cNvPr id="25" name="tag concept"/>
+          <a:effectLst>
+            <a:outerShdw sx="100000" sy="100000" kx="0" ky="0" algn="bl" rotWithShape="0" blurRad="101600" dist="25400" dir="5400000">
+              <a:srgbClr val="1B2A4A">
+                <a:alpha val="12000"/>
+              </a:srgbClr>
+            </a:outerShdw>
+          </a:effectLst>
+        </p:spPr>
+      </p:sp>
+      <p:sp>
+        <p:nvSpPr>
+          <p:cNvPr id="33" name="tag concept"/>
           <p:cNvSpPr/>
           <p:nvPr/>
         </p:nvSpPr>
         <p:spPr>
           <a:xfrm>
-            <a:off x="5029200" y="1572768"/>
+            <a:off x="5029200" y="1517904"/>
             <a:ext cx="1188720" cy="219456"/>
           </a:xfrm>
           <a:prstGeom prst="roundRect">
@@ -5670,13 +6617,13 @@
       </p:sp>
       <p:sp>
         <p:nvSpPr>
-          <p:cNvPr id="26" name="tag text"/>
+          <p:cNvPr id="34" name="tag text"/>
           <p:cNvSpPr txBox="1"/>
           <p:nvPr/>
         </p:nvSpPr>
         <p:spPr>
           <a:xfrm>
-            <a:off x="5029200" y="1572768"/>
+            <a:off x="5029200" y="1517904"/>
             <a:ext cx="1188720" cy="219456"/>
           </a:xfrm>
           <a:prstGeom prst="rect">
@@ -5706,14 +6653,14 @@
       </p:sp>
       <p:sp>
         <p:nvSpPr>
-          <p:cNvPr id="27" name="concept head"/>
+          <p:cNvPr id="35" name="concept head"/>
           <p:cNvSpPr txBox="1"/>
           <p:nvPr/>
         </p:nvSpPr>
         <p:spPr>
           <a:xfrm>
-            <a:off x="5029200" y="1847088"/>
-            <a:ext cx="3474720" cy="274320"/>
+            <a:off x="5029200" y="1792224"/>
+            <a:ext cx="2697480" cy="274320"/>
           </a:xfrm>
           <a:prstGeom prst="rect">
             <a:avLst/>
@@ -5729,27 +6676,27 @@
               <a:buNone/>
             </a:pPr>
             <a:r>
-              <a:rPr lang="en-US" sz="1200" b="1" dirty="0">
+              <a:rPr lang="en-US" sz="1050" b="1" dirty="0">
                 <a:solidFill>
                   <a:schemeClr val="tx1"/>
                 </a:solidFill>
               </a:rPr>
               <a:t>The "Jagged Technological Frontier"</a:t>
             </a:r>
-            <a:endParaRPr lang="en-US" sz="1200" dirty="0"/>
-          </a:p>
-        </p:txBody>
-      </p:sp>
-      <p:sp>
-        <p:nvSpPr>
-          <p:cNvPr id="28" name="concept body"/>
+            <a:endParaRPr lang="en-US" sz="1050" dirty="0"/>
+          </a:p>
+        </p:txBody>
+      </p:sp>
+      <p:sp>
+        <p:nvSpPr>
+          <p:cNvPr id="36" name="concept body"/>
           <p:cNvSpPr txBox="1"/>
           <p:nvPr/>
         </p:nvSpPr>
         <p:spPr>
           <a:xfrm>
-            <a:off x="5029200" y="2139696"/>
-            <a:ext cx="3474720" cy="868680"/>
+            <a:off x="5029200" y="2084832"/>
+            <a:ext cx="2697480" cy="896112"/>
           </a:xfrm>
           <a:prstGeom prst="rect">
             <a:avLst/>
@@ -5765,213 +6712,270 @@
               <a:buNone/>
             </a:pPr>
             <a:r>
-              <a:rPr lang="en-US" sz="950" dirty="0">
+              <a:rPr lang="en-US" sz="900" dirty="0">
                 <a:solidFill>
                   <a:schemeClr val="tx2"/>
                 </a:solidFill>
               </a:rPr>
               <a:t>AI can perform some tasks well while struggling with other tasks that appear similarly difficult. The boundary is uneven, so workers cannot assume that a task is "safe" for AI just because it looks easy.</a:t>
             </a:r>
-            <a:endParaRPr lang="en-US" sz="950" dirty="0"/>
-          </a:p>
-        </p:txBody>
-      </p:sp>
-      <p:sp>
-        <p:nvSpPr>
-          <p:cNvPr id="29" name="diagram frame"/>
+            <a:endParaRPr lang="en-US" sz="900" dirty="0"/>
+          </a:p>
+        </p:txBody>
+      </p:sp>
+      <p:pic>
+        <p:nvPicPr>
+          <p:cNvPr id="37" name="mascot searching" descr="preencoded.png">    </p:cNvPr>
+          <p:cNvPicPr>
+            <a:picLocks noChangeAspect="1"/>
+          </p:cNvPicPr>
+          <p:nvPr/>
+        </p:nvPicPr>
+        <p:blipFill>
+          <a:blip r:embed="rId6"/>
+          <a:stretch>
+            <a:fillRect/>
+          </a:stretch>
+        </p:blipFill>
+        <p:spPr>
+          <a:xfrm>
+            <a:off x="7607808" y="1572768"/>
+            <a:ext cx="1005840" cy="868680"/>
+          </a:xfrm>
+          <a:prstGeom prst="rect">
+            <a:avLst/>
+          </a:prstGeom>
+        </p:spPr>
+      </p:pic>
+      <p:pic>
+        <p:nvPicPr>
+          <p:cNvPr id="38" name="frontier illustration" descr="preencoded.png">    </p:cNvPr>
+          <p:cNvPicPr>
+            <a:picLocks noChangeAspect="1"/>
+          </p:cNvPicPr>
+          <p:nvPr/>
+        </p:nvPicPr>
+        <p:blipFill>
+          <a:blip r:embed="rId7"/>
+          <a:stretch>
+            <a:fillRect/>
+          </a:stretch>
+        </p:blipFill>
+        <p:spPr>
+          <a:xfrm>
+            <a:off x="5029200" y="3017520"/>
+            <a:ext cx="3474720" cy="1078992"/>
+          </a:xfrm>
+          <a:prstGeom prst="rect">
+            <a:avLst/>
+          </a:prstGeom>
+        </p:spPr>
+      </p:pic>
+      <p:sp>
+        <p:nvSpPr>
+          <p:cNvPr id="39" name="outside label"/>
+          <p:cNvSpPr txBox="1"/>
+          <p:nvPr/>
+        </p:nvSpPr>
+        <p:spPr>
+          <a:xfrm>
+            <a:off x="5120640" y="3063240"/>
+            <a:ext cx="3291840" cy="182880"/>
+          </a:xfrm>
+          <a:prstGeom prst="rect">
+            <a:avLst/>
+          </a:prstGeom>
+          <a:noFill/>
+          <a:ln/>
+        </p:spPr>
+        <p:txBody>
+          <a:bodyPr wrap="square" lIns="0" tIns="0" rIns="0" bIns="0" rtlCol="0" anchor="ctr"/>
+          <a:lstStyle/>
+          <a:p>
+            <a:pPr algn="r" indent="0" marL="0">
+              <a:buNone/>
+            </a:pPr>
+            <a:r>
+              <a:rPr lang="en-US" sz="750" b="1" dirty="0">
+                <a:solidFill>
+                  <a:schemeClr val="tx2"/>
+                </a:solidFill>
+              </a:rPr>
+              <a:t>Outside the frontier: AI struggles</a:t>
+            </a:r>
+            <a:endParaRPr lang="en-US" sz="750" dirty="0"/>
+          </a:p>
+        </p:txBody>
+      </p:sp>
+      <p:sp>
+        <p:nvSpPr>
+          <p:cNvPr id="40" name="inside label"/>
+          <p:cNvSpPr txBox="1"/>
+          <p:nvPr/>
+        </p:nvSpPr>
+        <p:spPr>
+          <a:xfrm>
+            <a:off x="5120640" y="3858768"/>
+            <a:ext cx="3291840" cy="182880"/>
+          </a:xfrm>
+          <a:prstGeom prst="rect">
+            <a:avLst/>
+          </a:prstGeom>
+          <a:noFill/>
+          <a:ln/>
+        </p:spPr>
+        <p:txBody>
+          <a:bodyPr wrap="square" lIns="0" tIns="0" rIns="0" bIns="0" rtlCol="0" anchor="ctr"/>
+          <a:lstStyle/>
+          <a:p>
+            <a:pPr indent="0" marL="0">
+              <a:buNone/>
+            </a:pPr>
+            <a:r>
+              <a:rPr lang="en-US" sz="750" b="1" dirty="0">
+                <a:solidFill>
+                  <a:srgbClr val="2E8B86"/>
+                </a:solidFill>
+              </a:rPr>
+              <a:t>Inside the frontier: AI performs well</a:t>
+            </a:r>
+            <a:endParaRPr lang="en-US" sz="750" dirty="0"/>
+          </a:p>
+        </p:txBody>
+      </p:sp>
+      <p:sp>
+        <p:nvSpPr>
+          <p:cNvPr id="41" name="axis label"/>
+          <p:cNvSpPr txBox="1"/>
+          <p:nvPr/>
+        </p:nvSpPr>
+        <p:spPr>
+          <a:xfrm>
+            <a:off x="5029200" y="4105656"/>
+            <a:ext cx="3474720" cy="146304"/>
+          </a:xfrm>
+          <a:prstGeom prst="rect">
+            <a:avLst/>
+          </a:prstGeom>
+          <a:noFill/>
+          <a:ln/>
+        </p:spPr>
+        <p:txBody>
+          <a:bodyPr wrap="square" lIns="0" tIns="0" rIns="0" bIns="0" rtlCol="0" anchor="ctr"/>
+          <a:lstStyle/>
+          <a:p>
+            <a:pPr algn="ctr" indent="0" marL="0">
+              <a:buNone/>
+            </a:pPr>
+            <a:r>
+              <a:rPr lang="en-US" sz="700" i="1" dirty="0">
+                <a:solidFill>
+                  <a:schemeClr val="tx2"/>
+                </a:solidFill>
+              </a:rPr>
+              <a:t>Tasks of similar apparent difficulty</a:t>
+            </a:r>
+            <a:endParaRPr lang="en-US" sz="700" dirty="0"/>
+          </a:p>
+        </p:txBody>
+      </p:sp>
+      <p:sp>
+        <p:nvSpPr>
+          <p:cNvPr id="42" name="reference"/>
+          <p:cNvSpPr txBox="1"/>
+          <p:nvPr/>
+        </p:nvSpPr>
+        <p:spPr>
+          <a:xfrm>
+            <a:off x="457200" y="4425696"/>
+            <a:ext cx="5120640" cy="310896"/>
+          </a:xfrm>
+          <a:prstGeom prst="rect">
+            <a:avLst/>
+          </a:prstGeom>
+          <a:noFill/>
+          <a:ln/>
+        </p:spPr>
+        <p:txBody>
+          <a:bodyPr wrap="square" lIns="0" tIns="0" rIns="0" bIns="0" rtlCol="0" anchor="t"/>
+          <a:lstStyle/>
+          <a:p>
+            <a:pPr indent="0" marL="0">
+              <a:buNone/>
+            </a:pPr>
+            <a:r>
+              <a:rPr lang="en-US" sz="750" i="1" dirty="0">
+                <a:solidFill>
+                  <a:schemeClr val="tx2"/>
+                </a:solidFill>
+              </a:rPr>
+              <a:t>Dell'Acqua, F., McFowland III, E., Mollick, E., Lifshitz-Assaf, H., Kellogg, K. C., Rajendran, S., Krayer, L., Candelon, F., &amp; Lakhani, K. R. (2023). Navigating the Jagged Technological Frontier. Harvard Business School Working Paper 24-013.</a:t>
+            </a:r>
+            <a:endParaRPr lang="en-US" sz="750" dirty="0"/>
+          </a:p>
+        </p:txBody>
+      </p:sp>
+      <p:sp>
+        <p:nvSpPr>
+          <p:cNvPr id="43" name="bridge card"/>
           <p:cNvSpPr/>
           <p:nvPr/>
         </p:nvSpPr>
         <p:spPr>
           <a:xfrm>
-            <a:off x="5029200" y="3035808"/>
-            <a:ext cx="3474720" cy="1115568"/>
-          </a:xfrm>
-          <a:prstGeom prst="rect">
-            <a:avLst/>
+            <a:off x="5760720" y="4407408"/>
+            <a:ext cx="2926080" cy="329184"/>
+          </a:xfrm>
+          <a:prstGeom prst="roundRect">
+            <a:avLst>
+              <a:gd name="adj" fmla="val 27778"/>
+            </a:avLst>
           </a:prstGeom>
           <a:solidFill>
-            <a:srgbClr val="FFFFFF"/>
+            <a:srgbClr val="BFE6E0"/>
           </a:solidFill>
-          <a:ln w="9525">
+          <a:ln w="12700">
             <a:solidFill>
-              <a:srgbClr val="D8DEE6"/>
+              <a:srgbClr val="BFE6E0"/>
             </a:solidFill>
             <a:prstDash val="solid"/>
           </a:ln>
         </p:spPr>
       </p:sp>
-      <p:sp>
-        <p:nvSpPr>
-          <p:cNvPr id="30" name="frontier segment"/>
-          <p:cNvSpPr/>
-          <p:nvPr/>
-        </p:nvSpPr>
-        <p:spPr>
-          <a:xfrm>
-            <a:off x="5029200" y="3537814"/>
-            <a:ext cx="496389" cy="278892"/>
-          </a:xfrm>
-          <a:prstGeom prst="line">
-            <a:avLst/>
-          </a:prstGeom>
-          <a:noFill/>
-          <a:ln w="28575">
-            <a:solidFill>
-              <a:srgbClr val="2E8B86"/>
-            </a:solidFill>
-            <a:prstDash val="solid"/>
-          </a:ln>
-        </p:spPr>
-      </p:sp>
-      <p:sp>
-        <p:nvSpPr>
-          <p:cNvPr id="31" name="frontier segment"/>
-          <p:cNvSpPr/>
-          <p:nvPr/>
-        </p:nvSpPr>
-        <p:spPr>
-          <a:xfrm flipV="1">
-            <a:off x="5525589" y="3370478"/>
-            <a:ext cx="496389" cy="446227"/>
-          </a:xfrm>
-          <a:prstGeom prst="line">
-            <a:avLst/>
-          </a:prstGeom>
-          <a:noFill/>
-          <a:ln w="28575">
-            <a:solidFill>
-              <a:srgbClr val="2E8B86"/>
-            </a:solidFill>
-            <a:prstDash val="solid"/>
-          </a:ln>
-        </p:spPr>
-      </p:sp>
-      <p:sp>
-        <p:nvSpPr>
-          <p:cNvPr id="32" name="frontier segment"/>
-          <p:cNvSpPr/>
-          <p:nvPr/>
-        </p:nvSpPr>
-        <p:spPr>
-          <a:xfrm>
-            <a:off x="6021977" y="3370478"/>
-            <a:ext cx="496389" cy="390449"/>
-          </a:xfrm>
-          <a:prstGeom prst="line">
-            <a:avLst/>
-          </a:prstGeom>
-          <a:noFill/>
-          <a:ln w="28575">
-            <a:solidFill>
-              <a:srgbClr val="2E8B86"/>
-            </a:solidFill>
-            <a:prstDash val="solid"/>
-          </a:ln>
-        </p:spPr>
-      </p:sp>
-      <p:sp>
-        <p:nvSpPr>
-          <p:cNvPr id="33" name="frontier segment"/>
-          <p:cNvSpPr/>
-          <p:nvPr/>
-        </p:nvSpPr>
-        <p:spPr>
-          <a:xfrm flipV="1">
-            <a:off x="6518366" y="3258922"/>
-            <a:ext cx="496389" cy="502006"/>
-          </a:xfrm>
-          <a:prstGeom prst="line">
-            <a:avLst/>
-          </a:prstGeom>
-          <a:noFill/>
-          <a:ln w="28575">
-            <a:solidFill>
-              <a:srgbClr val="2E8B86"/>
-            </a:solidFill>
-            <a:prstDash val="solid"/>
-          </a:ln>
-        </p:spPr>
-      </p:sp>
-      <p:sp>
-        <p:nvSpPr>
-          <p:cNvPr id="34" name="frontier segment"/>
-          <p:cNvSpPr/>
-          <p:nvPr/>
-        </p:nvSpPr>
-        <p:spPr>
-          <a:xfrm>
-            <a:off x="7014754" y="3258922"/>
-            <a:ext cx="496389" cy="390449"/>
-          </a:xfrm>
-          <a:prstGeom prst="line">
-            <a:avLst/>
-          </a:prstGeom>
-          <a:noFill/>
-          <a:ln w="28575">
-            <a:solidFill>
-              <a:srgbClr val="2E8B86"/>
-            </a:solidFill>
-            <a:prstDash val="solid"/>
-          </a:ln>
-        </p:spPr>
-      </p:sp>
-      <p:sp>
-        <p:nvSpPr>
-          <p:cNvPr id="35" name="frontier segment"/>
-          <p:cNvSpPr/>
-          <p:nvPr/>
-        </p:nvSpPr>
-        <p:spPr>
-          <a:xfrm>
-            <a:off x="7511143" y="3649370"/>
-            <a:ext cx="496389" cy="223114"/>
-          </a:xfrm>
-          <a:prstGeom prst="line">
-            <a:avLst/>
-          </a:prstGeom>
-          <a:noFill/>
-          <a:ln w="28575">
-            <a:solidFill>
-              <a:srgbClr val="2E8B86"/>
-            </a:solidFill>
-            <a:prstDash val="solid"/>
-          </a:ln>
-        </p:spPr>
-      </p:sp>
-      <p:sp>
-        <p:nvSpPr>
-          <p:cNvPr id="36" name="frontier segment"/>
-          <p:cNvSpPr/>
-          <p:nvPr/>
-        </p:nvSpPr>
-        <p:spPr>
-          <a:xfrm flipV="1">
-            <a:off x="8007531" y="3482035"/>
-            <a:ext cx="496389" cy="390449"/>
-          </a:xfrm>
-          <a:prstGeom prst="line">
-            <a:avLst/>
-          </a:prstGeom>
-          <a:noFill/>
-          <a:ln w="28575">
-            <a:solidFill>
-              <a:srgbClr val="2E8B86"/>
-            </a:solidFill>
-            <a:prstDash val="solid"/>
-          </a:ln>
-        </p:spPr>
-      </p:sp>
-      <p:sp>
-        <p:nvSpPr>
-          <p:cNvPr id="37" name="inside label"/>
+      <p:pic>
+        <p:nvPicPr>
+          <p:cNvPr id="44" name="icon FiArrowRight" descr="preencoded.png">    </p:cNvPr>
+          <p:cNvPicPr>
+            <a:picLocks noChangeAspect="1"/>
+          </p:cNvPicPr>
+          <p:nvPr/>
+        </p:nvPicPr>
+        <p:blipFill>
+          <a:blip r:embed="rId8"/>
+          <a:stretch>
+            <a:fillRect/>
+          </a:stretch>
+        </p:blipFill>
+        <p:spPr>
+          <a:xfrm>
+            <a:off x="8412480" y="4480560"/>
+            <a:ext cx="182880" cy="182880"/>
+          </a:xfrm>
+          <a:prstGeom prst="rect">
+            <a:avLst/>
+          </a:prstGeom>
+        </p:spPr>
+      </p:pic>
+      <p:sp>
+        <p:nvSpPr>
+          <p:cNvPr id="45" name="bridge text"/>
           <p:cNvSpPr txBox="1"/>
           <p:nvPr/>
         </p:nvSpPr>
         <p:spPr>
           <a:xfrm>
-            <a:off x="5102352" y="3877056"/>
-            <a:ext cx="3328416" cy="201168"/>
+            <a:off x="5870448" y="4407408"/>
+            <a:ext cx="2505456" cy="329184"/>
           </a:xfrm>
           <a:prstGeom prst="rect">
             <a:avLst/>
@@ -5992,117 +6996,20 @@
                   <a:srgbClr val="2E8B86"/>
                 </a:solidFill>
               </a:rPr>
-              <a:t>Inside the frontier: AI performs well</a:t>
+              <a:t>Next:  </a:t>
+            </a:r>
+            <a:pPr indent="0" marL="0">
+              <a:buNone/>
+            </a:pPr>
+            <a:r>
+              <a:rPr lang="en-US" sz="800" dirty="0">
+                <a:solidFill>
+                  <a:srgbClr val="1B2A4A"/>
+                </a:solidFill>
+              </a:rPr>
+              <a:t>So what happened when 758 consultants actually used GPT-4?</a:t>
             </a:r>
             <a:endParaRPr lang="en-US" sz="800" dirty="0"/>
-          </a:p>
-        </p:txBody>
-      </p:sp>
-      <p:sp>
-        <p:nvSpPr>
-          <p:cNvPr id="38" name="outside label"/>
-          <p:cNvSpPr txBox="1"/>
-          <p:nvPr/>
-        </p:nvSpPr>
-        <p:spPr>
-          <a:xfrm>
-            <a:off x="5102352" y="3090672"/>
-            <a:ext cx="3328416" cy="201168"/>
-          </a:xfrm>
-          <a:prstGeom prst="rect">
-            <a:avLst/>
-          </a:prstGeom>
-          <a:noFill/>
-          <a:ln/>
-        </p:spPr>
-        <p:txBody>
-          <a:bodyPr wrap="square" lIns="0" tIns="0" rIns="0" bIns="0" rtlCol="0" anchor="ctr"/>
-          <a:lstStyle/>
-          <a:p>
-            <a:pPr algn="r" indent="0" marL="0">
-              <a:buNone/>
-            </a:pPr>
-            <a:r>
-              <a:rPr lang="en-US" sz="800" b="1" dirty="0">
-                <a:solidFill>
-                  <a:schemeClr val="tx2"/>
-                </a:solidFill>
-              </a:rPr>
-              <a:t>Outside the frontier: AI struggles</a:t>
-            </a:r>
-            <a:endParaRPr lang="en-US" sz="800" dirty="0"/>
-          </a:p>
-        </p:txBody>
-      </p:sp>
-      <p:sp>
-        <p:nvSpPr>
-          <p:cNvPr id="39" name="axis label"/>
-          <p:cNvSpPr txBox="1"/>
-          <p:nvPr/>
-        </p:nvSpPr>
-        <p:spPr>
-          <a:xfrm>
-            <a:off x="5029200" y="4169664"/>
-            <a:ext cx="3474720" cy="164592"/>
-          </a:xfrm>
-          <a:prstGeom prst="rect">
-            <a:avLst/>
-          </a:prstGeom>
-          <a:noFill/>
-          <a:ln/>
-        </p:spPr>
-        <p:txBody>
-          <a:bodyPr wrap="square" lIns="0" tIns="0" rIns="0" bIns="0" rtlCol="0" anchor="ctr"/>
-          <a:lstStyle/>
-          <a:p>
-            <a:pPr algn="ctr" indent="0" marL="0">
-              <a:buNone/>
-            </a:pPr>
-            <a:r>
-              <a:rPr lang="en-US" sz="750" i="1" dirty="0">
-                <a:solidFill>
-                  <a:schemeClr val="tx2"/>
-                </a:solidFill>
-              </a:rPr>
-              <a:t>Tasks of similar apparent difficulty</a:t>
-            </a:r>
-            <a:endParaRPr lang="en-US" sz="750" dirty="0"/>
-          </a:p>
-        </p:txBody>
-      </p:sp>
-      <p:sp>
-        <p:nvSpPr>
-          <p:cNvPr id="40" name="reference"/>
-          <p:cNvSpPr txBox="1"/>
-          <p:nvPr/>
-        </p:nvSpPr>
-        <p:spPr>
-          <a:xfrm>
-            <a:off x="457200" y="4425696"/>
-            <a:ext cx="8229600" cy="310896"/>
-          </a:xfrm>
-          <a:prstGeom prst="rect">
-            <a:avLst/>
-          </a:prstGeom>
-          <a:noFill/>
-          <a:ln/>
-        </p:spPr>
-        <p:txBody>
-          <a:bodyPr wrap="square" lIns="0" tIns="0" rIns="0" bIns="0" rtlCol="0" anchor="t"/>
-          <a:lstStyle/>
-          <a:p>
-            <a:pPr indent="0" marL="0">
-              <a:buNone/>
-            </a:pPr>
-            <a:r>
-              <a:rPr lang="en-US" sz="750" i="1" dirty="0">
-                <a:solidFill>
-                  <a:schemeClr val="tx2"/>
-                </a:solidFill>
-              </a:rPr>
-              <a:t>Dell'Acqua, F., McFowland III, E., Mollick, E., Lifshitz-Assaf, H., Kellogg, K. C., Rajendran, S., Krayer, L., Candelon, F., &amp; Lakhani, K. R. (2023). Navigating the Jagged Technological Frontier. Harvard Business School Working Paper 24-013.</a:t>
-            </a:r>
-            <a:endParaRPr lang="en-US" sz="750" dirty="0"/>
           </a:p>
         </p:txBody>
       </p:sp>
@@ -6186,8 +7093,8 @@
         </p:nvSpPr>
         <p:spPr>
           <a:xfrm>
-            <a:off x="457200" y="146304"/>
-            <a:ext cx="8229600" cy="237744"/>
+            <a:off x="457200" y="164592"/>
+            <a:ext cx="5943600" cy="237744"/>
           </a:xfrm>
           <a:prstGeom prst="rect">
             <a:avLst/>
@@ -6224,7 +7131,7 @@
         </p:nvSpPr>
         <p:spPr>
           <a:xfrm>
-            <a:off x="457200" y="347472"/>
+            <a:off x="457200" y="365760"/>
             <a:ext cx="8229600" cy="713232"/>
           </a:xfrm>
           <a:prstGeom prst="rect">
@@ -6256,19 +7163,67 @@
       </p:sp>
       <p:sp>
         <p:nvSpPr>
-          <p:cNvPr id="4" name="tag finding"/>
+          <p:cNvPr id="4" name="progress dot 1"/>
           <p:cNvSpPr/>
           <p:nvPr/>
         </p:nvSpPr>
         <p:spPr>
           <a:xfrm>
-            <a:off x="457200" y="1133856"/>
-            <a:ext cx="2286000" cy="219456"/>
-          </a:xfrm>
-          <a:prstGeom prst="roundRect">
-            <a:avLst>
-              <a:gd name="adj" fmla="val 50000"/>
-            </a:avLst>
+            <a:off x="7845552" y="228600"/>
+            <a:ext cx="109728" cy="109728"/>
+          </a:xfrm>
+          <a:prstGeom prst="ellipse">
+            <a:avLst/>
+          </a:prstGeom>
+          <a:solidFill>
+            <a:srgbClr val="BFE6E0"/>
+          </a:solidFill>
+          <a:ln w="12700">
+            <a:solidFill>
+              <a:srgbClr val="BFE6E0"/>
+            </a:solidFill>
+            <a:prstDash val="solid"/>
+          </a:ln>
+        </p:spPr>
+      </p:sp>
+      <p:sp>
+        <p:nvSpPr>
+          <p:cNvPr id="5" name="progress dot 2"/>
+          <p:cNvSpPr/>
+          <p:nvPr/>
+        </p:nvSpPr>
+        <p:spPr>
+          <a:xfrm>
+            <a:off x="8028432" y="228600"/>
+            <a:ext cx="109728" cy="109728"/>
+          </a:xfrm>
+          <a:prstGeom prst="ellipse">
+            <a:avLst/>
+          </a:prstGeom>
+          <a:solidFill>
+            <a:srgbClr val="BFE6E0"/>
+          </a:solidFill>
+          <a:ln w="12700">
+            <a:solidFill>
+              <a:srgbClr val="BFE6E0"/>
+            </a:solidFill>
+            <a:prstDash val="solid"/>
+          </a:ln>
+        </p:spPr>
+      </p:sp>
+      <p:sp>
+        <p:nvSpPr>
+          <p:cNvPr id="6" name="progress dot 3"/>
+          <p:cNvSpPr/>
+          <p:nvPr/>
+        </p:nvSpPr>
+        <p:spPr>
+          <a:xfrm>
+            <a:off x="8211312" y="228600"/>
+            <a:ext cx="109728" cy="109728"/>
+          </a:xfrm>
+          <a:prstGeom prst="ellipse">
+            <a:avLst/>
           </a:prstGeom>
           <a:solidFill>
             <a:srgbClr val="2E8B86"/>
@@ -6283,8 +7238,94 @@
       </p:sp>
       <p:sp>
         <p:nvSpPr>
-          <p:cNvPr id="5" name="tag text"/>
+          <p:cNvPr id="7" name="progress dot 4"/>
+          <p:cNvSpPr/>
+          <p:nvPr/>
+        </p:nvSpPr>
+        <p:spPr>
+          <a:xfrm>
+            <a:off x="8394192" y="228600"/>
+            <a:ext cx="109728" cy="109728"/>
+          </a:xfrm>
+          <a:prstGeom prst="ellipse">
+            <a:avLst/>
+          </a:prstGeom>
+          <a:solidFill>
+            <a:srgbClr val="D8DEE6"/>
+          </a:solidFill>
+          <a:ln w="12700">
+            <a:solidFill>
+              <a:srgbClr val="D8DEE6"/>
+            </a:solidFill>
+            <a:prstDash val="solid"/>
+          </a:ln>
+        </p:spPr>
+      </p:sp>
+      <p:sp>
+        <p:nvSpPr>
+          <p:cNvPr id="8" name="progress dot 5"/>
+          <p:cNvSpPr/>
+          <p:nvPr/>
+        </p:nvSpPr>
+        <p:spPr>
+          <a:xfrm>
+            <a:off x="8577072" y="228600"/>
+            <a:ext cx="109728" cy="109728"/>
+          </a:xfrm>
+          <a:prstGeom prst="ellipse">
+            <a:avLst/>
+          </a:prstGeom>
+          <a:solidFill>
+            <a:srgbClr val="D8DEE6"/>
+          </a:solidFill>
+          <a:ln w="12700">
+            <a:solidFill>
+              <a:srgbClr val="D8DEE6"/>
+            </a:solidFill>
+            <a:prstDash val="solid"/>
+          </a:ln>
+        </p:spPr>
+      </p:sp>
+      <p:sp>
+        <p:nvSpPr>
+          <p:cNvPr id="9" name="progress label"/>
           <p:cNvSpPr txBox="1"/>
+          <p:nvPr/>
+        </p:nvSpPr>
+        <p:spPr>
+          <a:xfrm>
+            <a:off x="5742432" y="164592"/>
+            <a:ext cx="2011680" cy="237744"/>
+          </a:xfrm>
+          <a:prstGeom prst="rect">
+            <a:avLst/>
+          </a:prstGeom>
+          <a:noFill/>
+          <a:ln/>
+        </p:spPr>
+        <p:txBody>
+          <a:bodyPr wrap="square" lIns="0" tIns="0" rIns="0" bIns="0" rtlCol="0" anchor="ctr"/>
+          <a:lstStyle/>
+          <a:p>
+            <a:pPr algn="r" indent="0" marL="0">
+              <a:buNone/>
+            </a:pPr>
+            <a:r>
+              <a:rPr lang="en-US" sz="800" dirty="0">
+                <a:solidFill>
+                  <a:schemeClr val="tx2"/>
+                </a:solidFill>
+              </a:rPr>
+              <a:t>Article 2: Findings</a:t>
+            </a:r>
+            <a:endParaRPr lang="en-US" sz="800" dirty="0"/>
+          </a:p>
+        </p:txBody>
+      </p:sp>
+      <p:sp>
+        <p:nvSpPr>
+          <p:cNvPr id="10" name="tag finding"/>
+          <p:cNvSpPr/>
           <p:nvPr/>
         </p:nvSpPr>
         <p:spPr>
@@ -6292,6 +7333,33 @@
             <a:off x="457200" y="1133856"/>
             <a:ext cx="2286000" cy="219456"/>
           </a:xfrm>
+          <a:prstGeom prst="roundRect">
+            <a:avLst>
+              <a:gd name="adj" fmla="val 50000"/>
+            </a:avLst>
+          </a:prstGeom>
+          <a:solidFill>
+            <a:srgbClr val="2E8B86"/>
+          </a:solidFill>
+          <a:ln w="12700">
+            <a:solidFill>
+              <a:srgbClr val="2E8B86"/>
+            </a:solidFill>
+            <a:prstDash val="solid"/>
+          </a:ln>
+        </p:spPr>
+      </p:sp>
+      <p:sp>
+        <p:nvSpPr>
+          <p:cNvPr id="11" name="tag text"/>
+          <p:cNvSpPr txBox="1"/>
+          <p:nvPr/>
+        </p:nvSpPr>
+        <p:spPr>
+          <a:xfrm>
+            <a:off x="457200" y="1133856"/>
+            <a:ext cx="2286000" cy="219456"/>
+          </a:xfrm>
           <a:prstGeom prst="rect">
             <a:avLst/>
           </a:prstGeom>
@@ -6308,7 +7376,7 @@
             <a:r>
               <a:rPr lang="en-US" sz="800" b="1" spc="100" kern="0" dirty="0">
                 <a:solidFill>
-                  <a:schemeClr val="bg1"/>
+                  <a:srgbClr val="FFFFFF"/>
                 </a:solidFill>
               </a:rPr>
               <a:t>FINDING (reported in the article)</a:t>
@@ -6319,7 +7387,7 @@
       </p:sp>
       <p:graphicFrame>
         <p:nvGraphicFramePr>
-          <p:cNvPr id="6" name="findings chart" descr=""/>
+          <p:cNvPr id="12" name="findings chart" descr=""/>
           <p:cNvGraphicFramePr/>
           <p:nvPr/>
         </p:nvGraphicFramePr>
@@ -6335,7 +7403,7 @@
       </p:graphicFrame>
       <p:sp>
         <p:nvSpPr>
-          <p:cNvPr id="7" name="chart note"/>
+          <p:cNvPr id="13" name="chart note"/>
           <p:cNvSpPr txBox="1"/>
           <p:nvPr/>
         </p:nvSpPr>
@@ -6371,18 +7439,18 @@
       </p:sp>
       <p:sp>
         <p:nvSpPr>
-          <p:cNvPr id="8" name="outside callout"/>
+          <p:cNvPr id="14" name="outside callout"/>
           <p:cNvSpPr/>
           <p:nvPr/>
         </p:nvSpPr>
         <p:spPr>
           <a:xfrm>
             <a:off x="5577840" y="1133856"/>
-            <a:ext cx="3108960" cy="1737360"/>
+            <a:ext cx="3108960" cy="1755648"/>
           </a:xfrm>
           <a:prstGeom prst="roundRect">
             <a:avLst>
-              <a:gd name="adj" fmla="val 4211"/>
+              <a:gd name="adj" fmla="val 5208"/>
             </a:avLst>
           </a:prstGeom>
           <a:solidFill>
@@ -6394,11 +7462,18 @@
             </a:solidFill>
             <a:prstDash val="solid"/>
           </a:ln>
-        </p:spPr>
-      </p:sp>
-      <p:sp>
-        <p:nvSpPr>
-          <p:cNvPr id="9" name="outside head"/>
+          <a:effectLst>
+            <a:outerShdw sx="100000" sy="100000" kx="0" ky="0" algn="bl" rotWithShape="0" blurRad="101600" dist="25400" dir="5400000">
+              <a:srgbClr val="1B2A4A">
+                <a:alpha val="12000"/>
+              </a:srgbClr>
+            </a:outerShdw>
+          </a:effectLst>
+        </p:spPr>
+      </p:sp>
+      <p:sp>
+        <p:nvSpPr>
+          <p:cNvPr id="15" name="outside head"/>
           <p:cNvSpPr txBox="1"/>
           <p:nvPr/>
         </p:nvSpPr>
@@ -6423,7 +7498,7 @@
             <a:r>
               <a:rPr lang="en-US" sz="1000" b="1" spc="100" kern="0" dirty="0">
                 <a:solidFill>
-                  <a:srgbClr val="C9D6D4"/>
+                  <a:srgbClr val="BFE6E0"/>
                 </a:solidFill>
               </a:rPr>
               <a:t>Outside the frontier</a:t>
@@ -6434,14 +7509,14 @@
       </p:sp>
       <p:sp>
         <p:nvSpPr>
-          <p:cNvPr id="10" name="outside stat"/>
+          <p:cNvPr id="16" name="outside stat"/>
           <p:cNvSpPr txBox="1"/>
           <p:nvPr/>
         </p:nvSpPr>
         <p:spPr>
           <a:xfrm>
             <a:off x="5760720" y="1426464"/>
-            <a:ext cx="2743200" cy="457200"/>
+            <a:ext cx="1463040" cy="457200"/>
           </a:xfrm>
           <a:prstGeom prst="rect">
             <a:avLst/>
@@ -6470,14 +7545,14 @@
       </p:sp>
       <p:sp>
         <p:nvSpPr>
-          <p:cNvPr id="11" name="outside unit"/>
+          <p:cNvPr id="17" name="outside unit"/>
           <p:cNvSpPr txBox="1"/>
           <p:nvPr/>
         </p:nvSpPr>
         <p:spPr>
           <a:xfrm>
             <a:off x="5760720" y="1883664"/>
-            <a:ext cx="2743200" cy="201168"/>
+            <a:ext cx="1828800" cy="201168"/>
           </a:xfrm>
           <a:prstGeom prst="rect">
             <a:avLst/>
@@ -6495,7 +7570,7 @@
             <a:r>
               <a:rPr lang="en-US" sz="950" dirty="0">
                 <a:solidFill>
-                  <a:srgbClr val="C9D6D4"/>
+                  <a:srgbClr val="BFE6E0"/>
                 </a:solidFill>
               </a:rPr>
               <a:t>percentage points</a:t>
@@ -6504,16 +7579,40 @@
           </a:p>
         </p:txBody>
       </p:sp>
-      <p:sp>
-        <p:nvSpPr>
-          <p:cNvPr id="12" name="outside body"/>
+      <p:pic>
+        <p:nvPicPr>
+          <p:cNvPr id="18" name="mascot confused" descr="preencoded.png">    </p:cNvPr>
+          <p:cNvPicPr>
+            <a:picLocks noChangeAspect="1"/>
+          </p:cNvPicPr>
+          <p:nvPr/>
+        </p:nvPicPr>
+        <p:blipFill>
+          <a:blip r:embed="rId2"/>
+          <a:stretch>
+            <a:fillRect/>
+          </a:stretch>
+        </p:blipFill>
+        <p:spPr>
+          <a:xfrm>
+            <a:off x="7571232" y="1316736"/>
+            <a:ext cx="1005840" cy="868680"/>
+          </a:xfrm>
+          <a:prstGeom prst="rect">
+            <a:avLst/>
+          </a:prstGeom>
+        </p:spPr>
+      </p:pic>
+      <p:sp>
+        <p:nvSpPr>
+          <p:cNvPr id="19" name="outside body"/>
           <p:cNvSpPr txBox="1"/>
           <p:nvPr/>
         </p:nvSpPr>
         <p:spPr>
           <a:xfrm>
-            <a:off x="5760720" y="2121408"/>
-            <a:ext cx="2743200" cy="713232"/>
+            <a:off x="5760720" y="2139696"/>
+            <a:ext cx="2743200" cy="694944"/>
           </a:xfrm>
           <a:prstGeom prst="rect">
             <a:avLst/>
@@ -6542,18 +7641,18 @@
       </p:sp>
       <p:sp>
         <p:nvSpPr>
-          <p:cNvPr id="13" name="unit note card"/>
+          <p:cNvPr id="20" name="unit note card"/>
           <p:cNvSpPr/>
           <p:nvPr/>
         </p:nvSpPr>
         <p:spPr>
           <a:xfrm>
-            <a:off x="5577840" y="2962656"/>
-            <a:ext cx="3108960" cy="822960"/>
+            <a:off x="5577840" y="2980944"/>
+            <a:ext cx="3108960" cy="804672"/>
           </a:xfrm>
           <a:prstGeom prst="roundRect">
             <a:avLst>
-              <a:gd name="adj" fmla="val 8889"/>
+              <a:gd name="adj" fmla="val 11364"/>
             </a:avLst>
           </a:prstGeom>
           <a:solidFill>
@@ -6569,14 +7668,14 @@
       </p:sp>
       <p:sp>
         <p:nvSpPr>
-          <p:cNvPr id="14" name="unit note"/>
+          <p:cNvPr id="21" name="unit note"/>
           <p:cNvSpPr txBox="1"/>
           <p:nvPr/>
         </p:nvSpPr>
         <p:spPr>
           <a:xfrm>
             <a:off x="5715000" y="3017520"/>
-            <a:ext cx="2834640" cy="713232"/>
+            <a:ext cx="2834640" cy="731520"/>
           </a:xfrm>
           <a:prstGeom prst="rect">
             <a:avLst/>
@@ -6605,14 +7704,14 @@
       </p:sp>
       <p:sp>
         <p:nvSpPr>
-          <p:cNvPr id="15" name="approach head"/>
+          <p:cNvPr id="22" name="approach head"/>
           <p:cNvSpPr txBox="1"/>
           <p:nvPr/>
         </p:nvSpPr>
         <p:spPr>
           <a:xfrm>
             <a:off x="457200" y="3840480"/>
-            <a:ext cx="3657600" cy="201168"/>
+            <a:ext cx="4572000" cy="201168"/>
           </a:xfrm>
           <a:prstGeom prst="rect">
             <a:avLst/>
@@ -6641,18 +7740,18 @@
       </p:sp>
       <p:sp>
         <p:nvSpPr>
-          <p:cNvPr id="16" name="approach Centaurs"/>
+          <p:cNvPr id="23" name="approach Centaurs"/>
           <p:cNvSpPr/>
           <p:nvPr/>
         </p:nvSpPr>
         <p:spPr>
           <a:xfrm>
             <a:off x="457200" y="4059936"/>
-            <a:ext cx="3977640" cy="384048"/>
+            <a:ext cx="3977640" cy="365760"/>
           </a:xfrm>
           <a:prstGeom prst="roundRect">
             <a:avLst>
-              <a:gd name="adj" fmla="val 19048"/>
+              <a:gd name="adj" fmla="val 25000"/>
             </a:avLst>
           </a:prstGeom>
           <a:solidFill>
@@ -6668,22 +7767,22 @@
       </p:sp>
       <p:pic>
         <p:nvPicPr>
-          <p:cNvPr id="17" name="icon FiGitBranch" descr="preencoded.png">    </p:cNvPr>
+          <p:cNvPr id="24" name="glyph Centaurs" descr="preencoded.png">    </p:cNvPr>
           <p:cNvPicPr>
             <a:picLocks noChangeAspect="1"/>
           </p:cNvPicPr>
           <p:nvPr/>
         </p:nvPicPr>
         <p:blipFill>
-          <a:blip r:embed="rId2"/>
+          <a:blip r:embed="rId3"/>
           <a:stretch>
             <a:fillRect/>
           </a:stretch>
         </p:blipFill>
         <p:spPr>
           <a:xfrm>
-            <a:off x="548640" y="4142232"/>
-            <a:ext cx="219456" cy="219456"/>
+            <a:off x="530352" y="4105656"/>
+            <a:ext cx="411480" cy="274320"/>
           </a:xfrm>
           <a:prstGeom prst="rect">
             <a:avLst/>
@@ -6692,14 +7791,14 @@
       </p:pic>
       <p:sp>
         <p:nvSpPr>
-          <p:cNvPr id="18" name="approach text"/>
+          <p:cNvPr id="25" name="approach text"/>
           <p:cNvSpPr txBox="1"/>
           <p:nvPr/>
         </p:nvSpPr>
         <p:spPr>
           <a:xfrm>
-            <a:off x="841248" y="4059936"/>
-            <a:ext cx="3520440" cy="384048"/>
+            <a:off x="1024128" y="4059936"/>
+            <a:ext cx="3337560" cy="365760"/>
           </a:xfrm>
           <a:prstGeom prst="rect">
             <a:avLst/>
@@ -6739,18 +7838,18 @@
       </p:sp>
       <p:sp>
         <p:nvSpPr>
-          <p:cNvPr id="19" name="approach Cyborgs"/>
+          <p:cNvPr id="26" name="approach Cyborgs"/>
           <p:cNvSpPr/>
           <p:nvPr/>
         </p:nvSpPr>
         <p:spPr>
           <a:xfrm>
             <a:off x="4709160" y="4059936"/>
-            <a:ext cx="3977640" cy="384048"/>
+            <a:ext cx="3977640" cy="365760"/>
           </a:xfrm>
           <a:prstGeom prst="roundRect">
             <a:avLst>
-              <a:gd name="adj" fmla="val 19048"/>
+              <a:gd name="adj" fmla="val 25000"/>
             </a:avLst>
           </a:prstGeom>
           <a:solidFill>
@@ -6766,22 +7865,22 @@
       </p:sp>
       <p:pic>
         <p:nvPicPr>
-          <p:cNvPr id="20" name="icon FiRefreshCw" descr="preencoded.png">    </p:cNvPr>
+          <p:cNvPr id="27" name="glyph Cyborgs" descr="preencoded.png">    </p:cNvPr>
           <p:cNvPicPr>
             <a:picLocks noChangeAspect="1"/>
           </p:cNvPicPr>
           <p:nvPr/>
         </p:nvPicPr>
         <p:blipFill>
-          <a:blip r:embed="rId3"/>
+          <a:blip r:embed="rId4"/>
           <a:stretch>
             <a:fillRect/>
           </a:stretch>
         </p:blipFill>
         <p:spPr>
           <a:xfrm>
-            <a:off x="4800600" y="4142232"/>
-            <a:ext cx="219456" cy="219456"/>
+            <a:off x="4782312" y="4105656"/>
+            <a:ext cx="411480" cy="274320"/>
           </a:xfrm>
           <a:prstGeom prst="rect">
             <a:avLst/>
@@ -6790,14 +7889,14 @@
       </p:pic>
       <p:sp>
         <p:nvSpPr>
-          <p:cNvPr id="21" name="approach text"/>
+          <p:cNvPr id="28" name="approach text"/>
           <p:cNvSpPr txBox="1"/>
           <p:nvPr/>
         </p:nvSpPr>
         <p:spPr>
           <a:xfrm>
-            <a:off x="5093208" y="4059936"/>
-            <a:ext cx="3520440" cy="384048"/>
+            <a:off x="5276088" y="4059936"/>
+            <a:ext cx="3337560" cy="365760"/>
           </a:xfrm>
           <a:prstGeom prst="rect">
             <a:avLst/>
@@ -6837,14 +7936,14 @@
       </p:sp>
       <p:sp>
         <p:nvSpPr>
-          <p:cNvPr id="22" name="reference"/>
+          <p:cNvPr id="29" name="reference"/>
           <p:cNvSpPr txBox="1"/>
           <p:nvPr/>
         </p:nvSpPr>
         <p:spPr>
           <a:xfrm>
             <a:off x="457200" y="4425696"/>
-            <a:ext cx="8229600" cy="310896"/>
+            <a:ext cx="5120640" cy="310896"/>
           </a:xfrm>
           <a:prstGeom prst="rect">
             <a:avLst/>
@@ -6868,6 +7967,104 @@
               <a:t>Dell'Acqua, F., McFowland III, E., Mollick, E., Lifshitz-Assaf, H., Kellogg, K. C., Rajendran, S., Krayer, L., Candelon, F., &amp; Lakhani, K. R. (2023). Navigating the Jagged Technological Frontier. Harvard Business School Working Paper 24-013.</a:t>
             </a:r>
             <a:endParaRPr lang="en-US" sz="750" dirty="0"/>
+          </a:p>
+        </p:txBody>
+      </p:sp>
+      <p:sp>
+        <p:nvSpPr>
+          <p:cNvPr id="30" name="bridge card"/>
+          <p:cNvSpPr/>
+          <p:nvPr/>
+        </p:nvSpPr>
+        <p:spPr>
+          <a:xfrm>
+            <a:off x="5760720" y="4407408"/>
+            <a:ext cx="2926080" cy="329184"/>
+          </a:xfrm>
+          <a:prstGeom prst="roundRect">
+            <a:avLst>
+              <a:gd name="adj" fmla="val 27778"/>
+            </a:avLst>
+          </a:prstGeom>
+          <a:solidFill>
+            <a:srgbClr val="BFE6E0"/>
+          </a:solidFill>
+          <a:ln w="12700">
+            <a:solidFill>
+              <a:srgbClr val="BFE6E0"/>
+            </a:solidFill>
+            <a:prstDash val="solid"/>
+          </a:ln>
+        </p:spPr>
+      </p:sp>
+      <p:pic>
+        <p:nvPicPr>
+          <p:cNvPr id="31" name="icon FiArrowRight" descr="preencoded.png">    </p:cNvPr>
+          <p:cNvPicPr>
+            <a:picLocks noChangeAspect="1"/>
+          </p:cNvPicPr>
+          <p:nvPr/>
+        </p:nvPicPr>
+        <p:blipFill>
+          <a:blip r:embed="rId5"/>
+          <a:stretch>
+            <a:fillRect/>
+          </a:stretch>
+        </p:blipFill>
+        <p:spPr>
+          <a:xfrm>
+            <a:off x="8412480" y="4480560"/>
+            <a:ext cx="182880" cy="182880"/>
+          </a:xfrm>
+          <a:prstGeom prst="rect">
+            <a:avLst/>
+          </a:prstGeom>
+        </p:spPr>
+      </p:pic>
+      <p:sp>
+        <p:nvSpPr>
+          <p:cNvPr id="32" name="bridge text"/>
+          <p:cNvSpPr txBox="1"/>
+          <p:nvPr/>
+        </p:nvSpPr>
+        <p:spPr>
+          <a:xfrm>
+            <a:off x="5870448" y="4407408"/>
+            <a:ext cx="2505456" cy="329184"/>
+          </a:xfrm>
+          <a:prstGeom prst="rect">
+            <a:avLst/>
+          </a:prstGeom>
+          <a:noFill/>
+          <a:ln/>
+        </p:spPr>
+        <p:txBody>
+          <a:bodyPr wrap="square" lIns="0" tIns="0" rIns="0" bIns="0" rtlCol="0" anchor="ctr"/>
+          <a:lstStyle/>
+          <a:p>
+            <a:pPr indent="0" marL="0">
+              <a:buNone/>
+            </a:pPr>
+            <a:r>
+              <a:rPr lang="en-US" sz="800" b="1" dirty="0">
+                <a:solidFill>
+                  <a:srgbClr val="2E8B86"/>
+                </a:solidFill>
+              </a:rPr>
+              <a:t>Next:  </a:t>
+            </a:r>
+            <a:pPr indent="0" marL="0">
+              <a:buNone/>
+            </a:pPr>
+            <a:r>
+              <a:rPr lang="en-US" sz="800" dirty="0">
+                <a:solidFill>
+                  <a:srgbClr val="1B2A4A"/>
+                </a:solidFill>
+              </a:rPr>
+              <a:t>Does this hold outside the office, for real small businesses?</a:t>
+            </a:r>
+            <a:endParaRPr lang="en-US" sz="800" dirty="0"/>
           </a:p>
         </p:txBody>
       </p:sp>
@@ -6951,8 +8148,8 @@
         </p:nvSpPr>
         <p:spPr>
           <a:xfrm>
-            <a:off x="457200" y="146304"/>
-            <a:ext cx="8229600" cy="237744"/>
+            <a:off x="457200" y="164592"/>
+            <a:ext cx="5943600" cy="237744"/>
           </a:xfrm>
           <a:prstGeom prst="rect">
             <a:avLst/>
@@ -6989,7 +8186,7 @@
         </p:nvSpPr>
         <p:spPr>
           <a:xfrm>
-            <a:off x="457200" y="347472"/>
+            <a:off x="457200" y="365760"/>
             <a:ext cx="8229600" cy="713232"/>
           </a:xfrm>
           <a:prstGeom prst="rect">
@@ -7021,50 +8218,89 @@
       </p:sp>
       <p:sp>
         <p:nvSpPr>
-          <p:cNvPr id="4" name="byline"/>
-          <p:cNvSpPr txBox="1"/>
-          <p:nvPr/>
-        </p:nvSpPr>
-        <p:spPr>
-          <a:xfrm>
-            <a:off x="457200" y="1060704"/>
-            <a:ext cx="8229600" cy="219456"/>
-          </a:xfrm>
-          <a:prstGeom prst="rect">
-            <a:avLst/>
-          </a:prstGeom>
-          <a:noFill/>
-          <a:ln/>
-        </p:spPr>
-        <p:txBody>
-          <a:bodyPr wrap="square" lIns="0" tIns="0" rIns="0" bIns="0" rtlCol="0" anchor="ctr"/>
-          <a:lstStyle/>
-          <a:p>
-            <a:pPr indent="0" marL="0">
-              <a:buNone/>
-            </a:pPr>
-            <a:r>
-              <a:rPr lang="en-US" sz="900" dirty="0">
-                <a:solidFill>
-                  <a:schemeClr val="tx2"/>
-                </a:solidFill>
-              </a:rPr>
-              <a:t>Nicholas G. Otis et al.  |  Management Science, Vol. 72, No. 7, 2026  |  DOI 10.1287/mnsc.2024.06909</a:t>
-            </a:r>
-            <a:endParaRPr lang="en-US" sz="900" dirty="0"/>
-          </a:p>
-        </p:txBody>
-      </p:sp>
-      <p:sp>
-        <p:nvSpPr>
-          <p:cNvPr id="5" name="icon circle"/>
+          <p:cNvPr id="4" name="progress dot 1"/>
           <p:cNvSpPr/>
           <p:nvPr/>
         </p:nvSpPr>
         <p:spPr>
           <a:xfrm>
-            <a:off x="457200" y="1426464"/>
-            <a:ext cx="384048" cy="384048"/>
+            <a:off x="7845552" y="228600"/>
+            <a:ext cx="109728" cy="109728"/>
+          </a:xfrm>
+          <a:prstGeom prst="ellipse">
+            <a:avLst/>
+          </a:prstGeom>
+          <a:solidFill>
+            <a:srgbClr val="BFE6E0"/>
+          </a:solidFill>
+          <a:ln w="12700">
+            <a:solidFill>
+              <a:srgbClr val="BFE6E0"/>
+            </a:solidFill>
+            <a:prstDash val="solid"/>
+          </a:ln>
+        </p:spPr>
+      </p:sp>
+      <p:sp>
+        <p:nvSpPr>
+          <p:cNvPr id="5" name="progress dot 2"/>
+          <p:cNvSpPr/>
+          <p:nvPr/>
+        </p:nvSpPr>
+        <p:spPr>
+          <a:xfrm>
+            <a:off x="8028432" y="228600"/>
+            <a:ext cx="109728" cy="109728"/>
+          </a:xfrm>
+          <a:prstGeom prst="ellipse">
+            <a:avLst/>
+          </a:prstGeom>
+          <a:solidFill>
+            <a:srgbClr val="BFE6E0"/>
+          </a:solidFill>
+          <a:ln w="12700">
+            <a:solidFill>
+              <a:srgbClr val="BFE6E0"/>
+            </a:solidFill>
+            <a:prstDash val="solid"/>
+          </a:ln>
+        </p:spPr>
+      </p:sp>
+      <p:sp>
+        <p:nvSpPr>
+          <p:cNvPr id="6" name="progress dot 3"/>
+          <p:cNvSpPr/>
+          <p:nvPr/>
+        </p:nvSpPr>
+        <p:spPr>
+          <a:xfrm>
+            <a:off x="8211312" y="228600"/>
+            <a:ext cx="109728" cy="109728"/>
+          </a:xfrm>
+          <a:prstGeom prst="ellipse">
+            <a:avLst/>
+          </a:prstGeom>
+          <a:solidFill>
+            <a:srgbClr val="BFE6E0"/>
+          </a:solidFill>
+          <a:ln w="12700">
+            <a:solidFill>
+              <a:srgbClr val="BFE6E0"/>
+            </a:solidFill>
+            <a:prstDash val="solid"/>
+          </a:ln>
+        </p:spPr>
+      </p:sp>
+      <p:sp>
+        <p:nvSpPr>
+          <p:cNvPr id="7" name="progress dot 4"/>
+          <p:cNvSpPr/>
+          <p:nvPr/>
+        </p:nvSpPr>
+        <p:spPr>
+          <a:xfrm>
+            <a:off x="8394192" y="228600"/>
+            <a:ext cx="109728" cy="109728"/>
           </a:xfrm>
           <a:prstGeom prst="ellipse">
             <a:avLst/>
@@ -7080,89 +8316,112 @@
           </a:ln>
         </p:spPr>
       </p:sp>
-      <p:pic>
-        <p:nvPicPr>
-          <p:cNvPr id="6" name="icon FiMapPin" descr="preencoded.png">    </p:cNvPr>
-          <p:cNvPicPr>
-            <a:picLocks noChangeAspect="1"/>
-          </p:cNvPicPr>
-          <p:nvPr/>
-        </p:nvPicPr>
-        <p:blipFill>
-          <a:blip r:embed="rId1"/>
-          <a:stretch>
-            <a:fillRect/>
-          </a:stretch>
-        </p:blipFill>
-        <p:spPr>
-          <a:xfrm>
-            <a:off x="539496" y="1508760"/>
-            <a:ext cx="219456" cy="219456"/>
-          </a:xfrm>
-          <a:prstGeom prst="rect">
-            <a:avLst/>
-          </a:prstGeom>
-        </p:spPr>
-      </p:pic>
-      <p:sp>
-        <p:nvSpPr>
-          <p:cNvPr id="7" name="fact Setting"/>
+      <p:sp>
+        <p:nvSpPr>
+          <p:cNvPr id="8" name="progress dot 5"/>
+          <p:cNvSpPr/>
+          <p:nvPr/>
+        </p:nvSpPr>
+        <p:spPr>
+          <a:xfrm>
+            <a:off x="8577072" y="228600"/>
+            <a:ext cx="109728" cy="109728"/>
+          </a:xfrm>
+          <a:prstGeom prst="ellipse">
+            <a:avLst/>
+          </a:prstGeom>
+          <a:solidFill>
+            <a:srgbClr val="D8DEE6"/>
+          </a:solidFill>
+          <a:ln w="12700">
+            <a:solidFill>
+              <a:srgbClr val="D8DEE6"/>
+            </a:solidFill>
+            <a:prstDash val="solid"/>
+          </a:ln>
+        </p:spPr>
+      </p:sp>
+      <p:sp>
+        <p:nvSpPr>
+          <p:cNvPr id="9" name="progress label"/>
           <p:cNvSpPr txBox="1"/>
           <p:nvPr/>
         </p:nvSpPr>
         <p:spPr>
           <a:xfrm>
-            <a:off x="969264" y="1389888"/>
-            <a:ext cx="3328416" cy="530352"/>
-          </a:xfrm>
-          <a:prstGeom prst="rect">
-            <a:avLst/>
-          </a:prstGeom>
-          <a:noFill/>
-          <a:ln/>
-        </p:spPr>
-        <p:txBody>
-          <a:bodyPr wrap="square" lIns="0" tIns="0" rIns="0" bIns="0" rtlCol="0" anchor="t"/>
+            <a:off x="5742432" y="164592"/>
+            <a:ext cx="2011680" cy="237744"/>
+          </a:xfrm>
+          <a:prstGeom prst="rect">
+            <a:avLst/>
+          </a:prstGeom>
+          <a:noFill/>
+          <a:ln/>
+        </p:spPr>
+        <p:txBody>
+          <a:bodyPr wrap="square" lIns="0" tIns="0" rIns="0" bIns="0" rtlCol="0" anchor="ctr"/>
+          <a:lstStyle/>
+          <a:p>
+            <a:pPr algn="r" indent="0" marL="0">
+              <a:buNone/>
+            </a:pPr>
+            <a:r>
+              <a:rPr lang="en-US" sz="800" dirty="0">
+                <a:solidFill>
+                  <a:schemeClr val="tx2"/>
+                </a:solidFill>
+              </a:rPr>
+              <a:t>Article 5: Entrepreneurs</a:t>
+            </a:r>
+            <a:endParaRPr lang="en-US" sz="800" dirty="0"/>
+          </a:p>
+        </p:txBody>
+      </p:sp>
+      <p:sp>
+        <p:nvSpPr>
+          <p:cNvPr id="10" name="byline"/>
+          <p:cNvSpPr txBox="1"/>
+          <p:nvPr/>
+        </p:nvSpPr>
+        <p:spPr>
+          <a:xfrm>
+            <a:off x="457200" y="1060704"/>
+            <a:ext cx="8229600" cy="219456"/>
+          </a:xfrm>
+          <a:prstGeom prst="rect">
+            <a:avLst/>
+          </a:prstGeom>
+          <a:noFill/>
+          <a:ln/>
+        </p:spPr>
+        <p:txBody>
+          <a:bodyPr wrap="square" lIns="0" tIns="0" rIns="0" bIns="0" rtlCol="0" anchor="ctr"/>
           <a:lstStyle/>
           <a:p>
             <a:pPr indent="0" marL="0">
               <a:buNone/>
             </a:pPr>
             <a:r>
-              <a:rPr lang="en-US" sz="1150" b="1" dirty="0">
-                <a:solidFill>
-                  <a:schemeClr val="tx1"/>
-                </a:solidFill>
-              </a:rPr>
-              <a:t>Setting</a:t>
-            </a:r>
-            <a:endParaRPr lang="en-US" sz="1150" dirty="0"/>
-          </a:p>
-          <a:p>
-            <a:pPr indent="0" marL="0">
-              <a:buNone/>
-            </a:pPr>
-            <a:r>
-              <a:rPr lang="en-US" sz="1050" dirty="0">
+              <a:rPr lang="en-US" sz="900" dirty="0">
                 <a:solidFill>
                   <a:schemeClr val="tx2"/>
                 </a:solidFill>
               </a:rPr>
-              <a:t>Field experiment with small-business entrepreneurs in Kenya</a:t>
-            </a:r>
-            <a:endParaRPr lang="en-US" sz="1150" dirty="0"/>
-          </a:p>
-        </p:txBody>
-      </p:sp>
-      <p:sp>
-        <p:nvSpPr>
-          <p:cNvPr id="8" name="icon circle"/>
+              <a:t>Nicholas G. Otis et al.  |  Management Science, Vol. 72, No. 7, 2026  |  DOI 10.1287/mnsc.2024.06909</a:t>
+            </a:r>
+            <a:endParaRPr lang="en-US" sz="900" dirty="0"/>
+          </a:p>
+        </p:txBody>
+      </p:sp>
+      <p:sp>
+        <p:nvSpPr>
+          <p:cNvPr id="11" name="icon circle"/>
           <p:cNvSpPr/>
           <p:nvPr/>
         </p:nvSpPr>
         <p:spPr>
           <a:xfrm>
-            <a:off x="457200" y="2011680"/>
+            <a:off x="457200" y="1426464"/>
             <a:ext cx="384048" cy="384048"/>
           </a:xfrm>
           <a:prstGeom prst="ellipse">
@@ -7181,21 +8440,21 @@
       </p:sp>
       <p:pic>
         <p:nvPicPr>
-          <p:cNvPr id="9" name="icon FiMessageSquare" descr="preencoded.png">    </p:cNvPr>
+          <p:cNvPr id="12" name="icon FiMapPin" descr="preencoded.png">    </p:cNvPr>
           <p:cNvPicPr>
             <a:picLocks noChangeAspect="1"/>
           </p:cNvPicPr>
           <p:nvPr/>
         </p:nvPicPr>
         <p:blipFill>
-          <a:blip r:embed="rId2"/>
+          <a:blip r:embed="rId1"/>
           <a:stretch>
             <a:fillRect/>
           </a:stretch>
         </p:blipFill>
         <p:spPr>
           <a:xfrm>
-            <a:off x="539496" y="2093976"/>
+            <a:off x="539496" y="1508760"/>
             <a:ext cx="219456" cy="219456"/>
           </a:xfrm>
           <a:prstGeom prst="rect">
@@ -7205,13 +8464,13 @@
       </p:pic>
       <p:sp>
         <p:nvSpPr>
-          <p:cNvPr id="10" name="fact Intervention"/>
+          <p:cNvPr id="13" name="fact Setting"/>
           <p:cNvSpPr txBox="1"/>
           <p:nvPr/>
         </p:nvSpPr>
         <p:spPr>
           <a:xfrm>
-            <a:off x="969264" y="1975104"/>
+            <a:off x="969264" y="1389888"/>
             <a:ext cx="3328416" cy="530352"/>
           </a:xfrm>
           <a:prstGeom prst="rect">
@@ -7233,7 +8492,7 @@
                   <a:schemeClr val="tx1"/>
                 </a:solidFill>
               </a:rPr>
-              <a:t>Intervention</a:t>
+              <a:t>Setting</a:t>
             </a:r>
             <a:endParaRPr lang="en-US" sz="1150" dirty="0"/>
           </a:p>
@@ -7247,7 +8506,7 @@
                   <a:schemeClr val="tx2"/>
                 </a:solidFill>
               </a:rPr>
-              <a:t>Access to a GPT-4-powered AI business assistant that gave business advice</a:t>
+              <a:t>Field experiment with small-business entrepreneurs in Kenya</a:t>
             </a:r>
             <a:endParaRPr lang="en-US" sz="1150" dirty="0"/>
           </a:p>
@@ -7255,13 +8514,13 @@
       </p:sp>
       <p:sp>
         <p:nvSpPr>
-          <p:cNvPr id="11" name="icon circle"/>
+          <p:cNvPr id="14" name="icon circle"/>
           <p:cNvSpPr/>
           <p:nvPr/>
         </p:nvSpPr>
         <p:spPr>
           <a:xfrm>
-            <a:off x="457200" y="2596896"/>
+            <a:off x="457200" y="2011680"/>
             <a:ext cx="384048" cy="384048"/>
           </a:xfrm>
           <a:prstGeom prst="ellipse">
@@ -7280,7 +8539,106 @@
       </p:sp>
       <p:pic>
         <p:nvPicPr>
-          <p:cNvPr id="12" name="icon FiDollarSign" descr="preencoded.png">    </p:cNvPr>
+          <p:cNvPr id="15" name="icon FiMessageSquare" descr="preencoded.png">    </p:cNvPr>
+          <p:cNvPicPr>
+            <a:picLocks noChangeAspect="1"/>
+          </p:cNvPicPr>
+          <p:nvPr/>
+        </p:nvPicPr>
+        <p:blipFill>
+          <a:blip r:embed="rId2"/>
+          <a:stretch>
+            <a:fillRect/>
+          </a:stretch>
+        </p:blipFill>
+        <p:spPr>
+          <a:xfrm>
+            <a:off x="539496" y="2093976"/>
+            <a:ext cx="219456" cy="219456"/>
+          </a:xfrm>
+          <a:prstGeom prst="rect">
+            <a:avLst/>
+          </a:prstGeom>
+        </p:spPr>
+      </p:pic>
+      <p:sp>
+        <p:nvSpPr>
+          <p:cNvPr id="16" name="fact Intervention"/>
+          <p:cNvSpPr txBox="1"/>
+          <p:nvPr/>
+        </p:nvSpPr>
+        <p:spPr>
+          <a:xfrm>
+            <a:off x="969264" y="1975104"/>
+            <a:ext cx="3328416" cy="530352"/>
+          </a:xfrm>
+          <a:prstGeom prst="rect">
+            <a:avLst/>
+          </a:prstGeom>
+          <a:noFill/>
+          <a:ln/>
+        </p:spPr>
+        <p:txBody>
+          <a:bodyPr wrap="square" lIns="0" tIns="0" rIns="0" bIns="0" rtlCol="0" anchor="t"/>
+          <a:lstStyle/>
+          <a:p>
+            <a:pPr indent="0" marL="0">
+              <a:buNone/>
+            </a:pPr>
+            <a:r>
+              <a:rPr lang="en-US" sz="1150" b="1" dirty="0">
+                <a:solidFill>
+                  <a:schemeClr val="tx1"/>
+                </a:solidFill>
+              </a:rPr>
+              <a:t>Intervention</a:t>
+            </a:r>
+            <a:endParaRPr lang="en-US" sz="1150" dirty="0"/>
+          </a:p>
+          <a:p>
+            <a:pPr indent="0" marL="0">
+              <a:buNone/>
+            </a:pPr>
+            <a:r>
+              <a:rPr lang="en-US" sz="1050" dirty="0">
+                <a:solidFill>
+                  <a:schemeClr val="tx2"/>
+                </a:solidFill>
+              </a:rPr>
+              <a:t>Access to a GPT-4-powered AI business assistant that gave business advice</a:t>
+            </a:r>
+            <a:endParaRPr lang="en-US" sz="1150" dirty="0"/>
+          </a:p>
+        </p:txBody>
+      </p:sp>
+      <p:sp>
+        <p:nvSpPr>
+          <p:cNvPr id="17" name="icon circle"/>
+          <p:cNvSpPr/>
+          <p:nvPr/>
+        </p:nvSpPr>
+        <p:spPr>
+          <a:xfrm>
+            <a:off x="457200" y="2596896"/>
+            <a:ext cx="384048" cy="384048"/>
+          </a:xfrm>
+          <a:prstGeom prst="ellipse">
+            <a:avLst/>
+          </a:prstGeom>
+          <a:solidFill>
+            <a:srgbClr val="2E8B86"/>
+          </a:solidFill>
+          <a:ln w="12700">
+            <a:solidFill>
+              <a:srgbClr val="2E8B86"/>
+            </a:solidFill>
+            <a:prstDash val="solid"/>
+          </a:ln>
+        </p:spPr>
+      </p:sp>
+      <p:pic>
+        <p:nvPicPr>
+          <p:cNvPr id="18" name="icon FiDollarSign" descr="preencoded.png">    </p:cNvPr>
           <p:cNvPicPr>
             <a:picLocks noChangeAspect="1"/>
           </p:cNvPicPr>
@@ -7304,7 +8662,7 @@
       </p:pic>
       <p:sp>
         <p:nvSpPr>
-          <p:cNvPr id="13" name="fact Outcomes examined"/>
+          <p:cNvPr id="19" name="fact Outcomes examined"/>
           <p:cNvSpPr txBox="1"/>
           <p:nvPr/>
         </p:nvSpPr>
@@ -7354,18 +8712,18 @@
       </p:sp>
       <p:sp>
         <p:nvSpPr>
-          <p:cNvPr id="14" name="main effect card"/>
+          <p:cNvPr id="20" name="main effect card"/>
           <p:cNvSpPr/>
           <p:nvPr/>
         </p:nvSpPr>
         <p:spPr>
           <a:xfrm>
             <a:off x="457200" y="3200400"/>
-            <a:ext cx="3840480" cy="1170432"/>
+            <a:ext cx="3840480" cy="1152144"/>
           </a:xfrm>
           <a:prstGeom prst="roundRect">
             <a:avLst>
-              <a:gd name="adj" fmla="val 6250"/>
+              <a:gd name="adj" fmla="val 7937"/>
             </a:avLst>
           </a:prstGeom>
           <a:solidFill>
@@ -7377,11 +8735,18 @@
             </a:solidFill>
             <a:prstDash val="solid"/>
           </a:ln>
-        </p:spPr>
-      </p:sp>
-      <p:sp>
-        <p:nvSpPr>
-          <p:cNvPr id="15" name="tag finding"/>
+          <a:effectLst>
+            <a:outerShdw sx="100000" sy="100000" kx="0" ky="0" algn="bl" rotWithShape="0" blurRad="101600" dist="25400" dir="5400000">
+              <a:srgbClr val="1B2A4A">
+                <a:alpha val="12000"/>
+              </a:srgbClr>
+            </a:outerShdw>
+          </a:effectLst>
+        </p:spPr>
+      </p:sp>
+      <p:sp>
+        <p:nvSpPr>
+          <p:cNvPr id="21" name="tag finding"/>
           <p:cNvSpPr/>
           <p:nvPr/>
         </p:nvSpPr>
@@ -7408,7 +8773,7 @@
       </p:sp>
       <p:sp>
         <p:nvSpPr>
-          <p:cNvPr id="16" name="tag text"/>
+          <p:cNvPr id="22" name="tag text"/>
           <p:cNvSpPr txBox="1"/>
           <p:nvPr/>
         </p:nvSpPr>
@@ -7433,7 +8798,7 @@
             <a:r>
               <a:rPr lang="en-US" sz="800" b="1" spc="100" kern="0" dirty="0">
                 <a:solidFill>
-                  <a:schemeClr val="bg1"/>
+                  <a:srgbClr val="FFFFFF"/>
                 </a:solidFill>
               </a:rPr>
               <a:t>FINDING (reported in the article)</a:t>
@@ -7444,14 +8809,14 @@
       </p:sp>
       <p:sp>
         <p:nvSpPr>
-          <p:cNvPr id="17" name="main head"/>
+          <p:cNvPr id="23" name="main head"/>
           <p:cNvSpPr txBox="1"/>
           <p:nvPr/>
         </p:nvSpPr>
         <p:spPr>
           <a:xfrm>
             <a:off x="621792" y="3566160"/>
-            <a:ext cx="3511296" cy="219456"/>
+            <a:ext cx="2651760" cy="219456"/>
           </a:xfrm>
           <a:prstGeom prst="rect">
             <a:avLst/>
@@ -7469,7 +8834,7 @@
             <a:r>
               <a:rPr lang="en-US" sz="1050" b="1" dirty="0">
                 <a:solidFill>
-                  <a:srgbClr val="C9D6D4"/>
+                  <a:srgbClr val="BFE6E0"/>
                 </a:solidFill>
               </a:rPr>
               <a:t>Average effect</a:t>
@@ -7480,14 +8845,14 @@
       </p:sp>
       <p:sp>
         <p:nvSpPr>
-          <p:cNvPr id="18" name="main body"/>
+          <p:cNvPr id="24" name="main body"/>
           <p:cNvSpPr txBox="1"/>
           <p:nvPr/>
         </p:nvSpPr>
         <p:spPr>
           <a:xfrm>
             <a:off x="621792" y="3785616"/>
-            <a:ext cx="3511296" cy="548640"/>
+            <a:ext cx="2651760" cy="548640"/>
           </a:xfrm>
           <a:prstGeom prst="rect">
             <a:avLst/>
@@ -7503,31 +8868,55 @@
               <a:buNone/>
             </a:pPr>
             <a:r>
-              <a:rPr lang="en-US" sz="950" dirty="0">
+              <a:rPr lang="en-US" sz="900" dirty="0">
                 <a:solidFill>
                   <a:srgbClr val="FFFFFF"/>
                 </a:solidFill>
               </a:rPr>
               <a:t>The researchers could not reject the null hypothesis of no average treatment effect on revenue and profits.</a:t>
             </a:r>
-            <a:endParaRPr lang="en-US" sz="950" dirty="0"/>
-          </a:p>
-        </p:txBody>
-      </p:sp>
-      <p:sp>
-        <p:nvSpPr>
-          <p:cNvPr id="19" name="subgroup card"/>
+            <a:endParaRPr lang="en-US" sz="900" dirty="0"/>
+          </a:p>
+        </p:txBody>
+      </p:sp>
+      <p:pic>
+        <p:nvPicPr>
+          <p:cNvPr id="25" name="mascot with phone" descr="preencoded.png">    </p:cNvPr>
+          <p:cNvPicPr>
+            <a:picLocks noChangeAspect="1"/>
+          </p:cNvPicPr>
+          <p:nvPr/>
+        </p:nvPicPr>
+        <p:blipFill>
+          <a:blip r:embed="rId4"/>
+          <a:stretch>
+            <a:fillRect/>
+          </a:stretch>
+        </p:blipFill>
+        <p:spPr>
+          <a:xfrm>
+            <a:off x="3246120" y="3419856"/>
+            <a:ext cx="960120" cy="822960"/>
+          </a:xfrm>
+          <a:prstGeom prst="rect">
+            <a:avLst/>
+          </a:prstGeom>
+        </p:spPr>
+      </p:pic>
+      <p:sp>
+        <p:nvSpPr>
+          <p:cNvPr id="26" name="subgroup card"/>
           <p:cNvSpPr/>
           <p:nvPr/>
         </p:nvSpPr>
         <p:spPr>
           <a:xfrm>
             <a:off x="4617720" y="1371600"/>
-            <a:ext cx="4069080" cy="1920240"/>
+            <a:ext cx="4069080" cy="1975104"/>
           </a:xfrm>
           <a:prstGeom prst="roundRect">
             <a:avLst>
-              <a:gd name="adj" fmla="val 3810"/>
+              <a:gd name="adj" fmla="val 4630"/>
             </a:avLst>
           </a:prstGeom>
           <a:solidFill>
@@ -7539,11 +8928,18 @@
             </a:solidFill>
             <a:prstDash val="solid"/>
           </a:ln>
-        </p:spPr>
-      </p:sp>
-      <p:sp>
-        <p:nvSpPr>
-          <p:cNvPr id="20" name="tag finding"/>
+          <a:effectLst>
+            <a:outerShdw sx="100000" sy="100000" kx="0" ky="0" algn="bl" rotWithShape="0" blurRad="101600" dist="25400" dir="5400000">
+              <a:srgbClr val="1B2A4A">
+                <a:alpha val="12000"/>
+              </a:srgbClr>
+            </a:outerShdw>
+          </a:effectLst>
+        </p:spPr>
+      </p:sp>
+      <p:sp>
+        <p:nvSpPr>
+          <p:cNvPr id="27" name="tag finding"/>
           <p:cNvSpPr/>
           <p:nvPr/>
         </p:nvSpPr>
@@ -7570,7 +8966,7 @@
       </p:sp>
       <p:sp>
         <p:nvSpPr>
-          <p:cNvPr id="21" name="tag text"/>
+          <p:cNvPr id="28" name="tag text"/>
           <p:cNvSpPr txBox="1"/>
           <p:nvPr/>
         </p:nvSpPr>
@@ -7595,7 +8991,7 @@
             <a:r>
               <a:rPr lang="en-US" sz="800" b="1" spc="100" kern="0" dirty="0">
                 <a:solidFill>
-                  <a:schemeClr val="bg1"/>
+                  <a:srgbClr val="FFFFFF"/>
                 </a:solidFill>
               </a:rPr>
               <a:t>FINDING (reported in the article)</a:t>
@@ -7606,14 +9002,14 @@
       </p:sp>
       <p:sp>
         <p:nvSpPr>
-          <p:cNvPr id="22" name="subgroup head"/>
+          <p:cNvPr id="29" name="subgroup head"/>
           <p:cNvSpPr txBox="1"/>
           <p:nvPr/>
         </p:nvSpPr>
         <p:spPr>
           <a:xfrm>
             <a:off x="4782312" y="1737360"/>
-            <a:ext cx="3739896" cy="237744"/>
+            <a:ext cx="2971800" cy="237744"/>
           </a:xfrm>
           <a:prstGeom prst="rect">
             <a:avLst/>
@@ -7629,26 +9025,50 @@
               <a:buNone/>
             </a:pPr>
             <a:r>
-              <a:rPr lang="en-US" sz="1100" b="1" dirty="0">
+              <a:rPr lang="en-US" sz="1000" b="1" dirty="0">
                 <a:solidFill>
                   <a:schemeClr val="tx1"/>
                 </a:solidFill>
               </a:rPr>
               <a:t>Subgroup results by baseline performance</a:t>
             </a:r>
-            <a:endParaRPr lang="en-US" sz="1100" dirty="0"/>
-          </a:p>
-        </p:txBody>
-      </p:sp>
-      <p:sp>
-        <p:nvSpPr>
-          <p:cNvPr id="23" name="zero line"/>
+            <a:endParaRPr lang="en-US" sz="1000" dirty="0"/>
+          </a:p>
+        </p:txBody>
+      </p:sp>
+      <p:pic>
+        <p:nvPicPr>
+          <p:cNvPr id="30" name="entrepreneur with phone" descr="preencoded.png">    </p:cNvPr>
+          <p:cNvPicPr>
+            <a:picLocks noChangeAspect="1"/>
+          </p:cNvPicPr>
+          <p:nvPr/>
+        </p:nvPicPr>
+        <p:blipFill>
+          <a:blip r:embed="rId5"/>
+          <a:stretch>
+            <a:fillRect/>
+          </a:stretch>
+        </p:blipFill>
+        <p:spPr>
+          <a:xfrm>
+            <a:off x="7662672" y="1426464"/>
+            <a:ext cx="914400" cy="960120"/>
+          </a:xfrm>
+          <a:prstGeom prst="rect">
+            <a:avLst/>
+          </a:prstGeom>
+        </p:spPr>
+      </p:pic>
+      <p:sp>
+        <p:nvSpPr>
+          <p:cNvPr id="31" name="zero line"/>
           <p:cNvSpPr/>
           <p:nvPr/>
         </p:nvSpPr>
         <p:spPr>
           <a:xfrm>
-            <a:off x="6652260" y="2194560"/>
+            <a:off x="6245352" y="2194560"/>
             <a:ext cx="0" cy="1024128"/>
           </a:xfrm>
           <a:prstGeom prst="line">
@@ -7665,7 +9085,7 @@
       </p:sp>
       <p:sp>
         <p:nvSpPr>
-          <p:cNvPr id="24" name="bar label 0"/>
+          <p:cNvPr id="32" name="bar label 0"/>
           <p:cNvSpPr txBox="1"/>
           <p:nvPr/>
         </p:nvSpPr>
@@ -7712,14 +9132,14 @@
       </p:sp>
       <p:sp>
         <p:nvSpPr>
-          <p:cNvPr id="25" name="bar 0"/>
+          <p:cNvPr id="33" name="bar 0"/>
           <p:cNvSpPr/>
           <p:nvPr/>
         </p:nvSpPr>
         <p:spPr>
           <a:xfrm>
-            <a:off x="5567172" y="2249424"/>
-            <a:ext cx="1085088" cy="237744"/>
+            <a:off x="5426050" y="2249424"/>
+            <a:ext cx="819302" cy="237744"/>
           </a:xfrm>
           <a:prstGeom prst="rect">
             <a:avLst/>
@@ -7737,7 +9157,7 @@
       </p:sp>
       <p:sp>
         <p:nvSpPr>
-          <p:cNvPr id="26" name="bar label 1"/>
+          <p:cNvPr id="34" name="bar label 1"/>
           <p:cNvSpPr txBox="1"/>
           <p:nvPr/>
         </p:nvSpPr>
@@ -7784,14 +9204,14 @@
       </p:sp>
       <p:sp>
         <p:nvSpPr>
-          <p:cNvPr id="27" name="bar 1"/>
+          <p:cNvPr id="35" name="bar 1"/>
           <p:cNvSpPr/>
           <p:nvPr/>
         </p:nvSpPr>
         <p:spPr>
           <a:xfrm>
-            <a:off x="6652260" y="2798064"/>
-            <a:ext cx="1627632" cy="237744"/>
+            <a:off x="6245352" y="2798064"/>
+            <a:ext cx="1228954" cy="237744"/>
           </a:xfrm>
           <a:prstGeom prst="rect">
             <a:avLst/>
@@ -7809,13 +9229,13 @@
       </p:sp>
       <p:sp>
         <p:nvSpPr>
-          <p:cNvPr id="28" name="bar note"/>
+          <p:cNvPr id="36" name="bar note"/>
           <p:cNvSpPr txBox="1"/>
           <p:nvPr/>
         </p:nvSpPr>
         <p:spPr>
           <a:xfrm>
-            <a:off x="4782312" y="3255264"/>
+            <a:off x="4782312" y="3163824"/>
             <a:ext cx="3739896" cy="164592"/>
           </a:xfrm>
           <a:prstGeom prst="rect">
@@ -7845,7 +9265,7 @@
       </p:sp>
       <p:sp>
         <p:nvSpPr>
-          <p:cNvPr id="29" name="mechanism card"/>
+          <p:cNvPr id="37" name="mechanism card"/>
           <p:cNvSpPr/>
           <p:nvPr/>
         </p:nvSpPr>
@@ -7856,7 +9276,7 @@
           </a:xfrm>
           <a:prstGeom prst="roundRect">
             <a:avLst>
-              <a:gd name="adj" fmla="val 16000"/>
+              <a:gd name="adj" fmla="val 20000"/>
             </a:avLst>
           </a:prstGeom>
           <a:solidFill>
@@ -7872,7 +9292,7 @@
       </p:sp>
       <p:sp>
         <p:nvSpPr>
-          <p:cNvPr id="30" name="mechanism"/>
+          <p:cNvPr id="38" name="mechanism"/>
           <p:cNvSpPr txBox="1"/>
           <p:nvPr/>
         </p:nvSpPr>
@@ -7908,18 +9328,18 @@
       </p:sp>
       <p:sp>
         <p:nvSpPr>
-          <p:cNvPr id="31" name="caution card"/>
+          <p:cNvPr id="39" name="caution card"/>
           <p:cNvSpPr/>
           <p:nvPr/>
         </p:nvSpPr>
         <p:spPr>
           <a:xfrm>
-            <a:off x="4617720" y="3950208"/>
+            <a:off x="4617720" y="3931920"/>
             <a:ext cx="4069080" cy="420624"/>
           </a:xfrm>
           <a:prstGeom prst="roundRect">
             <a:avLst>
-              <a:gd name="adj" fmla="val 17391"/>
+              <a:gd name="adj" fmla="val 21739"/>
             </a:avLst>
           </a:prstGeom>
           <a:solidFill>
@@ -7935,21 +9355,21 @@
       </p:sp>
       <p:pic>
         <p:nvPicPr>
-          <p:cNvPr id="32" name="icon FiAlertTriangle" descr="preencoded.png">    </p:cNvPr>
+          <p:cNvPr id="40" name="icon FiAlertTriangle" descr="preencoded.png">    </p:cNvPr>
           <p:cNvPicPr>
             <a:picLocks noChangeAspect="1"/>
           </p:cNvPicPr>
           <p:nvPr/>
         </p:nvPicPr>
         <p:blipFill>
-          <a:blip r:embed="rId4"/>
+          <a:blip r:embed="rId6"/>
           <a:stretch>
             <a:fillRect/>
           </a:stretch>
         </p:blipFill>
         <p:spPr>
           <a:xfrm>
-            <a:off x="4727448" y="4050792"/>
+            <a:off x="4727448" y="4032504"/>
             <a:ext cx="219456" cy="219456"/>
           </a:xfrm>
           <a:prstGeom prst="rect">
@@ -7959,13 +9379,13 @@
       </p:pic>
       <p:sp>
         <p:nvSpPr>
-          <p:cNvPr id="33" name="caution"/>
+          <p:cNvPr id="41" name="caution"/>
           <p:cNvSpPr txBox="1"/>
           <p:nvPr/>
         </p:nvSpPr>
         <p:spPr>
           <a:xfrm>
-            <a:off x="5020056" y="3968496"/>
+            <a:off x="5020056" y="3950208"/>
             <a:ext cx="3557016" cy="384048"/>
           </a:xfrm>
           <a:prstGeom prst="rect">
@@ -7995,14 +9415,14 @@
       </p:sp>
       <p:sp>
         <p:nvSpPr>
-          <p:cNvPr id="34" name="reference"/>
+          <p:cNvPr id="42" name="reference"/>
           <p:cNvSpPr txBox="1"/>
           <p:nvPr/>
         </p:nvSpPr>
         <p:spPr>
           <a:xfrm>
             <a:off x="457200" y="4425696"/>
-            <a:ext cx="8229600" cy="310896"/>
+            <a:ext cx="5120640" cy="310896"/>
           </a:xfrm>
           <a:prstGeom prst="rect">
             <a:avLst/>
@@ -8026,6 +9446,104 @@
               <a:t>Otis, N. G., Clarke, R., Delecourt, S., Holtz, D., &amp; Koning, R. (2026). The Uneven Impact of Generative Artificial Intelligence on Entrepreneurial Performance: Evidence from a Field Experiment in Kenya. Management Science, 72(7). https://doi.org/10.1287/mnsc.2024.06909</a:t>
             </a:r>
             <a:endParaRPr lang="en-US" sz="750" dirty="0"/>
+          </a:p>
+        </p:txBody>
+      </p:sp>
+      <p:sp>
+        <p:nvSpPr>
+          <p:cNvPr id="43" name="bridge card"/>
+          <p:cNvSpPr/>
+          <p:nvPr/>
+        </p:nvSpPr>
+        <p:spPr>
+          <a:xfrm>
+            <a:off x="5760720" y="4407408"/>
+            <a:ext cx="2926080" cy="329184"/>
+          </a:xfrm>
+          <a:prstGeom prst="roundRect">
+            <a:avLst>
+              <a:gd name="adj" fmla="val 27778"/>
+            </a:avLst>
+          </a:prstGeom>
+          <a:solidFill>
+            <a:srgbClr val="BFE6E0"/>
+          </a:solidFill>
+          <a:ln w="12700">
+            <a:solidFill>
+              <a:srgbClr val="BFE6E0"/>
+            </a:solidFill>
+            <a:prstDash val="solid"/>
+          </a:ln>
+        </p:spPr>
+      </p:sp>
+      <p:pic>
+        <p:nvPicPr>
+          <p:cNvPr id="44" name="icon FiArrowRight" descr="preencoded.png">    </p:cNvPr>
+          <p:cNvPicPr>
+            <a:picLocks noChangeAspect="1"/>
+          </p:cNvPicPr>
+          <p:nvPr/>
+        </p:nvPicPr>
+        <p:blipFill>
+          <a:blip r:embed="rId7"/>
+          <a:stretch>
+            <a:fillRect/>
+          </a:stretch>
+        </p:blipFill>
+        <p:spPr>
+          <a:xfrm>
+            <a:off x="8412480" y="4480560"/>
+            <a:ext cx="182880" cy="182880"/>
+          </a:xfrm>
+          <a:prstGeom prst="rect">
+            <a:avLst/>
+          </a:prstGeom>
+        </p:spPr>
+      </p:pic>
+      <p:sp>
+        <p:nvSpPr>
+          <p:cNvPr id="45" name="bridge text"/>
+          <p:cNvSpPr txBox="1"/>
+          <p:nvPr/>
+        </p:nvSpPr>
+        <p:spPr>
+          <a:xfrm>
+            <a:off x="5870448" y="4407408"/>
+            <a:ext cx="2505456" cy="329184"/>
+          </a:xfrm>
+          <a:prstGeom prst="rect">
+            <a:avLst/>
+          </a:prstGeom>
+          <a:noFill/>
+          <a:ln/>
+        </p:spPr>
+        <p:txBody>
+          <a:bodyPr wrap="square" lIns="0" tIns="0" rIns="0" bIns="0" rtlCol="0" anchor="ctr"/>
+          <a:lstStyle/>
+          <a:p>
+            <a:pPr indent="0" marL="0">
+              <a:buNone/>
+            </a:pPr>
+            <a:r>
+              <a:rPr lang="en-US" sz="800" b="1" dirty="0">
+                <a:solidFill>
+                  <a:srgbClr val="2E8B86"/>
+                </a:solidFill>
+              </a:rPr>
+              <a:t>Next:  </a:t>
+            </a:r>
+            <a:pPr indent="0" marL="0">
+              <a:buNone/>
+            </a:pPr>
+            <a:r>
+              <a:rPr lang="en-US" sz="800" dirty="0">
+                <a:solidFill>
+                  <a:srgbClr val="1B2A4A"/>
+                </a:solidFill>
+              </a:rPr>
+              <a:t>Two studies, one lesson: what do they tell us together?</a:t>
+            </a:r>
+            <a:endParaRPr lang="en-US" sz="800" dirty="0"/>
           </a:p>
         </p:txBody>
       </p:sp>
@@ -8109,8 +9627,8 @@
         </p:nvSpPr>
         <p:spPr>
           <a:xfrm>
-            <a:off x="457200" y="146304"/>
-            <a:ext cx="8229600" cy="237744"/>
+            <a:off x="457200" y="164592"/>
+            <a:ext cx="5943600" cy="237744"/>
           </a:xfrm>
           <a:prstGeom prst="rect">
             <a:avLst/>
@@ -8147,7 +9665,7 @@
         </p:nvSpPr>
         <p:spPr>
           <a:xfrm>
-            <a:off x="457200" y="347472"/>
+            <a:off x="457200" y="365760"/>
             <a:ext cx="8229600" cy="713232"/>
           </a:xfrm>
           <a:prstGeom prst="rect">
@@ -8179,19 +9697,117 @@
       </p:sp>
       <p:sp>
         <p:nvSpPr>
-          <p:cNvPr id="4" name="tag finding"/>
+          <p:cNvPr id="4" name="progress dot 1"/>
           <p:cNvSpPr/>
           <p:nvPr/>
         </p:nvSpPr>
         <p:spPr>
           <a:xfrm>
-            <a:off x="457200" y="1115568"/>
-            <a:ext cx="2286000" cy="219456"/>
-          </a:xfrm>
-          <a:prstGeom prst="roundRect">
-            <a:avLst>
-              <a:gd name="adj" fmla="val 50000"/>
-            </a:avLst>
+            <a:off x="7845552" y="228600"/>
+            <a:ext cx="109728" cy="109728"/>
+          </a:xfrm>
+          <a:prstGeom prst="ellipse">
+            <a:avLst/>
+          </a:prstGeom>
+          <a:solidFill>
+            <a:srgbClr val="BFE6E0"/>
+          </a:solidFill>
+          <a:ln w="12700">
+            <a:solidFill>
+              <a:srgbClr val="BFE6E0"/>
+            </a:solidFill>
+            <a:prstDash val="solid"/>
+          </a:ln>
+        </p:spPr>
+      </p:sp>
+      <p:sp>
+        <p:nvSpPr>
+          <p:cNvPr id="5" name="progress dot 2"/>
+          <p:cNvSpPr/>
+          <p:nvPr/>
+        </p:nvSpPr>
+        <p:spPr>
+          <a:xfrm>
+            <a:off x="8028432" y="228600"/>
+            <a:ext cx="109728" cy="109728"/>
+          </a:xfrm>
+          <a:prstGeom prst="ellipse">
+            <a:avLst/>
+          </a:prstGeom>
+          <a:solidFill>
+            <a:srgbClr val="BFE6E0"/>
+          </a:solidFill>
+          <a:ln w="12700">
+            <a:solidFill>
+              <a:srgbClr val="BFE6E0"/>
+            </a:solidFill>
+            <a:prstDash val="solid"/>
+          </a:ln>
+        </p:spPr>
+      </p:sp>
+      <p:sp>
+        <p:nvSpPr>
+          <p:cNvPr id="6" name="progress dot 3"/>
+          <p:cNvSpPr/>
+          <p:nvPr/>
+        </p:nvSpPr>
+        <p:spPr>
+          <a:xfrm>
+            <a:off x="8211312" y="228600"/>
+            <a:ext cx="109728" cy="109728"/>
+          </a:xfrm>
+          <a:prstGeom prst="ellipse">
+            <a:avLst/>
+          </a:prstGeom>
+          <a:solidFill>
+            <a:srgbClr val="BFE6E0"/>
+          </a:solidFill>
+          <a:ln w="12700">
+            <a:solidFill>
+              <a:srgbClr val="BFE6E0"/>
+            </a:solidFill>
+            <a:prstDash val="solid"/>
+          </a:ln>
+        </p:spPr>
+      </p:sp>
+      <p:sp>
+        <p:nvSpPr>
+          <p:cNvPr id="7" name="progress dot 4"/>
+          <p:cNvSpPr/>
+          <p:nvPr/>
+        </p:nvSpPr>
+        <p:spPr>
+          <a:xfrm>
+            <a:off x="8394192" y="228600"/>
+            <a:ext cx="109728" cy="109728"/>
+          </a:xfrm>
+          <a:prstGeom prst="ellipse">
+            <a:avLst/>
+          </a:prstGeom>
+          <a:solidFill>
+            <a:srgbClr val="BFE6E0"/>
+          </a:solidFill>
+          <a:ln w="12700">
+            <a:solidFill>
+              <a:srgbClr val="BFE6E0"/>
+            </a:solidFill>
+            <a:prstDash val="solid"/>
+          </a:ln>
+        </p:spPr>
+      </p:sp>
+      <p:sp>
+        <p:nvSpPr>
+          <p:cNvPr id="8" name="progress dot 5"/>
+          <p:cNvSpPr/>
+          <p:nvPr/>
+        </p:nvSpPr>
+        <p:spPr>
+          <a:xfrm>
+            <a:off x="8577072" y="228600"/>
+            <a:ext cx="109728" cy="109728"/>
+          </a:xfrm>
+          <a:prstGeom prst="ellipse">
+            <a:avLst/>
           </a:prstGeom>
           <a:solidFill>
             <a:srgbClr val="2E8B86"/>
@@ -8206,8 +9822,44 @@
       </p:sp>
       <p:sp>
         <p:nvSpPr>
-          <p:cNvPr id="5" name="tag text"/>
+          <p:cNvPr id="9" name="progress label"/>
           <p:cNvSpPr txBox="1"/>
+          <p:nvPr/>
+        </p:nvSpPr>
+        <p:spPr>
+          <a:xfrm>
+            <a:off x="5742432" y="164592"/>
+            <a:ext cx="2011680" cy="237744"/>
+          </a:xfrm>
+          <a:prstGeom prst="rect">
+            <a:avLst/>
+          </a:prstGeom>
+          <a:noFill/>
+          <a:ln/>
+        </p:spPr>
+        <p:txBody>
+          <a:bodyPr wrap="square" lIns="0" tIns="0" rIns="0" bIns="0" rtlCol="0" anchor="ctr"/>
+          <a:lstStyle/>
+          <a:p>
+            <a:pPr algn="r" indent="0" marL="0">
+              <a:buNone/>
+            </a:pPr>
+            <a:r>
+              <a:rPr lang="en-US" sz="800" dirty="0">
+                <a:solidFill>
+                  <a:schemeClr val="tx2"/>
+                </a:solidFill>
+              </a:rPr>
+              <a:t>Discussion</a:t>
+            </a:r>
+            <a:endParaRPr lang="en-US" sz="800" dirty="0"/>
+          </a:p>
+        </p:txBody>
+      </p:sp>
+      <p:sp>
+        <p:nvSpPr>
+          <p:cNvPr id="10" name="tag finding"/>
+          <p:cNvSpPr/>
           <p:nvPr/>
         </p:nvSpPr>
         <p:spPr>
@@ -8215,6 +9867,33 @@
             <a:off x="457200" y="1115568"/>
             <a:ext cx="2286000" cy="219456"/>
           </a:xfrm>
+          <a:prstGeom prst="roundRect">
+            <a:avLst>
+              <a:gd name="adj" fmla="val 50000"/>
+            </a:avLst>
+          </a:prstGeom>
+          <a:solidFill>
+            <a:srgbClr val="2E8B86"/>
+          </a:solidFill>
+          <a:ln w="12700">
+            <a:solidFill>
+              <a:srgbClr val="2E8B86"/>
+            </a:solidFill>
+            <a:prstDash val="solid"/>
+          </a:ln>
+        </p:spPr>
+      </p:sp>
+      <p:sp>
+        <p:nvSpPr>
+          <p:cNvPr id="11" name="tag text"/>
+          <p:cNvSpPr txBox="1"/>
+          <p:nvPr/>
+        </p:nvSpPr>
+        <p:spPr>
+          <a:xfrm>
+            <a:off x="457200" y="1115568"/>
+            <a:ext cx="2286000" cy="219456"/>
+          </a:xfrm>
           <a:prstGeom prst="rect">
             <a:avLst/>
           </a:prstGeom>
@@ -8231,7 +9910,7 @@
             <a:r>
               <a:rPr lang="en-US" sz="800" b="1" spc="100" kern="0" dirty="0">
                 <a:solidFill>
-                  <a:schemeClr val="bg1"/>
+                  <a:srgbClr val="FFFFFF"/>
                 </a:solidFill>
               </a:rPr>
               <a:t>FINDING (reported in the article)</a:t>
@@ -8273,7 +9952,7 @@
                     <a:bodyPr/>
                     <a:lstStyle/>
                     <a:p>
-                      <a:pPr algn="l" indent="0" marL="0">
+                      <a:pPr indent="0" marL="0">
                         <a:buNone/>
                       </a:pPr>
                       <a:endParaRPr lang="en-US" sz="950" dirty="0">
@@ -8330,7 +10009,7 @@
                     <a:bodyPr/>
                     <a:lstStyle/>
                     <a:p>
-                      <a:pPr algn="l" indent="0" marL="0">
+                      <a:pPr indent="0" marL="0">
                         <a:buNone/>
                       </a:pPr>
                       <a:r>
@@ -8398,7 +10077,7 @@
                     <a:bodyPr/>
                     <a:lstStyle/>
                     <a:p>
-                      <a:pPr algn="l" indent="0" marL="0">
+                      <a:pPr indent="0" marL="0">
                         <a:buNone/>
                       </a:pPr>
                       <a:r>
@@ -9086,7 +10765,7 @@
       </p:graphicFrame>
       <p:sp>
         <p:nvSpPr>
-          <p:cNvPr id="7" name="conclusion card"/>
+          <p:cNvPr id="13" name="conclusion card"/>
           <p:cNvSpPr/>
           <p:nvPr/>
         </p:nvSpPr>
@@ -9097,7 +10776,7 @@
           </a:xfrm>
           <a:prstGeom prst="roundRect">
             <a:avLst>
-              <a:gd name="adj" fmla="val 7018"/>
+              <a:gd name="adj" fmla="val 8772"/>
             </a:avLst>
           </a:prstGeom>
           <a:solidFill>
@@ -9109,11 +10788,18 @@
             </a:solidFill>
             <a:prstDash val="solid"/>
           </a:ln>
-        </p:spPr>
-      </p:sp>
-      <p:sp>
-        <p:nvSpPr>
-          <p:cNvPr id="8" name="tag interp"/>
+          <a:effectLst>
+            <a:outerShdw sx="100000" sy="100000" kx="0" ky="0" algn="bl" rotWithShape="0" blurRad="101600" dist="25400" dir="5400000">
+              <a:srgbClr val="1B2A4A">
+                <a:alpha val="12000"/>
+              </a:srgbClr>
+            </a:outerShdw>
+          </a:effectLst>
+        </p:spPr>
+      </p:sp>
+      <p:sp>
+        <p:nvSpPr>
+          <p:cNvPr id="14" name="tag interp"/>
           <p:cNvSpPr/>
           <p:nvPr/>
         </p:nvSpPr>
@@ -9140,7 +10826,7 @@
       </p:sp>
       <p:sp>
         <p:nvSpPr>
-          <p:cNvPr id="9" name="tag text"/>
+          <p:cNvPr id="15" name="tag text"/>
           <p:cNvSpPr txBox="1"/>
           <p:nvPr/>
         </p:nvSpPr>
@@ -9176,7 +10862,7 @@
       </p:sp>
       <p:sp>
         <p:nvSpPr>
-          <p:cNvPr id="10" name="conclusion head"/>
+          <p:cNvPr id="16" name="conclusion head"/>
           <p:cNvSpPr txBox="1"/>
           <p:nvPr/>
         </p:nvSpPr>
@@ -9212,14 +10898,14 @@
       </p:sp>
       <p:sp>
         <p:nvSpPr>
-          <p:cNvPr id="11" name="conclusion"/>
+          <p:cNvPr id="17" name="conclusion"/>
           <p:cNvSpPr txBox="1"/>
           <p:nvPr/>
         </p:nvSpPr>
         <p:spPr>
           <a:xfrm>
-            <a:off x="640080" y="3913632"/>
-            <a:ext cx="3931920" cy="402336"/>
+            <a:off x="640080" y="3895344"/>
+            <a:ext cx="3794760" cy="438912"/>
           </a:xfrm>
           <a:prstGeom prst="rect">
             <a:avLst/>
@@ -9235,20 +10921,20 @@
               <a:buNone/>
             </a:pPr>
             <a:r>
-              <a:rPr lang="en-US" sz="1000" dirty="0">
+              <a:rPr lang="en-US" sz="900" dirty="0">
                 <a:solidFill>
                   <a:srgbClr val="FFFFFF"/>
                 </a:solidFill>
               </a:rPr>
               <a:t>AI can influence real-world performance, but its impact depends on task suitability, user behavior, and human judgment.</a:t>
             </a:r>
-            <a:endParaRPr lang="en-US" sz="1000" dirty="0"/>
+            <a:endParaRPr lang="en-US" sz="900" dirty="0"/>
           </a:p>
         </p:txBody>
       </p:sp>
       <p:pic>
         <p:nvPicPr>
-          <p:cNvPr id="12" name="icon check" descr="preencoded.png">    </p:cNvPr>
+          <p:cNvPr id="18" name="icon check" descr="preencoded.png">    </p:cNvPr>
           <p:cNvPicPr>
             <a:picLocks noChangeAspect="1"/>
           </p:cNvPicPr>
@@ -9262,7 +10948,7 @@
         </p:blipFill>
         <p:spPr>
           <a:xfrm>
-            <a:off x="4846320" y="3474720"/>
+            <a:off x="4526280" y="3474720"/>
             <a:ext cx="182880" cy="182880"/>
           </a:xfrm>
           <a:prstGeom prst="rect">
@@ -9272,14 +10958,14 @@
       </p:pic>
       <p:sp>
         <p:nvSpPr>
-          <p:cNvPr id="13" name="takeaway 1"/>
+          <p:cNvPr id="19" name="takeaway 1"/>
           <p:cNvSpPr txBox="1"/>
           <p:nvPr/>
         </p:nvSpPr>
         <p:spPr>
           <a:xfrm>
-            <a:off x="5120640" y="3438144"/>
-            <a:ext cx="3383280" cy="256032"/>
+            <a:off x="4800600" y="3438144"/>
+            <a:ext cx="2240280" cy="256032"/>
           </a:xfrm>
           <a:prstGeom prst="rect">
             <a:avLst/>
@@ -9295,20 +10981,20 @@
               <a:buNone/>
             </a:pPr>
             <a:r>
-              <a:rPr lang="en-US" sz="950" dirty="0">
+              <a:rPr lang="en-US" sz="900" dirty="0">
                 <a:solidFill>
                   <a:srgbClr val="FFFFFF"/>
                 </a:solidFill>
               </a:rPr>
               <a:t>Match the task to what AI does well</a:t>
             </a:r>
-            <a:endParaRPr lang="en-US" sz="950" dirty="0"/>
+            <a:endParaRPr lang="en-US" sz="900" dirty="0"/>
           </a:p>
         </p:txBody>
       </p:sp>
       <p:pic>
         <p:nvPicPr>
-          <p:cNvPr id="14" name="icon check" descr="preencoded.png">    </p:cNvPr>
+          <p:cNvPr id="20" name="icon check" descr="preencoded.png">    </p:cNvPr>
           <p:cNvPicPr>
             <a:picLocks noChangeAspect="1"/>
           </p:cNvPicPr>
@@ -9322,7 +11008,7 @@
         </p:blipFill>
         <p:spPr>
           <a:xfrm>
-            <a:off x="4846320" y="3767328"/>
+            <a:off x="4526280" y="3767328"/>
             <a:ext cx="182880" cy="182880"/>
           </a:xfrm>
           <a:prstGeom prst="rect">
@@ -9332,14 +11018,14 @@
       </p:pic>
       <p:sp>
         <p:nvSpPr>
-          <p:cNvPr id="15" name="takeaway 2"/>
+          <p:cNvPr id="21" name="takeaway 2"/>
           <p:cNvSpPr txBox="1"/>
           <p:nvPr/>
         </p:nvSpPr>
         <p:spPr>
           <a:xfrm>
-            <a:off x="5120640" y="3730752"/>
-            <a:ext cx="3383280" cy="256032"/>
+            <a:off x="4800600" y="3730752"/>
+            <a:ext cx="2240280" cy="256032"/>
           </a:xfrm>
           <a:prstGeom prst="rect">
             <a:avLst/>
@@ -9355,20 +11041,20 @@
               <a:buNone/>
             </a:pPr>
             <a:r>
-              <a:rPr lang="en-US" sz="950" dirty="0">
+              <a:rPr lang="en-US" sz="900" dirty="0">
                 <a:solidFill>
                   <a:srgbClr val="FFFFFF"/>
                 </a:solidFill>
               </a:rPr>
               <a:t>Evaluate AI advice critically before acting</a:t>
             </a:r>
-            <a:endParaRPr lang="en-US" sz="950" dirty="0"/>
+            <a:endParaRPr lang="en-US" sz="900" dirty="0"/>
           </a:p>
         </p:txBody>
       </p:sp>
       <p:pic>
         <p:nvPicPr>
-          <p:cNvPr id="16" name="icon check" descr="preencoded.png">    </p:cNvPr>
+          <p:cNvPr id="22" name="icon check" descr="preencoded.png">    </p:cNvPr>
           <p:cNvPicPr>
             <a:picLocks noChangeAspect="1"/>
           </p:cNvPicPr>
@@ -9382,7 +11068,7 @@
         </p:blipFill>
         <p:spPr>
           <a:xfrm>
-            <a:off x="4846320" y="4059936"/>
+            <a:off x="4526280" y="4059936"/>
             <a:ext cx="182880" cy="182880"/>
           </a:xfrm>
           <a:prstGeom prst="rect">
@@ -9392,14 +11078,14 @@
       </p:pic>
       <p:sp>
         <p:nvSpPr>
-          <p:cNvPr id="17" name="takeaway 3"/>
+          <p:cNvPr id="23" name="takeaway 3"/>
           <p:cNvSpPr txBox="1"/>
           <p:nvPr/>
         </p:nvSpPr>
         <p:spPr>
           <a:xfrm>
-            <a:off x="5120640" y="4023360"/>
-            <a:ext cx="3383280" cy="256032"/>
+            <a:off x="4800600" y="4023360"/>
+            <a:ext cx="2240280" cy="256032"/>
           </a:xfrm>
           <a:prstGeom prst="rect">
             <a:avLst/>
@@ -9415,27 +11101,75 @@
               <a:buNone/>
             </a:pPr>
             <a:r>
-              <a:rPr lang="en-US" sz="950" dirty="0">
+              <a:rPr lang="en-US" sz="900" dirty="0">
                 <a:solidFill>
                   <a:srgbClr val="FFFFFF"/>
                 </a:solidFill>
               </a:rPr>
               <a:t>Keep human judgment in the loop</a:t>
             </a:r>
-            <a:endParaRPr lang="en-US" sz="950" dirty="0"/>
-          </a:p>
-        </p:txBody>
-      </p:sp>
-      <p:sp>
-        <p:nvSpPr>
-          <p:cNvPr id="18" name="reference"/>
+            <a:endParaRPr lang="en-US" sz="900" dirty="0"/>
+          </a:p>
+        </p:txBody>
+      </p:sp>
+      <p:pic>
+        <p:nvPicPr>
+          <p:cNvPr id="24" name="human handshake" descr="preencoded.png">    </p:cNvPr>
+          <p:cNvPicPr>
+            <a:picLocks noChangeAspect="1"/>
+          </p:cNvPicPr>
+          <p:nvPr/>
+        </p:nvPicPr>
+        <p:blipFill>
+          <a:blip r:embed="rId4"/>
+          <a:stretch>
+            <a:fillRect/>
+          </a:stretch>
+        </p:blipFill>
+        <p:spPr>
+          <a:xfrm>
+            <a:off x="6903720" y="3401568"/>
+            <a:ext cx="868680" cy="914400"/>
+          </a:xfrm>
+          <a:prstGeom prst="rect">
+            <a:avLst/>
+          </a:prstGeom>
+        </p:spPr>
+      </p:pic>
+      <p:pic>
+        <p:nvPicPr>
+          <p:cNvPr id="25" name="mascot handshake" descr="preencoded.png">    </p:cNvPr>
+          <p:cNvPicPr>
+            <a:picLocks noChangeAspect="1"/>
+          </p:cNvPicPr>
+          <p:nvPr/>
+        </p:nvPicPr>
+        <p:blipFill>
+          <a:blip r:embed="rId5"/>
+          <a:stretch>
+            <a:fillRect/>
+          </a:stretch>
+        </p:blipFill>
+        <p:spPr>
+          <a:xfrm>
+            <a:off x="7662672" y="3401568"/>
+            <a:ext cx="932688" cy="914400"/>
+          </a:xfrm>
+          <a:prstGeom prst="rect">
+            <a:avLst/>
+          </a:prstGeom>
+        </p:spPr>
+      </p:pic>
+      <p:sp>
+        <p:nvSpPr>
+          <p:cNvPr id="26" name="reference"/>
           <p:cNvSpPr txBox="1"/>
           <p:nvPr/>
         </p:nvSpPr>
         <p:spPr>
           <a:xfrm>
             <a:off x="457200" y="4425696"/>
-            <a:ext cx="8229600" cy="310896"/>
+            <a:ext cx="5120640" cy="310896"/>
           </a:xfrm>
           <a:prstGeom prst="rect">
             <a:avLst/>
@@ -9459,6 +11193,104 @@
               <a:t>Dell'Acqua et al. (2023), Harvard Business School Working Paper 24-013   |   Otis et al. (2026), Management Science, 72(7), https://doi.org/10.1287/mnsc.2024.06909</a:t>
             </a:r>
             <a:endParaRPr lang="en-US" sz="750" dirty="0"/>
+          </a:p>
+        </p:txBody>
+      </p:sp>
+      <p:sp>
+        <p:nvSpPr>
+          <p:cNvPr id="27" name="bridge card"/>
+          <p:cNvSpPr/>
+          <p:nvPr/>
+        </p:nvSpPr>
+        <p:spPr>
+          <a:xfrm>
+            <a:off x="5760720" y="4407408"/>
+            <a:ext cx="2926080" cy="329184"/>
+          </a:xfrm>
+          <a:prstGeom prst="roundRect">
+            <a:avLst>
+              <a:gd name="adj" fmla="val 27778"/>
+            </a:avLst>
+          </a:prstGeom>
+          <a:solidFill>
+            <a:srgbClr val="BFE6E0"/>
+          </a:solidFill>
+          <a:ln w="12700">
+            <a:solidFill>
+              <a:srgbClr val="BFE6E0"/>
+            </a:solidFill>
+            <a:prstDash val="solid"/>
+          </a:ln>
+        </p:spPr>
+      </p:sp>
+      <p:pic>
+        <p:nvPicPr>
+          <p:cNvPr id="28" name="icon FiArrowRight" descr="preencoded.png">    </p:cNvPr>
+          <p:cNvPicPr>
+            <a:picLocks noChangeAspect="1"/>
+          </p:cNvPicPr>
+          <p:nvPr/>
+        </p:nvPicPr>
+        <p:blipFill>
+          <a:blip r:embed="rId6"/>
+          <a:stretch>
+            <a:fillRect/>
+          </a:stretch>
+        </p:blipFill>
+        <p:spPr>
+          <a:xfrm>
+            <a:off x="8412480" y="4480560"/>
+            <a:ext cx="182880" cy="182880"/>
+          </a:xfrm>
+          <a:prstGeom prst="rect">
+            <a:avLst/>
+          </a:prstGeom>
+        </p:spPr>
+      </p:pic>
+      <p:sp>
+        <p:nvSpPr>
+          <p:cNvPr id="29" name="bridge text"/>
+          <p:cNvSpPr txBox="1"/>
+          <p:nvPr/>
+        </p:nvSpPr>
+        <p:spPr>
+          <a:xfrm>
+            <a:off x="5870448" y="4407408"/>
+            <a:ext cx="2505456" cy="329184"/>
+          </a:xfrm>
+          <a:prstGeom prst="rect">
+            <a:avLst/>
+          </a:prstGeom>
+          <a:noFill/>
+          <a:ln/>
+        </p:spPr>
+        <p:txBody>
+          <a:bodyPr wrap="square" lIns="0" tIns="0" rIns="0" bIns="0" rtlCol="0" anchor="ctr"/>
+          <a:lstStyle/>
+          <a:p>
+            <a:pPr indent="0" marL="0">
+              <a:buNone/>
+            </a:pPr>
+            <a:r>
+              <a:rPr lang="en-US" sz="800" b="1" dirty="0">
+                <a:solidFill>
+                  <a:srgbClr val="2E8B86"/>
+                </a:solidFill>
+              </a:rPr>
+              <a:t>Next:  </a:t>
+            </a:r>
+            <a:pPr indent="0" marL="0">
+              <a:buNone/>
+            </a:pPr>
+            <a:r>
+              <a:rPr lang="en-US" sz="800" dirty="0">
+                <a:solidFill>
+                  <a:srgbClr val="1B2A4A"/>
+                </a:solidFill>
+              </a:rPr>
+              <a:t>Thank you. Questions are welcome.</a:t>
+            </a:r>
+            <a:endParaRPr lang="en-US" sz="800" dirty="0"/>
           </a:p>
         </p:txBody>
       </p:sp>
@@ -9542,8 +11374,8 @@
         </p:nvSpPr>
         <p:spPr>
           <a:xfrm>
-            <a:off x="457200" y="502920"/>
-            <a:ext cx="8229600" cy="914400"/>
+            <a:off x="457200" y="274320"/>
+            <a:ext cx="6309360" cy="1143000"/>
           </a:xfrm>
           <a:prstGeom prst="rect">
             <a:avLst/>
@@ -9559,14 +11391,14 @@
               <a:buNone/>
             </a:pPr>
             <a:r>
-              <a:rPr lang="en-US" sz="3400" b="1" dirty="0">
+              <a:rPr lang="en-US" sz="3200" b="1" dirty="0">
                 <a:solidFill>
                   <a:schemeClr val="bg1"/>
                 </a:solidFill>
               </a:rPr>
               <a:t>ปัญญาประดิษฐ์กับประสิทธิภาพการทำงาน</a:t>
             </a:r>
-            <a:endParaRPr lang="en-US" sz="3400" dirty="0"/>
+            <a:endParaRPr lang="en-US" sz="3200" dirty="0"/>
           </a:p>
         </p:txBody>
       </p:sp>
@@ -9581,7 +11413,7 @@
         <p:spPr>
           <a:xfrm>
             <a:off x="457200" y="1463040"/>
-            <a:ext cx="8229600" cy="411480"/>
+            <a:ext cx="6309360" cy="365760"/>
           </a:xfrm>
           <a:prstGeom prst="rect">
             <a:avLst/>
@@ -9597,27 +11429,51 @@
               <a:buNone/>
             </a:pPr>
             <a:r>
-              <a:rPr lang="en-US" sz="1500" dirty="0">
+              <a:rPr lang="en-US" sz="1400" dirty="0">
                 <a:solidFill>
                   <a:schemeClr val="accent4"/>
                 </a:solidFill>
               </a:rPr>
               <a:t>หลักฐานจากการทดลองภาคสนามสองชิ้นล่าสุด</a:t>
             </a:r>
-            <a:endParaRPr lang="en-US" sz="1500" dirty="0"/>
-          </a:p>
-        </p:txBody>
-      </p:sp>
-      <p:sp>
-        <p:nvSpPr>
-          <p:cNvPr id="4" name="central question"/>
+            <a:endParaRPr lang="en-US" sz="1400" dirty="0"/>
+          </a:p>
+        </p:txBody>
+      </p:sp>
+      <p:pic>
+        <p:nvPicPr>
+          <p:cNvPr id="4" name="mascot waving" descr="preencoded.png">    </p:cNvPr>
+          <p:cNvPicPr>
+            <a:picLocks noChangeAspect="1"/>
+          </p:cNvPicPr>
+          <p:nvPr/>
+        </p:nvPicPr>
+        <p:blipFill>
+          <a:blip r:embed="rId1"/>
+          <a:stretch>
+            <a:fillRect/>
+          </a:stretch>
+        </p:blipFill>
+        <p:spPr>
+          <a:xfrm>
+            <a:off x="6903720" y="320040"/>
+            <a:ext cx="1920240" cy="1664208"/>
+          </a:xfrm>
+          <a:prstGeom prst="rect">
+            <a:avLst/>
+          </a:prstGeom>
+        </p:spPr>
+      </p:pic>
+      <p:sp>
+        <p:nvSpPr>
+          <p:cNvPr id="5" name="central question"/>
           <p:cNvSpPr txBox="1"/>
           <p:nvPr/>
         </p:nvSpPr>
         <p:spPr>
           <a:xfrm>
-            <a:off x="457200" y="1938528"/>
-            <a:ext cx="8229600" cy="384048"/>
+            <a:off x="457200" y="1920240"/>
+            <a:ext cx="8229600" cy="365760"/>
           </a:xfrm>
           <a:prstGeom prst="rect">
             <a:avLst/>
@@ -9633,39 +11489,39 @@
               <a:buNone/>
             </a:pPr>
             <a:r>
-              <a:rPr lang="en-US" sz="1300" b="1" dirty="0">
-                <a:solidFill>
-                  <a:srgbClr val="C9D6D4"/>
+              <a:rPr lang="en-US" sz="1250" b="1" dirty="0">
+                <a:solidFill>
+                  <a:srgbClr val="BFE6E0"/>
                 </a:solidFill>
               </a:rPr>
               <a:t>คำถามหลัก: AI ส่งผลต่อผลิตภาพ คุณภาพงาน และผลการดำเนินธุรกิจอย่างไร?</a:t>
             </a:r>
-            <a:endParaRPr lang="en-US" sz="1300" dirty="0"/>
-          </a:p>
-        </p:txBody>
-      </p:sp>
-      <p:sp>
-        <p:nvSpPr>
-          <p:cNvPr id="5" name="article card 1"/>
+            <a:endParaRPr lang="en-US" sz="1250" dirty="0"/>
+          </a:p>
+        </p:txBody>
+      </p:sp>
+      <p:sp>
+        <p:nvSpPr>
+          <p:cNvPr id="6" name="article card 1"/>
           <p:cNvSpPr/>
           <p:nvPr/>
         </p:nvSpPr>
         <p:spPr>
           <a:xfrm>
-            <a:off x="457200" y="2468880"/>
-            <a:ext cx="3977640" cy="1463040"/>
+            <a:off x="457200" y="2377440"/>
+            <a:ext cx="3977640" cy="1298448"/>
           </a:xfrm>
           <a:prstGeom prst="roundRect">
             <a:avLst>
-              <a:gd name="adj" fmla="val 5000"/>
+              <a:gd name="adj" fmla="val 7042"/>
             </a:avLst>
           </a:prstGeom>
           <a:solidFill>
-            <a:srgbClr val="3C4D6E"/>
+            <a:srgbClr val="2A3D63"/>
           </a:solidFill>
           <a:ln w="12700">
             <a:solidFill>
-              <a:srgbClr val="3C4D6E"/>
+              <a:srgbClr val="2A3D63"/>
             </a:solidFill>
             <a:prstDash val="solid"/>
           </a:ln>
@@ -9673,13 +11529,13 @@
       </p:sp>
       <p:sp>
         <p:nvSpPr>
-          <p:cNvPr id="6" name="article label"/>
+          <p:cNvPr id="7" name="article label"/>
           <p:cNvSpPr txBox="1"/>
           <p:nvPr/>
         </p:nvSpPr>
         <p:spPr>
           <a:xfrm>
-            <a:off x="658368" y="2596896"/>
+            <a:off x="658368" y="2487168"/>
             <a:ext cx="3575304" cy="219456"/>
           </a:xfrm>
           <a:prstGeom prst="rect">
@@ -9698,7 +11554,7 @@
             <a:r>
               <a:rPr lang="en-US" sz="1050" b="1" spc="100" kern="0" dirty="0">
                 <a:solidFill>
-                  <a:srgbClr val="2E8B86"/>
+                  <a:srgbClr val="BFE6E0"/>
                 </a:solidFill>
               </a:rPr>
               <a:t>บทความที่ 2</a:t>
@@ -9709,14 +11565,14 @@
       </p:sp>
       <p:sp>
         <p:nvSpPr>
-          <p:cNvPr id="7" name="article title"/>
+          <p:cNvPr id="8" name="article title"/>
           <p:cNvSpPr txBox="1"/>
           <p:nvPr/>
         </p:nvSpPr>
         <p:spPr>
           <a:xfrm>
-            <a:off x="658368" y="2834640"/>
-            <a:ext cx="3575304" cy="713232"/>
+            <a:off x="658368" y="2706624"/>
+            <a:ext cx="3575304" cy="640080"/>
           </a:xfrm>
           <a:prstGeom prst="rect">
             <a:avLst/>
@@ -9732,27 +11588,27 @@
               <a:buNone/>
             </a:pPr>
             <a:r>
-              <a:rPr lang="en-US" sz="1150" b="1" dirty="0">
+              <a:rPr lang="en-US" sz="1100" b="1" dirty="0">
                 <a:solidFill>
                   <a:srgbClr val="FFFFFF"/>
                 </a:solidFill>
               </a:rPr>
               <a:t>Navigating the Jagged Technological Frontier: Field Experimental Evidence of the Effects of AI on Knowledge Worker Productivity and Quality</a:t>
             </a:r>
-            <a:endParaRPr lang="en-US" sz="1150" dirty="0"/>
-          </a:p>
-        </p:txBody>
-      </p:sp>
-      <p:sp>
-        <p:nvSpPr>
-          <p:cNvPr id="8" name="article meta"/>
+            <a:endParaRPr lang="en-US" sz="1100" dirty="0"/>
+          </a:p>
+        </p:txBody>
+      </p:sp>
+      <p:sp>
+        <p:nvSpPr>
+          <p:cNvPr id="9" name="article meta"/>
           <p:cNvSpPr txBox="1"/>
           <p:nvPr/>
         </p:nvSpPr>
         <p:spPr>
           <a:xfrm>
-            <a:off x="658368" y="3547872"/>
-            <a:ext cx="3575304" cy="329184"/>
+            <a:off x="658368" y="3328416"/>
+            <a:ext cx="3575304" cy="310896"/>
           </a:xfrm>
           <a:prstGeom prst="rect">
             <a:avLst/>
@@ -9768,39 +11624,39 @@
               <a:buNone/>
             </a:pPr>
             <a:r>
-              <a:rPr lang="en-US" sz="950" dirty="0">
-                <a:solidFill>
-                  <a:srgbClr val="C9D6D4"/>
+              <a:rPr lang="en-US" sz="900" dirty="0">
+                <a:solidFill>
+                  <a:srgbClr val="BFE6E0"/>
                 </a:solidFill>
               </a:rPr>
               <a:t>Fabrizio Dell'Acqua et al.  |  Harvard Business School Working Paper 24-013, 2023</a:t>
             </a:r>
-            <a:endParaRPr lang="en-US" sz="950" dirty="0"/>
-          </a:p>
-        </p:txBody>
-      </p:sp>
-      <p:sp>
-        <p:nvSpPr>
-          <p:cNvPr id="9" name="article card 2"/>
+            <a:endParaRPr lang="en-US" sz="900" dirty="0"/>
+          </a:p>
+        </p:txBody>
+      </p:sp>
+      <p:sp>
+        <p:nvSpPr>
+          <p:cNvPr id="10" name="article card 2"/>
           <p:cNvSpPr/>
           <p:nvPr/>
         </p:nvSpPr>
         <p:spPr>
           <a:xfrm>
-            <a:off x="4709160" y="2468880"/>
-            <a:ext cx="3977640" cy="1463040"/>
+            <a:off x="4709160" y="2377440"/>
+            <a:ext cx="3977640" cy="1298448"/>
           </a:xfrm>
           <a:prstGeom prst="roundRect">
             <a:avLst>
-              <a:gd name="adj" fmla="val 5000"/>
+              <a:gd name="adj" fmla="val 7042"/>
             </a:avLst>
           </a:prstGeom>
           <a:solidFill>
-            <a:srgbClr val="3C4D6E"/>
+            <a:srgbClr val="2A3D63"/>
           </a:solidFill>
           <a:ln w="12700">
             <a:solidFill>
-              <a:srgbClr val="3C4D6E"/>
+              <a:srgbClr val="2A3D63"/>
             </a:solidFill>
             <a:prstDash val="solid"/>
           </a:ln>
@@ -9808,13 +11664,13 @@
       </p:sp>
       <p:sp>
         <p:nvSpPr>
-          <p:cNvPr id="10" name="article label"/>
+          <p:cNvPr id="11" name="article label"/>
           <p:cNvSpPr txBox="1"/>
           <p:nvPr/>
         </p:nvSpPr>
         <p:spPr>
           <a:xfrm>
-            <a:off x="4910328" y="2596896"/>
+            <a:off x="4910328" y="2487168"/>
             <a:ext cx="3575304" cy="219456"/>
           </a:xfrm>
           <a:prstGeom prst="rect">
@@ -9833,7 +11689,7 @@
             <a:r>
               <a:rPr lang="en-US" sz="1050" b="1" spc="100" kern="0" dirty="0">
                 <a:solidFill>
-                  <a:srgbClr val="2E8B86"/>
+                  <a:srgbClr val="BFE6E0"/>
                 </a:solidFill>
               </a:rPr>
               <a:t>บทความที่ 5</a:t>
@@ -9844,14 +11700,14 @@
       </p:sp>
       <p:sp>
         <p:nvSpPr>
-          <p:cNvPr id="11" name="article title"/>
+          <p:cNvPr id="12" name="article title"/>
           <p:cNvSpPr txBox="1"/>
           <p:nvPr/>
         </p:nvSpPr>
         <p:spPr>
           <a:xfrm>
-            <a:off x="4910328" y="2834640"/>
-            <a:ext cx="3575304" cy="713232"/>
+            <a:off x="4910328" y="2706624"/>
+            <a:ext cx="3575304" cy="640080"/>
           </a:xfrm>
           <a:prstGeom prst="rect">
             <a:avLst/>
@@ -9867,27 +11723,27 @@
               <a:buNone/>
             </a:pPr>
             <a:r>
-              <a:rPr lang="en-US" sz="1150" b="1" dirty="0">
+              <a:rPr lang="en-US" sz="1100" b="1" dirty="0">
                 <a:solidFill>
                   <a:srgbClr val="FFFFFF"/>
                 </a:solidFill>
               </a:rPr>
               <a:t>The Uneven Impact of Generative Artificial Intelligence on Entrepreneurial Performance: Evidence from a Field Experiment in Kenya</a:t>
             </a:r>
-            <a:endParaRPr lang="en-US" sz="1150" dirty="0"/>
-          </a:p>
-        </p:txBody>
-      </p:sp>
-      <p:sp>
-        <p:nvSpPr>
-          <p:cNvPr id="12" name="article meta"/>
+            <a:endParaRPr lang="en-US" sz="1100" dirty="0"/>
+          </a:p>
+        </p:txBody>
+      </p:sp>
+      <p:sp>
+        <p:nvSpPr>
+          <p:cNvPr id="13" name="article meta"/>
           <p:cNvSpPr txBox="1"/>
           <p:nvPr/>
         </p:nvSpPr>
         <p:spPr>
           <a:xfrm>
-            <a:off x="4910328" y="3547872"/>
-            <a:ext cx="3575304" cy="329184"/>
+            <a:off x="4910328" y="3328416"/>
+            <a:ext cx="3575304" cy="310896"/>
           </a:xfrm>
           <a:prstGeom prst="rect">
             <a:avLst/>
@@ -9903,27 +11759,378 @@
               <a:buNone/>
             </a:pPr>
             <a:r>
-              <a:rPr lang="en-US" sz="950" dirty="0">
-                <a:solidFill>
-                  <a:srgbClr val="C9D6D4"/>
+              <a:rPr lang="en-US" sz="900" dirty="0">
+                <a:solidFill>
+                  <a:srgbClr val="BFE6E0"/>
                 </a:solidFill>
               </a:rPr>
               <a:t>Nicholas G. Otis et al.  |  Management Science, Vol. 72, No. 7, 2026  |  DOI 10.1287/mnsc.2024.06909</a:t>
             </a:r>
-            <a:endParaRPr lang="en-US" sz="950" dirty="0"/>
-          </a:p>
-        </p:txBody>
-      </p:sp>
-      <p:sp>
-        <p:nvSpPr>
-          <p:cNvPr id="13" name="presenter"/>
+            <a:endParaRPr lang="en-US" sz="900" dirty="0"/>
+          </a:p>
+        </p:txBody>
+      </p:sp>
+      <p:sp>
+        <p:nvSpPr>
+          <p:cNvPr id="14" name="roadmap head"/>
           <p:cNvSpPr txBox="1"/>
           <p:nvPr/>
         </p:nvSpPr>
         <p:spPr>
           <a:xfrm>
-            <a:off x="457200" y="4114800"/>
-            <a:ext cx="8229600" cy="502920"/>
+            <a:off x="457200" y="3803904"/>
+            <a:ext cx="1051560" cy="274320"/>
+          </a:xfrm>
+          <a:prstGeom prst="rect">
+            <a:avLst/>
+          </a:prstGeom>
+          <a:noFill/>
+          <a:ln/>
+        </p:spPr>
+        <p:txBody>
+          <a:bodyPr wrap="square" lIns="0" tIns="0" rIns="0" bIns="0" rtlCol="0" anchor="ctr"/>
+          <a:lstStyle/>
+          <a:p>
+            <a:pPr indent="0" marL="0">
+              <a:buNone/>
+            </a:pPr>
+            <a:r>
+              <a:rPr lang="en-US" sz="1000" b="1" dirty="0">
+                <a:solidFill>
+                  <a:srgbClr val="BFE6E0"/>
+                </a:solidFill>
+              </a:rPr>
+              <a:t>ลำดับการนำเสนอ</a:t>
+            </a:r>
+            <a:endParaRPr lang="en-US" sz="1000" dirty="0"/>
+          </a:p>
+        </p:txBody>
+      </p:sp>
+      <p:sp>
+        <p:nvSpPr>
+          <p:cNvPr id="15" name="roadmap chip 1"/>
+          <p:cNvSpPr/>
+          <p:nvPr/>
+        </p:nvSpPr>
+        <p:spPr>
+          <a:xfrm>
+            <a:off x="1600200" y="3803904"/>
+            <a:ext cx="1344168" cy="274320"/>
+          </a:xfrm>
+          <a:prstGeom prst="roundRect">
+            <a:avLst>
+              <a:gd name="adj" fmla="val 50000"/>
+            </a:avLst>
+          </a:prstGeom>
+          <a:solidFill>
+            <a:srgbClr val="2E8B86"/>
+          </a:solidFill>
+          <a:ln w="12700">
+            <a:solidFill>
+              <a:srgbClr val="2E8B86"/>
+            </a:solidFill>
+            <a:prstDash val="solid"/>
+          </a:ln>
+        </p:spPr>
+      </p:sp>
+      <p:sp>
+        <p:nvSpPr>
+          <p:cNvPr id="16" name="roadmap chip text"/>
+          <p:cNvSpPr txBox="1"/>
+          <p:nvPr/>
+        </p:nvSpPr>
+        <p:spPr>
+          <a:xfrm>
+            <a:off x="1600200" y="3803904"/>
+            <a:ext cx="1344168" cy="274320"/>
+          </a:xfrm>
+          <a:prstGeom prst="rect">
+            <a:avLst/>
+          </a:prstGeom>
+          <a:noFill/>
+          <a:ln/>
+        </p:spPr>
+        <p:txBody>
+          <a:bodyPr wrap="square" lIns="0" tIns="0" rIns="0" bIns="0" rtlCol="0" anchor="ctr"/>
+          <a:lstStyle/>
+          <a:p>
+            <a:pPr algn="ctr" indent="0" marL="0">
+              <a:buNone/>
+            </a:pPr>
+            <a:r>
+              <a:rPr lang="en-US" sz="750" b="1" dirty="0">
+                <a:solidFill>
+                  <a:srgbClr val="FFFFFF"/>
+                </a:solidFill>
+              </a:rPr>
+              <a:t>1  บทนำ</a:t>
+            </a:r>
+            <a:endParaRPr lang="en-US" sz="750" dirty="0"/>
+          </a:p>
+        </p:txBody>
+      </p:sp>
+      <p:sp>
+        <p:nvSpPr>
+          <p:cNvPr id="17" name="roadmap chip 2"/>
+          <p:cNvSpPr/>
+          <p:nvPr/>
+        </p:nvSpPr>
+        <p:spPr>
+          <a:xfrm>
+            <a:off x="3035808" y="3803904"/>
+            <a:ext cx="1344168" cy="274320"/>
+          </a:xfrm>
+          <a:prstGeom prst="roundRect">
+            <a:avLst>
+              <a:gd name="adj" fmla="val 50000"/>
+            </a:avLst>
+          </a:prstGeom>
+          <a:solidFill>
+            <a:srgbClr val="2A3D63"/>
+          </a:solidFill>
+          <a:ln w="9525">
+            <a:solidFill>
+              <a:srgbClr val="2E8B86"/>
+            </a:solidFill>
+            <a:prstDash val="solid"/>
+          </a:ln>
+        </p:spPr>
+      </p:sp>
+      <p:sp>
+        <p:nvSpPr>
+          <p:cNvPr id="18" name="roadmap chip text"/>
+          <p:cNvSpPr txBox="1"/>
+          <p:nvPr/>
+        </p:nvSpPr>
+        <p:spPr>
+          <a:xfrm>
+            <a:off x="3035808" y="3803904"/>
+            <a:ext cx="1344168" cy="274320"/>
+          </a:xfrm>
+          <a:prstGeom prst="rect">
+            <a:avLst/>
+          </a:prstGeom>
+          <a:noFill/>
+          <a:ln/>
+        </p:spPr>
+        <p:txBody>
+          <a:bodyPr wrap="square" lIns="0" tIns="0" rIns="0" bIns="0" rtlCol="0" anchor="ctr"/>
+          <a:lstStyle/>
+          <a:p>
+            <a:pPr algn="ctr" indent="0" marL="0">
+              <a:buNone/>
+            </a:pPr>
+            <a:r>
+              <a:rPr lang="en-US" sz="750" b="1" dirty="0">
+                <a:solidFill>
+                  <a:srgbClr val="FFFFFF"/>
+                </a:solidFill>
+              </a:rPr>
+              <a:t>2  บทความ 2: วิธีวิจัย</a:t>
+            </a:r>
+            <a:endParaRPr lang="en-US" sz="750" dirty="0"/>
+          </a:p>
+        </p:txBody>
+      </p:sp>
+      <p:sp>
+        <p:nvSpPr>
+          <p:cNvPr id="19" name="roadmap chip 3"/>
+          <p:cNvSpPr/>
+          <p:nvPr/>
+        </p:nvSpPr>
+        <p:spPr>
+          <a:xfrm>
+            <a:off x="4471416" y="3803904"/>
+            <a:ext cx="1344168" cy="274320"/>
+          </a:xfrm>
+          <a:prstGeom prst="roundRect">
+            <a:avLst>
+              <a:gd name="adj" fmla="val 50000"/>
+            </a:avLst>
+          </a:prstGeom>
+          <a:solidFill>
+            <a:srgbClr val="2A3D63"/>
+          </a:solidFill>
+          <a:ln w="9525">
+            <a:solidFill>
+              <a:srgbClr val="2E8B86"/>
+            </a:solidFill>
+            <a:prstDash val="solid"/>
+          </a:ln>
+        </p:spPr>
+      </p:sp>
+      <p:sp>
+        <p:nvSpPr>
+          <p:cNvPr id="20" name="roadmap chip text"/>
+          <p:cNvSpPr txBox="1"/>
+          <p:nvPr/>
+        </p:nvSpPr>
+        <p:spPr>
+          <a:xfrm>
+            <a:off x="4471416" y="3803904"/>
+            <a:ext cx="1344168" cy="274320"/>
+          </a:xfrm>
+          <a:prstGeom prst="rect">
+            <a:avLst/>
+          </a:prstGeom>
+          <a:noFill/>
+          <a:ln/>
+        </p:spPr>
+        <p:txBody>
+          <a:bodyPr wrap="square" lIns="0" tIns="0" rIns="0" bIns="0" rtlCol="0" anchor="ctr"/>
+          <a:lstStyle/>
+          <a:p>
+            <a:pPr algn="ctr" indent="0" marL="0">
+              <a:buNone/>
+            </a:pPr>
+            <a:r>
+              <a:rPr lang="en-US" sz="750" b="1" dirty="0">
+                <a:solidFill>
+                  <a:srgbClr val="FFFFFF"/>
+                </a:solidFill>
+              </a:rPr>
+              <a:t>3  บทความ 2: ผลการศึกษา</a:t>
+            </a:r>
+            <a:endParaRPr lang="en-US" sz="750" dirty="0"/>
+          </a:p>
+        </p:txBody>
+      </p:sp>
+      <p:sp>
+        <p:nvSpPr>
+          <p:cNvPr id="21" name="roadmap chip 4"/>
+          <p:cNvSpPr/>
+          <p:nvPr/>
+        </p:nvSpPr>
+        <p:spPr>
+          <a:xfrm>
+            <a:off x="5907024" y="3803904"/>
+            <a:ext cx="1344168" cy="274320"/>
+          </a:xfrm>
+          <a:prstGeom prst="roundRect">
+            <a:avLst>
+              <a:gd name="adj" fmla="val 50000"/>
+            </a:avLst>
+          </a:prstGeom>
+          <a:solidFill>
+            <a:srgbClr val="2A3D63"/>
+          </a:solidFill>
+          <a:ln w="9525">
+            <a:solidFill>
+              <a:srgbClr val="2E8B86"/>
+            </a:solidFill>
+            <a:prstDash val="solid"/>
+          </a:ln>
+        </p:spPr>
+      </p:sp>
+      <p:sp>
+        <p:nvSpPr>
+          <p:cNvPr id="22" name="roadmap chip text"/>
+          <p:cNvSpPr txBox="1"/>
+          <p:nvPr/>
+        </p:nvSpPr>
+        <p:spPr>
+          <a:xfrm>
+            <a:off x="5907024" y="3803904"/>
+            <a:ext cx="1344168" cy="274320"/>
+          </a:xfrm>
+          <a:prstGeom prst="rect">
+            <a:avLst/>
+          </a:prstGeom>
+          <a:noFill/>
+          <a:ln/>
+        </p:spPr>
+        <p:txBody>
+          <a:bodyPr wrap="square" lIns="0" tIns="0" rIns="0" bIns="0" rtlCol="0" anchor="ctr"/>
+          <a:lstStyle/>
+          <a:p>
+            <a:pPr algn="ctr" indent="0" marL="0">
+              <a:buNone/>
+            </a:pPr>
+            <a:r>
+              <a:rPr lang="en-US" sz="750" b="1" dirty="0">
+                <a:solidFill>
+                  <a:srgbClr val="FFFFFF"/>
+                </a:solidFill>
+              </a:rPr>
+              <a:t>4  บทความ 5: ผู้ประกอบการ</a:t>
+            </a:r>
+            <a:endParaRPr lang="en-US" sz="750" dirty="0"/>
+          </a:p>
+        </p:txBody>
+      </p:sp>
+      <p:sp>
+        <p:nvSpPr>
+          <p:cNvPr id="23" name="roadmap chip 5"/>
+          <p:cNvSpPr/>
+          <p:nvPr/>
+        </p:nvSpPr>
+        <p:spPr>
+          <a:xfrm>
+            <a:off x="7342632" y="3803904"/>
+            <a:ext cx="1344168" cy="274320"/>
+          </a:xfrm>
+          <a:prstGeom prst="roundRect">
+            <a:avLst>
+              <a:gd name="adj" fmla="val 50000"/>
+            </a:avLst>
+          </a:prstGeom>
+          <a:solidFill>
+            <a:srgbClr val="2A3D63"/>
+          </a:solidFill>
+          <a:ln w="9525">
+            <a:solidFill>
+              <a:srgbClr val="2E8B86"/>
+            </a:solidFill>
+            <a:prstDash val="solid"/>
+          </a:ln>
+        </p:spPr>
+      </p:sp>
+      <p:sp>
+        <p:nvSpPr>
+          <p:cNvPr id="24" name="roadmap chip text"/>
+          <p:cNvSpPr txBox="1"/>
+          <p:nvPr/>
+        </p:nvSpPr>
+        <p:spPr>
+          <a:xfrm>
+            <a:off x="7342632" y="3803904"/>
+            <a:ext cx="1344168" cy="274320"/>
+          </a:xfrm>
+          <a:prstGeom prst="rect">
+            <a:avLst/>
+          </a:prstGeom>
+          <a:noFill/>
+          <a:ln/>
+        </p:spPr>
+        <p:txBody>
+          <a:bodyPr wrap="square" lIns="0" tIns="0" rIns="0" bIns="0" rtlCol="0" anchor="ctr"/>
+          <a:lstStyle/>
+          <a:p>
+            <a:pPr algn="ctr" indent="0" marL="0">
+              <a:buNone/>
+            </a:pPr>
+            <a:r>
+              <a:rPr lang="en-US" sz="750" b="1" dirty="0">
+                <a:solidFill>
+                  <a:srgbClr val="FFFFFF"/>
+                </a:solidFill>
+              </a:rPr>
+              <a:t>5  อภิปรายผล</a:t>
+            </a:r>
+            <a:endParaRPr lang="en-US" sz="750" dirty="0"/>
+          </a:p>
+        </p:txBody>
+      </p:sp>
+      <p:sp>
+        <p:nvSpPr>
+          <p:cNvPr id="25" name="presenter"/>
+          <p:cNvSpPr txBox="1"/>
+          <p:nvPr/>
+        </p:nvSpPr>
+        <p:spPr>
+          <a:xfrm>
+            <a:off x="457200" y="4224528"/>
+            <a:ext cx="8229600" cy="457200"/>
           </a:xfrm>
           <a:prstGeom prst="rect">
             <a:avLst/>
@@ -9953,9 +12160,9 @@
               <a:buNone/>
             </a:pPr>
             <a:r>
-              <a:rPr lang="en-US" sz="1050" dirty="0">
-                <a:solidFill>
-                  <a:srgbClr val="C9D6D4"/>
+              <a:rPr lang="en-US" sz="1000" dirty="0">
+                <a:solidFill>
+                  <a:srgbClr val="BFE6E0"/>
                 </a:solidFill>
               </a:rPr>
               <a:t>รหัสนักศึกษา 691401708  |  หลักสูตรบริหารธุรกิจมหาบัณฑิต (MBA)  |  ENG 501 English for Master's Degree</a:t>
@@ -10044,8 +12251,8 @@
         </p:nvSpPr>
         <p:spPr>
           <a:xfrm>
-            <a:off x="457200" y="146304"/>
-            <a:ext cx="8229600" cy="237744"/>
+            <a:off x="457200" y="164592"/>
+            <a:ext cx="5943600" cy="237744"/>
           </a:xfrm>
           <a:prstGeom prst="rect">
             <a:avLst/>
@@ -10082,7 +12289,7 @@
         </p:nvSpPr>
         <p:spPr>
           <a:xfrm>
-            <a:off x="457200" y="347472"/>
+            <a:off x="457200" y="365760"/>
             <a:ext cx="8229600" cy="713232"/>
           </a:xfrm>
           <a:prstGeom prst="rect">
@@ -10114,50 +12321,39 @@
       </p:sp>
       <p:sp>
         <p:nvSpPr>
-          <p:cNvPr id="4" name="byline"/>
-          <p:cNvSpPr txBox="1"/>
-          <p:nvPr/>
-        </p:nvSpPr>
-        <p:spPr>
-          <a:xfrm>
-            <a:off x="457200" y="1060704"/>
-            <a:ext cx="8229600" cy="219456"/>
-          </a:xfrm>
-          <a:prstGeom prst="rect">
-            <a:avLst/>
-          </a:prstGeom>
-          <a:noFill/>
-          <a:ln/>
-        </p:spPr>
-        <p:txBody>
-          <a:bodyPr wrap="square" lIns="0" tIns="0" rIns="0" bIns="0" rtlCol="0" anchor="ctr"/>
-          <a:lstStyle/>
-          <a:p>
-            <a:pPr indent="0" marL="0">
-              <a:buNone/>
-            </a:pPr>
-            <a:r>
-              <a:rPr lang="en-US" sz="1000" dirty="0">
-                <a:solidFill>
-                  <a:schemeClr val="tx2"/>
-                </a:solidFill>
-              </a:rPr>
-              <a:t>Fabrizio Dell'Acqua et al.  |  Harvard Business School Working Paper 24-013, 2023</a:t>
-            </a:r>
-            <a:endParaRPr lang="en-US" sz="1000" dirty="0"/>
-          </a:p>
-        </p:txBody>
-      </p:sp>
-      <p:sp>
-        <p:nvSpPr>
-          <p:cNvPr id="5" name="icon circle"/>
+          <p:cNvPr id="4" name="progress dot 1"/>
           <p:cNvSpPr/>
           <p:nvPr/>
         </p:nvSpPr>
         <p:spPr>
           <a:xfrm>
-            <a:off x="457200" y="1426464"/>
-            <a:ext cx="384048" cy="384048"/>
+            <a:off x="7845552" y="228600"/>
+            <a:ext cx="109728" cy="109728"/>
+          </a:xfrm>
+          <a:prstGeom prst="ellipse">
+            <a:avLst/>
+          </a:prstGeom>
+          <a:solidFill>
+            <a:srgbClr val="BFE6E0"/>
+          </a:solidFill>
+          <a:ln w="12700">
+            <a:solidFill>
+              <a:srgbClr val="BFE6E0"/>
+            </a:solidFill>
+            <a:prstDash val="solid"/>
+          </a:ln>
+        </p:spPr>
+      </p:sp>
+      <p:sp>
+        <p:nvSpPr>
+          <p:cNvPr id="5" name="progress dot 2"/>
+          <p:cNvSpPr/>
+          <p:nvPr/>
+        </p:nvSpPr>
+        <p:spPr>
+          <a:xfrm>
+            <a:off x="8028432" y="228600"/>
+            <a:ext cx="109728" cy="109728"/>
           </a:xfrm>
           <a:prstGeom prst="ellipse">
             <a:avLst/>
@@ -10173,89 +12369,162 @@
           </a:ln>
         </p:spPr>
       </p:sp>
-      <p:pic>
-        <p:nvPicPr>
-          <p:cNvPr id="6" name="icon FiBriefcase" descr="preencoded.png">    </p:cNvPr>
-          <p:cNvPicPr>
-            <a:picLocks noChangeAspect="1"/>
-          </p:cNvPicPr>
-          <p:nvPr/>
-        </p:nvPicPr>
-        <p:blipFill>
-          <a:blip r:embed="rId1"/>
-          <a:stretch>
-            <a:fillRect/>
-          </a:stretch>
-        </p:blipFill>
-        <p:spPr>
-          <a:xfrm>
-            <a:off x="539496" y="1508760"/>
-            <a:ext cx="219456" cy="219456"/>
-          </a:xfrm>
-          <a:prstGeom prst="rect">
-            <a:avLst/>
-          </a:prstGeom>
-        </p:spPr>
-      </p:pic>
-      <p:sp>
-        <p:nvSpPr>
-          <p:cNvPr id="7" name="fact องค์กรที่ร่วมวิจัย"/>
+      <p:sp>
+        <p:nvSpPr>
+          <p:cNvPr id="6" name="progress dot 3"/>
+          <p:cNvSpPr/>
+          <p:nvPr/>
+        </p:nvSpPr>
+        <p:spPr>
+          <a:xfrm>
+            <a:off x="8211312" y="228600"/>
+            <a:ext cx="109728" cy="109728"/>
+          </a:xfrm>
+          <a:prstGeom prst="ellipse">
+            <a:avLst/>
+          </a:prstGeom>
+          <a:solidFill>
+            <a:srgbClr val="D8DEE6"/>
+          </a:solidFill>
+          <a:ln w="12700">
+            <a:solidFill>
+              <a:srgbClr val="D8DEE6"/>
+            </a:solidFill>
+            <a:prstDash val="solid"/>
+          </a:ln>
+        </p:spPr>
+      </p:sp>
+      <p:sp>
+        <p:nvSpPr>
+          <p:cNvPr id="7" name="progress dot 4"/>
+          <p:cNvSpPr/>
+          <p:nvPr/>
+        </p:nvSpPr>
+        <p:spPr>
+          <a:xfrm>
+            <a:off x="8394192" y="228600"/>
+            <a:ext cx="109728" cy="109728"/>
+          </a:xfrm>
+          <a:prstGeom prst="ellipse">
+            <a:avLst/>
+          </a:prstGeom>
+          <a:solidFill>
+            <a:srgbClr val="D8DEE6"/>
+          </a:solidFill>
+          <a:ln w="12700">
+            <a:solidFill>
+              <a:srgbClr val="D8DEE6"/>
+            </a:solidFill>
+            <a:prstDash val="solid"/>
+          </a:ln>
+        </p:spPr>
+      </p:sp>
+      <p:sp>
+        <p:nvSpPr>
+          <p:cNvPr id="8" name="progress dot 5"/>
+          <p:cNvSpPr/>
+          <p:nvPr/>
+        </p:nvSpPr>
+        <p:spPr>
+          <a:xfrm>
+            <a:off x="8577072" y="228600"/>
+            <a:ext cx="109728" cy="109728"/>
+          </a:xfrm>
+          <a:prstGeom prst="ellipse">
+            <a:avLst/>
+          </a:prstGeom>
+          <a:solidFill>
+            <a:srgbClr val="D8DEE6"/>
+          </a:solidFill>
+          <a:ln w="12700">
+            <a:solidFill>
+              <a:srgbClr val="D8DEE6"/>
+            </a:solidFill>
+            <a:prstDash val="solid"/>
+          </a:ln>
+        </p:spPr>
+      </p:sp>
+      <p:sp>
+        <p:nvSpPr>
+          <p:cNvPr id="9" name="progress label"/>
           <p:cNvSpPr txBox="1"/>
           <p:nvPr/>
         </p:nvSpPr>
         <p:spPr>
           <a:xfrm>
-            <a:off x="969264" y="1389888"/>
-            <a:ext cx="3557016" cy="512064"/>
-          </a:xfrm>
-          <a:prstGeom prst="rect">
-            <a:avLst/>
-          </a:prstGeom>
-          <a:noFill/>
-          <a:ln/>
-        </p:spPr>
-        <p:txBody>
-          <a:bodyPr wrap="square" lIns="0" tIns="0" rIns="0" bIns="0" rtlCol="0" anchor="t"/>
+            <a:off x="5742432" y="164592"/>
+            <a:ext cx="2011680" cy="237744"/>
+          </a:xfrm>
+          <a:prstGeom prst="rect">
+            <a:avLst/>
+          </a:prstGeom>
+          <a:noFill/>
+          <a:ln/>
+        </p:spPr>
+        <p:txBody>
+          <a:bodyPr wrap="square" lIns="0" tIns="0" rIns="0" bIns="0" rtlCol="0" anchor="ctr"/>
+          <a:lstStyle/>
+          <a:p>
+            <a:pPr algn="r" indent="0" marL="0">
+              <a:buNone/>
+            </a:pPr>
+            <a:r>
+              <a:rPr lang="en-US" sz="900" dirty="0">
+                <a:solidFill>
+                  <a:schemeClr val="tx2"/>
+                </a:solidFill>
+              </a:rPr>
+              <a:t>บทความ 2: วิธีวิจัย</a:t>
+            </a:r>
+            <a:endParaRPr lang="en-US" sz="900" dirty="0"/>
+          </a:p>
+        </p:txBody>
+      </p:sp>
+      <p:sp>
+        <p:nvSpPr>
+          <p:cNvPr id="10" name="byline"/>
+          <p:cNvSpPr txBox="1"/>
+          <p:nvPr/>
+        </p:nvSpPr>
+        <p:spPr>
+          <a:xfrm>
+            <a:off x="457200" y="1060704"/>
+            <a:ext cx="8229600" cy="219456"/>
+          </a:xfrm>
+          <a:prstGeom prst="rect">
+            <a:avLst/>
+          </a:prstGeom>
+          <a:noFill/>
+          <a:ln/>
+        </p:spPr>
+        <p:txBody>
+          <a:bodyPr wrap="square" lIns="0" tIns="0" rIns="0" bIns="0" rtlCol="0" anchor="ctr"/>
           <a:lstStyle/>
           <a:p>
             <a:pPr indent="0" marL="0">
               <a:buNone/>
             </a:pPr>
             <a:r>
-              <a:rPr lang="en-US" sz="1250" b="1" dirty="0">
-                <a:solidFill>
-                  <a:schemeClr val="tx1"/>
-                </a:solidFill>
-              </a:rPr>
-              <a:t>องค์กรที่ร่วมวิจัย</a:t>
-            </a:r>
-            <a:endParaRPr lang="en-US" sz="1250" dirty="0"/>
-          </a:p>
-          <a:p>
-            <a:pPr indent="0" marL="0">
-              <a:buNone/>
-            </a:pPr>
-            <a:r>
-              <a:rPr lang="en-US" sz="1150" dirty="0">
+              <a:rPr lang="en-US" sz="1000" dirty="0">
                 <a:solidFill>
                   <a:schemeClr val="tx2"/>
                 </a:solidFill>
               </a:rPr>
-              <a:t>การทดลองภาคสนามร่วมกับ Boston Consulting Group (BCG)</a:t>
-            </a:r>
-            <a:endParaRPr lang="en-US" sz="1250" dirty="0"/>
-          </a:p>
-        </p:txBody>
-      </p:sp>
-      <p:sp>
-        <p:nvSpPr>
-          <p:cNvPr id="8" name="icon circle"/>
+              <a:t>Fabrizio Dell'Acqua et al.  |  Harvard Business School Working Paper 24-013, 2023</a:t>
+            </a:r>
+            <a:endParaRPr lang="en-US" sz="1000" dirty="0"/>
+          </a:p>
+        </p:txBody>
+      </p:sp>
+      <p:sp>
+        <p:nvSpPr>
+          <p:cNvPr id="11" name="icon circle"/>
           <p:cNvSpPr/>
           <p:nvPr/>
         </p:nvSpPr>
         <p:spPr>
           <a:xfrm>
-            <a:off x="457200" y="1993392"/>
+            <a:off x="457200" y="1426464"/>
             <a:ext cx="384048" cy="384048"/>
           </a:xfrm>
           <a:prstGeom prst="ellipse">
@@ -10274,21 +12543,21 @@
       </p:sp>
       <p:pic>
         <p:nvPicPr>
-          <p:cNvPr id="9" name="icon FiUsers" descr="preencoded.png">    </p:cNvPr>
+          <p:cNvPr id="12" name="icon FiBriefcase" descr="preencoded.png">    </p:cNvPr>
           <p:cNvPicPr>
             <a:picLocks noChangeAspect="1"/>
           </p:cNvPicPr>
           <p:nvPr/>
         </p:nvPicPr>
         <p:blipFill>
-          <a:blip r:embed="rId2"/>
+          <a:blip r:embed="rId1"/>
           <a:stretch>
             <a:fillRect/>
           </a:stretch>
         </p:blipFill>
         <p:spPr>
           <a:xfrm>
-            <a:off x="539496" y="2075688"/>
+            <a:off x="539496" y="1508760"/>
             <a:ext cx="219456" cy="219456"/>
           </a:xfrm>
           <a:prstGeom prst="rect">
@@ -10298,13 +12567,13 @@
       </p:pic>
       <p:sp>
         <p:nvSpPr>
-          <p:cNvPr id="10" name="fact ผู้เข้าร่วม"/>
+          <p:cNvPr id="13" name="fact องค์กรที่ร่วมวิจัย"/>
           <p:cNvSpPr txBox="1"/>
           <p:nvPr/>
         </p:nvSpPr>
         <p:spPr>
           <a:xfrm>
-            <a:off x="969264" y="1956816"/>
+            <a:off x="969264" y="1389888"/>
             <a:ext cx="3557016" cy="512064"/>
           </a:xfrm>
           <a:prstGeom prst="rect">
@@ -10326,7 +12595,7 @@
                   <a:schemeClr val="tx1"/>
                 </a:solidFill>
               </a:rPr>
-              <a:t>ผู้เข้าร่วม</a:t>
+              <a:t>องค์กรที่ร่วมวิจัย</a:t>
             </a:r>
             <a:endParaRPr lang="en-US" sz="1250" dirty="0"/>
           </a:p>
@@ -10340,7 +12609,7 @@
                   <a:schemeClr val="tx2"/>
                 </a:solidFill>
               </a:rPr>
-              <a:t>ที่ปรึกษาจำนวน 758 คน</a:t>
+              <a:t>การทดลองภาคสนามร่วมกับ Boston Consulting Group (BCG)</a:t>
             </a:r>
             <a:endParaRPr lang="en-US" sz="1250" dirty="0"/>
           </a:p>
@@ -10348,13 +12617,13 @@
       </p:sp>
       <p:sp>
         <p:nvSpPr>
-          <p:cNvPr id="11" name="icon circle"/>
+          <p:cNvPr id="14" name="icon circle"/>
           <p:cNvSpPr/>
           <p:nvPr/>
         </p:nvSpPr>
         <p:spPr>
           <a:xfrm>
-            <a:off x="457200" y="2560320"/>
+            <a:off x="457200" y="1993392"/>
             <a:ext cx="384048" cy="384048"/>
           </a:xfrm>
           <a:prstGeom prst="ellipse">
@@ -10373,7 +12642,106 @@
       </p:sp>
       <p:pic>
         <p:nvPicPr>
-          <p:cNvPr id="12" name="icon FiTarget" descr="preencoded.png">    </p:cNvPr>
+          <p:cNvPr id="15" name="icon FiUsers" descr="preencoded.png">    </p:cNvPr>
+          <p:cNvPicPr>
+            <a:picLocks noChangeAspect="1"/>
+          </p:cNvPicPr>
+          <p:nvPr/>
+        </p:nvPicPr>
+        <p:blipFill>
+          <a:blip r:embed="rId2"/>
+          <a:stretch>
+            <a:fillRect/>
+          </a:stretch>
+        </p:blipFill>
+        <p:spPr>
+          <a:xfrm>
+            <a:off x="539496" y="2075688"/>
+            <a:ext cx="219456" cy="219456"/>
+          </a:xfrm>
+          <a:prstGeom prst="rect">
+            <a:avLst/>
+          </a:prstGeom>
+        </p:spPr>
+      </p:pic>
+      <p:sp>
+        <p:nvSpPr>
+          <p:cNvPr id="16" name="fact ผู้เข้าร่วม"/>
+          <p:cNvSpPr txBox="1"/>
+          <p:nvPr/>
+        </p:nvSpPr>
+        <p:spPr>
+          <a:xfrm>
+            <a:off x="969264" y="1956816"/>
+            <a:ext cx="3557016" cy="512064"/>
+          </a:xfrm>
+          <a:prstGeom prst="rect">
+            <a:avLst/>
+          </a:prstGeom>
+          <a:noFill/>
+          <a:ln/>
+        </p:spPr>
+        <p:txBody>
+          <a:bodyPr wrap="square" lIns="0" tIns="0" rIns="0" bIns="0" rtlCol="0" anchor="t"/>
+          <a:lstStyle/>
+          <a:p>
+            <a:pPr indent="0" marL="0">
+              <a:buNone/>
+            </a:pPr>
+            <a:r>
+              <a:rPr lang="en-US" sz="1250" b="1" dirty="0">
+                <a:solidFill>
+                  <a:schemeClr val="tx1"/>
+                </a:solidFill>
+              </a:rPr>
+              <a:t>ผู้เข้าร่วม</a:t>
+            </a:r>
+            <a:endParaRPr lang="en-US" sz="1250" dirty="0"/>
+          </a:p>
+          <a:p>
+            <a:pPr indent="0" marL="0">
+              <a:buNone/>
+            </a:pPr>
+            <a:r>
+              <a:rPr lang="en-US" sz="1150" dirty="0">
+                <a:solidFill>
+                  <a:schemeClr val="tx2"/>
+                </a:solidFill>
+              </a:rPr>
+              <a:t>ที่ปรึกษาจำนวน 758 คน</a:t>
+            </a:r>
+            <a:endParaRPr lang="en-US" sz="1250" dirty="0"/>
+          </a:p>
+        </p:txBody>
+      </p:sp>
+      <p:sp>
+        <p:nvSpPr>
+          <p:cNvPr id="17" name="icon circle"/>
+          <p:cNvSpPr/>
+          <p:nvPr/>
+        </p:nvSpPr>
+        <p:spPr>
+          <a:xfrm>
+            <a:off x="457200" y="2560320"/>
+            <a:ext cx="384048" cy="384048"/>
+          </a:xfrm>
+          <a:prstGeom prst="ellipse">
+            <a:avLst/>
+          </a:prstGeom>
+          <a:solidFill>
+            <a:srgbClr val="2E8B86"/>
+          </a:solidFill>
+          <a:ln w="12700">
+            <a:solidFill>
+              <a:srgbClr val="2E8B86"/>
+            </a:solidFill>
+            <a:prstDash val="solid"/>
+          </a:ln>
+        </p:spPr>
+      </p:sp>
+      <p:pic>
+        <p:nvPicPr>
+          <p:cNvPr id="18" name="icon FiTarget" descr="preencoded.png">    </p:cNvPr>
           <p:cNvPicPr>
             <a:picLocks noChangeAspect="1"/>
           </p:cNvPicPr>
@@ -10397,7 +12765,7 @@
       </p:pic>
       <p:sp>
         <p:nvSpPr>
-          <p:cNvPr id="13" name="fact ประเด็นที่ศึกษา"/>
+          <p:cNvPr id="19" name="fact ประเด็นที่ศึกษา"/>
           <p:cNvSpPr txBox="1"/>
           <p:nvPr/>
         </p:nvSpPr>
@@ -10447,13 +12815,13 @@
       </p:sp>
       <p:sp>
         <p:nvSpPr>
-          <p:cNvPr id="14" name="conditions head"/>
+          <p:cNvPr id="20" name="conditions head"/>
           <p:cNvSpPr txBox="1"/>
           <p:nvPr/>
         </p:nvSpPr>
         <p:spPr>
           <a:xfrm>
-            <a:off x="457200" y="3182112"/>
+            <a:off x="457200" y="3163824"/>
             <a:ext cx="4069080" cy="237744"/>
           </a:xfrm>
           <a:prstGeom prst="rect">
@@ -10483,18 +12851,18 @@
       </p:sp>
       <p:sp>
         <p:nvSpPr>
-          <p:cNvPr id="15" name="condition 1"/>
+          <p:cNvPr id="21" name="condition 1"/>
           <p:cNvSpPr/>
           <p:nvPr/>
         </p:nvSpPr>
         <p:spPr>
           <a:xfrm>
             <a:off x="457200" y="3456432"/>
-            <a:ext cx="1295400" cy="896112"/>
+            <a:ext cx="1203960" cy="877824"/>
           </a:xfrm>
           <a:prstGeom prst="roundRect">
             <a:avLst>
-              <a:gd name="adj" fmla="val 8163"/>
+              <a:gd name="adj" fmla="val 10417"/>
             </a:avLst>
           </a:prstGeom>
           <a:solidFill>
@@ -10506,11 +12874,18 @@
             </a:solidFill>
             <a:prstDash val="solid"/>
           </a:ln>
-        </p:spPr>
-      </p:sp>
-      <p:sp>
-        <p:nvSpPr>
-          <p:cNvPr id="16" name="condition number"/>
+          <a:effectLst>
+            <a:outerShdw sx="100000" sy="100000" kx="0" ky="0" algn="bl" rotWithShape="0" blurRad="101600" dist="25400" dir="5400000">
+              <a:srgbClr val="1B2A4A">
+                <a:alpha val="12000"/>
+              </a:srgbClr>
+            </a:outerShdw>
+          </a:effectLst>
+        </p:spPr>
+      </p:sp>
+      <p:sp>
+        <p:nvSpPr>
+          <p:cNvPr id="22" name="condition number"/>
           <p:cNvSpPr txBox="1"/>
           <p:nvPr/>
         </p:nvSpPr>
@@ -10546,14 +12921,14 @@
       </p:sp>
       <p:sp>
         <p:nvSpPr>
-          <p:cNvPr id="17" name="condition text"/>
+          <p:cNvPr id="23" name="condition text"/>
           <p:cNvSpPr txBox="1"/>
           <p:nvPr/>
         </p:nvSpPr>
         <p:spPr>
           <a:xfrm>
             <a:off x="548640" y="3767328"/>
-            <a:ext cx="1112520" cy="548640"/>
+            <a:ext cx="1021080" cy="530352"/>
           </a:xfrm>
           <a:prstGeom prst="rect">
             <a:avLst/>
@@ -10569,31 +12944,55 @@
               <a:buNone/>
             </a:pPr>
             <a:r>
-              <a:rPr lang="en-US" sz="1050" dirty="0">
+              <a:rPr lang="en-US" sz="1000" dirty="0">
                 <a:solidFill>
                   <a:schemeClr val="tx1"/>
                 </a:solidFill>
               </a:rPr>
               <a:t>ไม่สามารถใช้ AI</a:t>
             </a:r>
-            <a:endParaRPr lang="en-US" sz="1050" dirty="0"/>
-          </a:p>
-        </p:txBody>
-      </p:sp>
-      <p:sp>
-        <p:nvSpPr>
-          <p:cNvPr id="18" name="condition 2"/>
+            <a:endParaRPr lang="en-US" sz="1000" dirty="0"/>
+          </a:p>
+        </p:txBody>
+      </p:sp>
+      <p:pic>
+        <p:nvPicPr>
+          <p:cNvPr id="24" name="icon FiChevronRight" descr="preencoded.png">    </p:cNvPr>
+          <p:cNvPicPr>
+            <a:picLocks noChangeAspect="1"/>
+          </p:cNvPicPr>
+          <p:nvPr/>
+        </p:nvPicPr>
+        <p:blipFill>
+          <a:blip r:embed="rId4"/>
+          <a:stretch>
+            <a:fillRect/>
+          </a:stretch>
+        </p:blipFill>
+        <p:spPr>
+          <a:xfrm>
+            <a:off x="1688592" y="3803904"/>
+            <a:ext cx="182880" cy="182880"/>
+          </a:xfrm>
+          <a:prstGeom prst="rect">
+            <a:avLst/>
+          </a:prstGeom>
+        </p:spPr>
+      </p:pic>
+      <p:sp>
+        <p:nvSpPr>
+          <p:cNvPr id="25" name="condition 2"/>
           <p:cNvSpPr/>
           <p:nvPr/>
         </p:nvSpPr>
         <p:spPr>
           <a:xfrm>
-            <a:off x="1844040" y="3456432"/>
-            <a:ext cx="1295400" cy="896112"/>
+            <a:off x="1889760" y="3456432"/>
+            <a:ext cx="1203960" cy="877824"/>
           </a:xfrm>
           <a:prstGeom prst="roundRect">
             <a:avLst>
-              <a:gd name="adj" fmla="val 8163"/>
+              <a:gd name="adj" fmla="val 10417"/>
             </a:avLst>
           </a:prstGeom>
           <a:solidFill>
@@ -10605,17 +13004,24 @@
             </a:solidFill>
             <a:prstDash val="solid"/>
           </a:ln>
-        </p:spPr>
-      </p:sp>
-      <p:sp>
-        <p:nvSpPr>
-          <p:cNvPr id="19" name="condition number"/>
+          <a:effectLst>
+            <a:outerShdw sx="100000" sy="100000" kx="0" ky="0" algn="bl" rotWithShape="0" blurRad="101600" dist="25400" dir="5400000">
+              <a:srgbClr val="1B2A4A">
+                <a:alpha val="12000"/>
+              </a:srgbClr>
+            </a:outerShdw>
+          </a:effectLst>
+        </p:spPr>
+      </p:sp>
+      <p:sp>
+        <p:nvSpPr>
+          <p:cNvPr id="26" name="condition number"/>
           <p:cNvSpPr txBox="1"/>
           <p:nvPr/>
         </p:nvSpPr>
         <p:spPr>
           <a:xfrm>
-            <a:off x="1935480" y="3511296"/>
+            <a:off x="1981200" y="3511296"/>
             <a:ext cx="274320" cy="274320"/>
           </a:xfrm>
           <a:prstGeom prst="rect">
@@ -10634,7 +13040,7 @@
             <a:r>
               <a:rPr lang="en-US" sz="1400" b="1" dirty="0">
                 <a:solidFill>
-                  <a:srgbClr val="C9D6D4"/>
+                  <a:srgbClr val="BFE6E0"/>
                 </a:solidFill>
               </a:rPr>
               <a:t>2</a:t>
@@ -10645,14 +13051,14 @@
       </p:sp>
       <p:sp>
         <p:nvSpPr>
-          <p:cNvPr id="20" name="condition text"/>
+          <p:cNvPr id="27" name="condition text"/>
           <p:cNvSpPr txBox="1"/>
           <p:nvPr/>
         </p:nvSpPr>
         <p:spPr>
           <a:xfrm>
-            <a:off x="1935480" y="3767328"/>
-            <a:ext cx="1112520" cy="548640"/>
+            <a:off x="1981200" y="3767328"/>
+            <a:ext cx="1021080" cy="530352"/>
           </a:xfrm>
           <a:prstGeom prst="rect">
             <a:avLst/>
@@ -10668,31 +13074,55 @@
               <a:buNone/>
             </a:pPr>
             <a:r>
-              <a:rPr lang="en-US" sz="1050" dirty="0">
+              <a:rPr lang="en-US" sz="1000" dirty="0">
                 <a:solidFill>
                   <a:srgbClr val="FFFFFF"/>
                 </a:solidFill>
               </a:rPr>
               <a:t>ใช้ GPT-4 ได้</a:t>
             </a:r>
-            <a:endParaRPr lang="en-US" sz="1050" dirty="0"/>
-          </a:p>
-        </p:txBody>
-      </p:sp>
-      <p:sp>
-        <p:nvSpPr>
-          <p:cNvPr id="21" name="condition 3"/>
+            <a:endParaRPr lang="en-US" sz="1000" dirty="0"/>
+          </a:p>
+        </p:txBody>
+      </p:sp>
+      <p:pic>
+        <p:nvPicPr>
+          <p:cNvPr id="28" name="icon FiChevronRight" descr="preencoded.png">    </p:cNvPr>
+          <p:cNvPicPr>
+            <a:picLocks noChangeAspect="1"/>
+          </p:cNvPicPr>
+          <p:nvPr/>
+        </p:nvPicPr>
+        <p:blipFill>
+          <a:blip r:embed="rId5"/>
+          <a:stretch>
+            <a:fillRect/>
+          </a:stretch>
+        </p:blipFill>
+        <p:spPr>
+          <a:xfrm>
+            <a:off x="3121152" y="3803904"/>
+            <a:ext cx="182880" cy="182880"/>
+          </a:xfrm>
+          <a:prstGeom prst="rect">
+            <a:avLst/>
+          </a:prstGeom>
+        </p:spPr>
+      </p:pic>
+      <p:sp>
+        <p:nvSpPr>
+          <p:cNvPr id="29" name="condition 3"/>
           <p:cNvSpPr/>
           <p:nvPr/>
         </p:nvSpPr>
         <p:spPr>
           <a:xfrm>
-            <a:off x="3230880" y="3456432"/>
-            <a:ext cx="1295400" cy="896112"/>
+            <a:off x="3322320" y="3456432"/>
+            <a:ext cx="1203960" cy="877824"/>
           </a:xfrm>
           <a:prstGeom prst="roundRect">
             <a:avLst>
-              <a:gd name="adj" fmla="val 8163"/>
+              <a:gd name="adj" fmla="val 10417"/>
             </a:avLst>
           </a:prstGeom>
           <a:solidFill>
@@ -10704,17 +13134,24 @@
             </a:solidFill>
             <a:prstDash val="solid"/>
           </a:ln>
-        </p:spPr>
-      </p:sp>
-      <p:sp>
-        <p:nvSpPr>
-          <p:cNvPr id="22" name="condition number"/>
+          <a:effectLst>
+            <a:outerShdw sx="100000" sy="100000" kx="0" ky="0" algn="bl" rotWithShape="0" blurRad="101600" dist="25400" dir="5400000">
+              <a:srgbClr val="1B2A4A">
+                <a:alpha val="12000"/>
+              </a:srgbClr>
+            </a:outerShdw>
+          </a:effectLst>
+        </p:spPr>
+      </p:sp>
+      <p:sp>
+        <p:nvSpPr>
+          <p:cNvPr id="30" name="condition number"/>
           <p:cNvSpPr txBox="1"/>
           <p:nvPr/>
         </p:nvSpPr>
         <p:spPr>
           <a:xfrm>
-            <a:off x="3322320" y="3511296"/>
+            <a:off x="3413760" y="3511296"/>
             <a:ext cx="274320" cy="274320"/>
           </a:xfrm>
           <a:prstGeom prst="rect">
@@ -10733,7 +13170,7 @@
             <a:r>
               <a:rPr lang="en-US" sz="1400" b="1" dirty="0">
                 <a:solidFill>
-                  <a:srgbClr val="C9D6D4"/>
+                  <a:srgbClr val="BFE6E0"/>
                 </a:solidFill>
               </a:rPr>
               <a:t>3</a:t>
@@ -10744,14 +13181,14 @@
       </p:sp>
       <p:sp>
         <p:nvSpPr>
-          <p:cNvPr id="23" name="condition text"/>
+          <p:cNvPr id="31" name="condition text"/>
           <p:cNvSpPr txBox="1"/>
           <p:nvPr/>
         </p:nvSpPr>
         <p:spPr>
           <a:xfrm>
-            <a:off x="3322320" y="3767328"/>
-            <a:ext cx="1112520" cy="548640"/>
+            <a:off x="3413760" y="3767328"/>
+            <a:ext cx="1021080" cy="530352"/>
           </a:xfrm>
           <a:prstGeom prst="rect">
             <a:avLst/>
@@ -10767,31 +13204,31 @@
               <a:buNone/>
             </a:pPr>
             <a:r>
-              <a:rPr lang="en-US" sz="1050" dirty="0">
+              <a:rPr lang="en-US" sz="1000" dirty="0">
                 <a:solidFill>
                   <a:srgbClr val="FFFFFF"/>
                 </a:solidFill>
               </a:rPr>
               <a:t>ใช้ GPT-4 ได้ พร้อมคำแนะนำการเขียน prompt</a:t>
             </a:r>
-            <a:endParaRPr lang="en-US" sz="1050" dirty="0"/>
-          </a:p>
-        </p:txBody>
-      </p:sp>
-      <p:sp>
-        <p:nvSpPr>
-          <p:cNvPr id="24" name="concept card"/>
+            <a:endParaRPr lang="en-US" sz="1000" dirty="0"/>
+          </a:p>
+        </p:txBody>
+      </p:sp>
+      <p:sp>
+        <p:nvSpPr>
+          <p:cNvPr id="32" name="concept card"/>
           <p:cNvSpPr/>
           <p:nvPr/>
         </p:nvSpPr>
         <p:spPr>
           <a:xfrm>
-            <a:off x="4846320" y="1426464"/>
-            <a:ext cx="3840480" cy="2907792"/>
+            <a:off x="4846320" y="1371600"/>
+            <a:ext cx="3840480" cy="2962656"/>
           </a:xfrm>
           <a:prstGeom prst="roundRect">
             <a:avLst>
-              <a:gd name="adj" fmla="val 2516"/>
+              <a:gd name="adj" fmla="val 3086"/>
             </a:avLst>
           </a:prstGeom>
           <a:solidFill>
@@ -10803,17 +13240,24 @@
             </a:solidFill>
             <a:prstDash val="solid"/>
           </a:ln>
-        </p:spPr>
-      </p:sp>
-      <p:sp>
-        <p:nvSpPr>
-          <p:cNvPr id="25" name="tag concept"/>
+          <a:effectLst>
+            <a:outerShdw sx="100000" sy="100000" kx="0" ky="0" algn="bl" rotWithShape="0" blurRad="101600" dist="25400" dir="5400000">
+              <a:srgbClr val="1B2A4A">
+                <a:alpha val="12000"/>
+              </a:srgbClr>
+            </a:outerShdw>
+          </a:effectLst>
+        </p:spPr>
+      </p:sp>
+      <p:sp>
+        <p:nvSpPr>
+          <p:cNvPr id="33" name="tag concept"/>
           <p:cNvSpPr/>
           <p:nvPr/>
         </p:nvSpPr>
         <p:spPr>
           <a:xfrm>
-            <a:off x="5029200" y="1572768"/>
+            <a:off x="5029200" y="1517904"/>
             <a:ext cx="1188720" cy="219456"/>
           </a:xfrm>
           <a:prstGeom prst="roundRect">
@@ -10834,13 +13278,13 @@
       </p:sp>
       <p:sp>
         <p:nvSpPr>
-          <p:cNvPr id="26" name="tag text"/>
+          <p:cNvPr id="34" name="tag text"/>
           <p:cNvSpPr txBox="1"/>
           <p:nvPr/>
         </p:nvSpPr>
         <p:spPr>
           <a:xfrm>
-            <a:off x="5029200" y="1572768"/>
+            <a:off x="5029200" y="1517904"/>
             <a:ext cx="1188720" cy="219456"/>
           </a:xfrm>
           <a:prstGeom prst="rect">
@@ -10870,14 +13314,14 @@
       </p:sp>
       <p:sp>
         <p:nvSpPr>
-          <p:cNvPr id="27" name="concept head"/>
+          <p:cNvPr id="35" name="concept head"/>
           <p:cNvSpPr txBox="1"/>
           <p:nvPr/>
         </p:nvSpPr>
         <p:spPr>
           <a:xfrm>
-            <a:off x="5029200" y="1847088"/>
-            <a:ext cx="3474720" cy="274320"/>
+            <a:off x="5029200" y="1792224"/>
+            <a:ext cx="2697480" cy="274320"/>
           </a:xfrm>
           <a:prstGeom prst="rect">
             <a:avLst/>
@@ -10893,27 +13337,27 @@
               <a:buNone/>
             </a:pPr>
             <a:r>
-              <a:rPr lang="en-US" sz="1200" b="1" dirty="0">
+              <a:rPr lang="en-US" sz="1150" b="1" dirty="0">
                 <a:solidFill>
                   <a:schemeClr val="tx1"/>
                 </a:solidFill>
               </a:rPr>
-              <a:t>แนวคิด "Jagged Technological Frontier"</a:t>
-            </a:r>
-            <a:endParaRPr lang="en-US" sz="1200" dirty="0"/>
-          </a:p>
-        </p:txBody>
-      </p:sp>
-      <p:sp>
-        <p:nvSpPr>
-          <p:cNvPr id="28" name="concept body"/>
+              <a:t>"Jagged Technological Frontier"</a:t>
+            </a:r>
+            <a:endParaRPr lang="en-US" sz="1150" dirty="0"/>
+          </a:p>
+        </p:txBody>
+      </p:sp>
+      <p:sp>
+        <p:nvSpPr>
+          <p:cNvPr id="36" name="concept body"/>
           <p:cNvSpPr txBox="1"/>
           <p:nvPr/>
         </p:nvSpPr>
         <p:spPr>
           <a:xfrm>
-            <a:off x="5029200" y="2139696"/>
-            <a:ext cx="3474720" cy="868680"/>
+            <a:off x="5029200" y="2084832"/>
+            <a:ext cx="2697480" cy="896112"/>
           </a:xfrm>
           <a:prstGeom prst="rect">
             <a:avLst/>
@@ -10929,213 +13373,270 @@
               <a:buNone/>
             </a:pPr>
             <a:r>
-              <a:rPr lang="en-US" sz="1050" dirty="0">
+              <a:rPr lang="en-US" sz="1000" dirty="0">
                 <a:solidFill>
                   <a:schemeClr val="tx2"/>
                 </a:solidFill>
               </a:rPr>
               <a:t>AI ทำงานบางอย่างได้ดี แต่กลับทำงานอื่นที่ดูยากพอกันได้ไม่ดี เส้นแบ่งนี้ไม่สม่ำเสมอ ผู้ใช้จึงไม่ควรสรุปว่างานใด "ปลอดภัย" ที่จะมอบให้ AI เพียงเพราะงานนั้นดูง่าย</a:t>
             </a:r>
-            <a:endParaRPr lang="en-US" sz="1050" dirty="0"/>
-          </a:p>
-        </p:txBody>
-      </p:sp>
-      <p:sp>
-        <p:nvSpPr>
-          <p:cNvPr id="29" name="diagram frame"/>
+            <a:endParaRPr lang="en-US" sz="1000" dirty="0"/>
+          </a:p>
+        </p:txBody>
+      </p:sp>
+      <p:pic>
+        <p:nvPicPr>
+          <p:cNvPr id="37" name="mascot searching" descr="preencoded.png">    </p:cNvPr>
+          <p:cNvPicPr>
+            <a:picLocks noChangeAspect="1"/>
+          </p:cNvPicPr>
+          <p:nvPr/>
+        </p:nvPicPr>
+        <p:blipFill>
+          <a:blip r:embed="rId6"/>
+          <a:stretch>
+            <a:fillRect/>
+          </a:stretch>
+        </p:blipFill>
+        <p:spPr>
+          <a:xfrm>
+            <a:off x="7607808" y="1572768"/>
+            <a:ext cx="1005840" cy="868680"/>
+          </a:xfrm>
+          <a:prstGeom prst="rect">
+            <a:avLst/>
+          </a:prstGeom>
+        </p:spPr>
+      </p:pic>
+      <p:pic>
+        <p:nvPicPr>
+          <p:cNvPr id="38" name="frontier illustration" descr="preencoded.png">    </p:cNvPr>
+          <p:cNvPicPr>
+            <a:picLocks noChangeAspect="1"/>
+          </p:cNvPicPr>
+          <p:nvPr/>
+        </p:nvPicPr>
+        <p:blipFill>
+          <a:blip r:embed="rId7"/>
+          <a:stretch>
+            <a:fillRect/>
+          </a:stretch>
+        </p:blipFill>
+        <p:spPr>
+          <a:xfrm>
+            <a:off x="5029200" y="3017520"/>
+            <a:ext cx="3474720" cy="1078992"/>
+          </a:xfrm>
+          <a:prstGeom prst="rect">
+            <a:avLst/>
+          </a:prstGeom>
+        </p:spPr>
+      </p:pic>
+      <p:sp>
+        <p:nvSpPr>
+          <p:cNvPr id="39" name="outside label"/>
+          <p:cNvSpPr txBox="1"/>
+          <p:nvPr/>
+        </p:nvSpPr>
+        <p:spPr>
+          <a:xfrm>
+            <a:off x="5120640" y="3063240"/>
+            <a:ext cx="3291840" cy="182880"/>
+          </a:xfrm>
+          <a:prstGeom prst="rect">
+            <a:avLst/>
+          </a:prstGeom>
+          <a:noFill/>
+          <a:ln/>
+        </p:spPr>
+        <p:txBody>
+          <a:bodyPr wrap="square" lIns="0" tIns="0" rIns="0" bIns="0" rtlCol="0" anchor="ctr"/>
+          <a:lstStyle/>
+          <a:p>
+            <a:pPr algn="r" indent="0" marL="0">
+              <a:buNone/>
+            </a:pPr>
+            <a:r>
+              <a:rPr lang="en-US" sz="850" b="1" dirty="0">
+                <a:solidFill>
+                  <a:schemeClr val="tx2"/>
+                </a:solidFill>
+              </a:rPr>
+              <a:t>ภายนอกพรมแดน: AI ทำได้ไม่ดี</a:t>
+            </a:r>
+            <a:endParaRPr lang="en-US" sz="850" dirty="0"/>
+          </a:p>
+        </p:txBody>
+      </p:sp>
+      <p:sp>
+        <p:nvSpPr>
+          <p:cNvPr id="40" name="inside label"/>
+          <p:cNvSpPr txBox="1"/>
+          <p:nvPr/>
+        </p:nvSpPr>
+        <p:spPr>
+          <a:xfrm>
+            <a:off x="5120640" y="3858768"/>
+            <a:ext cx="3291840" cy="182880"/>
+          </a:xfrm>
+          <a:prstGeom prst="rect">
+            <a:avLst/>
+          </a:prstGeom>
+          <a:noFill/>
+          <a:ln/>
+        </p:spPr>
+        <p:txBody>
+          <a:bodyPr wrap="square" lIns="0" tIns="0" rIns="0" bIns="0" rtlCol="0" anchor="ctr"/>
+          <a:lstStyle/>
+          <a:p>
+            <a:pPr indent="0" marL="0">
+              <a:buNone/>
+            </a:pPr>
+            <a:r>
+              <a:rPr lang="en-US" sz="850" b="1" dirty="0">
+                <a:solidFill>
+                  <a:srgbClr val="2E8B86"/>
+                </a:solidFill>
+              </a:rPr>
+              <a:t>ภายในพรมแดน: AI ทำได้ดี</a:t>
+            </a:r>
+            <a:endParaRPr lang="en-US" sz="850" dirty="0"/>
+          </a:p>
+        </p:txBody>
+      </p:sp>
+      <p:sp>
+        <p:nvSpPr>
+          <p:cNvPr id="41" name="axis label"/>
+          <p:cNvSpPr txBox="1"/>
+          <p:nvPr/>
+        </p:nvSpPr>
+        <p:spPr>
+          <a:xfrm>
+            <a:off x="5029200" y="4105656"/>
+            <a:ext cx="3474720" cy="146304"/>
+          </a:xfrm>
+          <a:prstGeom prst="rect">
+            <a:avLst/>
+          </a:prstGeom>
+          <a:noFill/>
+          <a:ln/>
+        </p:spPr>
+        <p:txBody>
+          <a:bodyPr wrap="square" lIns="0" tIns="0" rIns="0" bIns="0" rtlCol="0" anchor="ctr"/>
+          <a:lstStyle/>
+          <a:p>
+            <a:pPr algn="ctr" indent="0" marL="0">
+              <a:buNone/>
+            </a:pPr>
+            <a:r>
+              <a:rPr lang="en-US" sz="800" i="1" dirty="0">
+                <a:solidFill>
+                  <a:schemeClr val="tx2"/>
+                </a:solidFill>
+              </a:rPr>
+              <a:t>งานที่ดูยากในระดับใกล้เคียงกัน</a:t>
+            </a:r>
+            <a:endParaRPr lang="en-US" sz="800" dirty="0"/>
+          </a:p>
+        </p:txBody>
+      </p:sp>
+      <p:sp>
+        <p:nvSpPr>
+          <p:cNvPr id="42" name="reference"/>
+          <p:cNvSpPr txBox="1"/>
+          <p:nvPr/>
+        </p:nvSpPr>
+        <p:spPr>
+          <a:xfrm>
+            <a:off x="457200" y="4425696"/>
+            <a:ext cx="5120640" cy="310896"/>
+          </a:xfrm>
+          <a:prstGeom prst="rect">
+            <a:avLst/>
+          </a:prstGeom>
+          <a:noFill/>
+          <a:ln/>
+        </p:spPr>
+        <p:txBody>
+          <a:bodyPr wrap="square" lIns="0" tIns="0" rIns="0" bIns="0" rtlCol="0" anchor="t"/>
+          <a:lstStyle/>
+          <a:p>
+            <a:pPr indent="0" marL="0">
+              <a:buNone/>
+            </a:pPr>
+            <a:r>
+              <a:rPr lang="en-US" sz="750" i="1" dirty="0">
+                <a:solidFill>
+                  <a:schemeClr val="tx2"/>
+                </a:solidFill>
+              </a:rPr>
+              <a:t>Dell'Acqua, F., McFowland III, E., Mollick, E., Lifshitz-Assaf, H., Kellogg, K. C., Rajendran, S., Krayer, L., Candelon, F., &amp; Lakhani, K. R. (2023). Navigating the Jagged Technological Frontier. Harvard Business School Working Paper 24-013.</a:t>
+            </a:r>
+            <a:endParaRPr lang="en-US" sz="750" dirty="0"/>
+          </a:p>
+        </p:txBody>
+      </p:sp>
+      <p:sp>
+        <p:nvSpPr>
+          <p:cNvPr id="43" name="bridge card"/>
           <p:cNvSpPr/>
           <p:nvPr/>
         </p:nvSpPr>
         <p:spPr>
           <a:xfrm>
-            <a:off x="5029200" y="3035808"/>
-            <a:ext cx="3474720" cy="1115568"/>
-          </a:xfrm>
-          <a:prstGeom prst="rect">
-            <a:avLst/>
+            <a:off x="5760720" y="4407408"/>
+            <a:ext cx="2926080" cy="329184"/>
+          </a:xfrm>
+          <a:prstGeom prst="roundRect">
+            <a:avLst>
+              <a:gd name="adj" fmla="val 27778"/>
+            </a:avLst>
           </a:prstGeom>
           <a:solidFill>
-            <a:srgbClr val="FFFFFF"/>
+            <a:srgbClr val="BFE6E0"/>
           </a:solidFill>
-          <a:ln w="9525">
+          <a:ln w="12700">
             <a:solidFill>
-              <a:srgbClr val="D8DEE6"/>
+              <a:srgbClr val="BFE6E0"/>
             </a:solidFill>
             <a:prstDash val="solid"/>
           </a:ln>
         </p:spPr>
       </p:sp>
-      <p:sp>
-        <p:nvSpPr>
-          <p:cNvPr id="30" name="frontier segment"/>
-          <p:cNvSpPr/>
-          <p:nvPr/>
-        </p:nvSpPr>
-        <p:spPr>
-          <a:xfrm>
-            <a:off x="5029200" y="3537814"/>
-            <a:ext cx="496389" cy="278892"/>
-          </a:xfrm>
-          <a:prstGeom prst="line">
-            <a:avLst/>
-          </a:prstGeom>
-          <a:noFill/>
-          <a:ln w="28575">
-            <a:solidFill>
-              <a:srgbClr val="2E8B86"/>
-            </a:solidFill>
-            <a:prstDash val="solid"/>
-          </a:ln>
-        </p:spPr>
-      </p:sp>
-      <p:sp>
-        <p:nvSpPr>
-          <p:cNvPr id="31" name="frontier segment"/>
-          <p:cNvSpPr/>
-          <p:nvPr/>
-        </p:nvSpPr>
-        <p:spPr>
-          <a:xfrm flipV="1">
-            <a:off x="5525589" y="3370478"/>
-            <a:ext cx="496389" cy="446227"/>
-          </a:xfrm>
-          <a:prstGeom prst="line">
-            <a:avLst/>
-          </a:prstGeom>
-          <a:noFill/>
-          <a:ln w="28575">
-            <a:solidFill>
-              <a:srgbClr val="2E8B86"/>
-            </a:solidFill>
-            <a:prstDash val="solid"/>
-          </a:ln>
-        </p:spPr>
-      </p:sp>
-      <p:sp>
-        <p:nvSpPr>
-          <p:cNvPr id="32" name="frontier segment"/>
-          <p:cNvSpPr/>
-          <p:nvPr/>
-        </p:nvSpPr>
-        <p:spPr>
-          <a:xfrm>
-            <a:off x="6021977" y="3370478"/>
-            <a:ext cx="496389" cy="390449"/>
-          </a:xfrm>
-          <a:prstGeom prst="line">
-            <a:avLst/>
-          </a:prstGeom>
-          <a:noFill/>
-          <a:ln w="28575">
-            <a:solidFill>
-              <a:srgbClr val="2E8B86"/>
-            </a:solidFill>
-            <a:prstDash val="solid"/>
-          </a:ln>
-        </p:spPr>
-      </p:sp>
-      <p:sp>
-        <p:nvSpPr>
-          <p:cNvPr id="33" name="frontier segment"/>
-          <p:cNvSpPr/>
-          <p:nvPr/>
-        </p:nvSpPr>
-        <p:spPr>
-          <a:xfrm flipV="1">
-            <a:off x="6518366" y="3258922"/>
-            <a:ext cx="496389" cy="502006"/>
-          </a:xfrm>
-          <a:prstGeom prst="line">
-            <a:avLst/>
-          </a:prstGeom>
-          <a:noFill/>
-          <a:ln w="28575">
-            <a:solidFill>
-              <a:srgbClr val="2E8B86"/>
-            </a:solidFill>
-            <a:prstDash val="solid"/>
-          </a:ln>
-        </p:spPr>
-      </p:sp>
-      <p:sp>
-        <p:nvSpPr>
-          <p:cNvPr id="34" name="frontier segment"/>
-          <p:cNvSpPr/>
-          <p:nvPr/>
-        </p:nvSpPr>
-        <p:spPr>
-          <a:xfrm>
-            <a:off x="7014754" y="3258922"/>
-            <a:ext cx="496389" cy="390449"/>
-          </a:xfrm>
-          <a:prstGeom prst="line">
-            <a:avLst/>
-          </a:prstGeom>
-          <a:noFill/>
-          <a:ln w="28575">
-            <a:solidFill>
-              <a:srgbClr val="2E8B86"/>
-            </a:solidFill>
-            <a:prstDash val="solid"/>
-          </a:ln>
-        </p:spPr>
-      </p:sp>
-      <p:sp>
-        <p:nvSpPr>
-          <p:cNvPr id="35" name="frontier segment"/>
-          <p:cNvSpPr/>
-          <p:nvPr/>
-        </p:nvSpPr>
-        <p:spPr>
-          <a:xfrm>
-            <a:off x="7511143" y="3649370"/>
-            <a:ext cx="496389" cy="223114"/>
-          </a:xfrm>
-          <a:prstGeom prst="line">
-            <a:avLst/>
-          </a:prstGeom>
-          <a:noFill/>
-          <a:ln w="28575">
-            <a:solidFill>
-              <a:srgbClr val="2E8B86"/>
-            </a:solidFill>
-            <a:prstDash val="solid"/>
-          </a:ln>
-        </p:spPr>
-      </p:sp>
-      <p:sp>
-        <p:nvSpPr>
-          <p:cNvPr id="36" name="frontier segment"/>
-          <p:cNvSpPr/>
-          <p:nvPr/>
-        </p:nvSpPr>
-        <p:spPr>
-          <a:xfrm flipV="1">
-            <a:off x="8007531" y="3482035"/>
-            <a:ext cx="496389" cy="390449"/>
-          </a:xfrm>
-          <a:prstGeom prst="line">
-            <a:avLst/>
-          </a:prstGeom>
-          <a:noFill/>
-          <a:ln w="28575">
-            <a:solidFill>
-              <a:srgbClr val="2E8B86"/>
-            </a:solidFill>
-            <a:prstDash val="solid"/>
-          </a:ln>
-        </p:spPr>
-      </p:sp>
-      <p:sp>
-        <p:nvSpPr>
-          <p:cNvPr id="37" name="inside label"/>
+      <p:pic>
+        <p:nvPicPr>
+          <p:cNvPr id="44" name="icon FiArrowRight" descr="preencoded.png">    </p:cNvPr>
+          <p:cNvPicPr>
+            <a:picLocks noChangeAspect="1"/>
+          </p:cNvPicPr>
+          <p:nvPr/>
+        </p:nvPicPr>
+        <p:blipFill>
+          <a:blip r:embed="rId8"/>
+          <a:stretch>
+            <a:fillRect/>
+          </a:stretch>
+        </p:blipFill>
+        <p:spPr>
+          <a:xfrm>
+            <a:off x="8412480" y="4480560"/>
+            <a:ext cx="182880" cy="182880"/>
+          </a:xfrm>
+          <a:prstGeom prst="rect">
+            <a:avLst/>
+          </a:prstGeom>
+        </p:spPr>
+      </p:pic>
+      <p:sp>
+        <p:nvSpPr>
+          <p:cNvPr id="45" name="bridge text"/>
           <p:cNvSpPr txBox="1"/>
           <p:nvPr/>
         </p:nvSpPr>
         <p:spPr>
           <a:xfrm>
-            <a:off x="5102352" y="3877056"/>
-            <a:ext cx="3328416" cy="201168"/>
+            <a:off x="5870448" y="4407408"/>
+            <a:ext cx="2505456" cy="329184"/>
           </a:xfrm>
           <a:prstGeom prst="rect">
             <a:avLst/>
@@ -11156,117 +13657,20 @@
                   <a:srgbClr val="2E8B86"/>
                 </a:solidFill>
               </a:rPr>
-              <a:t>ภายในพรมแดน: AI ทำได้ดี</a:t>
+              <a:t>ถัดไป:  </a:t>
+            </a:r>
+            <a:pPr indent="0" marL="0">
+              <a:buNone/>
+            </a:pPr>
+            <a:r>
+              <a:rPr lang="en-US" sz="900" dirty="0">
+                <a:solidFill>
+                  <a:srgbClr val="1B2A4A"/>
+                </a:solidFill>
+              </a:rPr>
+              <a:t>แล้วเมื่อที่ปรึกษา 758 คนใช้ GPT-4 จริง เกิดอะไรขึ้น?</a:t>
             </a:r>
             <a:endParaRPr lang="en-US" sz="900" dirty="0"/>
-          </a:p>
-        </p:txBody>
-      </p:sp>
-      <p:sp>
-        <p:nvSpPr>
-          <p:cNvPr id="38" name="outside label"/>
-          <p:cNvSpPr txBox="1"/>
-          <p:nvPr/>
-        </p:nvSpPr>
-        <p:spPr>
-          <a:xfrm>
-            <a:off x="5102352" y="3090672"/>
-            <a:ext cx="3328416" cy="201168"/>
-          </a:xfrm>
-          <a:prstGeom prst="rect">
-            <a:avLst/>
-          </a:prstGeom>
-          <a:noFill/>
-          <a:ln/>
-        </p:spPr>
-        <p:txBody>
-          <a:bodyPr wrap="square" lIns="0" tIns="0" rIns="0" bIns="0" rtlCol="0" anchor="ctr"/>
-          <a:lstStyle/>
-          <a:p>
-            <a:pPr algn="r" indent="0" marL="0">
-              <a:buNone/>
-            </a:pPr>
-            <a:r>
-              <a:rPr lang="en-US" sz="900" b="1" dirty="0">
-                <a:solidFill>
-                  <a:schemeClr val="tx2"/>
-                </a:solidFill>
-              </a:rPr>
-              <a:t>ภายนอกพรมแดน: AI ทำได้ไม่ดี</a:t>
-            </a:r>
-            <a:endParaRPr lang="en-US" sz="900" dirty="0"/>
-          </a:p>
-        </p:txBody>
-      </p:sp>
-      <p:sp>
-        <p:nvSpPr>
-          <p:cNvPr id="39" name="axis label"/>
-          <p:cNvSpPr txBox="1"/>
-          <p:nvPr/>
-        </p:nvSpPr>
-        <p:spPr>
-          <a:xfrm>
-            <a:off x="5029200" y="4169664"/>
-            <a:ext cx="3474720" cy="164592"/>
-          </a:xfrm>
-          <a:prstGeom prst="rect">
-            <a:avLst/>
-          </a:prstGeom>
-          <a:noFill/>
-          <a:ln/>
-        </p:spPr>
-        <p:txBody>
-          <a:bodyPr wrap="square" lIns="0" tIns="0" rIns="0" bIns="0" rtlCol="0" anchor="ctr"/>
-          <a:lstStyle/>
-          <a:p>
-            <a:pPr algn="ctr" indent="0" marL="0">
-              <a:buNone/>
-            </a:pPr>
-            <a:r>
-              <a:rPr lang="en-US" sz="850" i="1" dirty="0">
-                <a:solidFill>
-                  <a:schemeClr val="tx2"/>
-                </a:solidFill>
-              </a:rPr>
-              <a:t>งานที่ดูยากในระดับใกล้เคียงกัน</a:t>
-            </a:r>
-            <a:endParaRPr lang="en-US" sz="850" dirty="0"/>
-          </a:p>
-        </p:txBody>
-      </p:sp>
-      <p:sp>
-        <p:nvSpPr>
-          <p:cNvPr id="40" name="reference"/>
-          <p:cNvSpPr txBox="1"/>
-          <p:nvPr/>
-        </p:nvSpPr>
-        <p:spPr>
-          <a:xfrm>
-            <a:off x="457200" y="4425696"/>
-            <a:ext cx="8229600" cy="310896"/>
-          </a:xfrm>
-          <a:prstGeom prst="rect">
-            <a:avLst/>
-          </a:prstGeom>
-          <a:noFill/>
-          <a:ln/>
-        </p:spPr>
-        <p:txBody>
-          <a:bodyPr wrap="square" lIns="0" tIns="0" rIns="0" bIns="0" rtlCol="0" anchor="t"/>
-          <a:lstStyle/>
-          <a:p>
-            <a:pPr indent="0" marL="0">
-              <a:buNone/>
-            </a:pPr>
-            <a:r>
-              <a:rPr lang="en-US" sz="750" i="1" dirty="0">
-                <a:solidFill>
-                  <a:schemeClr val="tx2"/>
-                </a:solidFill>
-              </a:rPr>
-              <a:t>Dell'Acqua, F., McFowland III, E., Mollick, E., Lifshitz-Assaf, H., Kellogg, K. C., Rajendran, S., Krayer, L., Candelon, F., &amp; Lakhani, K. R. (2023). Navigating the Jagged Technological Frontier. Harvard Business School Working Paper 24-013.</a:t>
-            </a:r>
-            <a:endParaRPr lang="en-US" sz="750" dirty="0"/>
           </a:p>
         </p:txBody>
       </p:sp>
@@ -11350,8 +13754,8 @@
         </p:nvSpPr>
         <p:spPr>
           <a:xfrm>
-            <a:off x="457200" y="146304"/>
-            <a:ext cx="8229600" cy="237744"/>
+            <a:off x="457200" y="164592"/>
+            <a:ext cx="5943600" cy="237744"/>
           </a:xfrm>
           <a:prstGeom prst="rect">
             <a:avLst/>
@@ -11388,7 +13792,7 @@
         </p:nvSpPr>
         <p:spPr>
           <a:xfrm>
-            <a:off x="457200" y="347472"/>
+            <a:off x="457200" y="365760"/>
             <a:ext cx="8229600" cy="713232"/>
           </a:xfrm>
           <a:prstGeom prst="rect">
@@ -11420,19 +13824,67 @@
       </p:sp>
       <p:sp>
         <p:nvSpPr>
-          <p:cNvPr id="4" name="tag finding"/>
+          <p:cNvPr id="4" name="progress dot 1"/>
           <p:cNvSpPr/>
           <p:nvPr/>
         </p:nvSpPr>
         <p:spPr>
           <a:xfrm>
-            <a:off x="457200" y="1133856"/>
-            <a:ext cx="2286000" cy="219456"/>
-          </a:xfrm>
-          <a:prstGeom prst="roundRect">
-            <a:avLst>
-              <a:gd name="adj" fmla="val 50000"/>
-            </a:avLst>
+            <a:off x="7845552" y="228600"/>
+            <a:ext cx="109728" cy="109728"/>
+          </a:xfrm>
+          <a:prstGeom prst="ellipse">
+            <a:avLst/>
+          </a:prstGeom>
+          <a:solidFill>
+            <a:srgbClr val="BFE6E0"/>
+          </a:solidFill>
+          <a:ln w="12700">
+            <a:solidFill>
+              <a:srgbClr val="BFE6E0"/>
+            </a:solidFill>
+            <a:prstDash val="solid"/>
+          </a:ln>
+        </p:spPr>
+      </p:sp>
+      <p:sp>
+        <p:nvSpPr>
+          <p:cNvPr id="5" name="progress dot 2"/>
+          <p:cNvSpPr/>
+          <p:nvPr/>
+        </p:nvSpPr>
+        <p:spPr>
+          <a:xfrm>
+            <a:off x="8028432" y="228600"/>
+            <a:ext cx="109728" cy="109728"/>
+          </a:xfrm>
+          <a:prstGeom prst="ellipse">
+            <a:avLst/>
+          </a:prstGeom>
+          <a:solidFill>
+            <a:srgbClr val="BFE6E0"/>
+          </a:solidFill>
+          <a:ln w="12700">
+            <a:solidFill>
+              <a:srgbClr val="BFE6E0"/>
+            </a:solidFill>
+            <a:prstDash val="solid"/>
+          </a:ln>
+        </p:spPr>
+      </p:sp>
+      <p:sp>
+        <p:nvSpPr>
+          <p:cNvPr id="6" name="progress dot 3"/>
+          <p:cNvSpPr/>
+          <p:nvPr/>
+        </p:nvSpPr>
+        <p:spPr>
+          <a:xfrm>
+            <a:off x="8211312" y="228600"/>
+            <a:ext cx="109728" cy="109728"/>
+          </a:xfrm>
+          <a:prstGeom prst="ellipse">
+            <a:avLst/>
           </a:prstGeom>
           <a:solidFill>
             <a:srgbClr val="2E8B86"/>
@@ -11447,8 +13899,94 @@
       </p:sp>
       <p:sp>
         <p:nvSpPr>
-          <p:cNvPr id="5" name="tag text"/>
+          <p:cNvPr id="7" name="progress dot 4"/>
+          <p:cNvSpPr/>
+          <p:nvPr/>
+        </p:nvSpPr>
+        <p:spPr>
+          <a:xfrm>
+            <a:off x="8394192" y="228600"/>
+            <a:ext cx="109728" cy="109728"/>
+          </a:xfrm>
+          <a:prstGeom prst="ellipse">
+            <a:avLst/>
+          </a:prstGeom>
+          <a:solidFill>
+            <a:srgbClr val="D8DEE6"/>
+          </a:solidFill>
+          <a:ln w="12700">
+            <a:solidFill>
+              <a:srgbClr val="D8DEE6"/>
+            </a:solidFill>
+            <a:prstDash val="solid"/>
+          </a:ln>
+        </p:spPr>
+      </p:sp>
+      <p:sp>
+        <p:nvSpPr>
+          <p:cNvPr id="8" name="progress dot 5"/>
+          <p:cNvSpPr/>
+          <p:nvPr/>
+        </p:nvSpPr>
+        <p:spPr>
+          <a:xfrm>
+            <a:off x="8577072" y="228600"/>
+            <a:ext cx="109728" cy="109728"/>
+          </a:xfrm>
+          <a:prstGeom prst="ellipse">
+            <a:avLst/>
+          </a:prstGeom>
+          <a:solidFill>
+            <a:srgbClr val="D8DEE6"/>
+          </a:solidFill>
+          <a:ln w="12700">
+            <a:solidFill>
+              <a:srgbClr val="D8DEE6"/>
+            </a:solidFill>
+            <a:prstDash val="solid"/>
+          </a:ln>
+        </p:spPr>
+      </p:sp>
+      <p:sp>
+        <p:nvSpPr>
+          <p:cNvPr id="9" name="progress label"/>
           <p:cNvSpPr txBox="1"/>
+          <p:nvPr/>
+        </p:nvSpPr>
+        <p:spPr>
+          <a:xfrm>
+            <a:off x="5742432" y="164592"/>
+            <a:ext cx="2011680" cy="237744"/>
+          </a:xfrm>
+          <a:prstGeom prst="rect">
+            <a:avLst/>
+          </a:prstGeom>
+          <a:noFill/>
+          <a:ln/>
+        </p:spPr>
+        <p:txBody>
+          <a:bodyPr wrap="square" lIns="0" tIns="0" rIns="0" bIns="0" rtlCol="0" anchor="ctr"/>
+          <a:lstStyle/>
+          <a:p>
+            <a:pPr algn="r" indent="0" marL="0">
+              <a:buNone/>
+            </a:pPr>
+            <a:r>
+              <a:rPr lang="en-US" sz="900" dirty="0">
+                <a:solidFill>
+                  <a:schemeClr val="tx2"/>
+                </a:solidFill>
+              </a:rPr>
+              <a:t>บทความ 2: ผลการศึกษา</a:t>
+            </a:r>
+            <a:endParaRPr lang="en-US" sz="900" dirty="0"/>
+          </a:p>
+        </p:txBody>
+      </p:sp>
+      <p:sp>
+        <p:nvSpPr>
+          <p:cNvPr id="10" name="tag finding"/>
+          <p:cNvSpPr/>
           <p:nvPr/>
         </p:nvSpPr>
         <p:spPr>
@@ -11456,6 +13994,33 @@
             <a:off x="457200" y="1133856"/>
             <a:ext cx="2286000" cy="219456"/>
           </a:xfrm>
+          <a:prstGeom prst="roundRect">
+            <a:avLst>
+              <a:gd name="adj" fmla="val 50000"/>
+            </a:avLst>
+          </a:prstGeom>
+          <a:solidFill>
+            <a:srgbClr val="2E8B86"/>
+          </a:solidFill>
+          <a:ln w="12700">
+            <a:solidFill>
+              <a:srgbClr val="2E8B86"/>
+            </a:solidFill>
+            <a:prstDash val="solid"/>
+          </a:ln>
+        </p:spPr>
+      </p:sp>
+      <p:sp>
+        <p:nvSpPr>
+          <p:cNvPr id="11" name="tag text"/>
+          <p:cNvSpPr txBox="1"/>
+          <p:nvPr/>
+        </p:nvSpPr>
+        <p:spPr>
+          <a:xfrm>
+            <a:off x="457200" y="1133856"/>
+            <a:ext cx="2286000" cy="219456"/>
+          </a:xfrm>
           <a:prstGeom prst="rect">
             <a:avLst/>
           </a:prstGeom>
@@ -11472,7 +14037,7 @@
             <a:r>
               <a:rPr lang="en-US" sz="900" b="1" spc="100" kern="0" dirty="0">
                 <a:solidFill>
-                  <a:schemeClr val="bg1"/>
+                  <a:srgbClr val="FFFFFF"/>
                 </a:solidFill>
               </a:rPr>
               <a:t>ผลการวิจัย (รายงานในบทความ)</a:t>
@@ -11483,7 +14048,7 @@
       </p:sp>
       <p:graphicFrame>
         <p:nvGraphicFramePr>
-          <p:cNvPr id="6" name="findings chart" descr=""/>
+          <p:cNvPr id="12" name="findings chart" descr=""/>
           <p:cNvGraphicFramePr/>
           <p:nvPr/>
         </p:nvGraphicFramePr>
@@ -11499,7 +14064,7 @@
       </p:graphicFrame>
       <p:sp>
         <p:nvSpPr>
-          <p:cNvPr id="7" name="chart note"/>
+          <p:cNvPr id="13" name="chart note"/>
           <p:cNvSpPr txBox="1"/>
           <p:nvPr/>
         </p:nvSpPr>
@@ -11535,18 +14100,18 @@
       </p:sp>
       <p:sp>
         <p:nvSpPr>
-          <p:cNvPr id="8" name="outside callout"/>
+          <p:cNvPr id="14" name="outside callout"/>
           <p:cNvSpPr/>
           <p:nvPr/>
         </p:nvSpPr>
         <p:spPr>
           <a:xfrm>
             <a:off x="5577840" y="1133856"/>
-            <a:ext cx="3108960" cy="1737360"/>
+            <a:ext cx="3108960" cy="1755648"/>
           </a:xfrm>
           <a:prstGeom prst="roundRect">
             <a:avLst>
-              <a:gd name="adj" fmla="val 4211"/>
+              <a:gd name="adj" fmla="val 5208"/>
             </a:avLst>
           </a:prstGeom>
           <a:solidFill>
@@ -11558,11 +14123,18 @@
             </a:solidFill>
             <a:prstDash val="solid"/>
           </a:ln>
-        </p:spPr>
-      </p:sp>
-      <p:sp>
-        <p:nvSpPr>
-          <p:cNvPr id="9" name="outside head"/>
+          <a:effectLst>
+            <a:outerShdw sx="100000" sy="100000" kx="0" ky="0" algn="bl" rotWithShape="0" blurRad="101600" dist="25400" dir="5400000">
+              <a:srgbClr val="1B2A4A">
+                <a:alpha val="12000"/>
+              </a:srgbClr>
+            </a:outerShdw>
+          </a:effectLst>
+        </p:spPr>
+      </p:sp>
+      <p:sp>
+        <p:nvSpPr>
+          <p:cNvPr id="15" name="outside head"/>
           <p:cNvSpPr txBox="1"/>
           <p:nvPr/>
         </p:nvSpPr>
@@ -11587,7 +14159,7 @@
             <a:r>
               <a:rPr lang="en-US" sz="1100" b="1" spc="100" kern="0" dirty="0">
                 <a:solidFill>
-                  <a:srgbClr val="C9D6D4"/>
+                  <a:srgbClr val="BFE6E0"/>
                 </a:solidFill>
               </a:rPr>
               <a:t>งานภายนอกพรมแดน</a:t>
@@ -11598,14 +14170,14 @@
       </p:sp>
       <p:sp>
         <p:nvSpPr>
-          <p:cNvPr id="10" name="outside stat"/>
+          <p:cNvPr id="16" name="outside stat"/>
           <p:cNvSpPr txBox="1"/>
           <p:nvPr/>
         </p:nvSpPr>
         <p:spPr>
           <a:xfrm>
             <a:off x="5760720" y="1426464"/>
-            <a:ext cx="2743200" cy="457200"/>
+            <a:ext cx="1463040" cy="457200"/>
           </a:xfrm>
           <a:prstGeom prst="rect">
             <a:avLst/>
@@ -11634,14 +14206,14 @@
       </p:sp>
       <p:sp>
         <p:nvSpPr>
-          <p:cNvPr id="11" name="outside unit"/>
+          <p:cNvPr id="17" name="outside unit"/>
           <p:cNvSpPr txBox="1"/>
           <p:nvPr/>
         </p:nvSpPr>
         <p:spPr>
           <a:xfrm>
             <a:off x="5760720" y="1883664"/>
-            <a:ext cx="2743200" cy="201168"/>
+            <a:ext cx="1828800" cy="201168"/>
           </a:xfrm>
           <a:prstGeom prst="rect">
             <a:avLst/>
@@ -11659,7 +14231,7 @@
             <a:r>
               <a:rPr lang="en-US" sz="1050" dirty="0">
                 <a:solidFill>
-                  <a:srgbClr val="C9D6D4"/>
+                  <a:srgbClr val="BFE6E0"/>
                 </a:solidFill>
               </a:rPr>
               <a:t>จุดร้อยละ (percentage points)</a:t>
@@ -11668,16 +14240,40 @@
           </a:p>
         </p:txBody>
       </p:sp>
-      <p:sp>
-        <p:nvSpPr>
-          <p:cNvPr id="12" name="outside body"/>
+      <p:pic>
+        <p:nvPicPr>
+          <p:cNvPr id="18" name="mascot confused" descr="preencoded.png">    </p:cNvPr>
+          <p:cNvPicPr>
+            <a:picLocks noChangeAspect="1"/>
+          </p:cNvPicPr>
+          <p:nvPr/>
+        </p:nvPicPr>
+        <p:blipFill>
+          <a:blip r:embed="rId2"/>
+          <a:stretch>
+            <a:fillRect/>
+          </a:stretch>
+        </p:blipFill>
+        <p:spPr>
+          <a:xfrm>
+            <a:off x="7571232" y="1316736"/>
+            <a:ext cx="1005840" cy="868680"/>
+          </a:xfrm>
+          <a:prstGeom prst="rect">
+            <a:avLst/>
+          </a:prstGeom>
+        </p:spPr>
+      </p:pic>
+      <p:sp>
+        <p:nvSpPr>
+          <p:cNvPr id="19" name="outside body"/>
           <p:cNvSpPr txBox="1"/>
           <p:nvPr/>
         </p:nvSpPr>
         <p:spPr>
           <a:xfrm>
-            <a:off x="5760720" y="2121408"/>
-            <a:ext cx="2743200" cy="713232"/>
+            <a:off x="5760720" y="2139696"/>
+            <a:ext cx="2743200" cy="694944"/>
           </a:xfrm>
           <a:prstGeom prst="rect">
             <a:avLst/>
@@ -11706,18 +14302,18 @@
       </p:sp>
       <p:sp>
         <p:nvSpPr>
-          <p:cNvPr id="13" name="unit note card"/>
+          <p:cNvPr id="20" name="unit note card"/>
           <p:cNvSpPr/>
           <p:nvPr/>
         </p:nvSpPr>
         <p:spPr>
           <a:xfrm>
-            <a:off x="5577840" y="2962656"/>
-            <a:ext cx="3108960" cy="822960"/>
+            <a:off x="5577840" y="2980944"/>
+            <a:ext cx="3108960" cy="804672"/>
           </a:xfrm>
           <a:prstGeom prst="roundRect">
             <a:avLst>
-              <a:gd name="adj" fmla="val 8889"/>
+              <a:gd name="adj" fmla="val 11364"/>
             </a:avLst>
           </a:prstGeom>
           <a:solidFill>
@@ -11733,14 +14329,14 @@
       </p:sp>
       <p:sp>
         <p:nvSpPr>
-          <p:cNvPr id="14" name="unit note"/>
+          <p:cNvPr id="21" name="unit note"/>
           <p:cNvSpPr txBox="1"/>
           <p:nvPr/>
         </p:nvSpPr>
         <p:spPr>
           <a:xfrm>
             <a:off x="5715000" y="3017520"/>
-            <a:ext cx="2834640" cy="713232"/>
+            <a:ext cx="2834640" cy="731520"/>
           </a:xfrm>
           <a:prstGeom prst="rect">
             <a:avLst/>
@@ -11769,14 +14365,14 @@
       </p:sp>
       <p:sp>
         <p:nvSpPr>
-          <p:cNvPr id="15" name="approach head"/>
+          <p:cNvPr id="22" name="approach head"/>
           <p:cNvSpPr txBox="1"/>
           <p:nvPr/>
         </p:nvSpPr>
         <p:spPr>
           <a:xfrm>
             <a:off x="457200" y="3840480"/>
-            <a:ext cx="3657600" cy="201168"/>
+            <a:ext cx="4572000" cy="201168"/>
           </a:xfrm>
           <a:prstGeom prst="rect">
             <a:avLst/>
@@ -11805,18 +14401,18 @@
       </p:sp>
       <p:sp>
         <p:nvSpPr>
-          <p:cNvPr id="16" name="approach Centaurs (เซนทอร์)"/>
+          <p:cNvPr id="23" name="approach Centaurs (เซนทอร์)"/>
           <p:cNvSpPr/>
           <p:nvPr/>
         </p:nvSpPr>
         <p:spPr>
           <a:xfrm>
             <a:off x="457200" y="4059936"/>
-            <a:ext cx="3977640" cy="384048"/>
+            <a:ext cx="3977640" cy="365760"/>
           </a:xfrm>
           <a:prstGeom prst="roundRect">
             <a:avLst>
-              <a:gd name="adj" fmla="val 19048"/>
+              <a:gd name="adj" fmla="val 25000"/>
             </a:avLst>
           </a:prstGeom>
           <a:solidFill>
@@ -11832,22 +14428,22 @@
       </p:sp>
       <p:pic>
         <p:nvPicPr>
-          <p:cNvPr id="17" name="icon FiGitBranch" descr="preencoded.png">    </p:cNvPr>
+          <p:cNvPr id="24" name="glyph Centaurs (เซนทอร์)" descr="preencoded.png">    </p:cNvPr>
           <p:cNvPicPr>
             <a:picLocks noChangeAspect="1"/>
           </p:cNvPicPr>
           <p:nvPr/>
         </p:nvPicPr>
         <p:blipFill>
-          <a:blip r:embed="rId2"/>
+          <a:blip r:embed="rId3"/>
           <a:stretch>
             <a:fillRect/>
           </a:stretch>
         </p:blipFill>
         <p:spPr>
           <a:xfrm>
-            <a:off x="548640" y="4142232"/>
-            <a:ext cx="219456" cy="219456"/>
+            <a:off x="530352" y="4105656"/>
+            <a:ext cx="411480" cy="274320"/>
           </a:xfrm>
           <a:prstGeom prst="rect">
             <a:avLst/>
@@ -11856,14 +14452,14 @@
       </p:pic>
       <p:sp>
         <p:nvSpPr>
-          <p:cNvPr id="18" name="approach text"/>
+          <p:cNvPr id="25" name="approach text"/>
           <p:cNvSpPr txBox="1"/>
           <p:nvPr/>
         </p:nvSpPr>
         <p:spPr>
           <a:xfrm>
-            <a:off x="841248" y="4059936"/>
-            <a:ext cx="3520440" cy="384048"/>
+            <a:off x="1024128" y="4059936"/>
+            <a:ext cx="3337560" cy="365760"/>
           </a:xfrm>
           <a:prstGeom prst="rect">
             <a:avLst/>
@@ -11903,18 +14499,18 @@
       </p:sp>
       <p:sp>
         <p:nvSpPr>
-          <p:cNvPr id="19" name="approach Cyborgs (ไซบอร์ก)"/>
+          <p:cNvPr id="26" name="approach Cyborgs (ไซบอร์ก)"/>
           <p:cNvSpPr/>
           <p:nvPr/>
         </p:nvSpPr>
         <p:spPr>
           <a:xfrm>
             <a:off x="4709160" y="4059936"/>
-            <a:ext cx="3977640" cy="384048"/>
+            <a:ext cx="3977640" cy="365760"/>
           </a:xfrm>
           <a:prstGeom prst="roundRect">
             <a:avLst>
-              <a:gd name="adj" fmla="val 19048"/>
+              <a:gd name="adj" fmla="val 25000"/>
             </a:avLst>
           </a:prstGeom>
           <a:solidFill>
@@ -11930,22 +14526,22 @@
       </p:sp>
       <p:pic>
         <p:nvPicPr>
-          <p:cNvPr id="20" name="icon FiRefreshCw" descr="preencoded.png">    </p:cNvPr>
+          <p:cNvPr id="27" name="glyph Cyborgs (ไซบอร์ก)" descr="preencoded.png">    </p:cNvPr>
           <p:cNvPicPr>
             <a:picLocks noChangeAspect="1"/>
           </p:cNvPicPr>
           <p:nvPr/>
         </p:nvPicPr>
         <p:blipFill>
-          <a:blip r:embed="rId3"/>
+          <a:blip r:embed="rId4"/>
           <a:stretch>
             <a:fillRect/>
           </a:stretch>
         </p:blipFill>
         <p:spPr>
           <a:xfrm>
-            <a:off x="4800600" y="4142232"/>
-            <a:ext cx="219456" cy="219456"/>
+            <a:off x="4782312" y="4105656"/>
+            <a:ext cx="411480" cy="274320"/>
           </a:xfrm>
           <a:prstGeom prst="rect">
             <a:avLst/>
@@ -11954,14 +14550,14 @@
       </p:pic>
       <p:sp>
         <p:nvSpPr>
-          <p:cNvPr id="21" name="approach text"/>
+          <p:cNvPr id="28" name="approach text"/>
           <p:cNvSpPr txBox="1"/>
           <p:nvPr/>
         </p:nvSpPr>
         <p:spPr>
           <a:xfrm>
-            <a:off x="5093208" y="4059936"/>
-            <a:ext cx="3520440" cy="384048"/>
+            <a:off x="5276088" y="4059936"/>
+            <a:ext cx="3337560" cy="365760"/>
           </a:xfrm>
           <a:prstGeom prst="rect">
             <a:avLst/>
@@ -12001,14 +14597,14 @@
       </p:sp>
       <p:sp>
         <p:nvSpPr>
-          <p:cNvPr id="22" name="reference"/>
+          <p:cNvPr id="29" name="reference"/>
           <p:cNvSpPr txBox="1"/>
           <p:nvPr/>
         </p:nvSpPr>
         <p:spPr>
           <a:xfrm>
             <a:off x="457200" y="4425696"/>
-            <a:ext cx="8229600" cy="310896"/>
+            <a:ext cx="5120640" cy="310896"/>
           </a:xfrm>
           <a:prstGeom prst="rect">
             <a:avLst/>
@@ -12032,6 +14628,104 @@
               <a:t>Dell'Acqua, F., McFowland III, E., Mollick, E., Lifshitz-Assaf, H., Kellogg, K. C., Rajendran, S., Krayer, L., Candelon, F., &amp; Lakhani, K. R. (2023). Navigating the Jagged Technological Frontier. Harvard Business School Working Paper 24-013.</a:t>
             </a:r>
             <a:endParaRPr lang="en-US" sz="750" dirty="0"/>
+          </a:p>
+        </p:txBody>
+      </p:sp>
+      <p:sp>
+        <p:nvSpPr>
+          <p:cNvPr id="30" name="bridge card"/>
+          <p:cNvSpPr/>
+          <p:nvPr/>
+        </p:nvSpPr>
+        <p:spPr>
+          <a:xfrm>
+            <a:off x="5760720" y="4407408"/>
+            <a:ext cx="2926080" cy="329184"/>
+          </a:xfrm>
+          <a:prstGeom prst="roundRect">
+            <a:avLst>
+              <a:gd name="adj" fmla="val 27778"/>
+            </a:avLst>
+          </a:prstGeom>
+          <a:solidFill>
+            <a:srgbClr val="BFE6E0"/>
+          </a:solidFill>
+          <a:ln w="12700">
+            <a:solidFill>
+              <a:srgbClr val="BFE6E0"/>
+            </a:solidFill>
+            <a:prstDash val="solid"/>
+          </a:ln>
+        </p:spPr>
+      </p:sp>
+      <p:pic>
+        <p:nvPicPr>
+          <p:cNvPr id="31" name="icon FiArrowRight" descr="preencoded.png">    </p:cNvPr>
+          <p:cNvPicPr>
+            <a:picLocks noChangeAspect="1"/>
+          </p:cNvPicPr>
+          <p:nvPr/>
+        </p:nvPicPr>
+        <p:blipFill>
+          <a:blip r:embed="rId5"/>
+          <a:stretch>
+            <a:fillRect/>
+          </a:stretch>
+        </p:blipFill>
+        <p:spPr>
+          <a:xfrm>
+            <a:off x="8412480" y="4480560"/>
+            <a:ext cx="182880" cy="182880"/>
+          </a:xfrm>
+          <a:prstGeom prst="rect">
+            <a:avLst/>
+          </a:prstGeom>
+        </p:spPr>
+      </p:pic>
+      <p:sp>
+        <p:nvSpPr>
+          <p:cNvPr id="32" name="bridge text"/>
+          <p:cNvSpPr txBox="1"/>
+          <p:nvPr/>
+        </p:nvSpPr>
+        <p:spPr>
+          <a:xfrm>
+            <a:off x="5870448" y="4407408"/>
+            <a:ext cx="2505456" cy="329184"/>
+          </a:xfrm>
+          <a:prstGeom prst="rect">
+            <a:avLst/>
+          </a:prstGeom>
+          <a:noFill/>
+          <a:ln/>
+        </p:spPr>
+        <p:txBody>
+          <a:bodyPr wrap="square" lIns="0" tIns="0" rIns="0" bIns="0" rtlCol="0" anchor="ctr"/>
+          <a:lstStyle/>
+          <a:p>
+            <a:pPr indent="0" marL="0">
+              <a:buNone/>
+            </a:pPr>
+            <a:r>
+              <a:rPr lang="en-US" sz="900" b="1" dirty="0">
+                <a:solidFill>
+                  <a:srgbClr val="2E8B86"/>
+                </a:solidFill>
+              </a:rPr>
+              <a:t>ถัดไป:  </a:t>
+            </a:r>
+            <a:pPr indent="0" marL="0">
+              <a:buNone/>
+            </a:pPr>
+            <a:r>
+              <a:rPr lang="en-US" sz="900" dirty="0">
+                <a:solidFill>
+                  <a:srgbClr val="1B2A4A"/>
+                </a:solidFill>
+              </a:rPr>
+              <a:t>ผลแบบนี้จะยังเป็นจริงนอกสำนักงาน กับธุรกิจขนาดเล็กจริงหรือไม่?</a:t>
+            </a:r>
+            <a:endParaRPr lang="en-US" sz="900" dirty="0"/>
           </a:p>
         </p:txBody>
       </p:sp>
@@ -12115,8 +14809,8 @@
         </p:nvSpPr>
         <p:spPr>
           <a:xfrm>
-            <a:off x="457200" y="146304"/>
-            <a:ext cx="8229600" cy="237744"/>
+            <a:off x="457200" y="164592"/>
+            <a:ext cx="5943600" cy="237744"/>
           </a:xfrm>
           <a:prstGeom prst="rect">
             <a:avLst/>
@@ -12153,7 +14847,7 @@
         </p:nvSpPr>
         <p:spPr>
           <a:xfrm>
-            <a:off x="457200" y="347472"/>
+            <a:off x="457200" y="365760"/>
             <a:ext cx="8229600" cy="713232"/>
           </a:xfrm>
           <a:prstGeom prst="rect">
@@ -12185,50 +14879,89 @@
       </p:sp>
       <p:sp>
         <p:nvSpPr>
-          <p:cNvPr id="4" name="byline"/>
-          <p:cNvSpPr txBox="1"/>
-          <p:nvPr/>
-        </p:nvSpPr>
-        <p:spPr>
-          <a:xfrm>
-            <a:off x="457200" y="1060704"/>
-            <a:ext cx="8229600" cy="219456"/>
-          </a:xfrm>
-          <a:prstGeom prst="rect">
-            <a:avLst/>
-          </a:prstGeom>
-          <a:noFill/>
-          <a:ln/>
-        </p:spPr>
-        <p:txBody>
-          <a:bodyPr wrap="square" lIns="0" tIns="0" rIns="0" bIns="0" rtlCol="0" anchor="ctr"/>
-          <a:lstStyle/>
-          <a:p>
-            <a:pPr indent="0" marL="0">
-              <a:buNone/>
-            </a:pPr>
-            <a:r>
-              <a:rPr lang="en-US" sz="1000" dirty="0">
-                <a:solidFill>
-                  <a:schemeClr val="tx2"/>
-                </a:solidFill>
-              </a:rPr>
-              <a:t>Nicholas G. Otis et al.  |  Management Science, Vol. 72, No. 7, 2026  |  DOI 10.1287/mnsc.2024.06909</a:t>
-            </a:r>
-            <a:endParaRPr lang="en-US" sz="1000" dirty="0"/>
-          </a:p>
-        </p:txBody>
-      </p:sp>
-      <p:sp>
-        <p:nvSpPr>
-          <p:cNvPr id="5" name="icon circle"/>
+          <p:cNvPr id="4" name="progress dot 1"/>
           <p:cNvSpPr/>
           <p:nvPr/>
         </p:nvSpPr>
         <p:spPr>
           <a:xfrm>
-            <a:off x="457200" y="1426464"/>
-            <a:ext cx="384048" cy="384048"/>
+            <a:off x="7845552" y="228600"/>
+            <a:ext cx="109728" cy="109728"/>
+          </a:xfrm>
+          <a:prstGeom prst="ellipse">
+            <a:avLst/>
+          </a:prstGeom>
+          <a:solidFill>
+            <a:srgbClr val="BFE6E0"/>
+          </a:solidFill>
+          <a:ln w="12700">
+            <a:solidFill>
+              <a:srgbClr val="BFE6E0"/>
+            </a:solidFill>
+            <a:prstDash val="solid"/>
+          </a:ln>
+        </p:spPr>
+      </p:sp>
+      <p:sp>
+        <p:nvSpPr>
+          <p:cNvPr id="5" name="progress dot 2"/>
+          <p:cNvSpPr/>
+          <p:nvPr/>
+        </p:nvSpPr>
+        <p:spPr>
+          <a:xfrm>
+            <a:off x="8028432" y="228600"/>
+            <a:ext cx="109728" cy="109728"/>
+          </a:xfrm>
+          <a:prstGeom prst="ellipse">
+            <a:avLst/>
+          </a:prstGeom>
+          <a:solidFill>
+            <a:srgbClr val="BFE6E0"/>
+          </a:solidFill>
+          <a:ln w="12700">
+            <a:solidFill>
+              <a:srgbClr val="BFE6E0"/>
+            </a:solidFill>
+            <a:prstDash val="solid"/>
+          </a:ln>
+        </p:spPr>
+      </p:sp>
+      <p:sp>
+        <p:nvSpPr>
+          <p:cNvPr id="6" name="progress dot 3"/>
+          <p:cNvSpPr/>
+          <p:nvPr/>
+        </p:nvSpPr>
+        <p:spPr>
+          <a:xfrm>
+            <a:off x="8211312" y="228600"/>
+            <a:ext cx="109728" cy="109728"/>
+          </a:xfrm>
+          <a:prstGeom prst="ellipse">
+            <a:avLst/>
+          </a:prstGeom>
+          <a:solidFill>
+            <a:srgbClr val="BFE6E0"/>
+          </a:solidFill>
+          <a:ln w="12700">
+            <a:solidFill>
+              <a:srgbClr val="BFE6E0"/>
+            </a:solidFill>
+            <a:prstDash val="solid"/>
+          </a:ln>
+        </p:spPr>
+      </p:sp>
+      <p:sp>
+        <p:nvSpPr>
+          <p:cNvPr id="7" name="progress dot 4"/>
+          <p:cNvSpPr/>
+          <p:nvPr/>
+        </p:nvSpPr>
+        <p:spPr>
+          <a:xfrm>
+            <a:off x="8394192" y="228600"/>
+            <a:ext cx="109728" cy="109728"/>
           </a:xfrm>
           <a:prstGeom prst="ellipse">
             <a:avLst/>
@@ -12244,89 +14977,112 @@
           </a:ln>
         </p:spPr>
       </p:sp>
-      <p:pic>
-        <p:nvPicPr>
-          <p:cNvPr id="6" name="icon FiMapPin" descr="preencoded.png">    </p:cNvPr>
-          <p:cNvPicPr>
-            <a:picLocks noChangeAspect="1"/>
-          </p:cNvPicPr>
-          <p:nvPr/>
-        </p:nvPicPr>
-        <p:blipFill>
-          <a:blip r:embed="rId1"/>
-          <a:stretch>
-            <a:fillRect/>
-          </a:stretch>
-        </p:blipFill>
-        <p:spPr>
-          <a:xfrm>
-            <a:off x="539496" y="1508760"/>
-            <a:ext cx="219456" cy="219456"/>
-          </a:xfrm>
-          <a:prstGeom prst="rect">
-            <a:avLst/>
-          </a:prstGeom>
-        </p:spPr>
-      </p:pic>
-      <p:sp>
-        <p:nvSpPr>
-          <p:cNvPr id="7" name="fact บริบทการศึกษา"/>
+      <p:sp>
+        <p:nvSpPr>
+          <p:cNvPr id="8" name="progress dot 5"/>
+          <p:cNvSpPr/>
+          <p:nvPr/>
+        </p:nvSpPr>
+        <p:spPr>
+          <a:xfrm>
+            <a:off x="8577072" y="228600"/>
+            <a:ext cx="109728" cy="109728"/>
+          </a:xfrm>
+          <a:prstGeom prst="ellipse">
+            <a:avLst/>
+          </a:prstGeom>
+          <a:solidFill>
+            <a:srgbClr val="D8DEE6"/>
+          </a:solidFill>
+          <a:ln w="12700">
+            <a:solidFill>
+              <a:srgbClr val="D8DEE6"/>
+            </a:solidFill>
+            <a:prstDash val="solid"/>
+          </a:ln>
+        </p:spPr>
+      </p:sp>
+      <p:sp>
+        <p:nvSpPr>
+          <p:cNvPr id="9" name="progress label"/>
           <p:cNvSpPr txBox="1"/>
           <p:nvPr/>
         </p:nvSpPr>
         <p:spPr>
           <a:xfrm>
-            <a:off x="969264" y="1389888"/>
-            <a:ext cx="3328416" cy="530352"/>
-          </a:xfrm>
-          <a:prstGeom prst="rect">
-            <a:avLst/>
-          </a:prstGeom>
-          <a:noFill/>
-          <a:ln/>
-        </p:spPr>
-        <p:txBody>
-          <a:bodyPr wrap="square" lIns="0" tIns="0" rIns="0" bIns="0" rtlCol="0" anchor="t"/>
+            <a:off x="5742432" y="164592"/>
+            <a:ext cx="2011680" cy="237744"/>
+          </a:xfrm>
+          <a:prstGeom prst="rect">
+            <a:avLst/>
+          </a:prstGeom>
+          <a:noFill/>
+          <a:ln/>
+        </p:spPr>
+        <p:txBody>
+          <a:bodyPr wrap="square" lIns="0" tIns="0" rIns="0" bIns="0" rtlCol="0" anchor="ctr"/>
+          <a:lstStyle/>
+          <a:p>
+            <a:pPr algn="r" indent="0" marL="0">
+              <a:buNone/>
+            </a:pPr>
+            <a:r>
+              <a:rPr lang="en-US" sz="900" dirty="0">
+                <a:solidFill>
+                  <a:schemeClr val="tx2"/>
+                </a:solidFill>
+              </a:rPr>
+              <a:t>บทความ 5: ผู้ประกอบการ</a:t>
+            </a:r>
+            <a:endParaRPr lang="en-US" sz="900" dirty="0"/>
+          </a:p>
+        </p:txBody>
+      </p:sp>
+      <p:sp>
+        <p:nvSpPr>
+          <p:cNvPr id="10" name="byline"/>
+          <p:cNvSpPr txBox="1"/>
+          <p:nvPr/>
+        </p:nvSpPr>
+        <p:spPr>
+          <a:xfrm>
+            <a:off x="457200" y="1060704"/>
+            <a:ext cx="8229600" cy="219456"/>
+          </a:xfrm>
+          <a:prstGeom prst="rect">
+            <a:avLst/>
+          </a:prstGeom>
+          <a:noFill/>
+          <a:ln/>
+        </p:spPr>
+        <p:txBody>
+          <a:bodyPr wrap="square" lIns="0" tIns="0" rIns="0" bIns="0" rtlCol="0" anchor="ctr"/>
           <a:lstStyle/>
           <a:p>
             <a:pPr indent="0" marL="0">
               <a:buNone/>
             </a:pPr>
             <a:r>
-              <a:rPr lang="en-US" sz="1250" b="1" dirty="0">
-                <a:solidFill>
-                  <a:schemeClr val="tx1"/>
-                </a:solidFill>
-              </a:rPr>
-              <a:t>บริบทการศึกษา</a:t>
-            </a:r>
-            <a:endParaRPr lang="en-US" sz="1250" dirty="0"/>
-          </a:p>
-          <a:p>
-            <a:pPr indent="0" marL="0">
-              <a:buNone/>
-            </a:pPr>
-            <a:r>
-              <a:rPr lang="en-US" sz="1150" dirty="0">
+              <a:rPr lang="en-US" sz="1000" dirty="0">
                 <a:solidFill>
                   <a:schemeClr val="tx2"/>
                 </a:solidFill>
               </a:rPr>
-              <a:t>การทดลองภาคสนามกับผู้ประกอบการธุรกิจขนาดเล็กในประเทศเคนยา</a:t>
-            </a:r>
-            <a:endParaRPr lang="en-US" sz="1250" dirty="0"/>
-          </a:p>
-        </p:txBody>
-      </p:sp>
-      <p:sp>
-        <p:nvSpPr>
-          <p:cNvPr id="8" name="icon circle"/>
+              <a:t>Nicholas G. Otis et al.  |  Management Science, Vol. 72, No. 7, 2026  |  DOI 10.1287/mnsc.2024.06909</a:t>
+            </a:r>
+            <a:endParaRPr lang="en-US" sz="1000" dirty="0"/>
+          </a:p>
+        </p:txBody>
+      </p:sp>
+      <p:sp>
+        <p:nvSpPr>
+          <p:cNvPr id="11" name="icon circle"/>
           <p:cNvSpPr/>
           <p:nvPr/>
         </p:nvSpPr>
         <p:spPr>
           <a:xfrm>
-            <a:off x="457200" y="2011680"/>
+            <a:off x="457200" y="1426464"/>
             <a:ext cx="384048" cy="384048"/>
           </a:xfrm>
           <a:prstGeom prst="ellipse">
@@ -12345,21 +15101,21 @@
       </p:sp>
       <p:pic>
         <p:nvPicPr>
-          <p:cNvPr id="9" name="icon FiMessageSquare" descr="preencoded.png">    </p:cNvPr>
+          <p:cNvPr id="12" name="icon FiMapPin" descr="preencoded.png">    </p:cNvPr>
           <p:cNvPicPr>
             <a:picLocks noChangeAspect="1"/>
           </p:cNvPicPr>
           <p:nvPr/>
         </p:nvPicPr>
         <p:blipFill>
-          <a:blip r:embed="rId2"/>
+          <a:blip r:embed="rId1"/>
           <a:stretch>
             <a:fillRect/>
           </a:stretch>
         </p:blipFill>
         <p:spPr>
           <a:xfrm>
-            <a:off x="539496" y="2093976"/>
+            <a:off x="539496" y="1508760"/>
             <a:ext cx="219456" cy="219456"/>
           </a:xfrm>
           <a:prstGeom prst="rect">
@@ -12369,13 +15125,13 @@
       </p:pic>
       <p:sp>
         <p:nvSpPr>
-          <p:cNvPr id="10" name="fact สิ่งที่ทดลอง"/>
+          <p:cNvPr id="13" name="fact บริบทการศึกษา"/>
           <p:cNvSpPr txBox="1"/>
           <p:nvPr/>
         </p:nvSpPr>
         <p:spPr>
           <a:xfrm>
-            <a:off x="969264" y="1975104"/>
+            <a:off x="969264" y="1389888"/>
             <a:ext cx="3328416" cy="530352"/>
           </a:xfrm>
           <a:prstGeom prst="rect">
@@ -12397,7 +15153,7 @@
                   <a:schemeClr val="tx1"/>
                 </a:solidFill>
               </a:rPr>
-              <a:t>สิ่งที่ทดลอง</a:t>
+              <a:t>บริบทการศึกษา</a:t>
             </a:r>
             <a:endParaRPr lang="en-US" sz="1250" dirty="0"/>
           </a:p>
@@ -12411,7 +15167,7 @@
                   <a:schemeClr val="tx2"/>
                 </a:solidFill>
               </a:rPr>
-              <a:t>การเข้าถึงผู้ช่วยธุรกิจ AI ที่ขับเคลื่อนด้วย GPT-4 ซึ่งให้คำแนะนำทางธุรกิจ</a:t>
+              <a:t>การทดลองภาคสนามกับผู้ประกอบการธุรกิจขนาดเล็กในประเทศเคนยา</a:t>
             </a:r>
             <a:endParaRPr lang="en-US" sz="1250" dirty="0"/>
           </a:p>
@@ -12419,13 +15175,13 @@
       </p:sp>
       <p:sp>
         <p:nvSpPr>
-          <p:cNvPr id="11" name="icon circle"/>
+          <p:cNvPr id="14" name="icon circle"/>
           <p:cNvSpPr/>
           <p:nvPr/>
         </p:nvSpPr>
         <p:spPr>
           <a:xfrm>
-            <a:off x="457200" y="2596896"/>
+            <a:off x="457200" y="2011680"/>
             <a:ext cx="384048" cy="384048"/>
           </a:xfrm>
           <a:prstGeom prst="ellipse">
@@ -12444,7 +15200,106 @@
       </p:sp>
       <p:pic>
         <p:nvPicPr>
-          <p:cNvPr id="12" name="icon FiDollarSign" descr="preencoded.png">    </p:cNvPr>
+          <p:cNvPr id="15" name="icon FiMessageSquare" descr="preencoded.png">    </p:cNvPr>
+          <p:cNvPicPr>
+            <a:picLocks noChangeAspect="1"/>
+          </p:cNvPicPr>
+          <p:nvPr/>
+        </p:nvPicPr>
+        <p:blipFill>
+          <a:blip r:embed="rId2"/>
+          <a:stretch>
+            <a:fillRect/>
+          </a:stretch>
+        </p:blipFill>
+        <p:spPr>
+          <a:xfrm>
+            <a:off x="539496" y="2093976"/>
+            <a:ext cx="219456" cy="219456"/>
+          </a:xfrm>
+          <a:prstGeom prst="rect">
+            <a:avLst/>
+          </a:prstGeom>
+        </p:spPr>
+      </p:pic>
+      <p:sp>
+        <p:nvSpPr>
+          <p:cNvPr id="16" name="fact สิ่งที่ทดลอง"/>
+          <p:cNvSpPr txBox="1"/>
+          <p:nvPr/>
+        </p:nvSpPr>
+        <p:spPr>
+          <a:xfrm>
+            <a:off x="969264" y="1975104"/>
+            <a:ext cx="3328416" cy="530352"/>
+          </a:xfrm>
+          <a:prstGeom prst="rect">
+            <a:avLst/>
+          </a:prstGeom>
+          <a:noFill/>
+          <a:ln/>
+        </p:spPr>
+        <p:txBody>
+          <a:bodyPr wrap="square" lIns="0" tIns="0" rIns="0" bIns="0" rtlCol="0" anchor="t"/>
+          <a:lstStyle/>
+          <a:p>
+            <a:pPr indent="0" marL="0">
+              <a:buNone/>
+            </a:pPr>
+            <a:r>
+              <a:rPr lang="en-US" sz="1250" b="1" dirty="0">
+                <a:solidFill>
+                  <a:schemeClr val="tx1"/>
+                </a:solidFill>
+              </a:rPr>
+              <a:t>สิ่งที่ทดลอง</a:t>
+            </a:r>
+            <a:endParaRPr lang="en-US" sz="1250" dirty="0"/>
+          </a:p>
+          <a:p>
+            <a:pPr indent="0" marL="0">
+              <a:buNone/>
+            </a:pPr>
+            <a:r>
+              <a:rPr lang="en-US" sz="1150" dirty="0">
+                <a:solidFill>
+                  <a:schemeClr val="tx2"/>
+                </a:solidFill>
+              </a:rPr>
+              <a:t>การเข้าถึงผู้ช่วยธุรกิจ AI ที่ขับเคลื่อนด้วย GPT-4 ซึ่งให้คำแนะนำทางธุรกิจ</a:t>
+            </a:r>
+            <a:endParaRPr lang="en-US" sz="1250" dirty="0"/>
+          </a:p>
+        </p:txBody>
+      </p:sp>
+      <p:sp>
+        <p:nvSpPr>
+          <p:cNvPr id="17" name="icon circle"/>
+          <p:cNvSpPr/>
+          <p:nvPr/>
+        </p:nvSpPr>
+        <p:spPr>
+          <a:xfrm>
+            <a:off x="457200" y="2596896"/>
+            <a:ext cx="384048" cy="384048"/>
+          </a:xfrm>
+          <a:prstGeom prst="ellipse">
+            <a:avLst/>
+          </a:prstGeom>
+          <a:solidFill>
+            <a:srgbClr val="2E8B86"/>
+          </a:solidFill>
+          <a:ln w="12700">
+            <a:solidFill>
+              <a:srgbClr val="2E8B86"/>
+            </a:solidFill>
+            <a:prstDash val="solid"/>
+          </a:ln>
+        </p:spPr>
+      </p:sp>
+      <p:pic>
+        <p:nvPicPr>
+          <p:cNvPr id="18" name="icon FiDollarSign" descr="preencoded.png">    </p:cNvPr>
           <p:cNvPicPr>
             <a:picLocks noChangeAspect="1"/>
           </p:cNvPicPr>
@@ -12468,7 +15323,7 @@
       </p:pic>
       <p:sp>
         <p:nvSpPr>
-          <p:cNvPr id="13" name="fact ตัวแปรผลลัพธ์"/>
+          <p:cNvPr id="19" name="fact ตัวแปรผลลัพธ์"/>
           <p:cNvSpPr txBox="1"/>
           <p:nvPr/>
         </p:nvSpPr>
@@ -12518,18 +15373,18 @@
       </p:sp>
       <p:sp>
         <p:nvSpPr>
-          <p:cNvPr id="14" name="main effect card"/>
+          <p:cNvPr id="20" name="main effect card"/>
           <p:cNvSpPr/>
           <p:nvPr/>
         </p:nvSpPr>
         <p:spPr>
           <a:xfrm>
             <a:off x="457200" y="3200400"/>
-            <a:ext cx="3840480" cy="1170432"/>
+            <a:ext cx="3840480" cy="1152144"/>
           </a:xfrm>
           <a:prstGeom prst="roundRect">
             <a:avLst>
-              <a:gd name="adj" fmla="val 6250"/>
+              <a:gd name="adj" fmla="val 7937"/>
             </a:avLst>
           </a:prstGeom>
           <a:solidFill>
@@ -12541,11 +15396,18 @@
             </a:solidFill>
             <a:prstDash val="solid"/>
           </a:ln>
-        </p:spPr>
-      </p:sp>
-      <p:sp>
-        <p:nvSpPr>
-          <p:cNvPr id="15" name="tag finding"/>
+          <a:effectLst>
+            <a:outerShdw sx="100000" sy="100000" kx="0" ky="0" algn="bl" rotWithShape="0" blurRad="101600" dist="25400" dir="5400000">
+              <a:srgbClr val="1B2A4A">
+                <a:alpha val="12000"/>
+              </a:srgbClr>
+            </a:outerShdw>
+          </a:effectLst>
+        </p:spPr>
+      </p:sp>
+      <p:sp>
+        <p:nvSpPr>
+          <p:cNvPr id="21" name="tag finding"/>
           <p:cNvSpPr/>
           <p:nvPr/>
         </p:nvSpPr>
@@ -12572,7 +15434,7 @@
       </p:sp>
       <p:sp>
         <p:nvSpPr>
-          <p:cNvPr id="16" name="tag text"/>
+          <p:cNvPr id="22" name="tag text"/>
           <p:cNvSpPr txBox="1"/>
           <p:nvPr/>
         </p:nvSpPr>
@@ -12597,7 +15459,7 @@
             <a:r>
               <a:rPr lang="en-US" sz="900" b="1" spc="100" kern="0" dirty="0">
                 <a:solidFill>
-                  <a:schemeClr val="bg1"/>
+                  <a:srgbClr val="FFFFFF"/>
                 </a:solidFill>
               </a:rPr>
               <a:t>ผลการวิจัย (รายงานในบทความ)</a:t>
@@ -12608,14 +15470,14 @@
       </p:sp>
       <p:sp>
         <p:nvSpPr>
-          <p:cNvPr id="17" name="main head"/>
+          <p:cNvPr id="23" name="main head"/>
           <p:cNvSpPr txBox="1"/>
           <p:nvPr/>
         </p:nvSpPr>
         <p:spPr>
           <a:xfrm>
             <a:off x="621792" y="3566160"/>
-            <a:ext cx="3511296" cy="219456"/>
+            <a:ext cx="2651760" cy="219456"/>
           </a:xfrm>
           <a:prstGeom prst="rect">
             <a:avLst/>
@@ -12633,7 +15495,7 @@
             <a:r>
               <a:rPr lang="en-US" sz="1150" b="1" dirty="0">
                 <a:solidFill>
-                  <a:srgbClr val="C9D6D4"/>
+                  <a:srgbClr val="BFE6E0"/>
                 </a:solidFill>
               </a:rPr>
               <a:t>ผลโดยเฉลี่ย</a:t>
@@ -12644,14 +15506,14 @@
       </p:sp>
       <p:sp>
         <p:nvSpPr>
-          <p:cNvPr id="18" name="main body"/>
+          <p:cNvPr id="24" name="main body"/>
           <p:cNvSpPr txBox="1"/>
           <p:nvPr/>
         </p:nvSpPr>
         <p:spPr>
           <a:xfrm>
             <a:off x="621792" y="3785616"/>
-            <a:ext cx="3511296" cy="548640"/>
+            <a:ext cx="2651760" cy="548640"/>
           </a:xfrm>
           <a:prstGeom prst="rect">
             <a:avLst/>
@@ -12667,31 +15529,55 @@
               <a:buNone/>
             </a:pPr>
             <a:r>
-              <a:rPr lang="en-US" sz="1050" dirty="0">
+              <a:rPr lang="en-US" sz="1000" dirty="0">
                 <a:solidFill>
                   <a:srgbClr val="FFFFFF"/>
                 </a:solidFill>
               </a:rPr>
               <a:t>ผู้วิจัยไม่สามารถปฏิเสธสมมติฐานว่าง (null hypothesis) ที่ว่าไม่มีผลเฉลี่ยของการทดลองต่อรายได้และกำไร</a:t>
             </a:r>
-            <a:endParaRPr lang="en-US" sz="1050" dirty="0"/>
-          </a:p>
-        </p:txBody>
-      </p:sp>
-      <p:sp>
-        <p:nvSpPr>
-          <p:cNvPr id="19" name="subgroup card"/>
+            <a:endParaRPr lang="en-US" sz="1000" dirty="0"/>
+          </a:p>
+        </p:txBody>
+      </p:sp>
+      <p:pic>
+        <p:nvPicPr>
+          <p:cNvPr id="25" name="mascot with phone" descr="preencoded.png">    </p:cNvPr>
+          <p:cNvPicPr>
+            <a:picLocks noChangeAspect="1"/>
+          </p:cNvPicPr>
+          <p:nvPr/>
+        </p:nvPicPr>
+        <p:blipFill>
+          <a:blip r:embed="rId4"/>
+          <a:stretch>
+            <a:fillRect/>
+          </a:stretch>
+        </p:blipFill>
+        <p:spPr>
+          <a:xfrm>
+            <a:off x="3246120" y="3419856"/>
+            <a:ext cx="960120" cy="822960"/>
+          </a:xfrm>
+          <a:prstGeom prst="rect">
+            <a:avLst/>
+          </a:prstGeom>
+        </p:spPr>
+      </p:pic>
+      <p:sp>
+        <p:nvSpPr>
+          <p:cNvPr id="26" name="subgroup card"/>
           <p:cNvSpPr/>
           <p:nvPr/>
         </p:nvSpPr>
         <p:spPr>
           <a:xfrm>
             <a:off x="4617720" y="1371600"/>
-            <a:ext cx="4069080" cy="1920240"/>
+            <a:ext cx="4069080" cy="1975104"/>
           </a:xfrm>
           <a:prstGeom prst="roundRect">
             <a:avLst>
-              <a:gd name="adj" fmla="val 3810"/>
+              <a:gd name="adj" fmla="val 4630"/>
             </a:avLst>
           </a:prstGeom>
           <a:solidFill>
@@ -12703,11 +15589,18 @@
             </a:solidFill>
             <a:prstDash val="solid"/>
           </a:ln>
-        </p:spPr>
-      </p:sp>
-      <p:sp>
-        <p:nvSpPr>
-          <p:cNvPr id="20" name="tag finding"/>
+          <a:effectLst>
+            <a:outerShdw sx="100000" sy="100000" kx="0" ky="0" algn="bl" rotWithShape="0" blurRad="101600" dist="25400" dir="5400000">
+              <a:srgbClr val="1B2A4A">
+                <a:alpha val="12000"/>
+              </a:srgbClr>
+            </a:outerShdw>
+          </a:effectLst>
+        </p:spPr>
+      </p:sp>
+      <p:sp>
+        <p:nvSpPr>
+          <p:cNvPr id="27" name="tag finding"/>
           <p:cNvSpPr/>
           <p:nvPr/>
         </p:nvSpPr>
@@ -12734,7 +15627,7 @@
       </p:sp>
       <p:sp>
         <p:nvSpPr>
-          <p:cNvPr id="21" name="tag text"/>
+          <p:cNvPr id="28" name="tag text"/>
           <p:cNvSpPr txBox="1"/>
           <p:nvPr/>
         </p:nvSpPr>
@@ -12759,7 +15652,7 @@
             <a:r>
               <a:rPr lang="en-US" sz="900" b="1" spc="100" kern="0" dirty="0">
                 <a:solidFill>
-                  <a:schemeClr val="bg1"/>
+                  <a:srgbClr val="FFFFFF"/>
                 </a:solidFill>
               </a:rPr>
               <a:t>ผลการวิจัย (รายงานในบทความ)</a:t>
@@ -12770,14 +15663,14 @@
       </p:sp>
       <p:sp>
         <p:nvSpPr>
-          <p:cNvPr id="22" name="subgroup head"/>
+          <p:cNvPr id="29" name="subgroup head"/>
           <p:cNvSpPr txBox="1"/>
           <p:nvPr/>
         </p:nvSpPr>
         <p:spPr>
           <a:xfrm>
             <a:off x="4782312" y="1737360"/>
-            <a:ext cx="3739896" cy="237744"/>
+            <a:ext cx="2971800" cy="237744"/>
           </a:xfrm>
           <a:prstGeom prst="rect">
             <a:avLst/>
@@ -12793,26 +15686,50 @@
               <a:buNone/>
             </a:pPr>
             <a:r>
-              <a:rPr lang="en-US" sz="1200" b="1" dirty="0">
+              <a:rPr lang="en-US" sz="1100" b="1" dirty="0">
                 <a:solidFill>
                   <a:schemeClr val="tx1"/>
                 </a:solidFill>
               </a:rPr>
               <a:t>ผลแยกตามกลุ่มผลการดำเนินงานตั้งต้น</a:t>
             </a:r>
-            <a:endParaRPr lang="en-US" sz="1200" dirty="0"/>
-          </a:p>
-        </p:txBody>
-      </p:sp>
-      <p:sp>
-        <p:nvSpPr>
-          <p:cNvPr id="23" name="zero line"/>
+            <a:endParaRPr lang="en-US" sz="1100" dirty="0"/>
+          </a:p>
+        </p:txBody>
+      </p:sp>
+      <p:pic>
+        <p:nvPicPr>
+          <p:cNvPr id="30" name="entrepreneur with phone" descr="preencoded.png">    </p:cNvPr>
+          <p:cNvPicPr>
+            <a:picLocks noChangeAspect="1"/>
+          </p:cNvPicPr>
+          <p:nvPr/>
+        </p:nvPicPr>
+        <p:blipFill>
+          <a:blip r:embed="rId5"/>
+          <a:stretch>
+            <a:fillRect/>
+          </a:stretch>
+        </p:blipFill>
+        <p:spPr>
+          <a:xfrm>
+            <a:off x="7662672" y="1426464"/>
+            <a:ext cx="914400" cy="960120"/>
+          </a:xfrm>
+          <a:prstGeom prst="rect">
+            <a:avLst/>
+          </a:prstGeom>
+        </p:spPr>
+      </p:pic>
+      <p:sp>
+        <p:nvSpPr>
+          <p:cNvPr id="31" name="zero line"/>
           <p:cNvSpPr/>
           <p:nvPr/>
         </p:nvSpPr>
         <p:spPr>
           <a:xfrm>
-            <a:off x="6652260" y="2194560"/>
+            <a:off x="6245352" y="2194560"/>
             <a:ext cx="0" cy="1024128"/>
           </a:xfrm>
           <a:prstGeom prst="line">
@@ -12829,7 +15746,7 @@
       </p:sp>
       <p:sp>
         <p:nvSpPr>
-          <p:cNvPr id="24" name="bar label 0"/>
+          <p:cNvPr id="32" name="bar label 0"/>
           <p:cNvSpPr txBox="1"/>
           <p:nvPr/>
         </p:nvSpPr>
@@ -12876,14 +15793,14 @@
       </p:sp>
       <p:sp>
         <p:nvSpPr>
-          <p:cNvPr id="25" name="bar 0"/>
+          <p:cNvPr id="33" name="bar 0"/>
           <p:cNvSpPr/>
           <p:nvPr/>
         </p:nvSpPr>
         <p:spPr>
           <a:xfrm>
-            <a:off x="5567172" y="2249424"/>
-            <a:ext cx="1085088" cy="237744"/>
+            <a:off x="5426050" y="2249424"/>
+            <a:ext cx="819302" cy="237744"/>
           </a:xfrm>
           <a:prstGeom prst="rect">
             <a:avLst/>
@@ -12901,7 +15818,7 @@
       </p:sp>
       <p:sp>
         <p:nvSpPr>
-          <p:cNvPr id="26" name="bar label 1"/>
+          <p:cNvPr id="34" name="bar label 1"/>
           <p:cNvSpPr txBox="1"/>
           <p:nvPr/>
         </p:nvSpPr>
@@ -12948,14 +15865,14 @@
       </p:sp>
       <p:sp>
         <p:nvSpPr>
-          <p:cNvPr id="27" name="bar 1"/>
+          <p:cNvPr id="35" name="bar 1"/>
           <p:cNvSpPr/>
           <p:nvPr/>
         </p:nvSpPr>
         <p:spPr>
           <a:xfrm>
-            <a:off x="6652260" y="2798064"/>
-            <a:ext cx="1627632" cy="237744"/>
+            <a:off x="6245352" y="2798064"/>
+            <a:ext cx="1228954" cy="237744"/>
           </a:xfrm>
           <a:prstGeom prst="rect">
             <a:avLst/>
@@ -12973,13 +15890,13 @@
       </p:sp>
       <p:sp>
         <p:nvSpPr>
-          <p:cNvPr id="28" name="bar note"/>
+          <p:cNvPr id="36" name="bar note"/>
           <p:cNvSpPr txBox="1"/>
           <p:nvPr/>
         </p:nvSpPr>
         <p:spPr>
           <a:xfrm>
-            <a:off x="4782312" y="3255264"/>
+            <a:off x="4782312" y="3163824"/>
             <a:ext cx="3739896" cy="164592"/>
           </a:xfrm>
           <a:prstGeom prst="rect">
@@ -13009,7 +15926,7 @@
       </p:sp>
       <p:sp>
         <p:nvSpPr>
-          <p:cNvPr id="29" name="mechanism card"/>
+          <p:cNvPr id="37" name="mechanism card"/>
           <p:cNvSpPr/>
           <p:nvPr/>
         </p:nvSpPr>
@@ -13020,7 +15937,7 @@
           </a:xfrm>
           <a:prstGeom prst="roundRect">
             <a:avLst>
-              <a:gd name="adj" fmla="val 16000"/>
+              <a:gd name="adj" fmla="val 20000"/>
             </a:avLst>
           </a:prstGeom>
           <a:solidFill>
@@ -13036,7 +15953,7 @@
       </p:sp>
       <p:sp>
         <p:nvSpPr>
-          <p:cNvPr id="30" name="mechanism"/>
+          <p:cNvPr id="38" name="mechanism"/>
           <p:cNvSpPr txBox="1"/>
           <p:nvPr/>
         </p:nvSpPr>
@@ -13072,18 +15989,18 @@
       </p:sp>
       <p:sp>
         <p:nvSpPr>
-          <p:cNvPr id="31" name="caution card"/>
+          <p:cNvPr id="39" name="caution card"/>
           <p:cNvSpPr/>
           <p:nvPr/>
         </p:nvSpPr>
         <p:spPr>
           <a:xfrm>
-            <a:off x="4617720" y="3950208"/>
+            <a:off x="4617720" y="3931920"/>
             <a:ext cx="4069080" cy="420624"/>
           </a:xfrm>
           <a:prstGeom prst="roundRect">
             <a:avLst>
-              <a:gd name="adj" fmla="val 17391"/>
+              <a:gd name="adj" fmla="val 21739"/>
             </a:avLst>
           </a:prstGeom>
           <a:solidFill>
@@ -13099,21 +16016,21 @@
       </p:sp>
       <p:pic>
         <p:nvPicPr>
-          <p:cNvPr id="32" name="icon FiAlertTriangle" descr="preencoded.png">    </p:cNvPr>
+          <p:cNvPr id="40" name="icon FiAlertTriangle" descr="preencoded.png">    </p:cNvPr>
           <p:cNvPicPr>
             <a:picLocks noChangeAspect="1"/>
           </p:cNvPicPr>
           <p:nvPr/>
         </p:nvPicPr>
         <p:blipFill>
-          <a:blip r:embed="rId4"/>
+          <a:blip r:embed="rId6"/>
           <a:stretch>
             <a:fillRect/>
           </a:stretch>
         </p:blipFill>
         <p:spPr>
           <a:xfrm>
-            <a:off x="4727448" y="4050792"/>
+            <a:off x="4727448" y="4032504"/>
             <a:ext cx="219456" cy="219456"/>
           </a:xfrm>
           <a:prstGeom prst="rect">
@@ -13123,13 +16040,13 @@
       </p:pic>
       <p:sp>
         <p:nvSpPr>
-          <p:cNvPr id="33" name="caution"/>
+          <p:cNvPr id="41" name="caution"/>
           <p:cNvSpPr txBox="1"/>
           <p:nvPr/>
         </p:nvSpPr>
         <p:spPr>
           <a:xfrm>
-            <a:off x="5020056" y="3968496"/>
+            <a:off x="5020056" y="3950208"/>
             <a:ext cx="3557016" cy="384048"/>
           </a:xfrm>
           <a:prstGeom prst="rect">
@@ -13159,14 +16076,14 @@
       </p:sp>
       <p:sp>
         <p:nvSpPr>
-          <p:cNvPr id="34" name="reference"/>
+          <p:cNvPr id="42" name="reference"/>
           <p:cNvSpPr txBox="1"/>
           <p:nvPr/>
         </p:nvSpPr>
         <p:spPr>
           <a:xfrm>
             <a:off x="457200" y="4425696"/>
-            <a:ext cx="8229600" cy="310896"/>
+            <a:ext cx="5120640" cy="310896"/>
           </a:xfrm>
           <a:prstGeom prst="rect">
             <a:avLst/>
@@ -13190,6 +16107,104 @@
               <a:t>Otis, N. G., Clarke, R., Delecourt, S., Holtz, D., &amp; Koning, R. (2026). The Uneven Impact of Generative Artificial Intelligence on Entrepreneurial Performance: Evidence from a Field Experiment in Kenya. Management Science, 72(7). https://doi.org/10.1287/mnsc.2024.06909</a:t>
             </a:r>
             <a:endParaRPr lang="en-US" sz="750" dirty="0"/>
+          </a:p>
+        </p:txBody>
+      </p:sp>
+      <p:sp>
+        <p:nvSpPr>
+          <p:cNvPr id="43" name="bridge card"/>
+          <p:cNvSpPr/>
+          <p:nvPr/>
+        </p:nvSpPr>
+        <p:spPr>
+          <a:xfrm>
+            <a:off x="5760720" y="4407408"/>
+            <a:ext cx="2926080" cy="329184"/>
+          </a:xfrm>
+          <a:prstGeom prst="roundRect">
+            <a:avLst>
+              <a:gd name="adj" fmla="val 27778"/>
+            </a:avLst>
+          </a:prstGeom>
+          <a:solidFill>
+            <a:srgbClr val="BFE6E0"/>
+          </a:solidFill>
+          <a:ln w="12700">
+            <a:solidFill>
+              <a:srgbClr val="BFE6E0"/>
+            </a:solidFill>
+            <a:prstDash val="solid"/>
+          </a:ln>
+        </p:spPr>
+      </p:sp>
+      <p:pic>
+        <p:nvPicPr>
+          <p:cNvPr id="44" name="icon FiArrowRight" descr="preencoded.png">    </p:cNvPr>
+          <p:cNvPicPr>
+            <a:picLocks noChangeAspect="1"/>
+          </p:cNvPicPr>
+          <p:nvPr/>
+        </p:nvPicPr>
+        <p:blipFill>
+          <a:blip r:embed="rId7"/>
+          <a:stretch>
+            <a:fillRect/>
+          </a:stretch>
+        </p:blipFill>
+        <p:spPr>
+          <a:xfrm>
+            <a:off x="8412480" y="4480560"/>
+            <a:ext cx="182880" cy="182880"/>
+          </a:xfrm>
+          <a:prstGeom prst="rect">
+            <a:avLst/>
+          </a:prstGeom>
+        </p:spPr>
+      </p:pic>
+      <p:sp>
+        <p:nvSpPr>
+          <p:cNvPr id="45" name="bridge text"/>
+          <p:cNvSpPr txBox="1"/>
+          <p:nvPr/>
+        </p:nvSpPr>
+        <p:spPr>
+          <a:xfrm>
+            <a:off x="5870448" y="4407408"/>
+            <a:ext cx="2505456" cy="329184"/>
+          </a:xfrm>
+          <a:prstGeom prst="rect">
+            <a:avLst/>
+          </a:prstGeom>
+          <a:noFill/>
+          <a:ln/>
+        </p:spPr>
+        <p:txBody>
+          <a:bodyPr wrap="square" lIns="0" tIns="0" rIns="0" bIns="0" rtlCol="0" anchor="ctr"/>
+          <a:lstStyle/>
+          <a:p>
+            <a:pPr indent="0" marL="0">
+              <a:buNone/>
+            </a:pPr>
+            <a:r>
+              <a:rPr lang="en-US" sz="900" b="1" dirty="0">
+                <a:solidFill>
+                  <a:srgbClr val="2E8B86"/>
+                </a:solidFill>
+              </a:rPr>
+              <a:t>ถัดไป:  </a:t>
+            </a:r>
+            <a:pPr indent="0" marL="0">
+              <a:buNone/>
+            </a:pPr>
+            <a:r>
+              <a:rPr lang="en-US" sz="900" dirty="0">
+                <a:solidFill>
+                  <a:srgbClr val="1B2A4A"/>
+                </a:solidFill>
+              </a:rPr>
+              <a:t>สองงานวิจัย บทเรียนเดียว: เมื่อมองร่วมกันบอกอะไรเรา?</a:t>
+            </a:r>
+            <a:endParaRPr lang="en-US" sz="900" dirty="0"/>
           </a:p>
         </p:txBody>
       </p:sp>
@@ -13247,9 +16262,9 @@
 </file>
 
 <file path=ppt/theme/theme1.xml><?xml version="1.0" encoding="utf-8"?>
-<a:theme xmlns:a="http://schemas.openxmlformats.org/drawingml/2006/main" name="Academic Navy Teal">
+<a:theme xmlns:a="http://schemas.openxmlformats.org/drawingml/2006/main" name="AI Navy Teal">
   <a:themeElements>
-    <a:clrScheme name="Academic Navy Teal">
+    <a:clrScheme name="AI Navy Teal">
       <a:dk1>
         <a:srgbClr val="1B2A4A"/>
       </a:dk1>
@@ -13272,13 +16287,13 @@
         <a:srgbClr val="9AA5B4"/>
       </a:accent3>
       <a:accent4>
-        <a:srgbClr val="C9D6D4"/>
+        <a:srgbClr val="BFE6E0"/>
       </a:accent4>
       <a:accent5>
         <a:srgbClr val="D8DEE6"/>
       </a:accent5>
       <a:accent6>
-        <a:srgbClr val="3C4D6E"/>
+        <a:srgbClr val="2A3D63"/>
       </a:accent6>
       <a:hlink>
         <a:srgbClr val="2E8B86"/>
@@ -13287,7 +16302,7 @@
         <a:srgbClr val="5A6472"/>
       </a:folHlink>
     </a:clrScheme>
-    <a:fontScheme name="Academic Navy Teal">
+    <a:fontScheme name="AI Navy Teal">
       <a:majorFont>
         <a:latin typeface="Tahoma"/>
         <a:ea typeface=""/>

--- a/presentation/AI_Work_Performance_ENG501.pptx
+++ b/presentation/AI_Work_Performance_ENG501.pptx
@@ -116,7 +116,7 @@
   <p:extLst>
     <p:ext uri="{521415D9-36F7-43E2-AB2F-B90AF26B5E84}">
       <p14:sectionLst xmlns:p14="http://schemas.microsoft.com/office/powerpoint/2010/main">
-        <p14:section name="English (Slides 1-5)" id="{3e9537ed-fada-b735-946b-e2a3a12bbb5a}">
+        <p14:section name="English (Slides 1-5)" id="{6181e29a-e672-cf70-2f7a-b3ec54fbc939}">
           <p14:sldIdLst>
             <p14:sldId id="256"/>
             <p14:sldId id="257"/>
@@ -125,7 +125,7 @@
             <p14:sldId id="260"/>
           </p14:sldIdLst>
         </p14:section>
-        <p14:section name="ภาษาไทย (Slides 6-10)" id="{e5c3b8c7-e207-c39b-994a-4120ca6ba37f}">
+        <p14:section name="ภาษาไทย (Slides 6-10)" id="{56039b48-a59d-e2dd-a6f5-0217f1e3d054}">
           <p14:sldIdLst>
             <p14:sldId id="261"/>
             <p14:sldId id="262"/>
@@ -297,13 +297,13 @@
                     <c:v>Task speed</c:v>
                   </c:pt>
                   <c:pt idx="2">
-                    <c:v>Quality vs. control</c:v>
+                    <c:v>Quality</c:v>
                   </c:pt>
                   <c:pt idx="3">
-                    <c:v>Below-average performers</c:v>
+                    <c:v>Below-average</c:v>
                   </c:pt>
                   <c:pt idx="4">
-                    <c:v>Above-average performers</c:v>
+                    <c:v>Above-average</c:v>
                   </c:pt>
                 </c:lvl>
               </c:multiLvlStrCache>
@@ -358,7 +358,7 @@
           <c:showBubbleSize val="0"/>
           <c:showLeaderLines val="0"/>
         </c:dLbls>
-        <c:gapWidth val="45"/>
+        <c:gapWidth val="40"/>
         <c:overlap val="0"/>
         <c:axId val="2094734554"/>
         <c:axId val="2094734552"/>
@@ -389,7 +389,7 @@
           <a:lstStyle/>
           <a:p>
             <a:pPr>
-              <a:defRPr sz="850" b="0" i="0" u="none" strike="noStrike">
+              <a:defRPr sz="800" b="0" i="0" u="none" strike="noStrike">
                 <a:solidFill>
                   <a:srgbClr val="5A6472"/>
                 </a:solidFill>
@@ -685,7 +685,7 @@
           <c:showBubbleSize val="0"/>
           <c:showLeaderLines val="0"/>
         </c:dLbls>
-        <c:gapWidth val="45"/>
+        <c:gapWidth val="40"/>
         <c:overlap val="0"/>
         <c:axId val="2094734554"/>
         <c:axId val="2094734552"/>
@@ -716,7 +716,7 @@
           <a:lstStyle/>
           <a:p>
             <a:pPr>
-              <a:defRPr sz="850" b="0" i="0" u="none" strike="noStrike">
+              <a:defRPr sz="800" b="0" i="0" u="none" strike="noStrike">
                 <a:solidFill>
                   <a:srgbClr val="5A6472"/>
                 </a:solidFill>
@@ -2058,7 +2058,7 @@
 
 <file path=ppt/slideLayouts/slideLayout2.xml><?xml version="1.0" encoding="utf-8"?>
 <p:sldLayout xmlns:a="http://schemas.openxmlformats.org/drawingml/2006/main" xmlns:r="http://schemas.openxmlformats.org/officeDocument/2006/relationships" xmlns:p="http://schemas.openxmlformats.org/presentationml/2006/main" preserve="1">
-  <p:cSld name="TITLE_DARK">
+  <p:cSld name="TITLE_DARK_EN">
     <p:bg>
       <p:bgPr>
         <a:blipFill dpi="0" rotWithShape="1">
@@ -2115,6 +2115,9 @@
                 <a:solidFill>
                   <a:schemeClr val="bg1"/>
                 </a:solidFill>
+                <a:latin typeface="Poppins" pitchFamily="34" charset="0"/>
+                <a:ea typeface="Poppins" pitchFamily="34" charset="-122"/>
+                <a:cs typeface="Poppins" pitchFamily="34" charset="-120"/>
               </a:defRPr>
             </a:lvl1pPr>
           </a:lstStyle>
@@ -2154,6 +2157,9 @@
                 <a:solidFill>
                   <a:schemeClr val="accent4"/>
                 </a:solidFill>
+                <a:latin typeface="Poppins" pitchFamily="34" charset="0"/>
+                <a:ea typeface="Poppins" pitchFamily="34" charset="-122"/>
+                <a:cs typeface="Poppins" pitchFamily="34" charset="-120"/>
               </a:defRPr>
             </a:lvl1pPr>
           </a:lstStyle>
@@ -2197,6 +2203,9 @@
                 <a:solidFill>
                   <a:srgbClr val="9AA5B4"/>
                 </a:solidFill>
+                <a:latin typeface="Poppins"/>
+                <a:ea typeface="Poppins"/>
+                <a:cs typeface="Poppins"/>
               </a:defRPr>
             </a:lvl1pPr>
           </a:lstStyle>
@@ -2277,6 +2286,9 @@
                 <a:solidFill>
                   <a:schemeClr val="accent1"/>
                 </a:solidFill>
+                <a:latin typeface="Poppins" pitchFamily="34" charset="0"/>
+                <a:ea typeface="Poppins" pitchFamily="34" charset="-122"/>
+                <a:cs typeface="Poppins" pitchFamily="34" charset="-120"/>
               </a:defRPr>
             </a:lvl1pPr>
           </a:lstStyle>
@@ -2316,6 +2328,9 @@
                 <a:solidFill>
                   <a:schemeClr val="tx1"/>
                 </a:solidFill>
+                <a:latin typeface="Poppins" pitchFamily="34" charset="0"/>
+                <a:ea typeface="Poppins" pitchFamily="34" charset="-122"/>
+                <a:cs typeface="Poppins" pitchFamily="34" charset="-120"/>
               </a:defRPr>
             </a:lvl1pPr>
           </a:lstStyle>
@@ -2356,6 +2371,9 @@
                 <a:solidFill>
                   <a:srgbClr val="9AA5B4"/>
                 </a:solidFill>
+                <a:latin typeface="Poppins" pitchFamily="34" charset="0"/>
+                <a:ea typeface="Poppins" pitchFamily="34" charset="-122"/>
+                <a:cs typeface="Poppins" pitchFamily="34" charset="-120"/>
               </a:rPr>
               <a:t>Chayanun Sungsa-ard  |  691401708  |  MBA  |  ENG 501</a:t>
             </a:r>
@@ -2395,6 +2413,9 @@
                 <a:solidFill>
                   <a:srgbClr val="9AA5B4"/>
                 </a:solidFill>
+                <a:latin typeface="Poppins"/>
+                <a:ea typeface="Poppins"/>
+                <a:cs typeface="Poppins"/>
               </a:defRPr>
             </a:lvl1pPr>
           </a:lstStyle>
@@ -2417,6 +2438,177 @@
 </file>
 
 <file path=ppt/slideLayouts/slideLayout4.xml><?xml version="1.0" encoding="utf-8"?>
+<p:sldLayout xmlns:a="http://schemas.openxmlformats.org/drawingml/2006/main" xmlns:r="http://schemas.openxmlformats.org/officeDocument/2006/relationships" xmlns:p="http://schemas.openxmlformats.org/presentationml/2006/main" preserve="1">
+  <p:cSld name="TITLE_DARK_TH">
+    <p:bg>
+      <p:bgPr>
+        <a:blipFill dpi="0" rotWithShape="1">
+          <a:blip r:embed="rId1">
+            <a:lum/>
+          </a:blip>
+          <a:srcRect/>
+          <a:stretch>
+            <a:fillRect/>
+          </a:stretch>
+        </a:blipFill>
+        <a:effectLst/>
+      </p:bgPr>
+    </p:bg>
+    <p:spTree>
+      <p:nvGrpSpPr>
+        <p:cNvPr id="1" name=""/>
+        <p:cNvGrpSpPr/>
+        <p:nvPr/>
+      </p:nvGrpSpPr>
+      <p:grpSpPr>
+        <a:xfrm>
+          <a:off x="0" y="0"/>
+          <a:ext cx="0" cy="0"/>
+          <a:chOff x="0" y="0"/>
+          <a:chExt cx="0" cy="0"/>
+        </a:xfrm>
+      </p:grpSpPr>
+      <p:sp>
+        <p:nvSpPr>
+          <p:cNvPr id="2" name="Text 0"/>
+          <p:cNvSpPr/>
+          <p:nvPr>
+            <p:ph idx="100" type="title" hasCustomPrompt="1"/>
+          </p:nvPr>
+        </p:nvSpPr>
+        <p:spPr>
+          <a:xfrm>
+            <a:off x="457200" y="274320"/>
+            <a:ext cx="6309360" cy="1143000"/>
+          </a:xfrm>
+          <a:prstGeom prst="rect">
+            <a:avLst/>
+          </a:prstGeom>
+          <a:noFill/>
+          <a:ln/>
+        </p:spPr>
+        <p:txBody>
+          <a:bodyPr wrap="square" rtlCol="0"/>
+          <a:lstStyle>
+            <a:lvl1pPr algn="l" indent="0" marL="0">
+              <a:buNone/>
+              <a:defRPr lang="en-US" sz="3200" b="1" dirty="0">
+                <a:solidFill>
+                  <a:schemeClr val="bg1"/>
+                </a:solidFill>
+                <a:latin typeface="Prompt" pitchFamily="34" charset="0"/>
+                <a:ea typeface="Prompt" pitchFamily="34" charset="-122"/>
+                <a:cs typeface="Prompt" pitchFamily="34" charset="-120"/>
+              </a:defRPr>
+            </a:lvl1pPr>
+          </a:lstStyle>
+          <a:p>
+            <a:pPr algn="l" indent="0" marL="0">
+              <a:buNone/>
+            </a:pPr>
+            <a:endParaRPr lang="en-US" sz="3200" dirty="0"/>
+          </a:p>
+        </p:txBody>
+      </p:sp>
+      <p:sp>
+        <p:nvSpPr>
+          <p:cNvPr id="3" name="Text 0"/>
+          <p:cNvSpPr/>
+          <p:nvPr>
+            <p:ph idx="101" type="body" hasCustomPrompt="1"/>
+          </p:nvPr>
+        </p:nvSpPr>
+        <p:spPr>
+          <a:xfrm>
+            <a:off x="457200" y="1463040"/>
+            <a:ext cx="6309360" cy="365760"/>
+          </a:xfrm>
+          <a:prstGeom prst="rect">
+            <a:avLst/>
+          </a:prstGeom>
+          <a:noFill/>
+          <a:ln/>
+        </p:spPr>
+        <p:txBody>
+          <a:bodyPr wrap="square" rtlCol="0"/>
+          <a:lstStyle>
+            <a:lvl1pPr algn="l" indent="0" marL="0">
+              <a:buNone/>
+              <a:defRPr lang="en-US" sz="1400" dirty="0">
+                <a:solidFill>
+                  <a:schemeClr val="accent4"/>
+                </a:solidFill>
+                <a:latin typeface="Prompt" pitchFamily="34" charset="0"/>
+                <a:ea typeface="Prompt" pitchFamily="34" charset="-122"/>
+                <a:cs typeface="Prompt" pitchFamily="34" charset="-120"/>
+              </a:defRPr>
+            </a:lvl1pPr>
+          </a:lstStyle>
+          <a:p>
+            <a:pPr algn="l" indent="0" marL="0">
+              <a:buNone/>
+            </a:pPr>
+            <a:endParaRPr lang="en-US" sz="1400" dirty="0"/>
+          </a:p>
+        </p:txBody>
+      </p:sp>
+      <p:sp>
+        <p:nvSpPr>
+          <p:cNvPr id="25" name="Slide Number Placeholder 0"/>
+          <p:cNvSpPr>
+            <a:spLocks noGrp="1"/>
+          </p:cNvSpPr>
+          <p:nvPr>
+            <p:ph type="sldNum" sz="quarter" idx="4294967295"/>
+          </p:nvPr>
+        </p:nvSpPr>
+        <p:spPr>
+          <a:xfrm>
+            <a:off x="8138160" y="4773168"/>
+            <a:ext cx="548640" cy="274320"/>
+          </a:xfrm>
+          <a:prstGeom prst="rect">
+            <a:avLst/>
+          </a:prstGeom>
+          <a:extLst>
+            <a:ext uri="{C572A759-6A51-4108-AA02-DFA0A04FC94B}">
+              <ma14:wrappingTextBoxFlag xmlns:ma14="http://schemas.microsoft.com/office/mac/drawingml/2011/main" val="0"/>
+            </a:ext>
+          </a:extLst>
+        </p:spPr>
+        <p:txBody>
+          <a:bodyPr/>
+          <a:lstStyle>
+            <a:lvl1pPr>
+              <a:defRPr sz="900">
+                <a:solidFill>
+                  <a:srgbClr val="9AA5B4"/>
+                </a:solidFill>
+                <a:latin typeface="Prompt"/>
+                <a:ea typeface="Prompt"/>
+                <a:cs typeface="Prompt"/>
+              </a:defRPr>
+            </a:lvl1pPr>
+          </a:lstStyle>
+          <a:p>
+            <a:pPr algn="r"/>
+            <a:fld id="{F7021451-1387-4CA6-816F-3879F97B5CBC}" type="slidenum">
+              <a:rPr b="0" lang="en-US"/>
+              <a:t>1004</a:t>
+            </a:fld>
+            <a:endParaRPr lang="en-US"/>
+          </a:p>
+        </p:txBody>
+      </p:sp>
+    </p:spTree>
+  </p:cSld>
+  <p:clrMapOvr>
+    <a:masterClrMapping/>
+  </p:clrMapOvr>
+</p:sldLayout>
+</file>
+
+<file path=ppt/slideLayouts/slideLayout5.xml><?xml version="1.0" encoding="utf-8"?>
 <p:sldLayout xmlns:a="http://schemas.openxmlformats.org/drawingml/2006/main" xmlns:r="http://schemas.openxmlformats.org/officeDocument/2006/relationships" xmlns:p="http://schemas.openxmlformats.org/presentationml/2006/main" preserve="1">
   <p:cSld name="CONTENT_TH">
     <p:bg>
@@ -2475,6 +2667,9 @@
                 <a:solidFill>
                   <a:schemeClr val="accent1"/>
                 </a:solidFill>
+                <a:latin typeface="Prompt" pitchFamily="34" charset="0"/>
+                <a:ea typeface="Prompt" pitchFamily="34" charset="-122"/>
+                <a:cs typeface="Prompt" pitchFamily="34" charset="-120"/>
               </a:defRPr>
             </a:lvl1pPr>
           </a:lstStyle>
@@ -2514,6 +2709,9 @@
                 <a:solidFill>
                   <a:schemeClr val="tx1"/>
                 </a:solidFill>
+                <a:latin typeface="Prompt" pitchFamily="34" charset="0"/>
+                <a:ea typeface="Prompt" pitchFamily="34" charset="-122"/>
+                <a:cs typeface="Prompt" pitchFamily="34" charset="-120"/>
               </a:defRPr>
             </a:lvl1pPr>
           </a:lstStyle>
@@ -2554,6 +2752,9 @@
                 <a:solidFill>
                   <a:srgbClr val="9AA5B4"/>
                 </a:solidFill>
+                <a:latin typeface="Prompt" pitchFamily="34" charset="0"/>
+                <a:ea typeface="Prompt" pitchFamily="34" charset="-122"/>
+                <a:cs typeface="Prompt" pitchFamily="34" charset="-120"/>
               </a:rPr>
               <a:t>Chayanun Sungsa-ard  |  691401708  |  MBA  |  ENG 501</a:t>
             </a:r>
@@ -2593,6 +2794,9 @@
                 <a:solidFill>
                   <a:srgbClr val="9AA5B4"/>
                 </a:solidFill>
+                <a:latin typeface="Prompt"/>
+                <a:ea typeface="Prompt"/>
+                <a:cs typeface="Prompt"/>
               </a:defRPr>
             </a:lvl1pPr>
           </a:lstStyle>
@@ -2600,7 +2804,7 @@
             <a:pPr algn="r"/>
             <a:fld id="{F7021451-1387-4CA6-816F-3879F97B5CBC}" type="slidenum">
               <a:rPr b="0" lang="en-US"/>
-              <a:t>1004</a:t>
+              <a:t>1005</a:t>
             </a:fld>
             <a:endParaRPr lang="en-US"/>
           </a:p>
@@ -2663,6 +2867,9 @@
                 <a:solidFill>
                   <a:srgbClr val="9AA5B4"/>
                 </a:solidFill>
+                <a:latin typeface="Poppins"/>
+                <a:ea typeface="Poppins"/>
+                <a:cs typeface="Poppins"/>
               </a:defRPr>
             </a:lvl1pPr>
           </a:lstStyle>
@@ -2684,6 +2891,7 @@
     <p:sldLayoutId id="2147483650" r:id="rId2"/>
     <p:sldLayoutId id="2147483651" r:id="rId3"/>
     <p:sldLayoutId id="2147483652" r:id="rId4"/>
+    <p:sldLayoutId id="2147483653" r:id="rId5"/>
   </p:sldLayoutIdLst>
   <p:hf sldNum="0" hdr="0" ftr="0" dt="0"/>
   <p:txStyles>
@@ -2987,6 +3195,9 @@
                 <a:solidFill>
                   <a:schemeClr val="bg1"/>
                 </a:solidFill>
+                <a:latin typeface="Poppins" pitchFamily="34" charset="0"/>
+                <a:ea typeface="Poppins" pitchFamily="34" charset="-122"/>
+                <a:cs typeface="Poppins" pitchFamily="34" charset="-120"/>
               </a:rPr>
               <a:t>Artificial Intelligence and Work Performance</a:t>
             </a:r>
@@ -3025,6 +3236,9 @@
                 <a:solidFill>
                   <a:schemeClr val="accent4"/>
                 </a:solidFill>
+                <a:latin typeface="Poppins" pitchFamily="34" charset="0"/>
+                <a:ea typeface="Poppins" pitchFamily="34" charset="-122"/>
+                <a:cs typeface="Poppins" pitchFamily="34" charset="-120"/>
               </a:rPr>
               <a:t>Evidence from two recent field experiments</a:t>
             </a:r>
@@ -3085,6 +3299,9 @@
                 <a:solidFill>
                   <a:srgbClr val="BFE6E0"/>
                 </a:solidFill>
+                <a:latin typeface="Poppins" pitchFamily="34" charset="0"/>
+                <a:ea typeface="Poppins" pitchFamily="34" charset="-122"/>
+                <a:cs typeface="Poppins" pitchFamily="34" charset="-120"/>
               </a:rPr>
               <a:t>Central question: How does AI affect productivity, work quality, and business performance?</a:t>
             </a:r>
@@ -3148,6 +3365,9 @@
                 <a:solidFill>
                   <a:srgbClr val="BFE6E0"/>
                 </a:solidFill>
+                <a:latin typeface="Poppins" pitchFamily="34" charset="0"/>
+                <a:ea typeface="Poppins" pitchFamily="34" charset="-122"/>
+                <a:cs typeface="Poppins" pitchFamily="34" charset="-120"/>
               </a:rPr>
               <a:t>Article 2</a:t>
             </a:r>
@@ -3184,6 +3404,9 @@
                 <a:solidFill>
                   <a:srgbClr val="FFFFFF"/>
                 </a:solidFill>
+                <a:latin typeface="Poppins" pitchFamily="34" charset="0"/>
+                <a:ea typeface="Poppins" pitchFamily="34" charset="-122"/>
+                <a:cs typeface="Poppins" pitchFamily="34" charset="-120"/>
               </a:rPr>
               <a:t>Navigating the Jagged Technological Frontier: Field Experimental Evidence of the Effects of AI on Knowledge Worker Productivity and Quality</a:t>
             </a:r>
@@ -3220,6 +3443,9 @@
                 <a:solidFill>
                   <a:srgbClr val="BFE6E0"/>
                 </a:solidFill>
+                <a:latin typeface="Poppins" pitchFamily="34" charset="0"/>
+                <a:ea typeface="Poppins" pitchFamily="34" charset="-122"/>
+                <a:cs typeface="Poppins" pitchFamily="34" charset="-120"/>
               </a:rPr>
               <a:t>Fabrizio Dell'Acqua et al.  |  Harvard Business School Working Paper 24-013, 2023</a:t>
             </a:r>
@@ -3283,6 +3509,9 @@
                 <a:solidFill>
                   <a:srgbClr val="BFE6E0"/>
                 </a:solidFill>
+                <a:latin typeface="Poppins" pitchFamily="34" charset="0"/>
+                <a:ea typeface="Poppins" pitchFamily="34" charset="-122"/>
+                <a:cs typeface="Poppins" pitchFamily="34" charset="-120"/>
               </a:rPr>
               <a:t>Article 5</a:t>
             </a:r>
@@ -3319,6 +3548,9 @@
                 <a:solidFill>
                   <a:srgbClr val="FFFFFF"/>
                 </a:solidFill>
+                <a:latin typeface="Poppins" pitchFamily="34" charset="0"/>
+                <a:ea typeface="Poppins" pitchFamily="34" charset="-122"/>
+                <a:cs typeface="Poppins" pitchFamily="34" charset="-120"/>
               </a:rPr>
               <a:t>The Uneven Impact of Generative Artificial Intelligence on Entrepreneurial Performance: Evidence from a Field Experiment in Kenya</a:t>
             </a:r>
@@ -3355,6 +3587,9 @@
                 <a:solidFill>
                   <a:srgbClr val="BFE6E0"/>
                 </a:solidFill>
+                <a:latin typeface="Poppins" pitchFamily="34" charset="0"/>
+                <a:ea typeface="Poppins" pitchFamily="34" charset="-122"/>
+                <a:cs typeface="Poppins" pitchFamily="34" charset="-120"/>
               </a:rPr>
               <a:t>Nicholas G. Otis et al.  |  Management Science, Vol. 72, No. 7, 2026  |  DOI 10.1287/mnsc.2024.06909</a:t>
             </a:r>
@@ -3391,6 +3626,9 @@
                 <a:solidFill>
                   <a:srgbClr val="BFE6E0"/>
                 </a:solidFill>
+                <a:latin typeface="Poppins" pitchFamily="34" charset="0"/>
+                <a:ea typeface="Poppins" pitchFamily="34" charset="-122"/>
+                <a:cs typeface="Poppins" pitchFamily="34" charset="-120"/>
               </a:rPr>
               <a:t>Today's path</a:t>
             </a:r>
@@ -3454,6 +3692,9 @@
                 <a:solidFill>
                   <a:srgbClr val="FFFFFF"/>
                 </a:solidFill>
+                <a:latin typeface="Poppins" pitchFamily="34" charset="0"/>
+                <a:ea typeface="Poppins" pitchFamily="34" charset="-122"/>
+                <a:cs typeface="Poppins" pitchFamily="34" charset="-120"/>
               </a:rPr>
               <a:t>1  Introduction</a:t>
             </a:r>
@@ -3517,6 +3758,9 @@
                 <a:solidFill>
                   <a:srgbClr val="FFFFFF"/>
                 </a:solidFill>
+                <a:latin typeface="Poppins" pitchFamily="34" charset="0"/>
+                <a:ea typeface="Poppins" pitchFamily="34" charset="-122"/>
+                <a:cs typeface="Poppins" pitchFamily="34" charset="-120"/>
               </a:rPr>
               <a:t>2  Article 2: Method</a:t>
             </a:r>
@@ -3580,6 +3824,9 @@
                 <a:solidFill>
                   <a:srgbClr val="FFFFFF"/>
                 </a:solidFill>
+                <a:latin typeface="Poppins" pitchFamily="34" charset="0"/>
+                <a:ea typeface="Poppins" pitchFamily="34" charset="-122"/>
+                <a:cs typeface="Poppins" pitchFamily="34" charset="-120"/>
               </a:rPr>
               <a:t>3  Article 2: Findings</a:t>
             </a:r>
@@ -3643,6 +3890,9 @@
                 <a:solidFill>
                   <a:srgbClr val="FFFFFF"/>
                 </a:solidFill>
+                <a:latin typeface="Poppins" pitchFamily="34" charset="0"/>
+                <a:ea typeface="Poppins" pitchFamily="34" charset="-122"/>
+                <a:cs typeface="Poppins" pitchFamily="34" charset="-120"/>
               </a:rPr>
               <a:t>4  Article 5: Entrepreneurs</a:t>
             </a:r>
@@ -3706,6 +3956,9 @@
                 <a:solidFill>
                   <a:srgbClr val="FFFFFF"/>
                 </a:solidFill>
+                <a:latin typeface="Poppins" pitchFamily="34" charset="0"/>
+                <a:ea typeface="Poppins" pitchFamily="34" charset="-122"/>
+                <a:cs typeface="Poppins" pitchFamily="34" charset="-120"/>
               </a:rPr>
               <a:t>5  Discussion</a:t>
             </a:r>
@@ -3742,6 +3995,9 @@
                 <a:solidFill>
                   <a:srgbClr val="FFFFFF"/>
                 </a:solidFill>
+                <a:latin typeface="Poppins" pitchFamily="34" charset="0"/>
+                <a:ea typeface="Poppins" pitchFamily="34" charset="-122"/>
+                <a:cs typeface="Poppins" pitchFamily="34" charset="-120"/>
               </a:rPr>
               <a:t>Chayanun Sungsa-ard</a:t>
             </a:r>
@@ -3756,6 +4012,9 @@
                 <a:solidFill>
                   <a:srgbClr val="BFE6E0"/>
                 </a:solidFill>
+                <a:latin typeface="Poppins" pitchFamily="34" charset="0"/>
+                <a:ea typeface="Poppins" pitchFamily="34" charset="-122"/>
+                <a:cs typeface="Poppins" pitchFamily="34" charset="-120"/>
               </a:rPr>
               <a:t>Student ID 691401708  |  Master of Business Administration (MBA)  |  ENG 501 English for Master's Degree</a:t>
             </a:r>
@@ -3795,6 +4054,9 @@
                 <a:solidFill>
                   <a:srgbClr val="9AA5B4"/>
                 </a:solidFill>
+                <a:latin typeface="Poppins"/>
+                <a:ea typeface="Poppins"/>
+                <a:cs typeface="Poppins"/>
               </a:defRPr>
             </a:lvl1pPr>
           </a:lstStyle>
@@ -3864,6 +4126,9 @@
                 <a:solidFill>
                   <a:schemeClr val="accent1"/>
                 </a:solidFill>
+                <a:latin typeface="Prompt" pitchFamily="34" charset="0"/>
+                <a:ea typeface="Prompt" pitchFamily="34" charset="-122"/>
+                <a:cs typeface="Prompt" pitchFamily="34" charset="-120"/>
               </a:rPr>
               <a:t>อภิปรายผลและเปรียบเทียบ</a:t>
             </a:r>
@@ -3904,6 +4169,9 @@
                 <a:solidFill>
                   <a:schemeClr val="tx1"/>
                 </a:solidFill>
+                <a:latin typeface="Prompt" pitchFamily="34" charset="0"/>
+                <a:ea typeface="Prompt" pitchFamily="34" charset="-122"/>
+                <a:cs typeface="Prompt" pitchFamily="34" charset="-120"/>
               </a:rPr>
               <a:t>AI เป็นเครื่องมือ ไม่ใช่หลักประกันความสำเร็จ</a:t>
             </a:r>
@@ -4065,6 +4333,9 @@
                 <a:solidFill>
                   <a:schemeClr val="tx2"/>
                 </a:solidFill>
+                <a:latin typeface="Prompt" pitchFamily="34" charset="0"/>
+                <a:ea typeface="Prompt" pitchFamily="34" charset="-122"/>
+                <a:cs typeface="Prompt" pitchFamily="34" charset="-120"/>
               </a:rPr>
               <a:t>อภิปรายผล</a:t>
             </a:r>
@@ -4128,6 +4399,9 @@
                 <a:solidFill>
                   <a:srgbClr val="FFFFFF"/>
                 </a:solidFill>
+                <a:latin typeface="Prompt" pitchFamily="34" charset="0"/>
+                <a:ea typeface="Prompt" pitchFamily="34" charset="-122"/>
+                <a:cs typeface="Prompt" pitchFamily="34" charset="-120"/>
               </a:rPr>
               <a:t>ผลการวิจัย (รายงานในบทความ)</a:t>
             </a:r>
@@ -4172,9 +4446,9 @@
                         <a:buNone/>
                       </a:pPr>
                       <a:endParaRPr lang="en-US" sz="1050" dirty="0">
-                        <a:latin typeface="Tahoma" charset="0"/>
-                        <a:ea typeface="Tahoma" charset="0"/>
-                        <a:cs typeface="Tahoma" charset="0"/>
+                        <a:latin typeface="Prompt" charset="0"/>
+                        <a:ea typeface="Prompt" charset="0"/>
+                        <a:cs typeface="Prompt" charset="0"/>
                       </a:endParaRPr>
                     </a:p>
                   </a:txBody>
@@ -4233,16 +4507,16 @@
                           <a:solidFill>
                             <a:srgbClr val="FFFFFF"/>
                           </a:solidFill>
-                          <a:latin typeface="Tahoma" pitchFamily="34" charset="0"/>
-                          <a:ea typeface="Tahoma" pitchFamily="34" charset="-122"/>
-                          <a:cs typeface="Tahoma" pitchFamily="34" charset="-120"/>
+                          <a:latin typeface="Prompt" pitchFamily="34" charset="0"/>
+                          <a:ea typeface="Prompt" pitchFamily="34" charset="-122"/>
+                          <a:cs typeface="Prompt" pitchFamily="34" charset="-120"/>
                         </a:rPr>
                         <a:t>บทความที่ 2  |  Dell'Acqua et al. (2023)</a:t>
                       </a:r>
                       <a:endParaRPr lang="en-US" sz="1050" dirty="0">
-                        <a:latin typeface="Tahoma" charset="0"/>
-                        <a:ea typeface="Tahoma" charset="0"/>
-                        <a:cs typeface="Tahoma" charset="0"/>
+                        <a:latin typeface="Prompt" charset="0"/>
+                        <a:ea typeface="Prompt" charset="0"/>
+                        <a:cs typeface="Prompt" charset="0"/>
                       </a:endParaRPr>
                     </a:p>
                   </a:txBody>
@@ -4301,16 +4575,16 @@
                           <a:solidFill>
                             <a:srgbClr val="FFFFFF"/>
                           </a:solidFill>
-                          <a:latin typeface="Tahoma" pitchFamily="34" charset="0"/>
-                          <a:ea typeface="Tahoma" pitchFamily="34" charset="-122"/>
-                          <a:cs typeface="Tahoma" pitchFamily="34" charset="-120"/>
+                          <a:latin typeface="Prompt" pitchFamily="34" charset="0"/>
+                          <a:ea typeface="Prompt" pitchFamily="34" charset="-122"/>
+                          <a:cs typeface="Prompt" pitchFamily="34" charset="-120"/>
                         </a:rPr>
                         <a:t>บทความที่ 5  |  Otis et al. (2026)</a:t>
                       </a:r>
                       <a:endParaRPr lang="en-US" sz="1050" dirty="0">
-                        <a:latin typeface="Tahoma" charset="0"/>
-                        <a:ea typeface="Tahoma" charset="0"/>
-                        <a:cs typeface="Tahoma" charset="0"/>
+                        <a:latin typeface="Prompt" charset="0"/>
+                        <a:ea typeface="Prompt" charset="0"/>
+                        <a:cs typeface="Prompt" charset="0"/>
                       </a:endParaRPr>
                     </a:p>
                   </a:txBody>
@@ -4371,16 +4645,16 @@
                           <a:solidFill>
                             <a:srgbClr val="1B2A4A"/>
                           </a:solidFill>
-                          <a:latin typeface="Tahoma" pitchFamily="34" charset="0"/>
-                          <a:ea typeface="Tahoma" pitchFamily="34" charset="-122"/>
-                          <a:cs typeface="Tahoma" pitchFamily="34" charset="-120"/>
+                          <a:latin typeface="Prompt" pitchFamily="34" charset="0"/>
+                          <a:ea typeface="Prompt" pitchFamily="34" charset="-122"/>
+                          <a:cs typeface="Prompt" pitchFamily="34" charset="-120"/>
                         </a:rPr>
                         <a:t>กลุ่มที่ศึกษา</a:t>
                       </a:r>
                       <a:endParaRPr lang="en-US" sz="1050" dirty="0">
-                        <a:latin typeface="Tahoma" charset="0"/>
-                        <a:ea typeface="Tahoma" charset="0"/>
-                        <a:cs typeface="Tahoma" charset="0"/>
+                        <a:latin typeface="Prompt" charset="0"/>
+                        <a:ea typeface="Prompt" charset="0"/>
+                        <a:cs typeface="Prompt" charset="0"/>
                       </a:endParaRPr>
                     </a:p>
                   </a:txBody>
@@ -4439,16 +4713,16 @@
                           <a:solidFill>
                             <a:srgbClr val="5A6472"/>
                           </a:solidFill>
-                          <a:latin typeface="Tahoma" pitchFamily="34" charset="0"/>
-                          <a:ea typeface="Tahoma" pitchFamily="34" charset="-122"/>
-                          <a:cs typeface="Tahoma" pitchFamily="34" charset="-120"/>
+                          <a:latin typeface="Prompt" pitchFamily="34" charset="0"/>
+                          <a:ea typeface="Prompt" pitchFamily="34" charset="-122"/>
+                          <a:cs typeface="Prompt" pitchFamily="34" charset="-120"/>
                         </a:rPr>
                         <a:t>พนักงานความรู้และที่ปรึกษา (BCG)</a:t>
                       </a:r>
                       <a:endParaRPr lang="en-US" sz="1050" dirty="0">
-                        <a:latin typeface="Tahoma" charset="0"/>
-                        <a:ea typeface="Tahoma" charset="0"/>
-                        <a:cs typeface="Tahoma" charset="0"/>
+                        <a:latin typeface="Prompt" charset="0"/>
+                        <a:ea typeface="Prompt" charset="0"/>
+                        <a:cs typeface="Prompt" charset="0"/>
                       </a:endParaRPr>
                     </a:p>
                   </a:txBody>
@@ -4507,16 +4781,16 @@
                           <a:solidFill>
                             <a:srgbClr val="5A6472"/>
                           </a:solidFill>
-                          <a:latin typeface="Tahoma" pitchFamily="34" charset="0"/>
-                          <a:ea typeface="Tahoma" pitchFamily="34" charset="-122"/>
-                          <a:cs typeface="Tahoma" pitchFamily="34" charset="-120"/>
+                          <a:latin typeface="Prompt" pitchFamily="34" charset="0"/>
+                          <a:ea typeface="Prompt" pitchFamily="34" charset="-122"/>
+                          <a:cs typeface="Prompt" pitchFamily="34" charset="-120"/>
                         </a:rPr>
                         <a:t>ผู้ประกอบการในประเทศเคนยา</a:t>
                       </a:r>
                       <a:endParaRPr lang="en-US" sz="1050" dirty="0">
-                        <a:latin typeface="Tahoma" charset="0"/>
-                        <a:ea typeface="Tahoma" charset="0"/>
-                        <a:cs typeface="Tahoma" charset="0"/>
+                        <a:latin typeface="Prompt" charset="0"/>
+                        <a:ea typeface="Prompt" charset="0"/>
+                        <a:cs typeface="Prompt" charset="0"/>
                       </a:endParaRPr>
                     </a:p>
                   </a:txBody>
@@ -4577,16 +4851,16 @@
                           <a:solidFill>
                             <a:srgbClr val="1B2A4A"/>
                           </a:solidFill>
-                          <a:latin typeface="Tahoma" pitchFamily="34" charset="0"/>
-                          <a:ea typeface="Tahoma" pitchFamily="34" charset="-122"/>
-                          <a:cs typeface="Tahoma" pitchFamily="34" charset="-120"/>
+                          <a:latin typeface="Prompt" pitchFamily="34" charset="0"/>
+                          <a:ea typeface="Prompt" pitchFamily="34" charset="-122"/>
+                          <a:cs typeface="Prompt" pitchFamily="34" charset="-120"/>
                         </a:rPr>
                         <a:t>ผลหลัก</a:t>
                       </a:r>
                       <a:endParaRPr lang="en-US" sz="1050" dirty="0">
-                        <a:latin typeface="Tahoma" charset="0"/>
-                        <a:ea typeface="Tahoma" charset="0"/>
-                        <a:cs typeface="Tahoma" charset="0"/>
+                        <a:latin typeface="Prompt" charset="0"/>
+                        <a:ea typeface="Prompt" charset="0"/>
+                        <a:cs typeface="Prompt" charset="0"/>
                       </a:endParaRPr>
                     </a:p>
                   </a:txBody>
@@ -4645,16 +4919,16 @@
                           <a:solidFill>
                             <a:srgbClr val="5A6472"/>
                           </a:solidFill>
-                          <a:latin typeface="Tahoma" pitchFamily="34" charset="0"/>
-                          <a:ea typeface="Tahoma" pitchFamily="34" charset="-122"/>
-                          <a:cs typeface="Tahoma" pitchFamily="34" charset="-120"/>
+                          <a:latin typeface="Prompt" pitchFamily="34" charset="0"/>
+                          <a:ea typeface="Prompt" pitchFamily="34" charset="-122"/>
+                          <a:cs typeface="Prompt" pitchFamily="34" charset="-120"/>
                         </a:rPr>
                         <a:t>ผลิตภาพและคุณภาพงานสูงขึ้นสำหรับงานภายในพรมแดนความสามารถของ AI</a:t>
                       </a:r>
                       <a:endParaRPr lang="en-US" sz="1050" dirty="0">
-                        <a:latin typeface="Tahoma" charset="0"/>
-                        <a:ea typeface="Tahoma" charset="0"/>
-                        <a:cs typeface="Tahoma" charset="0"/>
+                        <a:latin typeface="Prompt" charset="0"/>
+                        <a:ea typeface="Prompt" charset="0"/>
+                        <a:cs typeface="Prompt" charset="0"/>
                       </a:endParaRPr>
                     </a:p>
                   </a:txBody>
@@ -4713,16 +4987,16 @@
                           <a:solidFill>
                             <a:srgbClr val="5A6472"/>
                           </a:solidFill>
-                          <a:latin typeface="Tahoma" pitchFamily="34" charset="0"/>
-                          <a:ea typeface="Tahoma" pitchFamily="34" charset="-122"/>
-                          <a:cs typeface="Tahoma" pitchFamily="34" charset="-120"/>
+                          <a:latin typeface="Prompt" pitchFamily="34" charset="0"/>
+                          <a:ea typeface="Prompt" pitchFamily="34" charset="-122"/>
+                          <a:cs typeface="Prompt" pitchFamily="34" charset="-120"/>
                         </a:rPr>
                         <a:t>ไม่พบผลเฉลี่ยของการทดลองต่อรายได้และกำไรอย่างชัดเจน</a:t>
                       </a:r>
                       <a:endParaRPr lang="en-US" sz="1050" dirty="0">
-                        <a:latin typeface="Tahoma" charset="0"/>
-                        <a:ea typeface="Tahoma" charset="0"/>
-                        <a:cs typeface="Tahoma" charset="0"/>
+                        <a:latin typeface="Prompt" charset="0"/>
+                        <a:ea typeface="Prompt" charset="0"/>
+                        <a:cs typeface="Prompt" charset="0"/>
                       </a:endParaRPr>
                     </a:p>
                   </a:txBody>
@@ -4783,16 +5057,16 @@
                           <a:solidFill>
                             <a:srgbClr val="1B2A4A"/>
                           </a:solidFill>
-                          <a:latin typeface="Tahoma" pitchFamily="34" charset="0"/>
-                          <a:ea typeface="Tahoma" pitchFamily="34" charset="-122"/>
-                          <a:cs typeface="Tahoma" pitchFamily="34" charset="-120"/>
+                          <a:latin typeface="Prompt" pitchFamily="34" charset="0"/>
+                          <a:ea typeface="Prompt" pitchFamily="34" charset="-122"/>
+                          <a:cs typeface="Prompt" pitchFamily="34" charset="-120"/>
                         </a:rPr>
                         <a:t>ข้อจำกัดหรือข้อค้นพบสำคัญ</a:t>
                       </a:r>
                       <a:endParaRPr lang="en-US" sz="1050" dirty="0">
-                        <a:latin typeface="Tahoma" charset="0"/>
-                        <a:ea typeface="Tahoma" charset="0"/>
-                        <a:cs typeface="Tahoma" charset="0"/>
+                        <a:latin typeface="Prompt" charset="0"/>
+                        <a:ea typeface="Prompt" charset="0"/>
+                        <a:cs typeface="Prompt" charset="0"/>
                       </a:endParaRPr>
                     </a:p>
                   </a:txBody>
@@ -4851,16 +5125,16 @@
                           <a:solidFill>
                             <a:srgbClr val="5A6472"/>
                           </a:solidFill>
-                          <a:latin typeface="Tahoma" pitchFamily="34" charset="0"/>
-                          <a:ea typeface="Tahoma" pitchFamily="34" charset="-122"/>
-                          <a:cs typeface="Tahoma" pitchFamily="34" charset="-120"/>
+                          <a:latin typeface="Prompt" pitchFamily="34" charset="0"/>
+                          <a:ea typeface="Prompt" pitchFamily="34" charset="-122"/>
+                          <a:cs typeface="Prompt" pitchFamily="34" charset="-120"/>
                         </a:rPr>
                         <a:t>ความถูกต้องลดลงในงานที่อยู่นอกพรมแดนนั้น</a:t>
                       </a:r>
                       <a:endParaRPr lang="en-US" sz="1050" dirty="0">
-                        <a:latin typeface="Tahoma" charset="0"/>
-                        <a:ea typeface="Tahoma" charset="0"/>
-                        <a:cs typeface="Tahoma" charset="0"/>
+                        <a:latin typeface="Prompt" charset="0"/>
+                        <a:ea typeface="Prompt" charset="0"/>
+                        <a:cs typeface="Prompt" charset="0"/>
                       </a:endParaRPr>
                     </a:p>
                   </a:txBody>
@@ -4919,16 +5193,16 @@
                           <a:solidFill>
                             <a:srgbClr val="5A6472"/>
                           </a:solidFill>
-                          <a:latin typeface="Tahoma" pitchFamily="34" charset="0"/>
-                          <a:ea typeface="Tahoma" pitchFamily="34" charset="-122"/>
-                          <a:cs typeface="Tahoma" pitchFamily="34" charset="-120"/>
+                          <a:latin typeface="Prompt" pitchFamily="34" charset="0"/>
+                          <a:ea typeface="Prompt" pitchFamily="34" charset="-122"/>
+                          <a:cs typeface="Prompt" pitchFamily="34" charset="-120"/>
                         </a:rPr>
                         <a:t>ผลลัพธ์ต่างกันตามผลการดำเนินงานตั้งต้น และตามคำแนะนำของ AI ที่เลือกนำไปปฏิบัติ</a:t>
                       </a:r>
                       <a:endParaRPr lang="en-US" sz="1050" dirty="0">
-                        <a:latin typeface="Tahoma" charset="0"/>
-                        <a:ea typeface="Tahoma" charset="0"/>
-                        <a:cs typeface="Tahoma" charset="0"/>
+                        <a:latin typeface="Prompt" charset="0"/>
+                        <a:ea typeface="Prompt" charset="0"/>
+                        <a:cs typeface="Prompt" charset="0"/>
                       </a:endParaRPr>
                     </a:p>
                   </a:txBody>
@@ -5069,6 +5343,9 @@
                 <a:solidFill>
                   <a:schemeClr val="tx2"/>
                 </a:solidFill>
+                <a:latin typeface="Prompt" pitchFamily="34" charset="0"/>
+                <a:ea typeface="Prompt" pitchFamily="34" charset="-122"/>
+                <a:cs typeface="Prompt" pitchFamily="34" charset="-120"/>
               </a:rPr>
               <a:t>การตีความ</a:t>
             </a:r>
@@ -5105,6 +5382,9 @@
                 <a:solidFill>
                   <a:srgbClr val="FFFFFF"/>
                 </a:solidFill>
+                <a:latin typeface="Prompt" pitchFamily="34" charset="0"/>
+                <a:ea typeface="Prompt" pitchFamily="34" charset="-122"/>
+                <a:cs typeface="Prompt" pitchFamily="34" charset="-120"/>
               </a:rPr>
               <a:t>บทสรุป</a:t>
             </a:r>
@@ -5141,6 +5421,9 @@
                 <a:solidFill>
                   <a:srgbClr val="FFFFFF"/>
                 </a:solidFill>
+                <a:latin typeface="Prompt" pitchFamily="34" charset="0"/>
+                <a:ea typeface="Prompt" pitchFamily="34" charset="-122"/>
+                <a:cs typeface="Prompt" pitchFamily="34" charset="-120"/>
               </a:rPr>
               <a:t>AI ส่งผลต่อผลการทำงานจริงได้ แต่ผลกระทบขึ้นอยู่กับความเหมาะสมของงาน พฤติกรรมของผู้ใช้ และวิจารณญาณของมนุษย์</a:t>
             </a:r>
@@ -5197,14 +5480,17 @@
               <a:buNone/>
             </a:pPr>
             <a:r>
-              <a:rPr lang="en-US" sz="1000" dirty="0">
+              <a:rPr lang="en-US" sz="950" dirty="0">
                 <a:solidFill>
                   <a:srgbClr val="FFFFFF"/>
                 </a:solidFill>
+                <a:latin typeface="Prompt" pitchFamily="34" charset="0"/>
+                <a:ea typeface="Prompt" pitchFamily="34" charset="-122"/>
+                <a:cs typeface="Prompt" pitchFamily="34" charset="-120"/>
               </a:rPr>
               <a:t>เลือกงานให้เหมาะกับสิ่งที่ AI ทำได้ดี</a:t>
             </a:r>
-            <a:endParaRPr lang="en-US" sz="1000" dirty="0"/>
+            <a:endParaRPr lang="en-US" sz="950" dirty="0"/>
           </a:p>
         </p:txBody>
       </p:sp>
@@ -5257,14 +5543,17 @@
               <a:buNone/>
             </a:pPr>
             <a:r>
-              <a:rPr lang="en-US" sz="1000" dirty="0">
+              <a:rPr lang="en-US" sz="950" dirty="0">
                 <a:solidFill>
                   <a:srgbClr val="FFFFFF"/>
                 </a:solidFill>
+                <a:latin typeface="Prompt" pitchFamily="34" charset="0"/>
+                <a:ea typeface="Prompt" pitchFamily="34" charset="-122"/>
+                <a:cs typeface="Prompt" pitchFamily="34" charset="-120"/>
               </a:rPr>
               <a:t>ประเมินคำแนะนำของ AI อย่างมีวิจารณญาณก่อนนำไปใช้</a:t>
             </a:r>
-            <a:endParaRPr lang="en-US" sz="1000" dirty="0"/>
+            <a:endParaRPr lang="en-US" sz="950" dirty="0"/>
           </a:p>
         </p:txBody>
       </p:sp>
@@ -5317,14 +5606,17 @@
               <a:buNone/>
             </a:pPr>
             <a:r>
-              <a:rPr lang="en-US" sz="1000" dirty="0">
+              <a:rPr lang="en-US" sz="950" dirty="0">
                 <a:solidFill>
                   <a:srgbClr val="FFFFFF"/>
                 </a:solidFill>
+                <a:latin typeface="Prompt" pitchFamily="34" charset="0"/>
+                <a:ea typeface="Prompt" pitchFamily="34" charset="-122"/>
+                <a:cs typeface="Prompt" pitchFamily="34" charset="-120"/>
               </a:rPr>
               <a:t>ให้มนุษย์เป็นผู้ตัดสินใจขั้นสุดท้าย</a:t>
             </a:r>
-            <a:endParaRPr lang="en-US" sz="1000" dirty="0"/>
+            <a:endParaRPr lang="en-US" sz="950" dirty="0"/>
           </a:p>
         </p:txBody>
       </p:sp>
@@ -5405,6 +5697,9 @@
                 <a:solidFill>
                   <a:schemeClr val="tx2"/>
                 </a:solidFill>
+                <a:latin typeface="Prompt" pitchFamily="34" charset="0"/>
+                <a:ea typeface="Prompt" pitchFamily="34" charset="-122"/>
+                <a:cs typeface="Prompt" pitchFamily="34" charset="-120"/>
               </a:rPr>
               <a:t>Dell'Acqua et al. (2023), Harvard Business School Working Paper 24-013   |   Otis et al. (2026), Management Science, 72(7), https://doi.org/10.1287/mnsc.2024.06909</a:t>
             </a:r>
@@ -5492,6 +5787,9 @@
                 <a:solidFill>
                   <a:srgbClr val="2E8B86"/>
                 </a:solidFill>
+                <a:latin typeface="Prompt" pitchFamily="34" charset="0"/>
+                <a:ea typeface="Prompt" pitchFamily="34" charset="-122"/>
+                <a:cs typeface="Prompt" pitchFamily="34" charset="-120"/>
               </a:rPr>
               <a:t>ถัดไป:  </a:t>
             </a:r>
@@ -5503,6 +5801,9 @@
                 <a:solidFill>
                   <a:srgbClr val="1B2A4A"/>
                 </a:solidFill>
+                <a:latin typeface="Prompt" pitchFamily="34" charset="0"/>
+                <a:ea typeface="Prompt" pitchFamily="34" charset="-122"/>
+                <a:cs typeface="Prompt" pitchFamily="34" charset="-120"/>
               </a:rPr>
               <a:t>ขอบคุณครับ ยินดีรับคำถาม</a:t>
             </a:r>
@@ -5542,6 +5843,9 @@
                 <a:solidFill>
                   <a:srgbClr val="9AA5B4"/>
                 </a:solidFill>
+                <a:latin typeface="Prompt"/>
+                <a:ea typeface="Prompt"/>
+                <a:cs typeface="Prompt"/>
               </a:defRPr>
             </a:lvl1pPr>
           </a:lstStyle>
@@ -5611,6 +5915,9 @@
                 <a:solidFill>
                   <a:schemeClr val="accent1"/>
                 </a:solidFill>
+                <a:latin typeface="Poppins" pitchFamily="34" charset="0"/>
+                <a:ea typeface="Poppins" pitchFamily="34" charset="-122"/>
+                <a:cs typeface="Poppins" pitchFamily="34" charset="-120"/>
               </a:rPr>
               <a:t>Article 2  |  Research purpose and method</a:t>
             </a:r>
@@ -5651,6 +5958,9 @@
                 <a:solidFill>
                   <a:schemeClr val="tx1"/>
                 </a:solidFill>
+                <a:latin typeface="Poppins" pitchFamily="34" charset="0"/>
+                <a:ea typeface="Poppins" pitchFamily="34" charset="-122"/>
+                <a:cs typeface="Poppins" pitchFamily="34" charset="-120"/>
               </a:rPr>
               <a:t>Navigating the Jagged Technological Frontier</a:t>
             </a:r>
@@ -5812,6 +6122,9 @@
                 <a:solidFill>
                   <a:schemeClr val="tx2"/>
                 </a:solidFill>
+                <a:latin typeface="Poppins" pitchFamily="34" charset="0"/>
+                <a:ea typeface="Poppins" pitchFamily="34" charset="-122"/>
+                <a:cs typeface="Poppins" pitchFamily="34" charset="-120"/>
               </a:rPr>
               <a:t>Article 2: Method</a:t>
             </a:r>
@@ -5848,6 +6161,9 @@
                 <a:solidFill>
                   <a:schemeClr val="tx2"/>
                 </a:solidFill>
+                <a:latin typeface="Poppins" pitchFamily="34" charset="0"/>
+                <a:ea typeface="Poppins" pitchFamily="34" charset="-122"/>
+                <a:cs typeface="Poppins" pitchFamily="34" charset="-120"/>
               </a:rPr>
               <a:t>Fabrizio Dell'Acqua et al.  |  Harvard Business School Working Paper 24-013, 2023</a:t>
             </a:r>
@@ -5933,6 +6249,9 @@
                 <a:solidFill>
                   <a:schemeClr val="tx1"/>
                 </a:solidFill>
+                <a:latin typeface="Poppins" pitchFamily="34" charset="0"/>
+                <a:ea typeface="Poppins" pitchFamily="34" charset="-122"/>
+                <a:cs typeface="Poppins" pitchFamily="34" charset="-120"/>
               </a:rPr>
               <a:t>Research partner</a:t>
             </a:r>
@@ -5947,6 +6266,9 @@
                 <a:solidFill>
                   <a:schemeClr val="tx2"/>
                 </a:solidFill>
+                <a:latin typeface="Poppins" pitchFamily="34" charset="0"/>
+                <a:ea typeface="Poppins" pitchFamily="34" charset="-122"/>
+                <a:cs typeface="Poppins" pitchFamily="34" charset="-120"/>
               </a:rPr>
               <a:t>Field experiment conducted with Boston Consulting Group (BCG)</a:t>
             </a:r>
@@ -6032,6 +6354,9 @@
                 <a:solidFill>
                   <a:schemeClr val="tx1"/>
                 </a:solidFill>
+                <a:latin typeface="Poppins" pitchFamily="34" charset="0"/>
+                <a:ea typeface="Poppins" pitchFamily="34" charset="-122"/>
+                <a:cs typeface="Poppins" pitchFamily="34" charset="-120"/>
               </a:rPr>
               <a:t>Participants</a:t>
             </a:r>
@@ -6046,6 +6371,9 @@
                 <a:solidFill>
                   <a:schemeClr val="tx2"/>
                 </a:solidFill>
+                <a:latin typeface="Poppins" pitchFamily="34" charset="0"/>
+                <a:ea typeface="Poppins" pitchFamily="34" charset="-122"/>
+                <a:cs typeface="Poppins" pitchFamily="34" charset="-120"/>
               </a:rPr>
               <a:t>758 consultants took part</a:t>
             </a:r>
@@ -6131,6 +6459,9 @@
                 <a:solidFill>
                   <a:schemeClr val="tx1"/>
                 </a:solidFill>
+                <a:latin typeface="Poppins" pitchFamily="34" charset="0"/>
+                <a:ea typeface="Poppins" pitchFamily="34" charset="-122"/>
+                <a:cs typeface="Poppins" pitchFamily="34" charset="-120"/>
               </a:rPr>
               <a:t>Research focus</a:t>
             </a:r>
@@ -6145,6 +6476,9 @@
                 <a:solidFill>
                   <a:schemeClr val="tx2"/>
                 </a:solidFill>
+                <a:latin typeface="Poppins" pitchFamily="34" charset="0"/>
+                <a:ea typeface="Poppins" pitchFamily="34" charset="-122"/>
+                <a:cs typeface="Poppins" pitchFamily="34" charset="-120"/>
               </a:rPr>
               <a:t>Productivity, work quality, and the boundaries of AI capability</a:t>
             </a:r>
@@ -6181,6 +6515,9 @@
                 <a:solidFill>
                   <a:schemeClr val="tx1"/>
                 </a:solidFill>
+                <a:latin typeface="Poppins" pitchFamily="34" charset="0"/>
+                <a:ea typeface="Poppins" pitchFamily="34" charset="-122"/>
+                <a:cs typeface="Poppins" pitchFamily="34" charset="-120"/>
               </a:rPr>
               <a:t>Three experimental conditions</a:t>
             </a:r>
@@ -6251,6 +6588,9 @@
                 <a:solidFill>
                   <a:srgbClr val="2E8B86"/>
                 </a:solidFill>
+                <a:latin typeface="Poppins" pitchFamily="34" charset="0"/>
+                <a:ea typeface="Poppins" pitchFamily="34" charset="-122"/>
+                <a:cs typeface="Poppins" pitchFamily="34" charset="-120"/>
               </a:rPr>
               <a:t>1</a:t>
             </a:r>
@@ -6287,6 +6627,9 @@
                 <a:solidFill>
                   <a:schemeClr val="tx1"/>
                 </a:solidFill>
+                <a:latin typeface="Poppins" pitchFamily="34" charset="0"/>
+                <a:ea typeface="Poppins" pitchFamily="34" charset="-122"/>
+                <a:cs typeface="Poppins" pitchFamily="34" charset="-120"/>
               </a:rPr>
               <a:t>No AI access</a:t>
             </a:r>
@@ -6381,6 +6724,9 @@
                 <a:solidFill>
                   <a:srgbClr val="BFE6E0"/>
                 </a:solidFill>
+                <a:latin typeface="Poppins" pitchFamily="34" charset="0"/>
+                <a:ea typeface="Poppins" pitchFamily="34" charset="-122"/>
+                <a:cs typeface="Poppins" pitchFamily="34" charset="-120"/>
               </a:rPr>
               <a:t>2</a:t>
             </a:r>
@@ -6417,6 +6763,9 @@
                 <a:solidFill>
                   <a:srgbClr val="FFFFFF"/>
                 </a:solidFill>
+                <a:latin typeface="Poppins" pitchFamily="34" charset="0"/>
+                <a:ea typeface="Poppins" pitchFamily="34" charset="-122"/>
+                <a:cs typeface="Poppins" pitchFamily="34" charset="-120"/>
               </a:rPr>
               <a:t>GPT-4 access</a:t>
             </a:r>
@@ -6511,6 +6860,9 @@
                 <a:solidFill>
                   <a:srgbClr val="BFE6E0"/>
                 </a:solidFill>
+                <a:latin typeface="Poppins" pitchFamily="34" charset="0"/>
+                <a:ea typeface="Poppins" pitchFamily="34" charset="-122"/>
+                <a:cs typeface="Poppins" pitchFamily="34" charset="-120"/>
               </a:rPr>
               <a:t>3</a:t>
             </a:r>
@@ -6547,6 +6899,9 @@
                 <a:solidFill>
                   <a:srgbClr val="FFFFFF"/>
                 </a:solidFill>
+                <a:latin typeface="Poppins" pitchFamily="34" charset="0"/>
+                <a:ea typeface="Poppins" pitchFamily="34" charset="-122"/>
+                <a:cs typeface="Poppins" pitchFamily="34" charset="-120"/>
               </a:rPr>
               <a:t>GPT-4 access with prompt engineering guidance</a:t>
             </a:r>
@@ -6644,6 +6999,9 @@
                 <a:solidFill>
                   <a:schemeClr val="tx2"/>
                 </a:solidFill>
+                <a:latin typeface="Poppins" pitchFamily="34" charset="0"/>
+                <a:ea typeface="Poppins" pitchFamily="34" charset="-122"/>
+                <a:cs typeface="Poppins" pitchFamily="34" charset="-120"/>
               </a:rPr>
               <a:t>CONCEPT</a:t>
             </a:r>
@@ -6680,6 +7038,9 @@
                 <a:solidFill>
                   <a:schemeClr val="tx1"/>
                 </a:solidFill>
+                <a:latin typeface="Poppins" pitchFamily="34" charset="0"/>
+                <a:ea typeface="Poppins" pitchFamily="34" charset="-122"/>
+                <a:cs typeface="Poppins" pitchFamily="34" charset="-120"/>
               </a:rPr>
               <a:t>The "Jagged Technological Frontier"</a:t>
             </a:r>
@@ -6716,6 +7077,9 @@
                 <a:solidFill>
                   <a:schemeClr val="tx2"/>
                 </a:solidFill>
+                <a:latin typeface="Poppins" pitchFamily="34" charset="0"/>
+                <a:ea typeface="Poppins" pitchFamily="34" charset="-122"/>
+                <a:cs typeface="Poppins" pitchFamily="34" charset="-120"/>
               </a:rPr>
               <a:t>AI can perform some tasks well while struggling with other tasks that appear similarly difficult. The boundary is uneven, so workers cannot assume that a task is "safe" for AI just because it looks easy.</a:t>
             </a:r>
@@ -6800,6 +7164,9 @@
                 <a:solidFill>
                   <a:schemeClr val="tx2"/>
                 </a:solidFill>
+                <a:latin typeface="Poppins" pitchFamily="34" charset="0"/>
+                <a:ea typeface="Poppins" pitchFamily="34" charset="-122"/>
+                <a:cs typeface="Poppins" pitchFamily="34" charset="-120"/>
               </a:rPr>
               <a:t>Outside the frontier: AI struggles</a:t>
             </a:r>
@@ -6836,6 +7203,9 @@
                 <a:solidFill>
                   <a:srgbClr val="2E8B86"/>
                 </a:solidFill>
+                <a:latin typeface="Poppins" pitchFamily="34" charset="0"/>
+                <a:ea typeface="Poppins" pitchFamily="34" charset="-122"/>
+                <a:cs typeface="Poppins" pitchFamily="34" charset="-120"/>
               </a:rPr>
               <a:t>Inside the frontier: AI performs well</a:t>
             </a:r>
@@ -6872,6 +7242,9 @@
                 <a:solidFill>
                   <a:schemeClr val="tx2"/>
                 </a:solidFill>
+                <a:latin typeface="Poppins" pitchFamily="34" charset="0"/>
+                <a:ea typeface="Poppins" pitchFamily="34" charset="-122"/>
+                <a:cs typeface="Poppins" pitchFamily="34" charset="-120"/>
               </a:rPr>
               <a:t>Tasks of similar apparent difficulty</a:t>
             </a:r>
@@ -6908,6 +7281,9 @@
                 <a:solidFill>
                   <a:schemeClr val="tx2"/>
                 </a:solidFill>
+                <a:latin typeface="Poppins" pitchFamily="34" charset="0"/>
+                <a:ea typeface="Poppins" pitchFamily="34" charset="-122"/>
+                <a:cs typeface="Poppins" pitchFamily="34" charset="-120"/>
               </a:rPr>
               <a:t>Dell'Acqua, F., McFowland III, E., Mollick, E., Lifshitz-Assaf, H., Kellogg, K. C., Rajendran, S., Krayer, L., Candelon, F., &amp; Lakhani, K. R. (2023). Navigating the Jagged Technological Frontier. Harvard Business School Working Paper 24-013.</a:t>
             </a:r>
@@ -6995,6 +7371,9 @@
                 <a:solidFill>
                   <a:srgbClr val="2E8B86"/>
                 </a:solidFill>
+                <a:latin typeface="Poppins" pitchFamily="34" charset="0"/>
+                <a:ea typeface="Poppins" pitchFamily="34" charset="-122"/>
+                <a:cs typeface="Poppins" pitchFamily="34" charset="-120"/>
               </a:rPr>
               <a:t>Next:  </a:t>
             </a:r>
@@ -7006,6 +7385,9 @@
                 <a:solidFill>
                   <a:srgbClr val="1B2A4A"/>
                 </a:solidFill>
+                <a:latin typeface="Poppins" pitchFamily="34" charset="0"/>
+                <a:ea typeface="Poppins" pitchFamily="34" charset="-122"/>
+                <a:cs typeface="Poppins" pitchFamily="34" charset="-120"/>
               </a:rPr>
               <a:t>So what happened when 758 consultants actually used GPT-4?</a:t>
             </a:r>
@@ -7045,6 +7427,9 @@
                 <a:solidFill>
                   <a:srgbClr val="9AA5B4"/>
                 </a:solidFill>
+                <a:latin typeface="Poppins"/>
+                <a:ea typeface="Poppins"/>
+                <a:cs typeface="Poppins"/>
               </a:defRPr>
             </a:lvl1pPr>
           </a:lstStyle>
@@ -7114,6 +7499,9 @@
                 <a:solidFill>
                   <a:schemeClr val="accent1"/>
                 </a:solidFill>
+                <a:latin typeface="Poppins" pitchFamily="34" charset="0"/>
+                <a:ea typeface="Poppins" pitchFamily="34" charset="-122"/>
+                <a:cs typeface="Poppins" pitchFamily="34" charset="-120"/>
               </a:rPr>
               <a:t>Article 2  |  Key findings</a:t>
             </a:r>
@@ -7154,6 +7542,9 @@
                 <a:solidFill>
                   <a:schemeClr val="tx1"/>
                 </a:solidFill>
+                <a:latin typeface="Poppins" pitchFamily="34" charset="0"/>
+                <a:ea typeface="Poppins" pitchFamily="34" charset="-122"/>
+                <a:cs typeface="Poppins" pitchFamily="34" charset="-120"/>
               </a:rPr>
               <a:t>AI Can Improve Productivity, but Has Limits</a:t>
             </a:r>
@@ -7315,6 +7706,9 @@
                 <a:solidFill>
                   <a:schemeClr val="tx2"/>
                 </a:solidFill>
+                <a:latin typeface="Poppins" pitchFamily="34" charset="0"/>
+                <a:ea typeface="Poppins" pitchFamily="34" charset="-122"/>
+                <a:cs typeface="Poppins" pitchFamily="34" charset="-120"/>
               </a:rPr>
               <a:t>Article 2: Findings</a:t>
             </a:r>
@@ -7378,6 +7772,9 @@
                 <a:solidFill>
                   <a:srgbClr val="FFFFFF"/>
                 </a:solidFill>
+                <a:latin typeface="Poppins" pitchFamily="34" charset="0"/>
+                <a:ea typeface="Poppins" pitchFamily="34" charset="-122"/>
+                <a:cs typeface="Poppins" pitchFamily="34" charset="-120"/>
               </a:rPr>
               <a:t>FINDING (reported in the article)</a:t>
             </a:r>
@@ -7393,7 +7790,7 @@
         </p:nvGraphicFramePr>
         <p:xfrm>
           <a:off x="457200" y="1371600"/>
-          <a:ext cx="4846320" cy="2057400"/>
+          <a:ext cx="4846320" cy="2103120"/>
         </p:xfrm>
         <a:graphic xmlns:a="http://schemas.openxmlformats.org/drawingml/2006/main">
           <a:graphicData uri="http://schemas.openxmlformats.org/drawingml/2006/chart">
@@ -7430,8 +7827,11 @@
                 <a:solidFill>
                   <a:schemeClr val="tx2"/>
                 </a:solidFill>
-              </a:rPr>
-              <a:t>Quality is reported as "more than 40%" higher; the bar is plotted at 40. Performer figures are each group's improvement over its own baseline score.</a:t>
+                <a:latin typeface="Poppins" pitchFamily="34" charset="0"/>
+                <a:ea typeface="Poppins" pitchFamily="34" charset="-122"/>
+                <a:cs typeface="Poppins" pitchFamily="34" charset="-120"/>
+              </a:rPr>
+              <a:t>Quality is reported as "more than 40%" higher than the control group; the bar is plotted at 40. Below-/above-average rows are performer groups, each improving against its own baseline score.</a:t>
             </a:r>
             <a:endParaRPr lang="en-US" sz="750" dirty="0"/>
           </a:p>
@@ -7500,6 +7900,9 @@
                 <a:solidFill>
                   <a:srgbClr val="BFE6E0"/>
                 </a:solidFill>
+                <a:latin typeface="Poppins" pitchFamily="34" charset="0"/>
+                <a:ea typeface="Poppins" pitchFamily="34" charset="-122"/>
+                <a:cs typeface="Poppins" pitchFamily="34" charset="-120"/>
               </a:rPr>
               <a:t>Outside the frontier</a:t>
             </a:r>
@@ -7536,6 +7939,9 @@
                 <a:solidFill>
                   <a:srgbClr val="FFFFFF"/>
                 </a:solidFill>
+                <a:latin typeface="Poppins" pitchFamily="34" charset="0"/>
+                <a:ea typeface="Poppins" pitchFamily="34" charset="-122"/>
+                <a:cs typeface="Poppins" pitchFamily="34" charset="-120"/>
               </a:rPr>
               <a:t>−19</a:t>
             </a:r>
@@ -7552,7 +7958,7 @@
         <p:spPr>
           <a:xfrm>
             <a:off x="5760720" y="1883664"/>
-            <a:ext cx="1828800" cy="201168"/>
+            <a:ext cx="1920240" cy="201168"/>
           </a:xfrm>
           <a:prstGeom prst="rect">
             <a:avLst/>
@@ -7568,14 +7974,17 @@
               <a:buNone/>
             </a:pPr>
             <a:r>
-              <a:rPr lang="en-US" sz="950" dirty="0">
+              <a:rPr lang="en-US" sz="850" dirty="0">
                 <a:solidFill>
                   <a:srgbClr val="BFE6E0"/>
                 </a:solidFill>
+                <a:latin typeface="Poppins" pitchFamily="34" charset="0"/>
+                <a:ea typeface="Poppins" pitchFamily="34" charset="-122"/>
+                <a:cs typeface="Poppins" pitchFamily="34" charset="-120"/>
               </a:rPr>
               <a:t>percentage points</a:t>
             </a:r>
-            <a:endParaRPr lang="en-US" sz="950" dirty="0"/>
+            <a:endParaRPr lang="en-US" sz="850" dirty="0"/>
           </a:p>
         </p:txBody>
       </p:sp>
@@ -7632,6 +8041,9 @@
                 <a:solidFill>
                   <a:srgbClr val="FFFFFF"/>
                 </a:solidFill>
+                <a:latin typeface="Poppins" pitchFamily="34" charset="0"/>
+                <a:ea typeface="Poppins" pitchFamily="34" charset="-122"/>
+                <a:cs typeface="Poppins" pitchFamily="34" charset="-120"/>
               </a:rPr>
               <a:t>For a task selected to be outside the frontier, AI users were 19 percentage points less likely to produce correct solutions than consultants without AI.</a:t>
             </a:r>
@@ -7695,6 +8107,9 @@
                 <a:solidFill>
                   <a:schemeClr val="tx2"/>
                 </a:solidFill>
+                <a:latin typeface="Poppins" pitchFamily="34" charset="0"/>
+                <a:ea typeface="Poppins" pitchFamily="34" charset="-122"/>
+                <a:cs typeface="Poppins" pitchFamily="34" charset="-120"/>
               </a:rPr>
               <a:t>Percentage change (e.g. +12.2%) compares to a baseline. Percentage points (−19) is the gap between two success rates.</a:t>
             </a:r>
@@ -7731,6 +8146,9 @@
                 <a:solidFill>
                   <a:schemeClr val="tx1"/>
                 </a:solidFill>
+                <a:latin typeface="Poppins" pitchFamily="34" charset="0"/>
+                <a:ea typeface="Poppins" pitchFamily="34" charset="-122"/>
+                <a:cs typeface="Poppins" pitchFamily="34" charset="-120"/>
               </a:rPr>
               <a:t>Two successful patterns of AI use</a:t>
             </a:r>
@@ -7818,6 +8236,9 @@
                 <a:solidFill>
                   <a:schemeClr val="tx1"/>
                 </a:solidFill>
+                <a:latin typeface="Poppins" pitchFamily="34" charset="0"/>
+                <a:ea typeface="Poppins" pitchFamily="34" charset="-122"/>
+                <a:cs typeface="Poppins" pitchFamily="34" charset="-120"/>
               </a:rPr>
               <a:t>Centaurs  </a:t>
             </a:r>
@@ -7829,6 +8250,9 @@
                 <a:solidFill>
                   <a:schemeClr val="tx2"/>
                 </a:solidFill>
+                <a:latin typeface="Poppins" pitchFamily="34" charset="0"/>
+                <a:ea typeface="Poppins" pitchFamily="34" charset="-122"/>
+                <a:cs typeface="Poppins" pitchFamily="34" charset="-120"/>
               </a:rPr>
               <a:t>Divide tasks between humans and AI, delegating sub-tasks to whichever is better suited.</a:t>
             </a:r>
@@ -7916,6 +8340,9 @@
                 <a:solidFill>
                   <a:schemeClr val="tx1"/>
                 </a:solidFill>
+                <a:latin typeface="Poppins" pitchFamily="34" charset="0"/>
+                <a:ea typeface="Poppins" pitchFamily="34" charset="-122"/>
+                <a:cs typeface="Poppins" pitchFamily="34" charset="-120"/>
               </a:rPr>
               <a:t>Cyborgs  </a:t>
             </a:r>
@@ -7927,6 +8354,9 @@
                 <a:solidFill>
                   <a:schemeClr val="tx2"/>
                 </a:solidFill>
+                <a:latin typeface="Poppins" pitchFamily="34" charset="0"/>
+                <a:ea typeface="Poppins" pitchFamily="34" charset="-122"/>
+                <a:cs typeface="Poppins" pitchFamily="34" charset="-120"/>
               </a:rPr>
               <a:t>Integrate AI continuously into the workflow, moving back and forth with the tool.</a:t>
             </a:r>
@@ -7963,6 +8393,9 @@
                 <a:solidFill>
                   <a:schemeClr val="tx2"/>
                 </a:solidFill>
+                <a:latin typeface="Poppins" pitchFamily="34" charset="0"/>
+                <a:ea typeface="Poppins" pitchFamily="34" charset="-122"/>
+                <a:cs typeface="Poppins" pitchFamily="34" charset="-120"/>
               </a:rPr>
               <a:t>Dell'Acqua, F., McFowland III, E., Mollick, E., Lifshitz-Assaf, H., Kellogg, K. C., Rajendran, S., Krayer, L., Candelon, F., &amp; Lakhani, K. R. (2023). Navigating the Jagged Technological Frontier. Harvard Business School Working Paper 24-013.</a:t>
             </a:r>
@@ -8050,6 +8483,9 @@
                 <a:solidFill>
                   <a:srgbClr val="2E8B86"/>
                 </a:solidFill>
+                <a:latin typeface="Poppins" pitchFamily="34" charset="0"/>
+                <a:ea typeface="Poppins" pitchFamily="34" charset="-122"/>
+                <a:cs typeface="Poppins" pitchFamily="34" charset="-120"/>
               </a:rPr>
               <a:t>Next:  </a:t>
             </a:r>
@@ -8061,6 +8497,9 @@
                 <a:solidFill>
                   <a:srgbClr val="1B2A4A"/>
                 </a:solidFill>
+                <a:latin typeface="Poppins" pitchFamily="34" charset="0"/>
+                <a:ea typeface="Poppins" pitchFamily="34" charset="-122"/>
+                <a:cs typeface="Poppins" pitchFamily="34" charset="-120"/>
               </a:rPr>
               <a:t>Does this hold outside the office, for real small businesses?</a:t>
             </a:r>
@@ -8100,6 +8539,9 @@
                 <a:solidFill>
                   <a:srgbClr val="9AA5B4"/>
                 </a:solidFill>
+                <a:latin typeface="Poppins"/>
+                <a:ea typeface="Poppins"/>
+                <a:cs typeface="Poppins"/>
               </a:defRPr>
             </a:lvl1pPr>
           </a:lstStyle>
@@ -8169,6 +8611,9 @@
                 <a:solidFill>
                   <a:schemeClr val="accent1"/>
                 </a:solidFill>
+                <a:latin typeface="Poppins" pitchFamily="34" charset="0"/>
+                <a:ea typeface="Poppins" pitchFamily="34" charset="-122"/>
+                <a:cs typeface="Poppins" pitchFamily="34" charset="-120"/>
               </a:rPr>
               <a:t>Article 5  |  Research purpose and findings</a:t>
             </a:r>
@@ -8209,6 +8654,9 @@
                 <a:solidFill>
                   <a:schemeClr val="tx1"/>
                 </a:solidFill>
+                <a:latin typeface="Poppins" pitchFamily="34" charset="0"/>
+                <a:ea typeface="Poppins" pitchFamily="34" charset="-122"/>
+                <a:cs typeface="Poppins" pitchFamily="34" charset="-120"/>
               </a:rPr>
               <a:t>The Uneven Impact of Generative AI on Entrepreneurial Performance</a:t>
             </a:r>
@@ -8370,6 +8818,9 @@
                 <a:solidFill>
                   <a:schemeClr val="tx2"/>
                 </a:solidFill>
+                <a:latin typeface="Poppins" pitchFamily="34" charset="0"/>
+                <a:ea typeface="Poppins" pitchFamily="34" charset="-122"/>
+                <a:cs typeface="Poppins" pitchFamily="34" charset="-120"/>
               </a:rPr>
               <a:t>Article 5: Entrepreneurs</a:t>
             </a:r>
@@ -8406,6 +8857,9 @@
                 <a:solidFill>
                   <a:schemeClr val="tx2"/>
                 </a:solidFill>
+                <a:latin typeface="Poppins" pitchFamily="34" charset="0"/>
+                <a:ea typeface="Poppins" pitchFamily="34" charset="-122"/>
+                <a:cs typeface="Poppins" pitchFamily="34" charset="-120"/>
               </a:rPr>
               <a:t>Nicholas G. Otis et al.  |  Management Science, Vol. 72, No. 7, 2026  |  DOI 10.1287/mnsc.2024.06909</a:t>
             </a:r>
@@ -8491,6 +8945,9 @@
                 <a:solidFill>
                   <a:schemeClr val="tx1"/>
                 </a:solidFill>
+                <a:latin typeface="Poppins" pitchFamily="34" charset="0"/>
+                <a:ea typeface="Poppins" pitchFamily="34" charset="-122"/>
+                <a:cs typeface="Poppins" pitchFamily="34" charset="-120"/>
               </a:rPr>
               <a:t>Setting</a:t>
             </a:r>
@@ -8505,6 +8962,9 @@
                 <a:solidFill>
                   <a:schemeClr val="tx2"/>
                 </a:solidFill>
+                <a:latin typeface="Poppins" pitchFamily="34" charset="0"/>
+                <a:ea typeface="Poppins" pitchFamily="34" charset="-122"/>
+                <a:cs typeface="Poppins" pitchFamily="34" charset="-120"/>
               </a:rPr>
               <a:t>Field experiment with small-business entrepreneurs in Kenya</a:t>
             </a:r>
@@ -8590,6 +9050,9 @@
                 <a:solidFill>
                   <a:schemeClr val="tx1"/>
                 </a:solidFill>
+                <a:latin typeface="Poppins" pitchFamily="34" charset="0"/>
+                <a:ea typeface="Poppins" pitchFamily="34" charset="-122"/>
+                <a:cs typeface="Poppins" pitchFamily="34" charset="-120"/>
               </a:rPr>
               <a:t>Intervention</a:t>
             </a:r>
@@ -8604,6 +9067,9 @@
                 <a:solidFill>
                   <a:schemeClr val="tx2"/>
                 </a:solidFill>
+                <a:latin typeface="Poppins" pitchFamily="34" charset="0"/>
+                <a:ea typeface="Poppins" pitchFamily="34" charset="-122"/>
+                <a:cs typeface="Poppins" pitchFamily="34" charset="-120"/>
               </a:rPr>
               <a:t>Access to a GPT-4-powered AI business assistant that gave business advice</a:t>
             </a:r>
@@ -8689,6 +9155,9 @@
                 <a:solidFill>
                   <a:schemeClr val="tx1"/>
                 </a:solidFill>
+                <a:latin typeface="Poppins" pitchFamily="34" charset="0"/>
+                <a:ea typeface="Poppins" pitchFamily="34" charset="-122"/>
+                <a:cs typeface="Poppins" pitchFamily="34" charset="-120"/>
               </a:rPr>
               <a:t>Outcomes examined</a:t>
             </a:r>
@@ -8703,6 +9172,9 @@
                 <a:solidFill>
                   <a:schemeClr val="tx2"/>
                 </a:solidFill>
+                <a:latin typeface="Poppins" pitchFamily="34" charset="0"/>
+                <a:ea typeface="Poppins" pitchFamily="34" charset="-122"/>
+                <a:cs typeface="Poppins" pitchFamily="34" charset="-120"/>
               </a:rPr>
               <a:t>Small-business revenue and profit</a:t>
             </a:r>
@@ -8800,6 +9272,9 @@
                 <a:solidFill>
                   <a:srgbClr val="FFFFFF"/>
                 </a:solidFill>
+                <a:latin typeface="Poppins" pitchFamily="34" charset="0"/>
+                <a:ea typeface="Poppins" pitchFamily="34" charset="-122"/>
+                <a:cs typeface="Poppins" pitchFamily="34" charset="-120"/>
               </a:rPr>
               <a:t>FINDING (reported in the article)</a:t>
             </a:r>
@@ -8836,6 +9311,9 @@
                 <a:solidFill>
                   <a:srgbClr val="BFE6E0"/>
                 </a:solidFill>
+                <a:latin typeface="Poppins" pitchFamily="34" charset="0"/>
+                <a:ea typeface="Poppins" pitchFamily="34" charset="-122"/>
+                <a:cs typeface="Poppins" pitchFamily="34" charset="-120"/>
               </a:rPr>
               <a:t>Average effect</a:t>
             </a:r>
@@ -8872,6 +9350,9 @@
                 <a:solidFill>
                   <a:srgbClr val="FFFFFF"/>
                 </a:solidFill>
+                <a:latin typeface="Poppins" pitchFamily="34" charset="0"/>
+                <a:ea typeface="Poppins" pitchFamily="34" charset="-122"/>
+                <a:cs typeface="Poppins" pitchFamily="34" charset="-120"/>
               </a:rPr>
               <a:t>The researchers could not reject the null hypothesis of no average treatment effect on revenue and profits.</a:t>
             </a:r>
@@ -8993,6 +9474,9 @@
                 <a:solidFill>
                   <a:srgbClr val="FFFFFF"/>
                 </a:solidFill>
+                <a:latin typeface="Poppins" pitchFamily="34" charset="0"/>
+                <a:ea typeface="Poppins" pitchFamily="34" charset="-122"/>
+                <a:cs typeface="Poppins" pitchFamily="34" charset="-120"/>
               </a:rPr>
               <a:t>FINDING (reported in the article)</a:t>
             </a:r>
@@ -9029,6 +9513,9 @@
                 <a:solidFill>
                   <a:schemeClr val="tx1"/>
                 </a:solidFill>
+                <a:latin typeface="Poppins" pitchFamily="34" charset="0"/>
+                <a:ea typeface="Poppins" pitchFamily="34" charset="-122"/>
+                <a:cs typeface="Poppins" pitchFamily="34" charset="-120"/>
               </a:rPr>
               <a:t>Subgroup results by baseline performance</a:t>
             </a:r>
@@ -9108,10 +9595,13 @@
               <a:buNone/>
             </a:pPr>
             <a:r>
-              <a:rPr lang="en-US" sz="900" b="1" dirty="0">
+              <a:rPr lang="en-US" sz="850" b="1" dirty="0">
                 <a:solidFill>
                   <a:schemeClr val="tx1"/>
                 </a:solidFill>
+                <a:latin typeface="Poppins" pitchFamily="34" charset="0"/>
+                <a:ea typeface="Poppins" pitchFamily="34" charset="-122"/>
+                <a:cs typeface="Poppins" pitchFamily="34" charset="-120"/>
               </a:rPr>
               <a:t>Low performers at baseline  </a:t>
             </a:r>
@@ -9119,14 +9609,17 @@
               <a:buNone/>
             </a:pPr>
             <a:r>
-              <a:rPr lang="en-US" sz="900" b="1" dirty="0">
+              <a:rPr lang="en-US" sz="850" b="1" dirty="0">
                 <a:solidFill>
                   <a:srgbClr val="5A6472"/>
                 </a:solidFill>
+                <a:latin typeface="Poppins" pitchFamily="34" charset="0"/>
+                <a:ea typeface="Poppins" pitchFamily="34" charset="-122"/>
+                <a:cs typeface="Poppins" pitchFamily="34" charset="-120"/>
               </a:rPr>
               <a:t>nearly 10% worse</a:t>
             </a:r>
-            <a:endParaRPr lang="en-US" sz="900" dirty="0"/>
+            <a:endParaRPr lang="en-US" sz="850" dirty="0"/>
           </a:p>
         </p:txBody>
       </p:sp>
@@ -9180,10 +9673,13 @@
               <a:buNone/>
             </a:pPr>
             <a:r>
-              <a:rPr lang="en-US" sz="900" b="1" dirty="0">
+              <a:rPr lang="en-US" sz="850" b="1" dirty="0">
                 <a:solidFill>
                   <a:schemeClr val="tx1"/>
                 </a:solidFill>
+                <a:latin typeface="Poppins" pitchFamily="34" charset="0"/>
+                <a:ea typeface="Poppins" pitchFamily="34" charset="-122"/>
+                <a:cs typeface="Poppins" pitchFamily="34" charset="-120"/>
               </a:rPr>
               <a:t>High performers at baseline  </a:t>
             </a:r>
@@ -9191,14 +9687,17 @@
               <a:buNone/>
             </a:pPr>
             <a:r>
-              <a:rPr lang="en-US" sz="900" b="1" dirty="0">
+              <a:rPr lang="en-US" sz="850" b="1" dirty="0">
                 <a:solidFill>
                   <a:srgbClr val="2E8B86"/>
                 </a:solidFill>
+                <a:latin typeface="Poppins" pitchFamily="34" charset="0"/>
+                <a:ea typeface="Poppins" pitchFamily="34" charset="-122"/>
+                <a:cs typeface="Poppins" pitchFamily="34" charset="-120"/>
               </a:rPr>
               <a:t>may have benefited by more than 15%</a:t>
             </a:r>
-            <a:endParaRPr lang="en-US" sz="900" dirty="0"/>
+            <a:endParaRPr lang="en-US" sz="850" dirty="0"/>
           </a:p>
         </p:txBody>
       </p:sp>
@@ -9256,6 +9755,9 @@
                 <a:solidFill>
                   <a:schemeClr val="tx2"/>
                 </a:solidFill>
+                <a:latin typeface="Poppins" pitchFamily="34" charset="0"/>
+                <a:ea typeface="Poppins" pitchFamily="34" charset="-122"/>
+                <a:cs typeface="Poppins" pitchFamily="34" charset="-120"/>
               </a:rPr>
               <a:t>Bar lengths are illustrative of the reported figures</a:t>
             </a:r>
@@ -9319,6 +9821,9 @@
                 <a:solidFill>
                   <a:schemeClr val="tx1"/>
                 </a:solidFill>
+                <a:latin typeface="Poppins" pitchFamily="34" charset="0"/>
+                <a:ea typeface="Poppins" pitchFamily="34" charset="-122"/>
+                <a:cs typeface="Poppins" pitchFamily="34" charset="-120"/>
               </a:rPr>
               <a:t>The difference did not appear to result from differences in the questions asked or the AI advice given, but from the advice entrepreneurs chose to implement.</a:t>
             </a:r>
@@ -9406,6 +9911,9 @@
                 <a:solidFill>
                   <a:schemeClr val="tx2"/>
                 </a:solidFill>
+                <a:latin typeface="Poppins" pitchFamily="34" charset="0"/>
+                <a:ea typeface="Poppins" pitchFamily="34" charset="-122"/>
+                <a:cs typeface="Poppins" pitchFamily="34" charset="-120"/>
               </a:rPr>
               <a:t>Caution: these are subgroup averages. They do not show that every high-performing entrepreneur benefits or that every low-performing entrepreneur loses.</a:t>
             </a:r>
@@ -9442,6 +9950,9 @@
                 <a:solidFill>
                   <a:schemeClr val="tx2"/>
                 </a:solidFill>
+                <a:latin typeface="Poppins" pitchFamily="34" charset="0"/>
+                <a:ea typeface="Poppins" pitchFamily="34" charset="-122"/>
+                <a:cs typeface="Poppins" pitchFamily="34" charset="-120"/>
               </a:rPr>
               <a:t>Otis, N. G., Clarke, R., Delecourt, S., Holtz, D., &amp; Koning, R. (2026). The Uneven Impact of Generative Artificial Intelligence on Entrepreneurial Performance: Evidence from a Field Experiment in Kenya. Management Science, 72(7). https://doi.org/10.1287/mnsc.2024.06909</a:t>
             </a:r>
@@ -9529,6 +10040,9 @@
                 <a:solidFill>
                   <a:srgbClr val="2E8B86"/>
                 </a:solidFill>
+                <a:latin typeface="Poppins" pitchFamily="34" charset="0"/>
+                <a:ea typeface="Poppins" pitchFamily="34" charset="-122"/>
+                <a:cs typeface="Poppins" pitchFamily="34" charset="-120"/>
               </a:rPr>
               <a:t>Next:  </a:t>
             </a:r>
@@ -9540,6 +10054,9 @@
                 <a:solidFill>
                   <a:srgbClr val="1B2A4A"/>
                 </a:solidFill>
+                <a:latin typeface="Poppins" pitchFamily="34" charset="0"/>
+                <a:ea typeface="Poppins" pitchFamily="34" charset="-122"/>
+                <a:cs typeface="Poppins" pitchFamily="34" charset="-120"/>
               </a:rPr>
               <a:t>Two studies, one lesson: what do they tell us together?</a:t>
             </a:r>
@@ -9579,6 +10096,9 @@
                 <a:solidFill>
                   <a:srgbClr val="9AA5B4"/>
                 </a:solidFill>
+                <a:latin typeface="Poppins"/>
+                <a:ea typeface="Poppins"/>
+                <a:cs typeface="Poppins"/>
               </a:defRPr>
             </a:lvl1pPr>
           </a:lstStyle>
@@ -9648,6 +10168,9 @@
                 <a:solidFill>
                   <a:schemeClr val="accent1"/>
                 </a:solidFill>
+                <a:latin typeface="Poppins" pitchFamily="34" charset="0"/>
+                <a:ea typeface="Poppins" pitchFamily="34" charset="-122"/>
+                <a:cs typeface="Poppins" pitchFamily="34" charset="-120"/>
               </a:rPr>
               <a:t>Discussion and comparison</a:t>
             </a:r>
@@ -9688,6 +10211,9 @@
                 <a:solidFill>
                   <a:schemeClr val="tx1"/>
                 </a:solidFill>
+                <a:latin typeface="Poppins" pitchFamily="34" charset="0"/>
+                <a:ea typeface="Poppins" pitchFamily="34" charset="-122"/>
+                <a:cs typeface="Poppins" pitchFamily="34" charset="-120"/>
               </a:rPr>
               <a:t>AI Is a Tool, Not a Guarantee of Success</a:t>
             </a:r>
@@ -9849,6 +10375,9 @@
                 <a:solidFill>
                   <a:schemeClr val="tx2"/>
                 </a:solidFill>
+                <a:latin typeface="Poppins" pitchFamily="34" charset="0"/>
+                <a:ea typeface="Poppins" pitchFamily="34" charset="-122"/>
+                <a:cs typeface="Poppins" pitchFamily="34" charset="-120"/>
               </a:rPr>
               <a:t>Discussion</a:t>
             </a:r>
@@ -9912,6 +10441,9 @@
                 <a:solidFill>
                   <a:srgbClr val="FFFFFF"/>
                 </a:solidFill>
+                <a:latin typeface="Poppins" pitchFamily="34" charset="0"/>
+                <a:ea typeface="Poppins" pitchFamily="34" charset="-122"/>
+                <a:cs typeface="Poppins" pitchFamily="34" charset="-120"/>
               </a:rPr>
               <a:t>FINDING (reported in the article)</a:t>
             </a:r>
@@ -9956,9 +10488,9 @@
                         <a:buNone/>
                       </a:pPr>
                       <a:endParaRPr lang="en-US" sz="950" dirty="0">
-                        <a:latin typeface="Tahoma" charset="0"/>
-                        <a:ea typeface="Tahoma" charset="0"/>
-                        <a:cs typeface="Tahoma" charset="0"/>
+                        <a:latin typeface="Poppins" charset="0"/>
+                        <a:ea typeface="Poppins" charset="0"/>
+                        <a:cs typeface="Poppins" charset="0"/>
                       </a:endParaRPr>
                     </a:p>
                   </a:txBody>
@@ -10017,16 +10549,16 @@
                           <a:solidFill>
                             <a:srgbClr val="FFFFFF"/>
                           </a:solidFill>
-                          <a:latin typeface="Tahoma" pitchFamily="34" charset="0"/>
-                          <a:ea typeface="Tahoma" pitchFamily="34" charset="-122"/>
-                          <a:cs typeface="Tahoma" pitchFamily="34" charset="-120"/>
+                          <a:latin typeface="Poppins" pitchFamily="34" charset="0"/>
+                          <a:ea typeface="Poppins" pitchFamily="34" charset="-122"/>
+                          <a:cs typeface="Poppins" pitchFamily="34" charset="-120"/>
                         </a:rPr>
                         <a:t>Article 2  |  Dell'Acqua et al. (2023)</a:t>
                       </a:r>
                       <a:endParaRPr lang="en-US" sz="950" dirty="0">
-                        <a:latin typeface="Tahoma" charset="0"/>
-                        <a:ea typeface="Tahoma" charset="0"/>
-                        <a:cs typeface="Tahoma" charset="0"/>
+                        <a:latin typeface="Poppins" charset="0"/>
+                        <a:ea typeface="Poppins" charset="0"/>
+                        <a:cs typeface="Poppins" charset="0"/>
                       </a:endParaRPr>
                     </a:p>
                   </a:txBody>
@@ -10085,16 +10617,16 @@
                           <a:solidFill>
                             <a:srgbClr val="FFFFFF"/>
                           </a:solidFill>
-                          <a:latin typeface="Tahoma" pitchFamily="34" charset="0"/>
-                          <a:ea typeface="Tahoma" pitchFamily="34" charset="-122"/>
-                          <a:cs typeface="Tahoma" pitchFamily="34" charset="-120"/>
+                          <a:latin typeface="Poppins" pitchFamily="34" charset="0"/>
+                          <a:ea typeface="Poppins" pitchFamily="34" charset="-122"/>
+                          <a:cs typeface="Poppins" pitchFamily="34" charset="-120"/>
                         </a:rPr>
                         <a:t>Article 5  |  Otis et al. (2026)</a:t>
                       </a:r>
                       <a:endParaRPr lang="en-US" sz="950" dirty="0">
-                        <a:latin typeface="Tahoma" charset="0"/>
-                        <a:ea typeface="Tahoma" charset="0"/>
-                        <a:cs typeface="Tahoma" charset="0"/>
+                        <a:latin typeface="Poppins" charset="0"/>
+                        <a:ea typeface="Poppins" charset="0"/>
+                        <a:cs typeface="Poppins" charset="0"/>
                       </a:endParaRPr>
                     </a:p>
                   </a:txBody>
@@ -10155,16 +10687,16 @@
                           <a:solidFill>
                             <a:srgbClr val="1B2A4A"/>
                           </a:solidFill>
-                          <a:latin typeface="Tahoma" pitchFamily="34" charset="0"/>
-                          <a:ea typeface="Tahoma" pitchFamily="34" charset="-122"/>
-                          <a:cs typeface="Tahoma" pitchFamily="34" charset="-120"/>
+                          <a:latin typeface="Poppins" pitchFamily="34" charset="0"/>
+                          <a:ea typeface="Poppins" pitchFamily="34" charset="-122"/>
+                          <a:cs typeface="Poppins" pitchFamily="34" charset="-120"/>
                         </a:rPr>
                         <a:t>Focus</a:t>
                       </a:r>
                       <a:endParaRPr lang="en-US" sz="950" dirty="0">
-                        <a:latin typeface="Tahoma" charset="0"/>
-                        <a:ea typeface="Tahoma" charset="0"/>
-                        <a:cs typeface="Tahoma" charset="0"/>
+                        <a:latin typeface="Poppins" charset="0"/>
+                        <a:ea typeface="Poppins" charset="0"/>
+                        <a:cs typeface="Poppins" charset="0"/>
                       </a:endParaRPr>
                     </a:p>
                   </a:txBody>
@@ -10223,16 +10755,16 @@
                           <a:solidFill>
                             <a:srgbClr val="5A6472"/>
                           </a:solidFill>
-                          <a:latin typeface="Tahoma" pitchFamily="34" charset="0"/>
-                          <a:ea typeface="Tahoma" pitchFamily="34" charset="-122"/>
-                          <a:cs typeface="Tahoma" pitchFamily="34" charset="-120"/>
+                          <a:latin typeface="Poppins" pitchFamily="34" charset="0"/>
+                          <a:ea typeface="Poppins" pitchFamily="34" charset="-122"/>
+                          <a:cs typeface="Poppins" pitchFamily="34" charset="-120"/>
                         </a:rPr>
                         <a:t>Knowledge workers and consultants (BCG)</a:t>
                       </a:r>
                       <a:endParaRPr lang="en-US" sz="950" dirty="0">
-                        <a:latin typeface="Tahoma" charset="0"/>
-                        <a:ea typeface="Tahoma" charset="0"/>
-                        <a:cs typeface="Tahoma" charset="0"/>
+                        <a:latin typeface="Poppins" charset="0"/>
+                        <a:ea typeface="Poppins" charset="0"/>
+                        <a:cs typeface="Poppins" charset="0"/>
                       </a:endParaRPr>
                     </a:p>
                   </a:txBody>
@@ -10291,16 +10823,16 @@
                           <a:solidFill>
                             <a:srgbClr val="5A6472"/>
                           </a:solidFill>
-                          <a:latin typeface="Tahoma" pitchFamily="34" charset="0"/>
-                          <a:ea typeface="Tahoma" pitchFamily="34" charset="-122"/>
-                          <a:cs typeface="Tahoma" pitchFamily="34" charset="-120"/>
+                          <a:latin typeface="Poppins" pitchFamily="34" charset="0"/>
+                          <a:ea typeface="Poppins" pitchFamily="34" charset="-122"/>
+                          <a:cs typeface="Poppins" pitchFamily="34" charset="-120"/>
                         </a:rPr>
                         <a:t>Entrepreneurs in Kenya</a:t>
                       </a:r>
                       <a:endParaRPr lang="en-US" sz="950" dirty="0">
-                        <a:latin typeface="Tahoma" charset="0"/>
-                        <a:ea typeface="Tahoma" charset="0"/>
-                        <a:cs typeface="Tahoma" charset="0"/>
+                        <a:latin typeface="Poppins" charset="0"/>
+                        <a:ea typeface="Poppins" charset="0"/>
+                        <a:cs typeface="Poppins" charset="0"/>
                       </a:endParaRPr>
                     </a:p>
                   </a:txBody>
@@ -10361,16 +10893,16 @@
                           <a:solidFill>
                             <a:srgbClr val="1B2A4A"/>
                           </a:solidFill>
-                          <a:latin typeface="Tahoma" pitchFamily="34" charset="0"/>
-                          <a:ea typeface="Tahoma" pitchFamily="34" charset="-122"/>
-                          <a:cs typeface="Tahoma" pitchFamily="34" charset="-120"/>
+                          <a:latin typeface="Poppins" pitchFamily="34" charset="0"/>
+                          <a:ea typeface="Poppins" pitchFamily="34" charset="-122"/>
+                          <a:cs typeface="Poppins" pitchFamily="34" charset="-120"/>
                         </a:rPr>
                         <a:t>Main result</a:t>
                       </a:r>
                       <a:endParaRPr lang="en-US" sz="950" dirty="0">
-                        <a:latin typeface="Tahoma" charset="0"/>
-                        <a:ea typeface="Tahoma" charset="0"/>
-                        <a:cs typeface="Tahoma" charset="0"/>
+                        <a:latin typeface="Poppins" charset="0"/>
+                        <a:ea typeface="Poppins" charset="0"/>
+                        <a:cs typeface="Poppins" charset="0"/>
                       </a:endParaRPr>
                     </a:p>
                   </a:txBody>
@@ -10429,16 +10961,16 @@
                           <a:solidFill>
                             <a:srgbClr val="5A6472"/>
                           </a:solidFill>
-                          <a:latin typeface="Tahoma" pitchFamily="34" charset="0"/>
-                          <a:ea typeface="Tahoma" pitchFamily="34" charset="-122"/>
-                          <a:cs typeface="Tahoma" pitchFamily="34" charset="-120"/>
+                          <a:latin typeface="Poppins" pitchFamily="34" charset="0"/>
+                          <a:ea typeface="Poppins" pitchFamily="34" charset="-122"/>
+                          <a:cs typeface="Poppins" pitchFamily="34" charset="-120"/>
                         </a:rPr>
                         <a:t>Higher productivity and work quality for tasks within AI's capability frontier</a:t>
                       </a:r>
                       <a:endParaRPr lang="en-US" sz="950" dirty="0">
-                        <a:latin typeface="Tahoma" charset="0"/>
-                        <a:ea typeface="Tahoma" charset="0"/>
-                        <a:cs typeface="Tahoma" charset="0"/>
+                        <a:latin typeface="Poppins" charset="0"/>
+                        <a:ea typeface="Poppins" charset="0"/>
+                        <a:cs typeface="Poppins" charset="0"/>
                       </a:endParaRPr>
                     </a:p>
                   </a:txBody>
@@ -10497,16 +11029,16 @@
                           <a:solidFill>
                             <a:srgbClr val="5A6472"/>
                           </a:solidFill>
-                          <a:latin typeface="Tahoma" pitchFamily="34" charset="0"/>
-                          <a:ea typeface="Tahoma" pitchFamily="34" charset="-122"/>
-                          <a:cs typeface="Tahoma" pitchFamily="34" charset="-120"/>
+                          <a:latin typeface="Poppins" pitchFamily="34" charset="0"/>
+                          <a:ea typeface="Poppins" pitchFamily="34" charset="-122"/>
+                          <a:cs typeface="Poppins" pitchFamily="34" charset="-120"/>
                         </a:rPr>
                         <a:t>No established average treatment effect on revenue and profits</a:t>
                       </a:r>
                       <a:endParaRPr lang="en-US" sz="950" dirty="0">
-                        <a:latin typeface="Tahoma" charset="0"/>
-                        <a:ea typeface="Tahoma" charset="0"/>
-                        <a:cs typeface="Tahoma" charset="0"/>
+                        <a:latin typeface="Poppins" charset="0"/>
+                        <a:ea typeface="Poppins" charset="0"/>
+                        <a:cs typeface="Poppins" charset="0"/>
                       </a:endParaRPr>
                     </a:p>
                   </a:txBody>
@@ -10567,16 +11099,16 @@
                           <a:solidFill>
                             <a:srgbClr val="1B2A4A"/>
                           </a:solidFill>
-                          <a:latin typeface="Tahoma" pitchFamily="34" charset="0"/>
-                          <a:ea typeface="Tahoma" pitchFamily="34" charset="-122"/>
-                          <a:cs typeface="Tahoma" pitchFamily="34" charset="-120"/>
+                          <a:latin typeface="Poppins" pitchFamily="34" charset="0"/>
+                          <a:ea typeface="Poppins" pitchFamily="34" charset="-122"/>
+                          <a:cs typeface="Poppins" pitchFamily="34" charset="-120"/>
                         </a:rPr>
                         <a:t>Key limitation or insight</a:t>
                       </a:r>
                       <a:endParaRPr lang="en-US" sz="950" dirty="0">
-                        <a:latin typeface="Tahoma" charset="0"/>
-                        <a:ea typeface="Tahoma" charset="0"/>
-                        <a:cs typeface="Tahoma" charset="0"/>
+                        <a:latin typeface="Poppins" charset="0"/>
+                        <a:ea typeface="Poppins" charset="0"/>
+                        <a:cs typeface="Poppins" charset="0"/>
                       </a:endParaRPr>
                     </a:p>
                   </a:txBody>
@@ -10635,16 +11167,16 @@
                           <a:solidFill>
                             <a:srgbClr val="5A6472"/>
                           </a:solidFill>
-                          <a:latin typeface="Tahoma" pitchFamily="34" charset="0"/>
-                          <a:ea typeface="Tahoma" pitchFamily="34" charset="-122"/>
-                          <a:cs typeface="Tahoma" pitchFamily="34" charset="-120"/>
+                          <a:latin typeface="Poppins" pitchFamily="34" charset="0"/>
+                          <a:ea typeface="Poppins" pitchFamily="34" charset="-122"/>
+                          <a:cs typeface="Poppins" pitchFamily="34" charset="-120"/>
                         </a:rPr>
                         <a:t>Reduced correctness on a task outside that frontier</a:t>
                       </a:r>
                       <a:endParaRPr lang="en-US" sz="950" dirty="0">
-                        <a:latin typeface="Tahoma" charset="0"/>
-                        <a:ea typeface="Tahoma" charset="0"/>
-                        <a:cs typeface="Tahoma" charset="0"/>
+                        <a:latin typeface="Poppins" charset="0"/>
+                        <a:ea typeface="Poppins" charset="0"/>
+                        <a:cs typeface="Poppins" charset="0"/>
                       </a:endParaRPr>
                     </a:p>
                   </a:txBody>
@@ -10703,16 +11235,16 @@
                           <a:solidFill>
                             <a:srgbClr val="5A6472"/>
                           </a:solidFill>
-                          <a:latin typeface="Tahoma" pitchFamily="34" charset="0"/>
-                          <a:ea typeface="Tahoma" pitchFamily="34" charset="-122"/>
-                          <a:cs typeface="Tahoma" pitchFamily="34" charset="-120"/>
+                          <a:latin typeface="Poppins" pitchFamily="34" charset="0"/>
+                          <a:ea typeface="Poppins" pitchFamily="34" charset="-122"/>
+                          <a:cs typeface="Poppins" pitchFamily="34" charset="-120"/>
                         </a:rPr>
                         <a:t>Outcomes differed by baseline performance and by which AI recommendations were implemented</a:t>
                       </a:r>
                       <a:endParaRPr lang="en-US" sz="950" dirty="0">
-                        <a:latin typeface="Tahoma" charset="0"/>
-                        <a:ea typeface="Tahoma" charset="0"/>
-                        <a:cs typeface="Tahoma" charset="0"/>
+                        <a:latin typeface="Poppins" charset="0"/>
+                        <a:ea typeface="Poppins" charset="0"/>
+                        <a:cs typeface="Poppins" charset="0"/>
                       </a:endParaRPr>
                     </a:p>
                   </a:txBody>
@@ -10853,6 +11385,9 @@
                 <a:solidFill>
                   <a:schemeClr val="tx2"/>
                 </a:solidFill>
+                <a:latin typeface="Poppins" pitchFamily="34" charset="0"/>
+                <a:ea typeface="Poppins" pitchFamily="34" charset="-122"/>
+                <a:cs typeface="Poppins" pitchFamily="34" charset="-120"/>
               </a:rPr>
               <a:t>INTERPRETATION</a:t>
             </a:r>
@@ -10889,6 +11424,9 @@
                 <a:solidFill>
                   <a:srgbClr val="FFFFFF"/>
                 </a:solidFill>
+                <a:latin typeface="Poppins" pitchFamily="34" charset="0"/>
+                <a:ea typeface="Poppins" pitchFamily="34" charset="-122"/>
+                <a:cs typeface="Poppins" pitchFamily="34" charset="-120"/>
               </a:rPr>
               <a:t>Conclusion</a:t>
             </a:r>
@@ -10925,6 +11463,9 @@
                 <a:solidFill>
                   <a:srgbClr val="FFFFFF"/>
                 </a:solidFill>
+                <a:latin typeface="Poppins" pitchFamily="34" charset="0"/>
+                <a:ea typeface="Poppins" pitchFamily="34" charset="-122"/>
+                <a:cs typeface="Poppins" pitchFamily="34" charset="-120"/>
               </a:rPr>
               <a:t>AI can influence real-world performance, but its impact depends on task suitability, user behavior, and human judgment.</a:t>
             </a:r>
@@ -10981,14 +11522,17 @@
               <a:buNone/>
             </a:pPr>
             <a:r>
-              <a:rPr lang="en-US" sz="900" dirty="0">
+              <a:rPr lang="en-US" sz="850" dirty="0">
                 <a:solidFill>
                   <a:srgbClr val="FFFFFF"/>
                 </a:solidFill>
+                <a:latin typeface="Poppins" pitchFamily="34" charset="0"/>
+                <a:ea typeface="Poppins" pitchFamily="34" charset="-122"/>
+                <a:cs typeface="Poppins" pitchFamily="34" charset="-120"/>
               </a:rPr>
               <a:t>Match the task to what AI does well</a:t>
             </a:r>
-            <a:endParaRPr lang="en-US" sz="900" dirty="0"/>
+            <a:endParaRPr lang="en-US" sz="850" dirty="0"/>
           </a:p>
         </p:txBody>
       </p:sp>
@@ -11041,14 +11585,17 @@
               <a:buNone/>
             </a:pPr>
             <a:r>
-              <a:rPr lang="en-US" sz="900" dirty="0">
+              <a:rPr lang="en-US" sz="850" dirty="0">
                 <a:solidFill>
                   <a:srgbClr val="FFFFFF"/>
                 </a:solidFill>
+                <a:latin typeface="Poppins" pitchFamily="34" charset="0"/>
+                <a:ea typeface="Poppins" pitchFamily="34" charset="-122"/>
+                <a:cs typeface="Poppins" pitchFamily="34" charset="-120"/>
               </a:rPr>
               <a:t>Evaluate AI advice critically before acting</a:t>
             </a:r>
-            <a:endParaRPr lang="en-US" sz="900" dirty="0"/>
+            <a:endParaRPr lang="en-US" sz="850" dirty="0"/>
           </a:p>
         </p:txBody>
       </p:sp>
@@ -11101,14 +11648,17 @@
               <a:buNone/>
             </a:pPr>
             <a:r>
-              <a:rPr lang="en-US" sz="900" dirty="0">
+              <a:rPr lang="en-US" sz="850" dirty="0">
                 <a:solidFill>
                   <a:srgbClr val="FFFFFF"/>
                 </a:solidFill>
+                <a:latin typeface="Poppins" pitchFamily="34" charset="0"/>
+                <a:ea typeface="Poppins" pitchFamily="34" charset="-122"/>
+                <a:cs typeface="Poppins" pitchFamily="34" charset="-120"/>
               </a:rPr>
               <a:t>Keep human judgment in the loop</a:t>
             </a:r>
-            <a:endParaRPr lang="en-US" sz="900" dirty="0"/>
+            <a:endParaRPr lang="en-US" sz="850" dirty="0"/>
           </a:p>
         </p:txBody>
       </p:sp>
@@ -11189,6 +11739,9 @@
                 <a:solidFill>
                   <a:schemeClr val="tx2"/>
                 </a:solidFill>
+                <a:latin typeface="Poppins" pitchFamily="34" charset="0"/>
+                <a:ea typeface="Poppins" pitchFamily="34" charset="-122"/>
+                <a:cs typeface="Poppins" pitchFamily="34" charset="-120"/>
               </a:rPr>
               <a:t>Dell'Acqua et al. (2023), Harvard Business School Working Paper 24-013   |   Otis et al. (2026), Management Science, 72(7), https://doi.org/10.1287/mnsc.2024.06909</a:t>
             </a:r>
@@ -11276,6 +11829,9 @@
                 <a:solidFill>
                   <a:srgbClr val="2E8B86"/>
                 </a:solidFill>
+                <a:latin typeface="Poppins" pitchFamily="34" charset="0"/>
+                <a:ea typeface="Poppins" pitchFamily="34" charset="-122"/>
+                <a:cs typeface="Poppins" pitchFamily="34" charset="-120"/>
               </a:rPr>
               <a:t>Next:  </a:t>
             </a:r>
@@ -11287,6 +11843,9 @@
                 <a:solidFill>
                   <a:srgbClr val="1B2A4A"/>
                 </a:solidFill>
+                <a:latin typeface="Poppins" pitchFamily="34" charset="0"/>
+                <a:ea typeface="Poppins" pitchFamily="34" charset="-122"/>
+                <a:cs typeface="Poppins" pitchFamily="34" charset="-120"/>
               </a:rPr>
               <a:t>Thank you. Questions are welcome.</a:t>
             </a:r>
@@ -11326,6 +11885,9 @@
                 <a:solidFill>
                   <a:srgbClr val="9AA5B4"/>
                 </a:solidFill>
+                <a:latin typeface="Poppins"/>
+                <a:ea typeface="Poppins"/>
+                <a:cs typeface="Poppins"/>
               </a:defRPr>
             </a:lvl1pPr>
           </a:lstStyle>
@@ -11395,6 +11957,9 @@
                 <a:solidFill>
                   <a:schemeClr val="bg1"/>
                 </a:solidFill>
+                <a:latin typeface="Prompt" pitchFamily="34" charset="0"/>
+                <a:ea typeface="Prompt" pitchFamily="34" charset="-122"/>
+                <a:cs typeface="Prompt" pitchFamily="34" charset="-120"/>
               </a:rPr>
               <a:t>ปัญญาประดิษฐ์กับประสิทธิภาพการทำงาน</a:t>
             </a:r>
@@ -11433,6 +11998,9 @@
                 <a:solidFill>
                   <a:schemeClr val="accent4"/>
                 </a:solidFill>
+                <a:latin typeface="Prompt" pitchFamily="34" charset="0"/>
+                <a:ea typeface="Prompt" pitchFamily="34" charset="-122"/>
+                <a:cs typeface="Prompt" pitchFamily="34" charset="-120"/>
               </a:rPr>
               <a:t>หลักฐานจากการทดลองภาคสนามสองชิ้นล่าสุด</a:t>
             </a:r>
@@ -11493,6 +12061,9 @@
                 <a:solidFill>
                   <a:srgbClr val="BFE6E0"/>
                 </a:solidFill>
+                <a:latin typeface="Prompt" pitchFamily="34" charset="0"/>
+                <a:ea typeface="Prompt" pitchFamily="34" charset="-122"/>
+                <a:cs typeface="Prompt" pitchFamily="34" charset="-120"/>
               </a:rPr>
               <a:t>คำถามหลัก: AI ส่งผลต่อผลิตภาพ คุณภาพงาน และผลการดำเนินธุรกิจอย่างไร?</a:t>
             </a:r>
@@ -11556,6 +12127,9 @@
                 <a:solidFill>
                   <a:srgbClr val="BFE6E0"/>
                 </a:solidFill>
+                <a:latin typeface="Prompt" pitchFamily="34" charset="0"/>
+                <a:ea typeface="Prompt" pitchFamily="34" charset="-122"/>
+                <a:cs typeface="Prompt" pitchFamily="34" charset="-120"/>
               </a:rPr>
               <a:t>บทความที่ 2</a:t>
             </a:r>
@@ -11592,6 +12166,9 @@
                 <a:solidFill>
                   <a:srgbClr val="FFFFFF"/>
                 </a:solidFill>
+                <a:latin typeface="Prompt" pitchFamily="34" charset="0"/>
+                <a:ea typeface="Prompt" pitchFamily="34" charset="-122"/>
+                <a:cs typeface="Prompt" pitchFamily="34" charset="-120"/>
               </a:rPr>
               <a:t>Navigating the Jagged Technological Frontier: Field Experimental Evidence of the Effects of AI on Knowledge Worker Productivity and Quality</a:t>
             </a:r>
@@ -11628,6 +12205,9 @@
                 <a:solidFill>
                   <a:srgbClr val="BFE6E0"/>
                 </a:solidFill>
+                <a:latin typeface="Prompt" pitchFamily="34" charset="0"/>
+                <a:ea typeface="Prompt" pitchFamily="34" charset="-122"/>
+                <a:cs typeface="Prompt" pitchFamily="34" charset="-120"/>
               </a:rPr>
               <a:t>Fabrizio Dell'Acqua et al.  |  Harvard Business School Working Paper 24-013, 2023</a:t>
             </a:r>
@@ -11691,6 +12271,9 @@
                 <a:solidFill>
                   <a:srgbClr val="BFE6E0"/>
                 </a:solidFill>
+                <a:latin typeface="Prompt" pitchFamily="34" charset="0"/>
+                <a:ea typeface="Prompt" pitchFamily="34" charset="-122"/>
+                <a:cs typeface="Prompt" pitchFamily="34" charset="-120"/>
               </a:rPr>
               <a:t>บทความที่ 5</a:t>
             </a:r>
@@ -11727,6 +12310,9 @@
                 <a:solidFill>
                   <a:srgbClr val="FFFFFF"/>
                 </a:solidFill>
+                <a:latin typeface="Prompt" pitchFamily="34" charset="0"/>
+                <a:ea typeface="Prompt" pitchFamily="34" charset="-122"/>
+                <a:cs typeface="Prompt" pitchFamily="34" charset="-120"/>
               </a:rPr>
               <a:t>The Uneven Impact of Generative Artificial Intelligence on Entrepreneurial Performance: Evidence from a Field Experiment in Kenya</a:t>
             </a:r>
@@ -11763,6 +12349,9 @@
                 <a:solidFill>
                   <a:srgbClr val="BFE6E0"/>
                 </a:solidFill>
+                <a:latin typeface="Prompt" pitchFamily="34" charset="0"/>
+                <a:ea typeface="Prompt" pitchFamily="34" charset="-122"/>
+                <a:cs typeface="Prompt" pitchFamily="34" charset="-120"/>
               </a:rPr>
               <a:t>Nicholas G. Otis et al.  |  Management Science, Vol. 72, No. 7, 2026  |  DOI 10.1287/mnsc.2024.06909</a:t>
             </a:r>
@@ -11799,6 +12388,9 @@
                 <a:solidFill>
                   <a:srgbClr val="BFE6E0"/>
                 </a:solidFill>
+                <a:latin typeface="Prompt" pitchFamily="34" charset="0"/>
+                <a:ea typeface="Prompt" pitchFamily="34" charset="-122"/>
+                <a:cs typeface="Prompt" pitchFamily="34" charset="-120"/>
               </a:rPr>
               <a:t>ลำดับการนำเสนอ</a:t>
             </a:r>
@@ -11862,6 +12454,9 @@
                 <a:solidFill>
                   <a:srgbClr val="FFFFFF"/>
                 </a:solidFill>
+                <a:latin typeface="Prompt" pitchFamily="34" charset="0"/>
+                <a:ea typeface="Prompt" pitchFamily="34" charset="-122"/>
+                <a:cs typeface="Prompt" pitchFamily="34" charset="-120"/>
               </a:rPr>
               <a:t>1  บทนำ</a:t>
             </a:r>
@@ -11925,6 +12520,9 @@
                 <a:solidFill>
                   <a:srgbClr val="FFFFFF"/>
                 </a:solidFill>
+                <a:latin typeface="Prompt" pitchFamily="34" charset="0"/>
+                <a:ea typeface="Prompt" pitchFamily="34" charset="-122"/>
+                <a:cs typeface="Prompt" pitchFamily="34" charset="-120"/>
               </a:rPr>
               <a:t>2  บทความ 2: วิธีวิจัย</a:t>
             </a:r>
@@ -11988,6 +12586,9 @@
                 <a:solidFill>
                   <a:srgbClr val="FFFFFF"/>
                 </a:solidFill>
+                <a:latin typeface="Prompt" pitchFamily="34" charset="0"/>
+                <a:ea typeface="Prompt" pitchFamily="34" charset="-122"/>
+                <a:cs typeface="Prompt" pitchFamily="34" charset="-120"/>
               </a:rPr>
               <a:t>3  บทความ 2: ผลการศึกษา</a:t>
             </a:r>
@@ -12051,6 +12652,9 @@
                 <a:solidFill>
                   <a:srgbClr val="FFFFFF"/>
                 </a:solidFill>
+                <a:latin typeface="Prompt" pitchFamily="34" charset="0"/>
+                <a:ea typeface="Prompt" pitchFamily="34" charset="-122"/>
+                <a:cs typeface="Prompt" pitchFamily="34" charset="-120"/>
               </a:rPr>
               <a:t>4  บทความ 5: ผู้ประกอบการ</a:t>
             </a:r>
@@ -12114,6 +12718,9 @@
                 <a:solidFill>
                   <a:srgbClr val="FFFFFF"/>
                 </a:solidFill>
+                <a:latin typeface="Prompt" pitchFamily="34" charset="0"/>
+                <a:ea typeface="Prompt" pitchFamily="34" charset="-122"/>
+                <a:cs typeface="Prompt" pitchFamily="34" charset="-120"/>
               </a:rPr>
               <a:t>5  อภิปรายผล</a:t>
             </a:r>
@@ -12150,6 +12757,9 @@
                 <a:solidFill>
                   <a:srgbClr val="FFFFFF"/>
                 </a:solidFill>
+                <a:latin typeface="Prompt" pitchFamily="34" charset="0"/>
+                <a:ea typeface="Prompt" pitchFamily="34" charset="-122"/>
+                <a:cs typeface="Prompt" pitchFamily="34" charset="-120"/>
               </a:rPr>
               <a:t>Chayanun Sungsa-ard</a:t>
             </a:r>
@@ -12164,6 +12774,9 @@
                 <a:solidFill>
                   <a:srgbClr val="BFE6E0"/>
                 </a:solidFill>
+                <a:latin typeface="Prompt" pitchFamily="34" charset="0"/>
+                <a:ea typeface="Prompt" pitchFamily="34" charset="-122"/>
+                <a:cs typeface="Prompt" pitchFamily="34" charset="-120"/>
               </a:rPr>
               <a:t>รหัสนักศึกษา 691401708  |  หลักสูตรบริหารธุรกิจมหาบัณฑิต (MBA)  |  ENG 501 English for Master's Degree</a:t>
             </a:r>
@@ -12203,6 +12816,9 @@
                 <a:solidFill>
                   <a:srgbClr val="9AA5B4"/>
                 </a:solidFill>
+                <a:latin typeface="Prompt"/>
+                <a:ea typeface="Prompt"/>
+                <a:cs typeface="Prompt"/>
               </a:defRPr>
             </a:lvl1pPr>
           </a:lstStyle>
@@ -12272,6 +12888,9 @@
                 <a:solidFill>
                   <a:schemeClr val="accent1"/>
                 </a:solidFill>
+                <a:latin typeface="Prompt" pitchFamily="34" charset="0"/>
+                <a:ea typeface="Prompt" pitchFamily="34" charset="-122"/>
+                <a:cs typeface="Prompt" pitchFamily="34" charset="-120"/>
               </a:rPr>
               <a:t>บทความที่ 2  |  วัตถุประสงค์และวิธีวิจัย</a:t>
             </a:r>
@@ -12312,6 +12931,9 @@
                 <a:solidFill>
                   <a:schemeClr val="tx1"/>
                 </a:solidFill>
+                <a:latin typeface="Prompt" pitchFamily="34" charset="0"/>
+                <a:ea typeface="Prompt" pitchFamily="34" charset="-122"/>
+                <a:cs typeface="Prompt" pitchFamily="34" charset="-120"/>
               </a:rPr>
               <a:t>การนำทางในพรมแดนเทคโนโลยีที่ไม่สม่ำเสมอ</a:t>
             </a:r>
@@ -12473,6 +13095,9 @@
                 <a:solidFill>
                   <a:schemeClr val="tx2"/>
                 </a:solidFill>
+                <a:latin typeface="Prompt" pitchFamily="34" charset="0"/>
+                <a:ea typeface="Prompt" pitchFamily="34" charset="-122"/>
+                <a:cs typeface="Prompt" pitchFamily="34" charset="-120"/>
               </a:rPr>
               <a:t>บทความ 2: วิธีวิจัย</a:t>
             </a:r>
@@ -12509,6 +13134,9 @@
                 <a:solidFill>
                   <a:schemeClr val="tx2"/>
                 </a:solidFill>
+                <a:latin typeface="Prompt" pitchFamily="34" charset="0"/>
+                <a:ea typeface="Prompt" pitchFamily="34" charset="-122"/>
+                <a:cs typeface="Prompt" pitchFamily="34" charset="-120"/>
               </a:rPr>
               <a:t>Fabrizio Dell'Acqua et al.  |  Harvard Business School Working Paper 24-013, 2023</a:t>
             </a:r>
@@ -12594,6 +13222,9 @@
                 <a:solidFill>
                   <a:schemeClr val="tx1"/>
                 </a:solidFill>
+                <a:latin typeface="Prompt" pitchFamily="34" charset="0"/>
+                <a:ea typeface="Prompt" pitchFamily="34" charset="-122"/>
+                <a:cs typeface="Prompt" pitchFamily="34" charset="-120"/>
               </a:rPr>
               <a:t>องค์กรที่ร่วมวิจัย</a:t>
             </a:r>
@@ -12608,6 +13239,9 @@
                 <a:solidFill>
                   <a:schemeClr val="tx2"/>
                 </a:solidFill>
+                <a:latin typeface="Prompt" pitchFamily="34" charset="0"/>
+                <a:ea typeface="Prompt" pitchFamily="34" charset="-122"/>
+                <a:cs typeface="Prompt" pitchFamily="34" charset="-120"/>
               </a:rPr>
               <a:t>การทดลองภาคสนามร่วมกับ Boston Consulting Group (BCG)</a:t>
             </a:r>
@@ -12693,6 +13327,9 @@
                 <a:solidFill>
                   <a:schemeClr val="tx1"/>
                 </a:solidFill>
+                <a:latin typeface="Prompt" pitchFamily="34" charset="0"/>
+                <a:ea typeface="Prompt" pitchFamily="34" charset="-122"/>
+                <a:cs typeface="Prompt" pitchFamily="34" charset="-120"/>
               </a:rPr>
               <a:t>ผู้เข้าร่วม</a:t>
             </a:r>
@@ -12707,6 +13344,9 @@
                 <a:solidFill>
                   <a:schemeClr val="tx2"/>
                 </a:solidFill>
+                <a:latin typeface="Prompt" pitchFamily="34" charset="0"/>
+                <a:ea typeface="Prompt" pitchFamily="34" charset="-122"/>
+                <a:cs typeface="Prompt" pitchFamily="34" charset="-120"/>
               </a:rPr>
               <a:t>ที่ปรึกษาจำนวน 758 คน</a:t>
             </a:r>
@@ -12792,6 +13432,9 @@
                 <a:solidFill>
                   <a:schemeClr val="tx1"/>
                 </a:solidFill>
+                <a:latin typeface="Prompt" pitchFamily="34" charset="0"/>
+                <a:ea typeface="Prompt" pitchFamily="34" charset="-122"/>
+                <a:cs typeface="Prompt" pitchFamily="34" charset="-120"/>
               </a:rPr>
               <a:t>ประเด็นที่ศึกษา</a:t>
             </a:r>
@@ -12806,6 +13449,9 @@
                 <a:solidFill>
                   <a:schemeClr val="tx2"/>
                 </a:solidFill>
+                <a:latin typeface="Prompt" pitchFamily="34" charset="0"/>
+                <a:ea typeface="Prompt" pitchFamily="34" charset="-122"/>
+                <a:cs typeface="Prompt" pitchFamily="34" charset="-120"/>
               </a:rPr>
               <a:t>ผลิตภาพ คุณภาพงาน และขอบเขตความสามารถของ AI</a:t>
             </a:r>
@@ -12842,6 +13488,9 @@
                 <a:solidFill>
                   <a:schemeClr val="tx1"/>
                 </a:solidFill>
+                <a:latin typeface="Prompt" pitchFamily="34" charset="0"/>
+                <a:ea typeface="Prompt" pitchFamily="34" charset="-122"/>
+                <a:cs typeface="Prompt" pitchFamily="34" charset="-120"/>
               </a:rPr>
               <a:t>เงื่อนไขการทดลองสามกลุ่ม</a:t>
             </a:r>
@@ -12912,6 +13561,9 @@
                 <a:solidFill>
                   <a:srgbClr val="2E8B86"/>
                 </a:solidFill>
+                <a:latin typeface="Prompt" pitchFamily="34" charset="0"/>
+                <a:ea typeface="Prompt" pitchFamily="34" charset="-122"/>
+                <a:cs typeface="Prompt" pitchFamily="34" charset="-120"/>
               </a:rPr>
               <a:t>1</a:t>
             </a:r>
@@ -12948,6 +13600,9 @@
                 <a:solidFill>
                   <a:schemeClr val="tx1"/>
                 </a:solidFill>
+                <a:latin typeface="Prompt" pitchFamily="34" charset="0"/>
+                <a:ea typeface="Prompt" pitchFamily="34" charset="-122"/>
+                <a:cs typeface="Prompt" pitchFamily="34" charset="-120"/>
               </a:rPr>
               <a:t>ไม่สามารถใช้ AI</a:t>
             </a:r>
@@ -13042,6 +13697,9 @@
                 <a:solidFill>
                   <a:srgbClr val="BFE6E0"/>
                 </a:solidFill>
+                <a:latin typeface="Prompt" pitchFamily="34" charset="0"/>
+                <a:ea typeface="Prompt" pitchFamily="34" charset="-122"/>
+                <a:cs typeface="Prompt" pitchFamily="34" charset="-120"/>
               </a:rPr>
               <a:t>2</a:t>
             </a:r>
@@ -13078,6 +13736,9 @@
                 <a:solidFill>
                   <a:srgbClr val="FFFFFF"/>
                 </a:solidFill>
+                <a:latin typeface="Prompt" pitchFamily="34" charset="0"/>
+                <a:ea typeface="Prompt" pitchFamily="34" charset="-122"/>
+                <a:cs typeface="Prompt" pitchFamily="34" charset="-120"/>
               </a:rPr>
               <a:t>ใช้ GPT-4 ได้</a:t>
             </a:r>
@@ -13172,6 +13833,9 @@
                 <a:solidFill>
                   <a:srgbClr val="BFE6E0"/>
                 </a:solidFill>
+                <a:latin typeface="Prompt" pitchFamily="34" charset="0"/>
+                <a:ea typeface="Prompt" pitchFamily="34" charset="-122"/>
+                <a:cs typeface="Prompt" pitchFamily="34" charset="-120"/>
               </a:rPr>
               <a:t>3</a:t>
             </a:r>
@@ -13208,6 +13872,9 @@
                 <a:solidFill>
                   <a:srgbClr val="FFFFFF"/>
                 </a:solidFill>
+                <a:latin typeface="Prompt" pitchFamily="34" charset="0"/>
+                <a:ea typeface="Prompt" pitchFamily="34" charset="-122"/>
+                <a:cs typeface="Prompt" pitchFamily="34" charset="-120"/>
               </a:rPr>
               <a:t>ใช้ GPT-4 ได้ พร้อมคำแนะนำการเขียน prompt</a:t>
             </a:r>
@@ -13305,6 +13972,9 @@
                 <a:solidFill>
                   <a:schemeClr val="tx2"/>
                 </a:solidFill>
+                <a:latin typeface="Prompt" pitchFamily="34" charset="0"/>
+                <a:ea typeface="Prompt" pitchFamily="34" charset="-122"/>
+                <a:cs typeface="Prompt" pitchFamily="34" charset="-120"/>
               </a:rPr>
               <a:t>แนวคิด</a:t>
             </a:r>
@@ -13341,6 +14011,9 @@
                 <a:solidFill>
                   <a:schemeClr val="tx1"/>
                 </a:solidFill>
+                <a:latin typeface="Prompt" pitchFamily="34" charset="0"/>
+                <a:ea typeface="Prompt" pitchFamily="34" charset="-122"/>
+                <a:cs typeface="Prompt" pitchFamily="34" charset="-120"/>
               </a:rPr>
               <a:t>"Jagged Technological Frontier"</a:t>
             </a:r>
@@ -13377,6 +14050,9 @@
                 <a:solidFill>
                   <a:schemeClr val="tx2"/>
                 </a:solidFill>
+                <a:latin typeface="Prompt" pitchFamily="34" charset="0"/>
+                <a:ea typeface="Prompt" pitchFamily="34" charset="-122"/>
+                <a:cs typeface="Prompt" pitchFamily="34" charset="-120"/>
               </a:rPr>
               <a:t>AI ทำงานบางอย่างได้ดี แต่กลับทำงานอื่นที่ดูยากพอกันได้ไม่ดี เส้นแบ่งนี้ไม่สม่ำเสมอ ผู้ใช้จึงไม่ควรสรุปว่างานใด "ปลอดภัย" ที่จะมอบให้ AI เพียงเพราะงานนั้นดูง่าย</a:t>
             </a:r>
@@ -13461,6 +14137,9 @@
                 <a:solidFill>
                   <a:schemeClr val="tx2"/>
                 </a:solidFill>
+                <a:latin typeface="Prompt" pitchFamily="34" charset="0"/>
+                <a:ea typeface="Prompt" pitchFamily="34" charset="-122"/>
+                <a:cs typeface="Prompt" pitchFamily="34" charset="-120"/>
               </a:rPr>
               <a:t>ภายนอกพรมแดน: AI ทำได้ไม่ดี</a:t>
             </a:r>
@@ -13497,6 +14176,9 @@
                 <a:solidFill>
                   <a:srgbClr val="2E8B86"/>
                 </a:solidFill>
+                <a:latin typeface="Prompt" pitchFamily="34" charset="0"/>
+                <a:ea typeface="Prompt" pitchFamily="34" charset="-122"/>
+                <a:cs typeface="Prompt" pitchFamily="34" charset="-120"/>
               </a:rPr>
               <a:t>ภายในพรมแดน: AI ทำได้ดี</a:t>
             </a:r>
@@ -13533,6 +14215,9 @@
                 <a:solidFill>
                   <a:schemeClr val="tx2"/>
                 </a:solidFill>
+                <a:latin typeface="Prompt" pitchFamily="34" charset="0"/>
+                <a:ea typeface="Prompt" pitchFamily="34" charset="-122"/>
+                <a:cs typeface="Prompt" pitchFamily="34" charset="-120"/>
               </a:rPr>
               <a:t>งานที่ดูยากในระดับใกล้เคียงกัน</a:t>
             </a:r>
@@ -13569,6 +14254,9 @@
                 <a:solidFill>
                   <a:schemeClr val="tx2"/>
                 </a:solidFill>
+                <a:latin typeface="Prompt" pitchFamily="34" charset="0"/>
+                <a:ea typeface="Prompt" pitchFamily="34" charset="-122"/>
+                <a:cs typeface="Prompt" pitchFamily="34" charset="-120"/>
               </a:rPr>
               <a:t>Dell'Acqua, F., McFowland III, E., Mollick, E., Lifshitz-Assaf, H., Kellogg, K. C., Rajendran, S., Krayer, L., Candelon, F., &amp; Lakhani, K. R. (2023). Navigating the Jagged Technological Frontier. Harvard Business School Working Paper 24-013.</a:t>
             </a:r>
@@ -13656,6 +14344,9 @@
                 <a:solidFill>
                   <a:srgbClr val="2E8B86"/>
                 </a:solidFill>
+                <a:latin typeface="Prompt" pitchFamily="34" charset="0"/>
+                <a:ea typeface="Prompt" pitchFamily="34" charset="-122"/>
+                <a:cs typeface="Prompt" pitchFamily="34" charset="-120"/>
               </a:rPr>
               <a:t>ถัดไป:  </a:t>
             </a:r>
@@ -13667,6 +14358,9 @@
                 <a:solidFill>
                   <a:srgbClr val="1B2A4A"/>
                 </a:solidFill>
+                <a:latin typeface="Prompt" pitchFamily="34" charset="0"/>
+                <a:ea typeface="Prompt" pitchFamily="34" charset="-122"/>
+                <a:cs typeface="Prompt" pitchFamily="34" charset="-120"/>
               </a:rPr>
               <a:t>แล้วเมื่อที่ปรึกษา 758 คนใช้ GPT-4 จริง เกิดอะไรขึ้น?</a:t>
             </a:r>
@@ -13706,6 +14400,9 @@
                 <a:solidFill>
                   <a:srgbClr val="9AA5B4"/>
                 </a:solidFill>
+                <a:latin typeface="Prompt"/>
+                <a:ea typeface="Prompt"/>
+                <a:cs typeface="Prompt"/>
               </a:defRPr>
             </a:lvl1pPr>
           </a:lstStyle>
@@ -13775,6 +14472,9 @@
                 <a:solidFill>
                   <a:schemeClr val="accent1"/>
                 </a:solidFill>
+                <a:latin typeface="Prompt" pitchFamily="34" charset="0"/>
+                <a:ea typeface="Prompt" pitchFamily="34" charset="-122"/>
+                <a:cs typeface="Prompt" pitchFamily="34" charset="-120"/>
               </a:rPr>
               <a:t>บทความที่ 2  |  ผลการศึกษาที่สำคัญ</a:t>
             </a:r>
@@ -13815,6 +14515,9 @@
                 <a:solidFill>
                   <a:schemeClr val="tx1"/>
                 </a:solidFill>
+                <a:latin typeface="Prompt" pitchFamily="34" charset="0"/>
+                <a:ea typeface="Prompt" pitchFamily="34" charset="-122"/>
+                <a:cs typeface="Prompt" pitchFamily="34" charset="-120"/>
               </a:rPr>
               <a:t>AI ช่วยเพิ่มประสิทธิภาพ แต่มีข้อจำกัด</a:t>
             </a:r>
@@ -13976,6 +14679,9 @@
                 <a:solidFill>
                   <a:schemeClr val="tx2"/>
                 </a:solidFill>
+                <a:latin typeface="Prompt" pitchFamily="34" charset="0"/>
+                <a:ea typeface="Prompt" pitchFamily="34" charset="-122"/>
+                <a:cs typeface="Prompt" pitchFamily="34" charset="-120"/>
               </a:rPr>
               <a:t>บทความ 2: ผลการศึกษา</a:t>
             </a:r>
@@ -14039,6 +14745,9 @@
                 <a:solidFill>
                   <a:srgbClr val="FFFFFF"/>
                 </a:solidFill>
+                <a:latin typeface="Prompt" pitchFamily="34" charset="0"/>
+                <a:ea typeface="Prompt" pitchFamily="34" charset="-122"/>
+                <a:cs typeface="Prompt" pitchFamily="34" charset="-120"/>
               </a:rPr>
               <a:t>ผลการวิจัย (รายงานในบทความ)</a:t>
             </a:r>
@@ -14054,7 +14763,7 @@
         </p:nvGraphicFramePr>
         <p:xfrm>
           <a:off x="457200" y="1371600"/>
-          <a:ext cx="4846320" cy="2057400"/>
+          <a:ext cx="4846320" cy="2103120"/>
         </p:xfrm>
         <a:graphic xmlns:a="http://schemas.openxmlformats.org/drawingml/2006/main">
           <a:graphicData uri="http://schemas.openxmlformats.org/drawingml/2006/chart">
@@ -14091,6 +14800,9 @@
                 <a:solidFill>
                   <a:schemeClr val="tx2"/>
                 </a:solidFill>
+                <a:latin typeface="Prompt" pitchFamily="34" charset="0"/>
+                <a:ea typeface="Prompt" pitchFamily="34" charset="-122"/>
+                <a:cs typeface="Prompt" pitchFamily="34" charset="-120"/>
               </a:rPr>
               <a:t>คุณภาพรายงานว่าสูงขึ้น "มากกว่า 40%" แท่งกราฟจึงแสดงที่ 40 ส่วนตัวเลขของแต่ละกลุ่มคือการพัฒนาเทียบกับคะแนนเดิมของกลุ่มนั้นเอง</a:t>
             </a:r>
@@ -14161,6 +14873,9 @@
                 <a:solidFill>
                   <a:srgbClr val="BFE6E0"/>
                 </a:solidFill>
+                <a:latin typeface="Prompt" pitchFamily="34" charset="0"/>
+                <a:ea typeface="Prompt" pitchFamily="34" charset="-122"/>
+                <a:cs typeface="Prompt" pitchFamily="34" charset="-120"/>
               </a:rPr>
               <a:t>งานภายนอกพรมแดน</a:t>
             </a:r>
@@ -14197,6 +14912,9 @@
                 <a:solidFill>
                   <a:srgbClr val="FFFFFF"/>
                 </a:solidFill>
+                <a:latin typeface="Prompt" pitchFamily="34" charset="0"/>
+                <a:ea typeface="Prompt" pitchFamily="34" charset="-122"/>
+                <a:cs typeface="Prompt" pitchFamily="34" charset="-120"/>
               </a:rPr>
               <a:t>−19</a:t>
             </a:r>
@@ -14213,7 +14931,7 @@
         <p:spPr>
           <a:xfrm>
             <a:off x="5760720" y="1883664"/>
-            <a:ext cx="1828800" cy="201168"/>
+            <a:ext cx="1920240" cy="201168"/>
           </a:xfrm>
           <a:prstGeom prst="rect">
             <a:avLst/>
@@ -14229,14 +14947,17 @@
               <a:buNone/>
             </a:pPr>
             <a:r>
-              <a:rPr lang="en-US" sz="1050" dirty="0">
+              <a:rPr lang="en-US" sz="950" dirty="0">
                 <a:solidFill>
                   <a:srgbClr val="BFE6E0"/>
                 </a:solidFill>
+                <a:latin typeface="Prompt" pitchFamily="34" charset="0"/>
+                <a:ea typeface="Prompt" pitchFamily="34" charset="-122"/>
+                <a:cs typeface="Prompt" pitchFamily="34" charset="-120"/>
               </a:rPr>
               <a:t>จุดร้อยละ (percentage points)</a:t>
             </a:r>
-            <a:endParaRPr lang="en-US" sz="1050" dirty="0"/>
+            <a:endParaRPr lang="en-US" sz="950" dirty="0"/>
           </a:p>
         </p:txBody>
       </p:sp>
@@ -14293,6 +15014,9 @@
                 <a:solidFill>
                   <a:srgbClr val="FFFFFF"/>
                 </a:solidFill>
+                <a:latin typeface="Prompt" pitchFamily="34" charset="0"/>
+                <a:ea typeface="Prompt" pitchFamily="34" charset="-122"/>
+                <a:cs typeface="Prompt" pitchFamily="34" charset="-120"/>
               </a:rPr>
               <a:t>สำหรับงานที่เลือกให้อยู่นอกพรมแดน ผู้ใช้ AI มีโอกาสได้คำตอบที่ถูกต้องน้อยกว่าผู้ไม่ใช้ AI อยู่ 19 จุดร้อยละ</a:t>
             </a:r>
@@ -14356,6 +15080,9 @@
                 <a:solidFill>
                   <a:schemeClr val="tx2"/>
                 </a:solidFill>
+                <a:latin typeface="Prompt" pitchFamily="34" charset="0"/>
+                <a:ea typeface="Prompt" pitchFamily="34" charset="-122"/>
+                <a:cs typeface="Prompt" pitchFamily="34" charset="-120"/>
               </a:rPr>
               <a:t>ร้อยละการเปลี่ยนแปลง (เช่น +12.2%) เทียบกับค่าฐานเดิม ส่วนจุดร้อยละ (−19) คือส่วนต่างระหว่างอัตราความถูกต้องของสองกลุ่ม</a:t>
             </a:r>
@@ -14392,6 +15119,9 @@
                 <a:solidFill>
                   <a:schemeClr val="tx1"/>
                 </a:solidFill>
+                <a:latin typeface="Prompt" pitchFamily="34" charset="0"/>
+                <a:ea typeface="Prompt" pitchFamily="34" charset="-122"/>
+                <a:cs typeface="Prompt" pitchFamily="34" charset="-120"/>
               </a:rPr>
               <a:t>รูปแบบการใช้ AI ที่ประสบความสำเร็จสองแบบ</a:t>
             </a:r>
@@ -14479,6 +15209,9 @@
                 <a:solidFill>
                   <a:schemeClr val="tx1"/>
                 </a:solidFill>
+                <a:latin typeface="Prompt" pitchFamily="34" charset="0"/>
+                <a:ea typeface="Prompt" pitchFamily="34" charset="-122"/>
+                <a:cs typeface="Prompt" pitchFamily="34" charset="-120"/>
               </a:rPr>
               <a:t>Centaurs (เซนทอร์)  </a:t>
             </a:r>
@@ -14490,6 +15223,9 @@
                 <a:solidFill>
                   <a:schemeClr val="tx2"/>
                 </a:solidFill>
+                <a:latin typeface="Prompt" pitchFamily="34" charset="0"/>
+                <a:ea typeface="Prompt" pitchFamily="34" charset="-122"/>
+                <a:cs typeface="Prompt" pitchFamily="34" charset="-120"/>
               </a:rPr>
               <a:t>แบ่งงานระหว่างคนกับ AI โดยมอบงานย่อยให้ฝ่ายที่เหมาะสมกว่า</a:t>
             </a:r>
@@ -14577,6 +15313,9 @@
                 <a:solidFill>
                   <a:schemeClr val="tx1"/>
                 </a:solidFill>
+                <a:latin typeface="Prompt" pitchFamily="34" charset="0"/>
+                <a:ea typeface="Prompt" pitchFamily="34" charset="-122"/>
+                <a:cs typeface="Prompt" pitchFamily="34" charset="-120"/>
               </a:rPr>
               <a:t>Cyborgs (ไซบอร์ก)  </a:t>
             </a:r>
@@ -14588,6 +15327,9 @@
                 <a:solidFill>
                   <a:schemeClr val="tx2"/>
                 </a:solidFill>
+                <a:latin typeface="Prompt" pitchFamily="34" charset="0"/>
+                <a:ea typeface="Prompt" pitchFamily="34" charset="-122"/>
+                <a:cs typeface="Prompt" pitchFamily="34" charset="-120"/>
               </a:rPr>
               <a:t>ผสาน AI เข้ากับขั้นตอนการทำงานอย่างต่อเนื่อง สลับไปมากับเครื่องมือตลอดเวลา</a:t>
             </a:r>
@@ -14624,6 +15366,9 @@
                 <a:solidFill>
                   <a:schemeClr val="tx2"/>
                 </a:solidFill>
+                <a:latin typeface="Prompt" pitchFamily="34" charset="0"/>
+                <a:ea typeface="Prompt" pitchFamily="34" charset="-122"/>
+                <a:cs typeface="Prompt" pitchFamily="34" charset="-120"/>
               </a:rPr>
               <a:t>Dell'Acqua, F., McFowland III, E., Mollick, E., Lifshitz-Assaf, H., Kellogg, K. C., Rajendran, S., Krayer, L., Candelon, F., &amp; Lakhani, K. R. (2023). Navigating the Jagged Technological Frontier. Harvard Business School Working Paper 24-013.</a:t>
             </a:r>
@@ -14711,6 +15456,9 @@
                 <a:solidFill>
                   <a:srgbClr val="2E8B86"/>
                 </a:solidFill>
+                <a:latin typeface="Prompt" pitchFamily="34" charset="0"/>
+                <a:ea typeface="Prompt" pitchFamily="34" charset="-122"/>
+                <a:cs typeface="Prompt" pitchFamily="34" charset="-120"/>
               </a:rPr>
               <a:t>ถัดไป:  </a:t>
             </a:r>
@@ -14722,6 +15470,9 @@
                 <a:solidFill>
                   <a:srgbClr val="1B2A4A"/>
                 </a:solidFill>
+                <a:latin typeface="Prompt" pitchFamily="34" charset="0"/>
+                <a:ea typeface="Prompt" pitchFamily="34" charset="-122"/>
+                <a:cs typeface="Prompt" pitchFamily="34" charset="-120"/>
               </a:rPr>
               <a:t>ผลแบบนี้จะยังเป็นจริงนอกสำนักงาน กับธุรกิจขนาดเล็กจริงหรือไม่?</a:t>
             </a:r>
@@ -14761,6 +15512,9 @@
                 <a:solidFill>
                   <a:srgbClr val="9AA5B4"/>
                 </a:solidFill>
+                <a:latin typeface="Prompt"/>
+                <a:ea typeface="Prompt"/>
+                <a:cs typeface="Prompt"/>
               </a:defRPr>
             </a:lvl1pPr>
           </a:lstStyle>
@@ -14830,6 +15584,9 @@
                 <a:solidFill>
                   <a:schemeClr val="accent1"/>
                 </a:solidFill>
+                <a:latin typeface="Prompt" pitchFamily="34" charset="0"/>
+                <a:ea typeface="Prompt" pitchFamily="34" charset="-122"/>
+                <a:cs typeface="Prompt" pitchFamily="34" charset="-120"/>
               </a:rPr>
               <a:t>บทความที่ 5  |  วัตถุประสงค์และผลการศึกษา</a:t>
             </a:r>
@@ -14870,6 +15627,9 @@
                 <a:solidFill>
                   <a:schemeClr val="tx1"/>
                 </a:solidFill>
+                <a:latin typeface="Prompt" pitchFamily="34" charset="0"/>
+                <a:ea typeface="Prompt" pitchFamily="34" charset="-122"/>
+                <a:cs typeface="Prompt" pitchFamily="34" charset="-120"/>
               </a:rPr>
               <a:t>ผลกระทบของ AI ต่อผู้ประกอบการที่แตกต่างกัน</a:t>
             </a:r>
@@ -15031,6 +15791,9 @@
                 <a:solidFill>
                   <a:schemeClr val="tx2"/>
                 </a:solidFill>
+                <a:latin typeface="Prompt" pitchFamily="34" charset="0"/>
+                <a:ea typeface="Prompt" pitchFamily="34" charset="-122"/>
+                <a:cs typeface="Prompt" pitchFamily="34" charset="-120"/>
               </a:rPr>
               <a:t>บทความ 5: ผู้ประกอบการ</a:t>
             </a:r>
@@ -15067,6 +15830,9 @@
                 <a:solidFill>
                   <a:schemeClr val="tx2"/>
                 </a:solidFill>
+                <a:latin typeface="Prompt" pitchFamily="34" charset="0"/>
+                <a:ea typeface="Prompt" pitchFamily="34" charset="-122"/>
+                <a:cs typeface="Prompt" pitchFamily="34" charset="-120"/>
               </a:rPr>
               <a:t>Nicholas G. Otis et al.  |  Management Science, Vol. 72, No. 7, 2026  |  DOI 10.1287/mnsc.2024.06909</a:t>
             </a:r>
@@ -15152,6 +15918,9 @@
                 <a:solidFill>
                   <a:schemeClr val="tx1"/>
                 </a:solidFill>
+                <a:latin typeface="Prompt" pitchFamily="34" charset="0"/>
+                <a:ea typeface="Prompt" pitchFamily="34" charset="-122"/>
+                <a:cs typeface="Prompt" pitchFamily="34" charset="-120"/>
               </a:rPr>
               <a:t>บริบทการศึกษา</a:t>
             </a:r>
@@ -15166,6 +15935,9 @@
                 <a:solidFill>
                   <a:schemeClr val="tx2"/>
                 </a:solidFill>
+                <a:latin typeface="Prompt" pitchFamily="34" charset="0"/>
+                <a:ea typeface="Prompt" pitchFamily="34" charset="-122"/>
+                <a:cs typeface="Prompt" pitchFamily="34" charset="-120"/>
               </a:rPr>
               <a:t>การทดลองภาคสนามกับผู้ประกอบการธุรกิจขนาดเล็กในประเทศเคนยา</a:t>
             </a:r>
@@ -15251,6 +16023,9 @@
                 <a:solidFill>
                   <a:schemeClr val="tx1"/>
                 </a:solidFill>
+                <a:latin typeface="Prompt" pitchFamily="34" charset="0"/>
+                <a:ea typeface="Prompt" pitchFamily="34" charset="-122"/>
+                <a:cs typeface="Prompt" pitchFamily="34" charset="-120"/>
               </a:rPr>
               <a:t>สิ่งที่ทดลอง</a:t>
             </a:r>
@@ -15265,6 +16040,9 @@
                 <a:solidFill>
                   <a:schemeClr val="tx2"/>
                 </a:solidFill>
+                <a:latin typeface="Prompt" pitchFamily="34" charset="0"/>
+                <a:ea typeface="Prompt" pitchFamily="34" charset="-122"/>
+                <a:cs typeface="Prompt" pitchFamily="34" charset="-120"/>
               </a:rPr>
               <a:t>การเข้าถึงผู้ช่วยธุรกิจ AI ที่ขับเคลื่อนด้วย GPT-4 ซึ่งให้คำแนะนำทางธุรกิจ</a:t>
             </a:r>
@@ -15350,6 +16128,9 @@
                 <a:solidFill>
                   <a:schemeClr val="tx1"/>
                 </a:solidFill>
+                <a:latin typeface="Prompt" pitchFamily="34" charset="0"/>
+                <a:ea typeface="Prompt" pitchFamily="34" charset="-122"/>
+                <a:cs typeface="Prompt" pitchFamily="34" charset="-120"/>
               </a:rPr>
               <a:t>ตัวแปรผลลัพธ์</a:t>
             </a:r>
@@ -15364,6 +16145,9 @@
                 <a:solidFill>
                   <a:schemeClr val="tx2"/>
                 </a:solidFill>
+                <a:latin typeface="Prompt" pitchFamily="34" charset="0"/>
+                <a:ea typeface="Prompt" pitchFamily="34" charset="-122"/>
+                <a:cs typeface="Prompt" pitchFamily="34" charset="-120"/>
               </a:rPr>
               <a:t>รายได้และกำไรของธุรกิจขนาดเล็ก</a:t>
             </a:r>
@@ -15461,6 +16245,9 @@
                 <a:solidFill>
                   <a:srgbClr val="FFFFFF"/>
                 </a:solidFill>
+                <a:latin typeface="Prompt" pitchFamily="34" charset="0"/>
+                <a:ea typeface="Prompt" pitchFamily="34" charset="-122"/>
+                <a:cs typeface="Prompt" pitchFamily="34" charset="-120"/>
               </a:rPr>
               <a:t>ผลการวิจัย (รายงานในบทความ)</a:t>
             </a:r>
@@ -15497,6 +16284,9 @@
                 <a:solidFill>
                   <a:srgbClr val="BFE6E0"/>
                 </a:solidFill>
+                <a:latin typeface="Prompt" pitchFamily="34" charset="0"/>
+                <a:ea typeface="Prompt" pitchFamily="34" charset="-122"/>
+                <a:cs typeface="Prompt" pitchFamily="34" charset="-120"/>
               </a:rPr>
               <a:t>ผลโดยเฉลี่ย</a:t>
             </a:r>
@@ -15533,6 +16323,9 @@
                 <a:solidFill>
                   <a:srgbClr val="FFFFFF"/>
                 </a:solidFill>
+                <a:latin typeface="Prompt" pitchFamily="34" charset="0"/>
+                <a:ea typeface="Prompt" pitchFamily="34" charset="-122"/>
+                <a:cs typeface="Prompt" pitchFamily="34" charset="-120"/>
               </a:rPr>
               <a:t>ผู้วิจัยไม่สามารถปฏิเสธสมมติฐานว่าง (null hypothesis) ที่ว่าไม่มีผลเฉลี่ยของการทดลองต่อรายได้และกำไร</a:t>
             </a:r>
@@ -15654,6 +16447,9 @@
                 <a:solidFill>
                   <a:srgbClr val="FFFFFF"/>
                 </a:solidFill>
+                <a:latin typeface="Prompt" pitchFamily="34" charset="0"/>
+                <a:ea typeface="Prompt" pitchFamily="34" charset="-122"/>
+                <a:cs typeface="Prompt" pitchFamily="34" charset="-120"/>
               </a:rPr>
               <a:t>ผลการวิจัย (รายงานในบทความ)</a:t>
             </a:r>
@@ -15690,6 +16486,9 @@
                 <a:solidFill>
                   <a:schemeClr val="tx1"/>
                 </a:solidFill>
+                <a:latin typeface="Prompt" pitchFamily="34" charset="0"/>
+                <a:ea typeface="Prompt" pitchFamily="34" charset="-122"/>
+                <a:cs typeface="Prompt" pitchFamily="34" charset="-120"/>
               </a:rPr>
               <a:t>ผลแยกตามกลุ่มผลการดำเนินงานตั้งต้น</a:t>
             </a:r>
@@ -15769,10 +16568,13 @@
               <a:buNone/>
             </a:pPr>
             <a:r>
-              <a:rPr lang="en-US" sz="1000" b="1" dirty="0">
+              <a:rPr lang="en-US" sz="950" b="1" dirty="0">
                 <a:solidFill>
                   <a:schemeClr val="tx1"/>
                 </a:solidFill>
+                <a:latin typeface="Prompt" pitchFamily="34" charset="0"/>
+                <a:ea typeface="Prompt" pitchFamily="34" charset="-122"/>
+                <a:cs typeface="Prompt" pitchFamily="34" charset="-120"/>
               </a:rPr>
               <a:t>กลุ่มผลงานต่ำตั้งแต่ต้น  </a:t>
             </a:r>
@@ -15780,14 +16582,17 @@
               <a:buNone/>
             </a:pPr>
             <a:r>
-              <a:rPr lang="en-US" sz="1000" b="1" dirty="0">
+              <a:rPr lang="en-US" sz="950" b="1" dirty="0">
                 <a:solidFill>
                   <a:srgbClr val="5A6472"/>
                 </a:solidFill>
+                <a:latin typeface="Prompt" pitchFamily="34" charset="0"/>
+                <a:ea typeface="Prompt" pitchFamily="34" charset="-122"/>
+                <a:cs typeface="Prompt" pitchFamily="34" charset="-120"/>
               </a:rPr>
               <a:t>แย่ลงเกือบ 10%</a:t>
             </a:r>
-            <a:endParaRPr lang="en-US" sz="1000" dirty="0"/>
+            <a:endParaRPr lang="en-US" sz="950" dirty="0"/>
           </a:p>
         </p:txBody>
       </p:sp>
@@ -15841,10 +16646,13 @@
               <a:buNone/>
             </a:pPr>
             <a:r>
-              <a:rPr lang="en-US" sz="1000" b="1" dirty="0">
+              <a:rPr lang="en-US" sz="950" b="1" dirty="0">
                 <a:solidFill>
                   <a:schemeClr val="tx1"/>
                 </a:solidFill>
+                <a:latin typeface="Prompt" pitchFamily="34" charset="0"/>
+                <a:ea typeface="Prompt" pitchFamily="34" charset="-122"/>
+                <a:cs typeface="Prompt" pitchFamily="34" charset="-120"/>
               </a:rPr>
               <a:t>กลุ่มผลงานสูงตั้งแต่ต้น  </a:t>
             </a:r>
@@ -15852,14 +16660,17 @@
               <a:buNone/>
             </a:pPr>
             <a:r>
-              <a:rPr lang="en-US" sz="1000" b="1" dirty="0">
+              <a:rPr lang="en-US" sz="950" b="1" dirty="0">
                 <a:solidFill>
                   <a:srgbClr val="2E8B86"/>
                 </a:solidFill>
+                <a:latin typeface="Prompt" pitchFamily="34" charset="0"/>
+                <a:ea typeface="Prompt" pitchFamily="34" charset="-122"/>
+                <a:cs typeface="Prompt" pitchFamily="34" charset="-120"/>
               </a:rPr>
               <a:t>อาจได้ประโยชน์มากกว่า 15%</a:t>
             </a:r>
-            <a:endParaRPr lang="en-US" sz="1000" dirty="0"/>
+            <a:endParaRPr lang="en-US" sz="950" dirty="0"/>
           </a:p>
         </p:txBody>
       </p:sp>
@@ -15917,6 +16728,9 @@
                 <a:solidFill>
                   <a:schemeClr val="tx2"/>
                 </a:solidFill>
+                <a:latin typeface="Prompt" pitchFamily="34" charset="0"/>
+                <a:ea typeface="Prompt" pitchFamily="34" charset="-122"/>
+                <a:cs typeface="Prompt" pitchFamily="34" charset="-120"/>
               </a:rPr>
               <a:t>ความยาวแท่งเป็นเพียงภาพประกอบของตัวเลขที่รายงาน</a:t>
             </a:r>
@@ -15980,6 +16794,9 @@
                 <a:solidFill>
                   <a:schemeClr val="tx1"/>
                 </a:solidFill>
+                <a:latin typeface="Prompt" pitchFamily="34" charset="0"/>
+                <a:ea typeface="Prompt" pitchFamily="34" charset="-122"/>
+                <a:cs typeface="Prompt" pitchFamily="34" charset="-120"/>
               </a:rPr>
               <a:t>ความแตกต่างนี้ไม่ได้มาจากคำถามที่ถามหรือคำแนะนำที่ AI ให้ แต่มาจากคำแนะนำที่ผู้ประกอบการเลือกนำไปปฏิบัติ</a:t>
             </a:r>
@@ -16067,6 +16884,9 @@
                 <a:solidFill>
                   <a:schemeClr val="tx2"/>
                 </a:solidFill>
+                <a:latin typeface="Prompt" pitchFamily="34" charset="0"/>
+                <a:ea typeface="Prompt" pitchFamily="34" charset="-122"/>
+                <a:cs typeface="Prompt" pitchFamily="34" charset="-120"/>
               </a:rPr>
               <a:t>ข้อควรระวัง: ตัวเลขนี้เป็นค่าเฉลี่ยของกลุ่มย่อย ไม่ได้แสดงว่าผู้ประกอบการที่เก่งทุกคนจะได้ประโยชน์ หรือผู้ประกอบการที่อ่อนทุกคนจะเสียประโยชน์</a:t>
             </a:r>
@@ -16103,6 +16923,9 @@
                 <a:solidFill>
                   <a:schemeClr val="tx2"/>
                 </a:solidFill>
+                <a:latin typeface="Prompt" pitchFamily="34" charset="0"/>
+                <a:ea typeface="Prompt" pitchFamily="34" charset="-122"/>
+                <a:cs typeface="Prompt" pitchFamily="34" charset="-120"/>
               </a:rPr>
               <a:t>Otis, N. G., Clarke, R., Delecourt, S., Holtz, D., &amp; Koning, R. (2026). The Uneven Impact of Generative Artificial Intelligence on Entrepreneurial Performance: Evidence from a Field Experiment in Kenya. Management Science, 72(7). https://doi.org/10.1287/mnsc.2024.06909</a:t>
             </a:r>
@@ -16190,6 +17013,9 @@
                 <a:solidFill>
                   <a:srgbClr val="2E8B86"/>
                 </a:solidFill>
+                <a:latin typeface="Prompt" pitchFamily="34" charset="0"/>
+                <a:ea typeface="Prompt" pitchFamily="34" charset="-122"/>
+                <a:cs typeface="Prompt" pitchFamily="34" charset="-120"/>
               </a:rPr>
               <a:t>ถัดไป:  </a:t>
             </a:r>
@@ -16201,6 +17027,9 @@
                 <a:solidFill>
                   <a:srgbClr val="1B2A4A"/>
                 </a:solidFill>
+                <a:latin typeface="Prompt" pitchFamily="34" charset="0"/>
+                <a:ea typeface="Prompt" pitchFamily="34" charset="-122"/>
+                <a:cs typeface="Prompt" pitchFamily="34" charset="-120"/>
               </a:rPr>
               <a:t>สองงานวิจัย บทเรียนเดียว: เมื่อมองร่วมกันบอกอะไรเรา?</a:t>
             </a:r>
@@ -16240,6 +17069,9 @@
                 <a:solidFill>
                   <a:srgbClr val="9AA5B4"/>
                 </a:solidFill>
+                <a:latin typeface="Prompt"/>
+                <a:ea typeface="Prompt"/>
+                <a:cs typeface="Prompt"/>
               </a:defRPr>
             </a:lvl1pPr>
           </a:lstStyle>
@@ -16304,7 +17136,7 @@
     </a:clrScheme>
     <a:fontScheme name="AI Navy Teal">
       <a:majorFont>
-        <a:latin typeface="Tahoma"/>
+        <a:latin typeface="Poppins"/>
         <a:ea typeface=""/>
         <a:cs typeface=""/>
         <a:font script="Jpan" typeface="游ゴシック Light"/>
@@ -16356,7 +17188,7 @@
         <a:font script="Tfng" typeface="Ebrima"/>
       </a:majorFont>
       <a:minorFont>
-        <a:latin typeface="Tahoma"/>
+        <a:latin typeface="Poppins"/>
         <a:ea typeface=""/>
         <a:cs typeface=""/>
         <a:font script="Jpan" typeface="游ゴシック"/>

--- a/presentation/AI_Work_Performance_ENG501.pptx
+++ b/presentation/AI_Work_Performance_ENG501.pptx
@@ -116,7 +116,7 @@
   <p:extLst>
     <p:ext uri="{521415D9-36F7-43E2-AB2F-B90AF26B5E84}">
       <p14:sectionLst xmlns:p14="http://schemas.microsoft.com/office/powerpoint/2010/main">
-        <p14:section name="English (Slides 1-5)" id="{634685b7-f5ec-e893-8e3f-34eaaca150ac}">
+        <p14:section name="English (Slides 1-5)" id="{58d66c0d-2ef4-732c-3a0b-0c45bc4ff314}">
           <p14:sldIdLst>
             <p14:sldId id="256"/>
             <p14:sldId id="257"/>
@@ -125,7 +125,7 @@
             <p14:sldId id="260"/>
           </p14:sldIdLst>
         </p14:section>
-        <p14:section name="ภาษาไทย (Slides 6-10)" id="{a2d8bb49-f92f-f433-b64c-24a12a24b020}">
+        <p14:section name="ภาษาไทย (Slides 6-10)" id="{75e8ac88-95ac-c807-9bab-8c4f89a07d1b}">
           <p14:sldIdLst>
             <p14:sldId id="261"/>
             <p14:sldId id="262"/>

--- a/presentation/AI_Work_Performance_ENG501.pptx
+++ b/presentation/AI_Work_Performance_ENG501.pptx
@@ -116,7 +116,7 @@
   <p:extLst>
     <p:ext uri="{521415D9-36F7-43E2-AB2F-B90AF26B5E84}">
       <p14:sectionLst xmlns:p14="http://schemas.microsoft.com/office/powerpoint/2010/main">
-        <p14:section name="English version: two field experiments on AI, productivity and business performance." id="{af6cf5be-a0b5-6d41-56cd-672e3d0910ee}">
+        <p14:section name="English version: two field experiments on AI, productivity and business performance." id="{a4191d4c-2f5c-4ce6-f622-e5471820d11e}">
           <p14:sldIdLst>
             <p14:sldId id="256"/>
             <p14:sldId id="257"/>
@@ -130,7 +130,7 @@
             <p14:sldId id="265"/>
           </p14:sldIdLst>
         </p14:section>
-        <p14:section name="ฉบับภาษาไทย: การทดลองภาคสนามสองชิ้นเรื่อง AI ผลิตภาพ และผลการดำเนินธุรกิจ" id="{10922c1d-c01d-182c-4717-5834c61fa97e}">
+        <p14:section name="ฉบับภาษาไทย: การทดลองภาคสนามสองชิ้นเรื่อง AI ผลิตภาพ และผลการดำเนินธุรกิจ" id="{b2802288-ed4d-3b8f-cbc6-2dd6fae267ab}">
           <p14:sldIdLst/>
         </p14:section>
       </p14:sectionLst>
@@ -1744,7 +1744,7 @@
           <a:ln/>
         </p:spPr>
         <p:txBody>
-          <a:bodyPr wrap="square" lIns="0" tIns="0" rIns="0" bIns="0" rtlCol="0" anchor="ctr"/>
+          <a:bodyPr wrap="none" lIns="0" tIns="0" rIns="0" bIns="0" rtlCol="0" anchor="ctr"/>
           <a:lstStyle/>
           <a:p>
             <a:pPr algn="l" indent="0" marL="0">
@@ -1777,7 +1777,7 @@
         <p:spPr>
           <a:xfrm>
             <a:off x="609600" y="693390"/>
-            <a:ext cx="5829300" cy="1015305"/>
+            <a:ext cx="5943600" cy="1015305"/>
           </a:xfrm>
           <a:prstGeom prst="rect">
             <a:avLst/>
@@ -1828,7 +1828,7 @@
           <a:ln/>
         </p:spPr>
         <p:txBody>
-          <a:bodyPr wrap="square" lIns="0" tIns="0" rIns="0" bIns="0" rtlCol="0" anchor="ctr"/>
+          <a:bodyPr wrap="none" lIns="0" tIns="0" rIns="0" bIns="0" rtlCol="0" anchor="ctr"/>
           <a:lstStyle/>
           <a:p>
             <a:pPr algn="l" indent="0" marL="0">
@@ -1894,7 +1894,7 @@
           <a:ln/>
         </p:spPr>
         <p:txBody>
-          <a:bodyPr wrap="square" lIns="0" tIns="0" rIns="0" bIns="0" rtlCol="0" anchor="ctr"/>
+          <a:bodyPr wrap="none" lIns="0" tIns="0" rIns="0" bIns="0" rtlCol="0" anchor="ctr"/>
           <a:lstStyle/>
           <a:p>
             <a:pPr algn="l" indent="0" marL="0">
@@ -1958,7 +1958,7 @@
           <a:ln/>
         </p:spPr>
         <p:txBody>
-          <a:bodyPr wrap="square" lIns="0" tIns="0" rIns="0" bIns="0" rtlCol="0" anchor="ctr"/>
+          <a:bodyPr wrap="none" lIns="0" tIns="0" rIns="0" bIns="0" rtlCol="0" anchor="ctr"/>
           <a:lstStyle/>
           <a:p>
             <a:pPr algn="l" indent="0" marL="0">
@@ -1991,7 +1991,7 @@
         <p:spPr>
           <a:xfrm>
             <a:off x="800100" y="3055590"/>
-            <a:ext cx="3575304" cy="482873"/>
+            <a:ext cx="3645408" cy="482873"/>
           </a:xfrm>
           <a:prstGeom prst="rect">
             <a:avLst/>
@@ -2033,7 +2033,7 @@
         <p:spPr>
           <a:xfrm>
             <a:off x="800100" y="3595613"/>
-            <a:ext cx="3575304" cy="319980"/>
+            <a:ext cx="3645408" cy="319980"/>
           </a:xfrm>
           <a:prstGeom prst="rect">
             <a:avLst/>
@@ -2106,7 +2106,7 @@
           <a:ln/>
         </p:spPr>
         <p:txBody>
-          <a:bodyPr wrap="square" lIns="0" tIns="0" rIns="0" bIns="0" rtlCol="0" anchor="ctr"/>
+          <a:bodyPr wrap="none" lIns="0" tIns="0" rIns="0" bIns="0" rtlCol="0" anchor="ctr"/>
           <a:lstStyle/>
           <a:p>
             <a:pPr algn="l" indent="0" marL="0">
@@ -2139,7 +2139,7 @@
         <p:spPr>
           <a:xfrm>
             <a:off x="4838700" y="3055590"/>
-            <a:ext cx="3575304" cy="482873"/>
+            <a:ext cx="3645408" cy="482873"/>
           </a:xfrm>
           <a:prstGeom prst="rect">
             <a:avLst/>
@@ -2181,7 +2181,7 @@
         <p:spPr>
           <a:xfrm>
             <a:off x="4838700" y="3595613"/>
-            <a:ext cx="3575304" cy="319980"/>
+            <a:ext cx="3645408" cy="319980"/>
           </a:xfrm>
           <a:prstGeom prst="rect">
             <a:avLst/>
@@ -2232,7 +2232,7 @@
           <a:ln/>
         </p:spPr>
         <p:txBody>
-          <a:bodyPr wrap="square" lIns="0" tIns="0" rIns="0" bIns="0" rtlCol="0" anchor="ctr"/>
+          <a:bodyPr wrap="none" lIns="0" tIns="0" rIns="0" bIns="0" rtlCol="0" anchor="ctr"/>
           <a:lstStyle/>
           <a:p>
             <a:pPr algn="l" indent="0" marL="0">
@@ -3148,7 +3148,7 @@
           <a:ln/>
         </p:spPr>
         <p:txBody>
-          <a:bodyPr wrap="square" lIns="0" tIns="0" rIns="0" bIns="0" rtlCol="0" anchor="ctr"/>
+          <a:bodyPr wrap="none" lIns="0" tIns="0" rIns="0" bIns="0" rtlCol="0" anchor="ctr"/>
           <a:lstStyle/>
           <a:p>
             <a:pPr algn="l" indent="0" marL="0">
@@ -3190,7 +3190,7 @@
           <a:ln/>
         </p:spPr>
         <p:txBody>
-          <a:bodyPr wrap="square" lIns="0" tIns="0" rIns="0" bIns="0" rtlCol="0" anchor="ctr"/>
+          <a:bodyPr wrap="none" lIns="0" tIns="0" rIns="0" bIns="0" rtlCol="0" anchor="ctr"/>
           <a:lstStyle/>
           <a:p>
             <a:pPr algn="l" indent="0" marL="0">
@@ -3254,7 +3254,7 @@
           <a:ln/>
         </p:spPr>
         <p:txBody>
-          <a:bodyPr wrap="square" lIns="95250" tIns="0" rIns="95250" bIns="0" rtlCol="0" anchor="ctr"/>
+          <a:bodyPr wrap="none" lIns="95250" tIns="0" rIns="95250" bIns="0" rtlCol="0" anchor="ctr"/>
           <a:lstStyle/>
           <a:p>
             <a:pPr algn="ctr" indent="0" marL="0">
@@ -3342,7 +3342,7 @@
           <a:ln/>
         </p:spPr>
         <p:txBody>
-          <a:bodyPr wrap="square" lIns="95250" tIns="0" rIns="95250" bIns="0" rtlCol="0" anchor="ctr"/>
+          <a:bodyPr wrap="none" lIns="95250" tIns="0" rIns="95250" bIns="0" rtlCol="0" anchor="ctr"/>
           <a:lstStyle/>
           <a:p>
             <a:pPr algn="l" indent="0" marL="0">
@@ -3407,7 +3407,7 @@
           <a:ln/>
         </p:spPr>
         <p:txBody>
-          <a:bodyPr wrap="square" lIns="95250" tIns="0" rIns="95250" bIns="0" rtlCol="0" anchor="ctr"/>
+          <a:bodyPr wrap="none" lIns="95250" tIns="0" rIns="95250" bIns="0" rtlCol="0" anchor="ctr"/>
           <a:lstStyle/>
           <a:p>
             <a:pPr algn="l" indent="0" marL="0">
@@ -3472,7 +3472,7 @@
           <a:ln/>
         </p:spPr>
         <p:txBody>
-          <a:bodyPr wrap="square" lIns="95250" tIns="0" rIns="95250" bIns="0" rtlCol="0" anchor="ctr"/>
+          <a:bodyPr wrap="none" lIns="95250" tIns="0" rIns="95250" bIns="0" rtlCol="0" anchor="ctr"/>
           <a:lstStyle/>
           <a:p>
             <a:pPr algn="l" indent="0" marL="0">
@@ -3537,7 +3537,7 @@
           <a:ln/>
         </p:spPr>
         <p:txBody>
-          <a:bodyPr wrap="square" lIns="95250" tIns="0" rIns="95250" bIns="0" rtlCol="0" anchor="ctr"/>
+          <a:bodyPr wrap="none" lIns="95250" tIns="0" rIns="95250" bIns="0" rtlCol="0" anchor="ctr"/>
           <a:lstStyle/>
           <a:p>
             <a:pPr algn="l" indent="0" marL="0">
@@ -3602,7 +3602,7 @@
           <a:ln/>
         </p:spPr>
         <p:txBody>
-          <a:bodyPr wrap="square" lIns="95250" tIns="0" rIns="95250" bIns="0" rtlCol="0" anchor="ctr"/>
+          <a:bodyPr wrap="none" lIns="95250" tIns="0" rIns="95250" bIns="0" rtlCol="0" anchor="ctr"/>
           <a:lstStyle/>
           <a:p>
             <a:pPr algn="l" indent="0" marL="0">
@@ -3687,7 +3687,7 @@
           <a:ln/>
         </p:spPr>
         <p:txBody>
-          <a:bodyPr wrap="square" lIns="95250" tIns="0" rIns="95250" bIns="0" rtlCol="0" anchor="ctr"/>
+          <a:bodyPr wrap="none" lIns="95250" tIns="0" rIns="95250" bIns="0" rtlCol="0" anchor="ctr"/>
           <a:lstStyle/>
           <a:p>
             <a:pPr algn="l" indent="0" marL="0">
@@ -3752,7 +3752,7 @@
           <a:ln/>
         </p:spPr>
         <p:txBody>
-          <a:bodyPr wrap="square" lIns="95250" tIns="0" rIns="95250" bIns="0" rtlCol="0" anchor="ctr"/>
+          <a:bodyPr wrap="none" lIns="95250" tIns="0" rIns="95250" bIns="0" rtlCol="0" anchor="ctr"/>
           <a:lstStyle/>
           <a:p>
             <a:pPr algn="l" indent="0" marL="0">
@@ -3817,7 +3817,7 @@
           <a:ln/>
         </p:spPr>
         <p:txBody>
-          <a:bodyPr wrap="square" lIns="95250" tIns="0" rIns="95250" bIns="0" rtlCol="0" anchor="ctr"/>
+          <a:bodyPr wrap="none" lIns="95250" tIns="0" rIns="95250" bIns="0" rtlCol="0" anchor="ctr"/>
           <a:lstStyle/>
           <a:p>
             <a:pPr algn="l" indent="0" marL="0">
@@ -3882,7 +3882,7 @@
           <a:ln/>
         </p:spPr>
         <p:txBody>
-          <a:bodyPr wrap="square" lIns="95250" tIns="0" rIns="95250" bIns="0" rtlCol="0" anchor="ctr"/>
+          <a:bodyPr wrap="none" lIns="95250" tIns="0" rIns="95250" bIns="0" rtlCol="0" anchor="ctr"/>
           <a:lstStyle/>
           <a:p>
             <a:pPr algn="l" indent="0" marL="0">
@@ -3947,7 +3947,7 @@
           <a:ln/>
         </p:spPr>
         <p:txBody>
-          <a:bodyPr wrap="square" lIns="95250" tIns="0" rIns="95250" bIns="0" rtlCol="0" anchor="ctr"/>
+          <a:bodyPr wrap="none" lIns="95250" tIns="0" rIns="95250" bIns="0" rtlCol="0" anchor="ctr"/>
           <a:lstStyle/>
           <a:p>
             <a:pPr algn="l" indent="0" marL="0">
@@ -4012,7 +4012,7 @@
           <a:ln/>
         </p:spPr>
         <p:txBody>
-          <a:bodyPr wrap="square" lIns="95250" tIns="0" rIns="95250" bIns="0" rtlCol="0" anchor="ctr"/>
+          <a:bodyPr wrap="none" lIns="95250" tIns="0" rIns="95250" bIns="0" rtlCol="0" anchor="ctr"/>
           <a:lstStyle/>
           <a:p>
             <a:pPr algn="l" indent="0" marL="0">
@@ -4098,7 +4098,7 @@
           <a:ln/>
         </p:spPr>
         <p:txBody>
-          <a:bodyPr wrap="square" lIns="85725" tIns="0" rIns="85725" bIns="0" rtlCol="0" anchor="ctr"/>
+          <a:bodyPr wrap="none" lIns="85725" tIns="0" rIns="85725" bIns="0" rtlCol="0" anchor="ctr"/>
           <a:lstStyle/>
           <a:p>
             <a:pPr algn="ctr" indent="0" marL="0">
@@ -4131,7 +4131,7 @@
         <p:spPr>
           <a:xfrm>
             <a:off x="819150" y="3541365"/>
-            <a:ext cx="3400425" cy="559222"/>
+            <a:ext cx="3467100" cy="559222"/>
           </a:xfrm>
           <a:prstGeom prst="rect">
             <a:avLst/>
@@ -4223,7 +4223,7 @@
           <a:ln/>
         </p:spPr>
         <p:txBody>
-          <a:bodyPr wrap="square" lIns="0" tIns="0" rIns="0" bIns="0" rtlCol="0" anchor="ctr"/>
+          <a:bodyPr wrap="none" lIns="0" tIns="0" rIns="0" bIns="0" rtlCol="0" anchor="ctr"/>
           <a:lstStyle/>
           <a:p>
             <a:pPr algn="l" indent="0" marL="0">
@@ -4289,7 +4289,7 @@
           <a:ln/>
         </p:spPr>
         <p:txBody>
-          <a:bodyPr wrap="square" lIns="0" tIns="0" rIns="0" bIns="0" rtlCol="0" anchor="ctr"/>
+          <a:bodyPr wrap="none" lIns="0" tIns="0" rIns="0" bIns="0" rtlCol="0" anchor="ctr"/>
           <a:lstStyle/>
           <a:p>
             <a:pPr algn="l" indent="0" marL="0">
@@ -4355,7 +4355,7 @@
           <a:ln/>
         </p:spPr>
         <p:txBody>
-          <a:bodyPr wrap="square" lIns="0" tIns="0" rIns="0" bIns="0" rtlCol="0" anchor="ctr"/>
+          <a:bodyPr wrap="none" lIns="0" tIns="0" rIns="0" bIns="0" rtlCol="0" anchor="ctr"/>
           <a:lstStyle/>
           <a:p>
             <a:pPr algn="l" indent="0" marL="0">
@@ -4436,7 +4436,7 @@
         <p:spPr>
           <a:xfrm>
             <a:off x="609600" y="4678710"/>
-            <a:ext cx="5343525" cy="319980"/>
+            <a:ext cx="5448300" cy="319980"/>
           </a:xfrm>
           <a:prstGeom prst="rect">
             <a:avLst/>
@@ -4487,7 +4487,7 @@
           <a:ln/>
         </p:spPr>
         <p:txBody>
-          <a:bodyPr wrap="square" lIns="0" tIns="0" rIns="0" bIns="0" rtlCol="0" anchor="ctr"/>
+          <a:bodyPr wrap="none" lIns="0" tIns="0" rIns="0" bIns="0" rtlCol="0" anchor="ctr"/>
           <a:lstStyle/>
           <a:p>
             <a:pPr algn="r" indent="0" marL="0">
@@ -6848,7 +6848,7 @@
           <a:ln/>
         </p:spPr>
         <p:txBody>
-          <a:bodyPr wrap="square" lIns="0" tIns="0" rIns="0" bIns="0" rtlCol="0" anchor="ctr"/>
+          <a:bodyPr wrap="none" lIns="0" tIns="0" rIns="0" bIns="0" rtlCol="0" anchor="ctr"/>
           <a:lstStyle/>
           <a:p>
             <a:pPr algn="l" indent="0" marL="0">
@@ -6890,7 +6890,7 @@
           <a:ln/>
         </p:spPr>
         <p:txBody>
-          <a:bodyPr wrap="square" lIns="0" tIns="0" rIns="0" bIns="0" rtlCol="0" anchor="ctr"/>
+          <a:bodyPr wrap="none" lIns="0" tIns="0" rIns="0" bIns="0" rtlCol="0" anchor="ctr"/>
           <a:lstStyle/>
           <a:p>
             <a:pPr algn="l" indent="0" marL="0">
@@ -6978,7 +6978,7 @@
           <a:ln/>
         </p:spPr>
         <p:txBody>
-          <a:bodyPr wrap="square" lIns="0" tIns="0" rIns="0" bIns="0" rtlCol="0" anchor="ctr"/>
+          <a:bodyPr wrap="none" lIns="0" tIns="0" rIns="0" bIns="0" rtlCol="0" anchor="ctr"/>
           <a:lstStyle/>
           <a:p>
             <a:pPr algn="l" indent="0" marL="0">
@@ -7011,7 +7011,7 @@
         <p:spPr>
           <a:xfrm>
             <a:off x="1066800" y="1609725"/>
-            <a:ext cx="3225546" cy="346621"/>
+            <a:ext cx="3288792" cy="346621"/>
           </a:xfrm>
           <a:prstGeom prst="rect">
             <a:avLst/>
@@ -7125,7 +7125,7 @@
           <a:ln/>
         </p:spPr>
         <p:txBody>
-          <a:bodyPr wrap="square" lIns="0" tIns="0" rIns="0" bIns="0" rtlCol="0" anchor="ctr"/>
+          <a:bodyPr wrap="none" lIns="0" tIns="0" rIns="0" bIns="0" rtlCol="0" anchor="ctr"/>
           <a:lstStyle/>
           <a:p>
             <a:pPr algn="l" indent="0" marL="0">
@@ -7167,7 +7167,7 @@
           <a:ln/>
         </p:spPr>
         <p:txBody>
-          <a:bodyPr wrap="square" lIns="0" tIns="0" rIns="0" bIns="0" rtlCol="0" anchor="ctr"/>
+          <a:bodyPr wrap="none" lIns="0" tIns="0" rIns="0" bIns="0" rtlCol="0" anchor="ctr"/>
           <a:lstStyle/>
           <a:p>
             <a:pPr algn="l" indent="0" marL="0">
@@ -7209,7 +7209,7 @@
           <a:ln/>
         </p:spPr>
         <p:txBody>
-          <a:bodyPr wrap="square" lIns="0" tIns="0" rIns="0" bIns="0" rtlCol="0" anchor="ctr"/>
+          <a:bodyPr wrap="none" lIns="0" tIns="0" rIns="0" bIns="0" rtlCol="0" anchor="ctr"/>
           <a:lstStyle/>
           <a:p>
             <a:pPr algn="l" indent="0" marL="0">
@@ -7273,7 +7273,7 @@
           <a:ln/>
         </p:spPr>
         <p:txBody>
-          <a:bodyPr wrap="square" lIns="0" tIns="0" rIns="0" bIns="0" rtlCol="0" anchor="ctr"/>
+          <a:bodyPr wrap="none" lIns="0" tIns="0" rIns="0" bIns="0" rtlCol="0" anchor="ctr"/>
           <a:lstStyle/>
           <a:p>
             <a:pPr algn="l" indent="0" marL="0">
@@ -7315,7 +7315,7 @@
           <a:ln/>
         </p:spPr>
         <p:txBody>
-          <a:bodyPr wrap="square" lIns="0" tIns="0" rIns="0" bIns="0" rtlCol="0" anchor="ctr"/>
+          <a:bodyPr wrap="none" lIns="0" tIns="0" rIns="0" bIns="0" rtlCol="0" anchor="ctr"/>
           <a:lstStyle/>
           <a:p>
             <a:pPr algn="l" indent="0" marL="0">
@@ -7379,7 +7379,7 @@
           <a:ln/>
         </p:spPr>
         <p:txBody>
-          <a:bodyPr wrap="square" lIns="0" tIns="0" rIns="0" bIns="0" rtlCol="0" anchor="ctr"/>
+          <a:bodyPr wrap="none" lIns="0" tIns="0" rIns="0" bIns="0" rtlCol="0" anchor="ctr"/>
           <a:lstStyle/>
           <a:p>
             <a:pPr algn="l" indent="0" marL="0">
@@ -7421,7 +7421,7 @@
           <a:ln/>
         </p:spPr>
         <p:txBody>
-          <a:bodyPr wrap="square" lIns="0" tIns="0" rIns="0" bIns="0" rtlCol="0" anchor="ctr"/>
+          <a:bodyPr wrap="none" lIns="0" tIns="0" rIns="0" bIns="0" rtlCol="0" anchor="ctr"/>
           <a:lstStyle/>
           <a:p>
             <a:pPr algn="l" indent="0" marL="0">
@@ -7485,7 +7485,7 @@
           <a:ln/>
         </p:spPr>
         <p:txBody>
-          <a:bodyPr wrap="square" lIns="0" tIns="0" rIns="0" bIns="0" rtlCol="0" anchor="ctr"/>
+          <a:bodyPr wrap="none" lIns="0" tIns="0" rIns="0" bIns="0" rtlCol="0" anchor="ctr"/>
           <a:lstStyle/>
           <a:p>
             <a:pPr algn="l" indent="0" marL="0">
@@ -7518,7 +7518,7 @@
         <p:spPr>
           <a:xfrm>
             <a:off x="3219450" y="3308970"/>
-            <a:ext cx="893826" cy="639961"/>
+            <a:ext cx="911352" cy="639961"/>
           </a:xfrm>
           <a:prstGeom prst="rect">
             <a:avLst/>
@@ -7591,7 +7591,7 @@
           <a:ln/>
         </p:spPr>
         <p:txBody>
-          <a:bodyPr wrap="square" lIns="95250" tIns="0" rIns="95250" bIns="0" rtlCol="0" anchor="ctr"/>
+          <a:bodyPr wrap="none" lIns="95250" tIns="0" rIns="95250" bIns="0" rtlCol="0" anchor="ctr"/>
           <a:lstStyle/>
           <a:p>
             <a:pPr algn="ctr" indent="0" marL="0">
@@ -7624,7 +7624,7 @@
         <p:spPr>
           <a:xfrm>
             <a:off x="4724400" y="1741140"/>
-            <a:ext cx="2720340" cy="388590"/>
+            <a:ext cx="2773680" cy="388590"/>
           </a:xfrm>
           <a:prstGeom prst="rect">
             <a:avLst/>
@@ -7666,7 +7666,7 @@
         <p:spPr>
           <a:xfrm>
             <a:off x="4724400" y="2205930"/>
-            <a:ext cx="2720340" cy="519931"/>
+            <a:ext cx="2773680" cy="519931"/>
           </a:xfrm>
           <a:prstGeom prst="rect">
             <a:avLst/>
@@ -7775,7 +7775,7 @@
           <a:ln/>
         </p:spPr>
         <p:txBody>
-          <a:bodyPr wrap="square" lIns="0" tIns="0" rIns="0" bIns="0" rtlCol="0" anchor="ctr"/>
+          <a:bodyPr wrap="none" lIns="0" tIns="0" rIns="0" bIns="0" rtlCol="0" anchor="ctr"/>
           <a:lstStyle/>
           <a:p>
             <a:pPr algn="r" indent="0" marL="0">
@@ -7889,7 +7889,7 @@
           <a:ln/>
         </p:spPr>
         <p:txBody>
-          <a:bodyPr wrap="square" lIns="0" tIns="0" rIns="0" bIns="0" rtlCol="0" anchor="ctr"/>
+          <a:bodyPr wrap="none" lIns="0" tIns="0" rIns="0" bIns="0" rtlCol="0" anchor="ctr"/>
           <a:lstStyle/>
           <a:p>
             <a:pPr algn="l" indent="0" marL="0">
@@ -7922,7 +7922,7 @@
         <p:spPr>
           <a:xfrm>
             <a:off x="4724400" y="4110930"/>
-            <a:ext cx="3886200" cy="308521"/>
+            <a:ext cx="3962400" cy="308521"/>
           </a:xfrm>
           <a:prstGeom prst="rect">
             <a:avLst/>
@@ -7973,7 +7973,7 @@
           <a:ln/>
         </p:spPr>
         <p:txBody>
-          <a:bodyPr wrap="square" lIns="0" tIns="0" rIns="0" bIns="0" rtlCol="0" anchor="ctr"/>
+          <a:bodyPr wrap="none" lIns="0" tIns="0" rIns="0" bIns="0" rtlCol="0" anchor="ctr"/>
           <a:lstStyle/>
           <a:p>
             <a:pPr algn="l" indent="0" marL="0">
@@ -8015,7 +8015,7 @@
           <a:ln/>
         </p:spPr>
         <p:txBody>
-          <a:bodyPr wrap="square" lIns="0" tIns="0" rIns="0" bIns="0" rtlCol="0" anchor="ctr"/>
+          <a:bodyPr wrap="none" lIns="0" tIns="0" rIns="0" bIns="0" rtlCol="0" anchor="ctr"/>
           <a:lstStyle/>
           <a:p>
             <a:pPr algn="r" indent="0" marL="0">
@@ -10140,7 +10140,7 @@
           <a:ln/>
         </p:spPr>
         <p:txBody>
-          <a:bodyPr wrap="square" lIns="0" tIns="0" rIns="0" bIns="0" rtlCol="0" anchor="ctr"/>
+          <a:bodyPr wrap="none" lIns="0" tIns="0" rIns="0" bIns="0" rtlCol="0" anchor="ctr"/>
           <a:lstStyle/>
           <a:p>
             <a:pPr algn="l" indent="0" marL="0">
@@ -10182,7 +10182,7 @@
           <a:ln/>
         </p:spPr>
         <p:txBody>
-          <a:bodyPr wrap="square" lIns="0" tIns="0" rIns="0" bIns="0" rtlCol="0" anchor="ctr"/>
+          <a:bodyPr wrap="none" lIns="0" tIns="0" rIns="0" bIns="0" rtlCol="0" anchor="ctr"/>
           <a:lstStyle/>
           <a:p>
             <a:pPr algn="l" indent="0" marL="0">
@@ -10246,7 +10246,7 @@
           <a:ln/>
         </p:spPr>
         <p:txBody>
-          <a:bodyPr wrap="square" lIns="95250" tIns="0" rIns="95250" bIns="0" rtlCol="0" anchor="ctr"/>
+          <a:bodyPr wrap="none" lIns="95250" tIns="0" rIns="95250" bIns="0" rtlCol="0" anchor="ctr"/>
           <a:lstStyle/>
           <a:p>
             <a:pPr algn="ctr" indent="0" marL="0">
@@ -10288,7 +10288,7 @@
           <a:ln/>
         </p:spPr>
         <p:txBody>
-          <a:bodyPr wrap="square" lIns="0" tIns="0" rIns="0" bIns="0" rtlCol="0" anchor="ctr"/>
+          <a:bodyPr wrap="none" lIns="0" tIns="0" rIns="0" bIns="0" rtlCol="0" anchor="ctr"/>
           <a:lstStyle/>
           <a:p>
             <a:pPr algn="l" indent="0" marL="0">
@@ -10347,7 +10347,7 @@
           <a:ln/>
         </p:spPr>
         <p:txBody>
-          <a:bodyPr wrap="square" lIns="0" tIns="0" rIns="0" bIns="0" rtlCol="0" anchor="ctr"/>
+          <a:bodyPr wrap="none" lIns="0" tIns="0" rIns="0" bIns="0" rtlCol="0" anchor="ctr"/>
           <a:lstStyle/>
           <a:p>
             <a:pPr algn="r" indent="0" marL="0">
@@ -10453,7 +10453,7 @@
           <a:ln/>
         </p:spPr>
         <p:txBody>
-          <a:bodyPr wrap="square" lIns="0" tIns="0" rIns="0" bIns="0" rtlCol="0" anchor="ctr"/>
+          <a:bodyPr wrap="none" lIns="0" tIns="0" rIns="0" bIns="0" rtlCol="0" anchor="ctr"/>
           <a:lstStyle/>
           <a:p>
             <a:pPr algn="r" indent="0" marL="0">
@@ -10559,7 +10559,7 @@
           <a:ln/>
         </p:spPr>
         <p:txBody>
-          <a:bodyPr wrap="square" lIns="0" tIns="0" rIns="0" bIns="0" rtlCol="0" anchor="ctr"/>
+          <a:bodyPr wrap="none" lIns="0" tIns="0" rIns="0" bIns="0" rtlCol="0" anchor="ctr"/>
           <a:lstStyle/>
           <a:p>
             <a:pPr algn="r" indent="0" marL="0">
@@ -10665,7 +10665,7 @@
           <a:ln/>
         </p:spPr>
         <p:txBody>
-          <a:bodyPr wrap="square" lIns="0" tIns="0" rIns="0" bIns="0" rtlCol="0" anchor="ctr"/>
+          <a:bodyPr wrap="none" lIns="0" tIns="0" rIns="0" bIns="0" rtlCol="0" anchor="ctr"/>
           <a:lstStyle/>
           <a:p>
             <a:pPr algn="r" indent="0" marL="0">
@@ -10771,7 +10771,7 @@
           <a:ln/>
         </p:spPr>
         <p:txBody>
-          <a:bodyPr wrap="square" lIns="0" tIns="0" rIns="0" bIns="0" rtlCol="0" anchor="ctr"/>
+          <a:bodyPr wrap="none" lIns="0" tIns="0" rIns="0" bIns="0" rtlCol="0" anchor="ctr"/>
           <a:lstStyle/>
           <a:p>
             <a:pPr algn="r" indent="0" marL="0">
@@ -10868,7 +10868,7 @@
         <p:spPr>
           <a:xfrm>
             <a:off x="609600" y="3333750"/>
-            <a:ext cx="4177665" cy="462781"/>
+            <a:ext cx="4259580" cy="462781"/>
           </a:xfrm>
           <a:prstGeom prst="rect">
             <a:avLst/>
@@ -10941,7 +10941,7 @@
           <a:ln/>
         </p:spPr>
         <p:txBody>
-          <a:bodyPr wrap="square" lIns="0" tIns="0" rIns="0" bIns="0" rtlCol="0" anchor="ctr"/>
+          <a:bodyPr wrap="none" lIns="0" tIns="0" rIns="0" bIns="0" rtlCol="0" anchor="ctr"/>
           <a:lstStyle/>
           <a:p>
             <a:pPr algn="l" indent="0" marL="0">
@@ -10983,7 +10983,7 @@
           <a:ln/>
         </p:spPr>
         <p:txBody>
-          <a:bodyPr wrap="square" lIns="0" tIns="0" rIns="0" bIns="0" rtlCol="0" anchor="ctr"/>
+          <a:bodyPr wrap="none" lIns="0" tIns="0" rIns="0" bIns="0" rtlCol="0" anchor="ctr"/>
           <a:lstStyle/>
           <a:p>
             <a:pPr algn="l" indent="0" marL="0">
@@ -11025,7 +11025,7 @@
           <a:ln/>
         </p:spPr>
         <p:txBody>
-          <a:bodyPr wrap="square" lIns="0" tIns="0" rIns="0" bIns="0" rtlCol="0" anchor="ctr"/>
+          <a:bodyPr wrap="none" lIns="0" tIns="0" rIns="0" bIns="0" rtlCol="0" anchor="ctr"/>
           <a:lstStyle/>
           <a:p>
             <a:pPr algn="l" indent="0" marL="0">
@@ -11058,7 +11058,7 @@
         <p:spPr>
           <a:xfrm>
             <a:off x="5410200" y="2514526"/>
-            <a:ext cx="2914650" cy="537121"/>
+            <a:ext cx="2971800" cy="537121"/>
           </a:xfrm>
           <a:prstGeom prst="rect">
             <a:avLst/>
@@ -11158,7 +11158,7 @@
         <p:spPr>
           <a:xfrm>
             <a:off x="5200650" y="3333750"/>
-            <a:ext cx="3400425" cy="308521"/>
+            <a:ext cx="3467100" cy="308521"/>
           </a:xfrm>
           <a:prstGeom prst="rect">
             <a:avLst/>
@@ -11232,7 +11232,7 @@
           <a:ln/>
         </p:spPr>
         <p:txBody>
-          <a:bodyPr wrap="square" lIns="0" tIns="0" rIns="0" bIns="0" rtlCol="0" anchor="ctr"/>
+          <a:bodyPr wrap="none" lIns="0" tIns="0" rIns="0" bIns="0" rtlCol="0" anchor="ctr"/>
           <a:lstStyle/>
           <a:p>
             <a:pPr algn="l" indent="0" marL="0">
@@ -11298,7 +11298,7 @@
           <a:ln/>
         </p:spPr>
         <p:txBody>
-          <a:bodyPr wrap="square" lIns="0" tIns="0" rIns="0" bIns="0" rtlCol="0" anchor="ctr"/>
+          <a:bodyPr wrap="none" lIns="0" tIns="0" rIns="0" bIns="0" rtlCol="0" anchor="ctr"/>
           <a:lstStyle/>
           <a:p>
             <a:pPr algn="l" indent="0" marL="0">
@@ -11381,7 +11381,7 @@
           <a:ln/>
         </p:spPr>
         <p:txBody>
-          <a:bodyPr wrap="square" lIns="0" tIns="0" rIns="0" bIns="0" rtlCol="0" anchor="ctr"/>
+          <a:bodyPr wrap="none" lIns="0" tIns="0" rIns="0" bIns="0" rtlCol="0" anchor="ctr"/>
           <a:lstStyle/>
           <a:p>
             <a:pPr algn="l" indent="0" marL="0">
@@ -11440,7 +11440,7 @@
           <a:ln/>
         </p:spPr>
         <p:txBody>
-          <a:bodyPr wrap="square" lIns="0" tIns="0" rIns="0" bIns="0" rtlCol="0" anchor="ctr"/>
+          <a:bodyPr wrap="none" lIns="0" tIns="0" rIns="0" bIns="0" rtlCol="0" anchor="ctr"/>
           <a:lstStyle/>
           <a:p>
             <a:pPr algn="l" indent="0" marL="0">
@@ -11482,7 +11482,7 @@
           <a:ln/>
         </p:spPr>
         <p:txBody>
-          <a:bodyPr wrap="square" lIns="0" tIns="0" rIns="0" bIns="0" rtlCol="0" anchor="ctr"/>
+          <a:bodyPr wrap="none" lIns="0" tIns="0" rIns="0" bIns="0" rtlCol="0" anchor="ctr"/>
           <a:lstStyle/>
           <a:p>
             <a:pPr algn="r" indent="0" marL="0">
@@ -13452,7 +13452,7 @@
           <a:ln/>
         </p:spPr>
         <p:txBody>
-          <a:bodyPr wrap="square" lIns="0" tIns="0" rIns="0" bIns="0" rtlCol="0" anchor="ctr"/>
+          <a:bodyPr wrap="none" lIns="0" tIns="0" rIns="0" bIns="0" rtlCol="0" anchor="ctr"/>
           <a:lstStyle/>
           <a:p>
             <a:pPr algn="l" indent="0" marL="0">
@@ -13485,7 +13485,7 @@
         <p:spPr>
           <a:xfrm>
             <a:off x="609600" y="617190"/>
-            <a:ext cx="7286625" cy="685800"/>
+            <a:ext cx="7429500" cy="685800"/>
           </a:xfrm>
           <a:prstGeom prst="rect">
             <a:avLst/>
@@ -13582,7 +13582,7 @@
           <a:ln/>
         </p:spPr>
         <p:txBody>
-          <a:bodyPr wrap="square" lIns="0" tIns="0" rIns="0" bIns="0" rtlCol="0" anchor="ctr"/>
+          <a:bodyPr wrap="none" lIns="0" tIns="0" rIns="0" bIns="0" rtlCol="0" anchor="ctr"/>
           <a:lstStyle/>
           <a:p>
             <a:pPr algn="l" indent="0" marL="0">
@@ -13624,7 +13624,7 @@
           <a:ln/>
         </p:spPr>
         <p:txBody>
-          <a:bodyPr wrap="square" lIns="0" tIns="0" rIns="0" bIns="0" rtlCol="0" anchor="ctr"/>
+          <a:bodyPr wrap="none" lIns="0" tIns="0" rIns="0" bIns="0" rtlCol="0" anchor="ctr"/>
           <a:lstStyle/>
           <a:p>
             <a:pPr algn="l" indent="0" marL="0">
@@ -13712,7 +13712,7 @@
           <a:ln/>
         </p:spPr>
         <p:txBody>
-          <a:bodyPr wrap="square" lIns="0" tIns="0" rIns="0" bIns="0" rtlCol="0" anchor="ctr"/>
+          <a:bodyPr wrap="none" lIns="0" tIns="0" rIns="0" bIns="0" rtlCol="0" anchor="ctr"/>
           <a:lstStyle/>
           <a:p>
             <a:pPr algn="l" indent="0" marL="0">
@@ -13745,7 +13745,7 @@
         <p:spPr>
           <a:xfrm>
             <a:off x="1066800" y="2093565"/>
-            <a:ext cx="3225546" cy="333375"/>
+            <a:ext cx="3288792" cy="333375"/>
           </a:xfrm>
           <a:prstGeom prst="rect">
             <a:avLst/>
@@ -13842,7 +13842,7 @@
           <a:ln/>
         </p:spPr>
         <p:txBody>
-          <a:bodyPr wrap="square" lIns="0" tIns="0" rIns="0" bIns="0" rtlCol="0" anchor="ctr"/>
+          <a:bodyPr wrap="none" lIns="0" tIns="0" rIns="0" bIns="0" rtlCol="0" anchor="ctr"/>
           <a:lstStyle/>
           <a:p>
             <a:pPr algn="l" indent="0" marL="0">
@@ -13884,7 +13884,7 @@
           <a:ln/>
         </p:spPr>
         <p:txBody>
-          <a:bodyPr wrap="square" lIns="0" tIns="0" rIns="0" bIns="0" rtlCol="0" anchor="ctr"/>
+          <a:bodyPr wrap="none" lIns="0" tIns="0" rIns="0" bIns="0" rtlCol="0" anchor="ctr"/>
           <a:lstStyle/>
           <a:p>
             <a:pPr algn="l" indent="0" marL="0">
@@ -13970,7 +13970,7 @@
           <a:ln/>
         </p:spPr>
         <p:txBody>
-          <a:bodyPr wrap="square" lIns="85725" tIns="0" rIns="85725" bIns="0" rtlCol="0" anchor="ctr"/>
+          <a:bodyPr wrap="none" lIns="85725" tIns="0" rIns="85725" bIns="0" rtlCol="0" anchor="ctr"/>
           <a:lstStyle/>
           <a:p>
             <a:pPr algn="ctr" indent="0" marL="0">
@@ -14012,7 +14012,7 @@
           <a:ln/>
         </p:spPr>
         <p:txBody>
-          <a:bodyPr wrap="square" lIns="0" tIns="0" rIns="0" bIns="0" rtlCol="0" anchor="ctr"/>
+          <a:bodyPr wrap="none" lIns="0" tIns="0" rIns="0" bIns="0" rtlCol="0" anchor="ctr"/>
           <a:lstStyle/>
           <a:p>
             <a:pPr algn="l" indent="0" marL="0">
@@ -14045,7 +14045,7 @@
         <p:spPr>
           <a:xfrm>
             <a:off x="800100" y="3691830"/>
-            <a:ext cx="2234565" cy="500063"/>
+            <a:ext cx="2278380" cy="500063"/>
           </a:xfrm>
           <a:prstGeom prst="rect">
             <a:avLst/>
@@ -14142,7 +14142,7 @@
           <a:ln/>
         </p:spPr>
         <p:txBody>
-          <a:bodyPr wrap="square" lIns="95250" tIns="0" rIns="95250" bIns="0" rtlCol="0" anchor="ctr"/>
+          <a:bodyPr wrap="none" lIns="95250" tIns="0" rIns="95250" bIns="0" rtlCol="0" anchor="ctr"/>
           <a:lstStyle/>
           <a:p>
             <a:pPr algn="ctr" indent="0" marL="0">
@@ -14184,7 +14184,7 @@
           <a:ln/>
         </p:spPr>
         <p:txBody>
-          <a:bodyPr wrap="square" lIns="0" tIns="0" rIns="0" bIns="0" rtlCol="0" anchor="ctr"/>
+          <a:bodyPr wrap="none" lIns="0" tIns="0" rIns="0" bIns="0" rtlCol="0" anchor="ctr"/>
           <a:lstStyle/>
           <a:p>
             <a:pPr algn="l" indent="0" marL="0">
@@ -14250,7 +14250,7 @@
           <a:ln/>
         </p:spPr>
         <p:txBody>
-          <a:bodyPr wrap="square" lIns="0" tIns="0" rIns="0" bIns="0" rtlCol="0" anchor="ctr"/>
+          <a:bodyPr wrap="none" lIns="0" tIns="0" rIns="0" bIns="0" rtlCol="0" anchor="ctr"/>
           <a:lstStyle/>
           <a:p>
             <a:pPr algn="l" indent="0" marL="0">
@@ -14348,7 +14348,7 @@
           <a:ln/>
         </p:spPr>
         <p:txBody>
-          <a:bodyPr wrap="square" lIns="0" tIns="0" rIns="0" bIns="0" rtlCol="0" anchor="ctr"/>
+          <a:bodyPr wrap="none" lIns="0" tIns="0" rIns="0" bIns="0" rtlCol="0" anchor="ctr"/>
           <a:lstStyle/>
           <a:p>
             <a:pPr algn="l" indent="0" marL="0">
@@ -14446,7 +14446,7 @@
           <a:ln/>
         </p:spPr>
         <p:txBody>
-          <a:bodyPr wrap="square" lIns="0" tIns="0" rIns="0" bIns="0" rtlCol="0" anchor="ctr"/>
+          <a:bodyPr wrap="none" lIns="0" tIns="0" rIns="0" bIns="0" rtlCol="0" anchor="ctr"/>
           <a:lstStyle/>
           <a:p>
             <a:pPr algn="l" indent="0" marL="0">
@@ -14526,7 +14526,7 @@
         <p:spPr>
           <a:xfrm>
             <a:off x="5067300" y="3414713"/>
-            <a:ext cx="3536442" cy="321469"/>
+            <a:ext cx="3605784" cy="321469"/>
           </a:xfrm>
           <a:prstGeom prst="rect">
             <a:avLst/>
@@ -14626,7 +14626,7 @@
         <p:spPr>
           <a:xfrm>
             <a:off x="5067300" y="3821906"/>
-            <a:ext cx="3536442" cy="321469"/>
+            <a:ext cx="3605784" cy="321469"/>
           </a:xfrm>
           <a:prstGeom prst="rect">
             <a:avLst/>
@@ -14677,7 +14677,7 @@
           <a:ln/>
         </p:spPr>
         <p:txBody>
-          <a:bodyPr wrap="square" lIns="0" tIns="0" rIns="0" bIns="0" rtlCol="0" anchor="ctr"/>
+          <a:bodyPr wrap="none" lIns="0" tIns="0" rIns="0" bIns="0" rtlCol="0" anchor="ctr"/>
           <a:lstStyle/>
           <a:p>
             <a:pPr algn="l" indent="0" marL="0">
@@ -14719,7 +14719,7 @@
           <a:ln/>
         </p:spPr>
         <p:txBody>
-          <a:bodyPr wrap="square" lIns="0" tIns="0" rIns="0" bIns="0" rtlCol="0" anchor="ctr"/>
+          <a:bodyPr wrap="none" lIns="0" tIns="0" rIns="0" bIns="0" rtlCol="0" anchor="ctr"/>
           <a:lstStyle/>
           <a:p>
             <a:pPr algn="r" indent="0" marL="0">
@@ -16884,7 +16884,7 @@
           <a:ln/>
         </p:spPr>
         <p:txBody>
-          <a:bodyPr wrap="square" lIns="0" tIns="0" rIns="0" bIns="0" rtlCol="0" anchor="ctr"/>
+          <a:bodyPr wrap="none" lIns="0" tIns="0" rIns="0" bIns="0" rtlCol="0" anchor="ctr"/>
           <a:lstStyle/>
           <a:p>
             <a:pPr algn="l" indent="0" marL="0">
@@ -16926,7 +16926,7 @@
           <a:ln/>
         </p:spPr>
         <p:txBody>
-          <a:bodyPr wrap="square" lIns="0" tIns="0" rIns="0" bIns="0" rtlCol="0" anchor="ctr"/>
+          <a:bodyPr wrap="none" lIns="0" tIns="0" rIns="0" bIns="0" rtlCol="0" anchor="ctr"/>
           <a:lstStyle/>
           <a:p>
             <a:pPr algn="l" indent="0" marL="0">
@@ -16990,7 +16990,7 @@
           <a:ln/>
         </p:spPr>
         <p:txBody>
-          <a:bodyPr wrap="square" lIns="95250" tIns="0" rIns="95250" bIns="0" rtlCol="0" anchor="ctr"/>
+          <a:bodyPr wrap="none" lIns="95250" tIns="0" rIns="95250" bIns="0" rtlCol="0" anchor="ctr"/>
           <a:lstStyle/>
           <a:p>
             <a:pPr algn="ctr" indent="0" marL="0">
@@ -17078,7 +17078,7 @@
           <a:ln/>
         </p:spPr>
         <p:txBody>
-          <a:bodyPr wrap="square" lIns="95250" tIns="0" rIns="95250" bIns="0" rtlCol="0" anchor="ctr"/>
+          <a:bodyPr wrap="none" lIns="95250" tIns="0" rIns="95250" bIns="0" rtlCol="0" anchor="ctr"/>
           <a:lstStyle/>
           <a:p>
             <a:pPr algn="l" indent="0" marL="0">
@@ -17143,7 +17143,7 @@
           <a:ln/>
         </p:spPr>
         <p:txBody>
-          <a:bodyPr wrap="square" lIns="95250" tIns="0" rIns="95250" bIns="0" rtlCol="0" anchor="ctr"/>
+          <a:bodyPr wrap="none" lIns="95250" tIns="0" rIns="95250" bIns="0" rtlCol="0" anchor="ctr"/>
           <a:lstStyle/>
           <a:p>
             <a:pPr algn="l" indent="0" marL="0">
@@ -17208,7 +17208,7 @@
           <a:ln/>
         </p:spPr>
         <p:txBody>
-          <a:bodyPr wrap="square" lIns="95250" tIns="0" rIns="95250" bIns="0" rtlCol="0" anchor="ctr"/>
+          <a:bodyPr wrap="none" lIns="95250" tIns="0" rIns="95250" bIns="0" rtlCol="0" anchor="ctr"/>
           <a:lstStyle/>
           <a:p>
             <a:pPr algn="l" indent="0" marL="0">
@@ -17273,7 +17273,7 @@
           <a:ln/>
         </p:spPr>
         <p:txBody>
-          <a:bodyPr wrap="square" lIns="95250" tIns="0" rIns="95250" bIns="0" rtlCol="0" anchor="ctr"/>
+          <a:bodyPr wrap="none" lIns="95250" tIns="0" rIns="95250" bIns="0" rtlCol="0" anchor="ctr"/>
           <a:lstStyle/>
           <a:p>
             <a:pPr algn="l" indent="0" marL="0">
@@ -17338,7 +17338,7 @@
           <a:ln/>
         </p:spPr>
         <p:txBody>
-          <a:bodyPr wrap="square" lIns="95250" tIns="0" rIns="95250" bIns="0" rtlCol="0" anchor="ctr"/>
+          <a:bodyPr wrap="none" lIns="95250" tIns="0" rIns="95250" bIns="0" rtlCol="0" anchor="ctr"/>
           <a:lstStyle/>
           <a:p>
             <a:pPr algn="l" indent="0" marL="0">
@@ -17414,7 +17414,7 @@
         <p:spPr>
           <a:xfrm>
             <a:off x="609600" y="2281684"/>
-            <a:ext cx="1454972" cy="471488"/>
+            <a:ext cx="1483501" cy="471488"/>
           </a:xfrm>
           <a:prstGeom prst="rect">
             <a:avLst/>
@@ -17479,7 +17479,7 @@
         <p:spPr>
           <a:xfrm>
             <a:off x="2036043" y="2281684"/>
-            <a:ext cx="3314124" cy="471488"/>
+            <a:ext cx="3379107" cy="471488"/>
           </a:xfrm>
           <a:prstGeom prst="rect">
             <a:avLst/>
@@ -17544,7 +17544,7 @@
         <p:spPr>
           <a:xfrm>
             <a:off x="5285184" y="2281684"/>
-            <a:ext cx="3314200" cy="471488"/>
+            <a:ext cx="3379184" cy="471488"/>
           </a:xfrm>
           <a:prstGeom prst="rect">
             <a:avLst/>
@@ -17609,7 +17609,7 @@
         <p:spPr>
           <a:xfrm>
             <a:off x="609600" y="2753171"/>
-            <a:ext cx="1454972" cy="471488"/>
+            <a:ext cx="1483501" cy="471488"/>
           </a:xfrm>
           <a:prstGeom prst="rect">
             <a:avLst/>
@@ -17674,7 +17674,7 @@
         <p:spPr>
           <a:xfrm>
             <a:off x="2036043" y="2753171"/>
-            <a:ext cx="3314124" cy="471488"/>
+            <a:ext cx="3379107" cy="471488"/>
           </a:xfrm>
           <a:prstGeom prst="rect">
             <a:avLst/>
@@ -17739,7 +17739,7 @@
         <p:spPr>
           <a:xfrm>
             <a:off x="5285184" y="2753171"/>
-            <a:ext cx="3314200" cy="471488"/>
+            <a:ext cx="3379184" cy="471488"/>
           </a:xfrm>
           <a:prstGeom prst="rect">
             <a:avLst/>
@@ -17834,7 +17834,7 @@
           <a:ln/>
         </p:spPr>
         <p:txBody>
-          <a:bodyPr wrap="square" lIns="85725" tIns="0" rIns="85725" bIns="0" rtlCol="0" anchor="ctr"/>
+          <a:bodyPr wrap="none" lIns="85725" tIns="0" rIns="85725" bIns="0" rtlCol="0" anchor="ctr"/>
           <a:lstStyle/>
           <a:p>
             <a:pPr algn="ctr" indent="0" marL="0">
@@ -17867,7 +17867,7 @@
         <p:spPr>
           <a:xfrm>
             <a:off x="819150" y="3541365"/>
-            <a:ext cx="3400425" cy="520601"/>
+            <a:ext cx="3467100" cy="520601"/>
           </a:xfrm>
           <a:prstGeom prst="rect">
             <a:avLst/>
@@ -17976,7 +17976,7 @@
           <a:ln/>
         </p:spPr>
         <p:txBody>
-          <a:bodyPr wrap="square" lIns="0" tIns="0" rIns="0" bIns="0" rtlCol="0" anchor="ctr"/>
+          <a:bodyPr wrap="none" lIns="0" tIns="0" rIns="0" bIns="0" rtlCol="0" anchor="ctr"/>
           <a:lstStyle/>
           <a:p>
             <a:pPr algn="l" indent="0" marL="0">
@@ -18042,7 +18042,7 @@
           <a:ln/>
         </p:spPr>
         <p:txBody>
-          <a:bodyPr wrap="square" lIns="0" tIns="0" rIns="0" bIns="0" rtlCol="0" anchor="ctr"/>
+          <a:bodyPr wrap="none" lIns="0" tIns="0" rIns="0" bIns="0" rtlCol="0" anchor="ctr"/>
           <a:lstStyle/>
           <a:p>
             <a:pPr algn="l" indent="0" marL="0">
@@ -18108,7 +18108,7 @@
           <a:ln/>
         </p:spPr>
         <p:txBody>
-          <a:bodyPr wrap="square" lIns="0" tIns="0" rIns="0" bIns="0" rtlCol="0" anchor="ctr"/>
+          <a:bodyPr wrap="none" lIns="0" tIns="0" rIns="0" bIns="0" rtlCol="0" anchor="ctr"/>
           <a:lstStyle/>
           <a:p>
             <a:pPr algn="l" indent="0" marL="0">
@@ -18189,7 +18189,7 @@
         <p:spPr>
           <a:xfrm>
             <a:off x="609600" y="4678710"/>
-            <a:ext cx="5343525" cy="319980"/>
+            <a:ext cx="5448300" cy="319980"/>
           </a:xfrm>
           <a:prstGeom prst="rect">
             <a:avLst/>
@@ -18240,7 +18240,7 @@
           <a:ln/>
         </p:spPr>
         <p:txBody>
-          <a:bodyPr wrap="square" lIns="0" tIns="0" rIns="0" bIns="0" rtlCol="0" anchor="ctr"/>
+          <a:bodyPr wrap="none" lIns="0" tIns="0" rIns="0" bIns="0" rtlCol="0" anchor="ctr"/>
           <a:lstStyle/>
           <a:p>
             <a:pPr algn="r" indent="0" marL="0">
@@ -20625,7 +20625,7 @@
           <a:ln/>
         </p:spPr>
         <p:txBody>
-          <a:bodyPr wrap="square" lIns="0" tIns="0" rIns="0" bIns="0" rtlCol="0" anchor="ctr"/>
+          <a:bodyPr wrap="none" lIns="0" tIns="0" rIns="0" bIns="0" rtlCol="0" anchor="ctr"/>
           <a:lstStyle/>
           <a:p>
             <a:pPr algn="l" indent="0" marL="0">
@@ -20658,7 +20658,7 @@
         <p:spPr>
           <a:xfrm>
             <a:off x="609600" y="693390"/>
-            <a:ext cx="5829300" cy="1059061"/>
+            <a:ext cx="5943600" cy="1059061"/>
           </a:xfrm>
           <a:prstGeom prst="rect">
             <a:avLst/>
@@ -20709,7 +20709,7 @@
           <a:ln/>
         </p:spPr>
         <p:txBody>
-          <a:bodyPr wrap="square" lIns="0" tIns="0" rIns="0" bIns="0" rtlCol="0" anchor="ctr"/>
+          <a:bodyPr wrap="none" lIns="0" tIns="0" rIns="0" bIns="0" rtlCol="0" anchor="ctr"/>
           <a:lstStyle/>
           <a:p>
             <a:pPr algn="l" indent="0" marL="0">
@@ -20775,7 +20775,7 @@
           <a:ln/>
         </p:spPr>
         <p:txBody>
-          <a:bodyPr wrap="square" lIns="0" tIns="0" rIns="0" bIns="0" rtlCol="0" anchor="ctr"/>
+          <a:bodyPr wrap="none" lIns="0" tIns="0" rIns="0" bIns="0" rtlCol="0" anchor="ctr"/>
           <a:lstStyle/>
           <a:p>
             <a:pPr algn="l" indent="0" marL="0">
@@ -20839,7 +20839,7 @@
           <a:ln/>
         </p:spPr>
         <p:txBody>
-          <a:bodyPr wrap="square" lIns="0" tIns="0" rIns="0" bIns="0" rtlCol="0" anchor="ctr"/>
+          <a:bodyPr wrap="none" lIns="0" tIns="0" rIns="0" bIns="0" rtlCol="0" anchor="ctr"/>
           <a:lstStyle/>
           <a:p>
             <a:pPr algn="l" indent="0" marL="0">
@@ -20872,7 +20872,7 @@
         <p:spPr>
           <a:xfrm>
             <a:off x="800100" y="3055590"/>
-            <a:ext cx="3575304" cy="482873"/>
+            <a:ext cx="3645408" cy="482873"/>
           </a:xfrm>
           <a:prstGeom prst="rect">
             <a:avLst/>
@@ -20914,7 +20914,7 @@
         <p:spPr>
           <a:xfrm>
             <a:off x="800100" y="3595613"/>
-            <a:ext cx="3575304" cy="319980"/>
+            <a:ext cx="3645408" cy="319980"/>
           </a:xfrm>
           <a:prstGeom prst="rect">
             <a:avLst/>
@@ -20987,7 +20987,7 @@
           <a:ln/>
         </p:spPr>
         <p:txBody>
-          <a:bodyPr wrap="square" lIns="0" tIns="0" rIns="0" bIns="0" rtlCol="0" anchor="ctr"/>
+          <a:bodyPr wrap="none" lIns="0" tIns="0" rIns="0" bIns="0" rtlCol="0" anchor="ctr"/>
           <a:lstStyle/>
           <a:p>
             <a:pPr algn="l" indent="0" marL="0">
@@ -21020,7 +21020,7 @@
         <p:spPr>
           <a:xfrm>
             <a:off x="4838700" y="3055590"/>
-            <a:ext cx="3575304" cy="482873"/>
+            <a:ext cx="3645408" cy="482873"/>
           </a:xfrm>
           <a:prstGeom prst="rect">
             <a:avLst/>
@@ -21062,7 +21062,7 @@
         <p:spPr>
           <a:xfrm>
             <a:off x="4838700" y="3595613"/>
-            <a:ext cx="3575304" cy="319980"/>
+            <a:ext cx="3645408" cy="319980"/>
           </a:xfrm>
           <a:prstGeom prst="rect">
             <a:avLst/>
@@ -21113,7 +21113,7 @@
           <a:ln/>
         </p:spPr>
         <p:txBody>
-          <a:bodyPr wrap="square" lIns="0" tIns="0" rIns="0" bIns="0" rtlCol="0" anchor="ctr"/>
+          <a:bodyPr wrap="none" lIns="0" tIns="0" rIns="0" bIns="0" rtlCol="0" anchor="ctr"/>
           <a:lstStyle/>
           <a:p>
             <a:pPr algn="l" indent="0" marL="0">
@@ -22029,7 +22029,7 @@
           <a:ln/>
         </p:spPr>
         <p:txBody>
-          <a:bodyPr wrap="square" lIns="0" tIns="0" rIns="0" bIns="0" rtlCol="0" anchor="ctr"/>
+          <a:bodyPr wrap="none" lIns="0" tIns="0" rIns="0" bIns="0" rtlCol="0" anchor="ctr"/>
           <a:lstStyle/>
           <a:p>
             <a:pPr algn="l" indent="0" marL="0">
@@ -22071,7 +22071,7 @@
           <a:ln/>
         </p:spPr>
         <p:txBody>
-          <a:bodyPr wrap="square" lIns="0" tIns="0" rIns="0" bIns="0" rtlCol="0" anchor="ctr"/>
+          <a:bodyPr wrap="none" lIns="0" tIns="0" rIns="0" bIns="0" rtlCol="0" anchor="ctr"/>
           <a:lstStyle/>
           <a:p>
             <a:pPr algn="l" indent="0" marL="0">
@@ -22159,7 +22159,7 @@
           <a:ln/>
         </p:spPr>
         <p:txBody>
-          <a:bodyPr wrap="square" lIns="0" tIns="0" rIns="0" bIns="0" rtlCol="0" anchor="ctr"/>
+          <a:bodyPr wrap="none" lIns="0" tIns="0" rIns="0" bIns="0" rtlCol="0" anchor="ctr"/>
           <a:lstStyle/>
           <a:p>
             <a:pPr algn="l" indent="0" marL="0">
@@ -22192,7 +22192,7 @@
         <p:spPr>
           <a:xfrm>
             <a:off x="1066800" y="1609725"/>
-            <a:ext cx="3225546" cy="346621"/>
+            <a:ext cx="3288792" cy="346621"/>
           </a:xfrm>
           <a:prstGeom prst="rect">
             <a:avLst/>
@@ -22306,7 +22306,7 @@
           <a:ln/>
         </p:spPr>
         <p:txBody>
-          <a:bodyPr wrap="square" lIns="0" tIns="0" rIns="0" bIns="0" rtlCol="0" anchor="ctr"/>
+          <a:bodyPr wrap="none" lIns="0" tIns="0" rIns="0" bIns="0" rtlCol="0" anchor="ctr"/>
           <a:lstStyle/>
           <a:p>
             <a:pPr algn="l" indent="0" marL="0">
@@ -22348,7 +22348,7 @@
           <a:ln/>
         </p:spPr>
         <p:txBody>
-          <a:bodyPr wrap="square" lIns="0" tIns="0" rIns="0" bIns="0" rtlCol="0" anchor="ctr"/>
+          <a:bodyPr wrap="none" lIns="0" tIns="0" rIns="0" bIns="0" rtlCol="0" anchor="ctr"/>
           <a:lstStyle/>
           <a:p>
             <a:pPr algn="l" indent="0" marL="0">
@@ -22390,7 +22390,7 @@
           <a:ln/>
         </p:spPr>
         <p:txBody>
-          <a:bodyPr wrap="square" lIns="0" tIns="0" rIns="0" bIns="0" rtlCol="0" anchor="ctr"/>
+          <a:bodyPr wrap="none" lIns="0" tIns="0" rIns="0" bIns="0" rtlCol="0" anchor="ctr"/>
           <a:lstStyle/>
           <a:p>
             <a:pPr algn="l" indent="0" marL="0">
@@ -22454,7 +22454,7 @@
           <a:ln/>
         </p:spPr>
         <p:txBody>
-          <a:bodyPr wrap="square" lIns="0" tIns="0" rIns="0" bIns="0" rtlCol="0" anchor="ctr"/>
+          <a:bodyPr wrap="none" lIns="0" tIns="0" rIns="0" bIns="0" rtlCol="0" anchor="ctr"/>
           <a:lstStyle/>
           <a:p>
             <a:pPr algn="l" indent="0" marL="0">
@@ -22496,7 +22496,7 @@
           <a:ln/>
         </p:spPr>
         <p:txBody>
-          <a:bodyPr wrap="square" lIns="0" tIns="0" rIns="0" bIns="0" rtlCol="0" anchor="ctr"/>
+          <a:bodyPr wrap="none" lIns="0" tIns="0" rIns="0" bIns="0" rtlCol="0" anchor="ctr"/>
           <a:lstStyle/>
           <a:p>
             <a:pPr algn="l" indent="0" marL="0">
@@ -22560,7 +22560,7 @@
           <a:ln/>
         </p:spPr>
         <p:txBody>
-          <a:bodyPr wrap="square" lIns="0" tIns="0" rIns="0" bIns="0" rtlCol="0" anchor="ctr"/>
+          <a:bodyPr wrap="none" lIns="0" tIns="0" rIns="0" bIns="0" rtlCol="0" anchor="ctr"/>
           <a:lstStyle/>
           <a:p>
             <a:pPr algn="l" indent="0" marL="0">
@@ -22602,7 +22602,7 @@
           <a:ln/>
         </p:spPr>
         <p:txBody>
-          <a:bodyPr wrap="square" lIns="0" tIns="0" rIns="0" bIns="0" rtlCol="0" anchor="ctr"/>
+          <a:bodyPr wrap="none" lIns="0" tIns="0" rIns="0" bIns="0" rtlCol="0" anchor="ctr"/>
           <a:lstStyle/>
           <a:p>
             <a:pPr algn="l" indent="0" marL="0">
@@ -22666,7 +22666,7 @@
           <a:ln/>
         </p:spPr>
         <p:txBody>
-          <a:bodyPr wrap="square" lIns="0" tIns="0" rIns="0" bIns="0" rtlCol="0" anchor="ctr"/>
+          <a:bodyPr wrap="none" lIns="0" tIns="0" rIns="0" bIns="0" rtlCol="0" anchor="ctr"/>
           <a:lstStyle/>
           <a:p>
             <a:pPr algn="l" indent="0" marL="0">
@@ -22699,7 +22699,7 @@
         <p:spPr>
           <a:xfrm>
             <a:off x="3219450" y="3308970"/>
-            <a:ext cx="893826" cy="479971"/>
+            <a:ext cx="911352" cy="479971"/>
           </a:xfrm>
           <a:prstGeom prst="rect">
             <a:avLst/>
@@ -22772,7 +22772,7 @@
           <a:ln/>
         </p:spPr>
         <p:txBody>
-          <a:bodyPr wrap="square" lIns="95250" tIns="0" rIns="95250" bIns="0" rtlCol="0" anchor="ctr"/>
+          <a:bodyPr wrap="none" lIns="95250" tIns="0" rIns="95250" bIns="0" rtlCol="0" anchor="ctr"/>
           <a:lstStyle/>
           <a:p>
             <a:pPr algn="ctr" indent="0" marL="0">
@@ -22814,7 +22814,7 @@
           <a:ln/>
         </p:spPr>
         <p:txBody>
-          <a:bodyPr wrap="square" lIns="0" tIns="0" rIns="0" bIns="0" rtlCol="0" anchor="ctr"/>
+          <a:bodyPr wrap="none" lIns="0" tIns="0" rIns="0" bIns="0" rtlCol="0" anchor="ctr"/>
           <a:lstStyle/>
           <a:p>
             <a:pPr algn="l" indent="0" marL="0">
@@ -22847,7 +22847,7 @@
         <p:spPr>
           <a:xfrm>
             <a:off x="4724400" y="2011635"/>
-            <a:ext cx="2720340" cy="371475"/>
+            <a:ext cx="2773680" cy="371475"/>
           </a:xfrm>
           <a:prstGeom prst="rect">
             <a:avLst/>
@@ -22939,7 +22939,7 @@
           <a:ln/>
         </p:spPr>
         <p:txBody>
-          <a:bodyPr wrap="square" lIns="0" tIns="0" rIns="0" bIns="0" rtlCol="0" anchor="ctr"/>
+          <a:bodyPr wrap="none" lIns="0" tIns="0" rIns="0" bIns="0" rtlCol="0" anchor="ctr"/>
           <a:lstStyle/>
           <a:p>
             <a:pPr algn="r" indent="0" marL="0">
@@ -23053,7 +23053,7 @@
           <a:ln/>
         </p:spPr>
         <p:txBody>
-          <a:bodyPr wrap="square" lIns="0" tIns="0" rIns="0" bIns="0" rtlCol="0" anchor="ctr"/>
+          <a:bodyPr wrap="none" lIns="0" tIns="0" rIns="0" bIns="0" rtlCol="0" anchor="ctr"/>
           <a:lstStyle/>
           <a:p>
             <a:pPr algn="l" indent="0" marL="0">
@@ -23086,7 +23086,7 @@
         <p:spPr>
           <a:xfrm>
             <a:off x="4724400" y="4110930"/>
-            <a:ext cx="3886200" cy="331440"/>
+            <a:ext cx="3962400" cy="331440"/>
           </a:xfrm>
           <a:prstGeom prst="rect">
             <a:avLst/>
@@ -23137,7 +23137,7 @@
           <a:ln/>
         </p:spPr>
         <p:txBody>
-          <a:bodyPr wrap="square" lIns="0" tIns="0" rIns="0" bIns="0" rtlCol="0" anchor="ctr"/>
+          <a:bodyPr wrap="none" lIns="0" tIns="0" rIns="0" bIns="0" rtlCol="0" anchor="ctr"/>
           <a:lstStyle/>
           <a:p>
             <a:pPr algn="l" indent="0" marL="0">
@@ -23179,7 +23179,7 @@
           <a:ln/>
         </p:spPr>
         <p:txBody>
-          <a:bodyPr wrap="square" lIns="0" tIns="0" rIns="0" bIns="0" rtlCol="0" anchor="ctr"/>
+          <a:bodyPr wrap="none" lIns="0" tIns="0" rIns="0" bIns="0" rtlCol="0" anchor="ctr"/>
           <a:lstStyle/>
           <a:p>
             <a:pPr algn="r" indent="0" marL="0">
@@ -25304,7 +25304,7 @@
           <a:ln/>
         </p:spPr>
         <p:txBody>
-          <a:bodyPr wrap="square" lIns="0" tIns="0" rIns="0" bIns="0" rtlCol="0" anchor="ctr"/>
+          <a:bodyPr wrap="none" lIns="0" tIns="0" rIns="0" bIns="0" rtlCol="0" anchor="ctr"/>
           <a:lstStyle/>
           <a:p>
             <a:pPr algn="l" indent="0" marL="0">
@@ -25346,7 +25346,7 @@
           <a:ln/>
         </p:spPr>
         <p:txBody>
-          <a:bodyPr wrap="square" lIns="0" tIns="0" rIns="0" bIns="0" rtlCol="0" anchor="ctr"/>
+          <a:bodyPr wrap="none" lIns="0" tIns="0" rIns="0" bIns="0" rtlCol="0" anchor="ctr"/>
           <a:lstStyle/>
           <a:p>
             <a:pPr algn="l" indent="0" marL="0">
@@ -25410,7 +25410,7 @@
           <a:ln/>
         </p:spPr>
         <p:txBody>
-          <a:bodyPr wrap="square" lIns="95250" tIns="0" rIns="95250" bIns="0" rtlCol="0" anchor="ctr"/>
+          <a:bodyPr wrap="none" lIns="95250" tIns="0" rIns="95250" bIns="0" rtlCol="0" anchor="ctr"/>
           <a:lstStyle/>
           <a:p>
             <a:pPr algn="ctr" indent="0" marL="0">
@@ -25452,7 +25452,7 @@
           <a:ln/>
         </p:spPr>
         <p:txBody>
-          <a:bodyPr wrap="square" lIns="0" tIns="0" rIns="0" bIns="0" rtlCol="0" anchor="ctr"/>
+          <a:bodyPr wrap="none" lIns="0" tIns="0" rIns="0" bIns="0" rtlCol="0" anchor="ctr"/>
           <a:lstStyle/>
           <a:p>
             <a:pPr algn="l" indent="0" marL="0">
@@ -25511,7 +25511,7 @@
           <a:ln/>
         </p:spPr>
         <p:txBody>
-          <a:bodyPr wrap="square" lIns="0" tIns="0" rIns="0" bIns="0" rtlCol="0" anchor="ctr"/>
+          <a:bodyPr wrap="none" lIns="0" tIns="0" rIns="0" bIns="0" rtlCol="0" anchor="ctr"/>
           <a:lstStyle/>
           <a:p>
             <a:pPr algn="r" indent="0" marL="0">
@@ -25617,7 +25617,7 @@
           <a:ln/>
         </p:spPr>
         <p:txBody>
-          <a:bodyPr wrap="square" lIns="0" tIns="0" rIns="0" bIns="0" rtlCol="0" anchor="ctr"/>
+          <a:bodyPr wrap="none" lIns="0" tIns="0" rIns="0" bIns="0" rtlCol="0" anchor="ctr"/>
           <a:lstStyle/>
           <a:p>
             <a:pPr algn="r" indent="0" marL="0">
@@ -25723,7 +25723,7 @@
           <a:ln/>
         </p:spPr>
         <p:txBody>
-          <a:bodyPr wrap="square" lIns="0" tIns="0" rIns="0" bIns="0" rtlCol="0" anchor="ctr"/>
+          <a:bodyPr wrap="none" lIns="0" tIns="0" rIns="0" bIns="0" rtlCol="0" anchor="ctr"/>
           <a:lstStyle/>
           <a:p>
             <a:pPr algn="r" indent="0" marL="0">
@@ -25829,7 +25829,7 @@
           <a:ln/>
         </p:spPr>
         <p:txBody>
-          <a:bodyPr wrap="square" lIns="0" tIns="0" rIns="0" bIns="0" rtlCol="0" anchor="ctr"/>
+          <a:bodyPr wrap="none" lIns="0" tIns="0" rIns="0" bIns="0" rtlCol="0" anchor="ctr"/>
           <a:lstStyle/>
           <a:p>
             <a:pPr algn="r" indent="0" marL="0">
@@ -25935,7 +25935,7 @@
           <a:ln/>
         </p:spPr>
         <p:txBody>
-          <a:bodyPr wrap="square" lIns="0" tIns="0" rIns="0" bIns="0" rtlCol="0" anchor="ctr"/>
+          <a:bodyPr wrap="none" lIns="0" tIns="0" rIns="0" bIns="0" rtlCol="0" anchor="ctr"/>
           <a:lstStyle/>
           <a:p>
             <a:pPr algn="r" indent="0" marL="0">
@@ -26032,7 +26032,7 @@
         <p:spPr>
           <a:xfrm>
             <a:off x="609600" y="3333750"/>
-            <a:ext cx="4177665" cy="331440"/>
+            <a:ext cx="4259580" cy="331440"/>
           </a:xfrm>
           <a:prstGeom prst="rect">
             <a:avLst/>
@@ -26105,7 +26105,7 @@
           <a:ln/>
         </p:spPr>
         <p:txBody>
-          <a:bodyPr wrap="square" lIns="0" tIns="0" rIns="0" bIns="0" rtlCol="0" anchor="ctr"/>
+          <a:bodyPr wrap="none" lIns="0" tIns="0" rIns="0" bIns="0" rtlCol="0" anchor="ctr"/>
           <a:lstStyle/>
           <a:p>
             <a:pPr algn="l" indent="0" marL="0">
@@ -26147,7 +26147,7 @@
           <a:ln/>
         </p:spPr>
         <p:txBody>
-          <a:bodyPr wrap="square" lIns="0" tIns="0" rIns="0" bIns="0" rtlCol="0" anchor="ctr"/>
+          <a:bodyPr wrap="none" lIns="0" tIns="0" rIns="0" bIns="0" rtlCol="0" anchor="ctr"/>
           <a:lstStyle/>
           <a:p>
             <a:pPr algn="l" indent="0" marL="0">
@@ -26189,7 +26189,7 @@
           <a:ln/>
         </p:spPr>
         <p:txBody>
-          <a:bodyPr wrap="square" lIns="0" tIns="0" rIns="0" bIns="0" rtlCol="0" anchor="ctr"/>
+          <a:bodyPr wrap="none" lIns="0" tIns="0" rIns="0" bIns="0" rtlCol="0" anchor="ctr"/>
           <a:lstStyle/>
           <a:p>
             <a:pPr algn="l" indent="0" marL="0">
@@ -26222,7 +26222,7 @@
         <p:spPr>
           <a:xfrm>
             <a:off x="5410200" y="2514526"/>
-            <a:ext cx="2914650" cy="400050"/>
+            <a:ext cx="2971800" cy="400050"/>
           </a:xfrm>
           <a:prstGeom prst="rect">
             <a:avLst/>
@@ -26305,7 +26305,7 @@
         <p:spPr>
           <a:xfrm>
             <a:off x="5200650" y="3333750"/>
-            <a:ext cx="3400425" cy="331440"/>
+            <a:ext cx="3467100" cy="331440"/>
           </a:xfrm>
           <a:prstGeom prst="rect">
             <a:avLst/>
@@ -26379,7 +26379,7 @@
           <a:ln/>
         </p:spPr>
         <p:txBody>
-          <a:bodyPr wrap="square" lIns="0" tIns="0" rIns="0" bIns="0" rtlCol="0" anchor="ctr"/>
+          <a:bodyPr wrap="none" lIns="0" tIns="0" rIns="0" bIns="0" rtlCol="0" anchor="ctr"/>
           <a:lstStyle/>
           <a:p>
             <a:pPr algn="l" indent="0" marL="0">
@@ -26445,7 +26445,7 @@
           <a:ln/>
         </p:spPr>
         <p:txBody>
-          <a:bodyPr wrap="square" lIns="0" tIns="0" rIns="0" bIns="0" rtlCol="0" anchor="ctr"/>
+          <a:bodyPr wrap="none" lIns="0" tIns="0" rIns="0" bIns="0" rtlCol="0" anchor="ctr"/>
           <a:lstStyle/>
           <a:p>
             <a:pPr algn="l" indent="0" marL="0">
@@ -26528,7 +26528,7 @@
           <a:ln/>
         </p:spPr>
         <p:txBody>
-          <a:bodyPr wrap="square" lIns="0" tIns="0" rIns="0" bIns="0" rtlCol="0" anchor="ctr"/>
+          <a:bodyPr wrap="none" lIns="0" tIns="0" rIns="0" bIns="0" rtlCol="0" anchor="ctr"/>
           <a:lstStyle/>
           <a:p>
             <a:pPr algn="l" indent="0" marL="0">
@@ -26587,7 +26587,7 @@
           <a:ln/>
         </p:spPr>
         <p:txBody>
-          <a:bodyPr wrap="square" lIns="0" tIns="0" rIns="0" bIns="0" rtlCol="0" anchor="ctr"/>
+          <a:bodyPr wrap="none" lIns="0" tIns="0" rIns="0" bIns="0" rtlCol="0" anchor="ctr"/>
           <a:lstStyle/>
           <a:p>
             <a:pPr algn="l" indent="0" marL="0">
@@ -26629,7 +26629,7 @@
           <a:ln/>
         </p:spPr>
         <p:txBody>
-          <a:bodyPr wrap="square" lIns="0" tIns="0" rIns="0" bIns="0" rtlCol="0" anchor="ctr"/>
+          <a:bodyPr wrap="none" lIns="0" tIns="0" rIns="0" bIns="0" rtlCol="0" anchor="ctr"/>
           <a:lstStyle/>
           <a:p>
             <a:pPr algn="r" indent="0" marL="0">
@@ -28599,7 +28599,7 @@
           <a:ln/>
         </p:spPr>
         <p:txBody>
-          <a:bodyPr wrap="square" lIns="0" tIns="0" rIns="0" bIns="0" rtlCol="0" anchor="ctr"/>
+          <a:bodyPr wrap="none" lIns="0" tIns="0" rIns="0" bIns="0" rtlCol="0" anchor="ctr"/>
           <a:lstStyle/>
           <a:p>
             <a:pPr algn="l" indent="0" marL="0">
@@ -28641,7 +28641,7 @@
           <a:ln/>
         </p:spPr>
         <p:txBody>
-          <a:bodyPr wrap="square" lIns="0" tIns="0" rIns="0" bIns="0" rtlCol="0" anchor="ctr"/>
+          <a:bodyPr wrap="none" lIns="0" tIns="0" rIns="0" bIns="0" rtlCol="0" anchor="ctr"/>
           <a:lstStyle/>
           <a:p>
             <a:pPr algn="l" indent="0" marL="0">
@@ -28729,7 +28729,7 @@
           <a:ln/>
         </p:spPr>
         <p:txBody>
-          <a:bodyPr wrap="square" lIns="0" tIns="0" rIns="0" bIns="0" rtlCol="0" anchor="ctr"/>
+          <a:bodyPr wrap="none" lIns="0" tIns="0" rIns="0" bIns="0" rtlCol="0" anchor="ctr"/>
           <a:lstStyle/>
           <a:p>
             <a:pPr algn="l" indent="0" marL="0">
@@ -28771,7 +28771,7 @@
           <a:ln/>
         </p:spPr>
         <p:txBody>
-          <a:bodyPr wrap="square" lIns="0" tIns="0" rIns="0" bIns="0" rtlCol="0" anchor="ctr"/>
+          <a:bodyPr wrap="none" lIns="0" tIns="0" rIns="0" bIns="0" rtlCol="0" anchor="ctr"/>
           <a:lstStyle/>
           <a:p>
             <a:pPr algn="l" indent="0" marL="0">
@@ -28859,7 +28859,7 @@
           <a:ln/>
         </p:spPr>
         <p:txBody>
-          <a:bodyPr wrap="square" lIns="0" tIns="0" rIns="0" bIns="0" rtlCol="0" anchor="ctr"/>
+          <a:bodyPr wrap="none" lIns="0" tIns="0" rIns="0" bIns="0" rtlCol="0" anchor="ctr"/>
           <a:lstStyle/>
           <a:p>
             <a:pPr algn="l" indent="0" marL="0">
@@ -28901,7 +28901,7 @@
           <a:ln/>
         </p:spPr>
         <p:txBody>
-          <a:bodyPr wrap="square" lIns="0" tIns="0" rIns="0" bIns="0" rtlCol="0" anchor="ctr"/>
+          <a:bodyPr wrap="none" lIns="0" tIns="0" rIns="0" bIns="0" rtlCol="0" anchor="ctr"/>
           <a:lstStyle/>
           <a:p>
             <a:pPr algn="l" indent="0" marL="0">
@@ -28989,7 +28989,7 @@
           <a:ln/>
         </p:spPr>
         <p:txBody>
-          <a:bodyPr wrap="square" lIns="0" tIns="0" rIns="0" bIns="0" rtlCol="0" anchor="ctr"/>
+          <a:bodyPr wrap="none" lIns="0" tIns="0" rIns="0" bIns="0" rtlCol="0" anchor="ctr"/>
           <a:lstStyle/>
           <a:p>
             <a:pPr algn="l" indent="0" marL="0">
@@ -29031,7 +29031,7 @@
           <a:ln/>
         </p:spPr>
         <p:txBody>
-          <a:bodyPr wrap="square" lIns="0" tIns="0" rIns="0" bIns="0" rtlCol="0" anchor="ctr"/>
+          <a:bodyPr wrap="none" lIns="0" tIns="0" rIns="0" bIns="0" rtlCol="0" anchor="ctr"/>
           <a:lstStyle/>
           <a:p>
             <a:pPr algn="l" indent="0" marL="0">
@@ -29117,7 +29117,7 @@
           <a:ln/>
         </p:spPr>
         <p:txBody>
-          <a:bodyPr wrap="square" lIns="85725" tIns="0" rIns="85725" bIns="0" rtlCol="0" anchor="ctr"/>
+          <a:bodyPr wrap="none" lIns="85725" tIns="0" rIns="85725" bIns="0" rtlCol="0" anchor="ctr"/>
           <a:lstStyle/>
           <a:p>
             <a:pPr algn="ctr" indent="0" marL="0">
@@ -29159,7 +29159,7 @@
           <a:ln/>
         </p:spPr>
         <p:txBody>
-          <a:bodyPr wrap="square" lIns="0" tIns="0" rIns="0" bIns="0" rtlCol="0" anchor="ctr"/>
+          <a:bodyPr wrap="none" lIns="0" tIns="0" rIns="0" bIns="0" rtlCol="0" anchor="ctr"/>
           <a:lstStyle/>
           <a:p>
             <a:pPr algn="l" indent="0" marL="0">
@@ -29192,7 +29192,7 @@
         <p:spPr>
           <a:xfrm>
             <a:off x="800100" y="3691830"/>
-            <a:ext cx="2234565" cy="535781"/>
+            <a:ext cx="2278380" cy="535781"/>
           </a:xfrm>
           <a:prstGeom prst="rect">
             <a:avLst/>
@@ -29289,7 +29289,7 @@
           <a:ln/>
         </p:spPr>
         <p:txBody>
-          <a:bodyPr wrap="square" lIns="95250" tIns="0" rIns="95250" bIns="0" rtlCol="0" anchor="ctr"/>
+          <a:bodyPr wrap="none" lIns="95250" tIns="0" rIns="95250" bIns="0" rtlCol="0" anchor="ctr"/>
           <a:lstStyle/>
           <a:p>
             <a:pPr algn="ctr" indent="0" marL="0">
@@ -29331,7 +29331,7 @@
           <a:ln/>
         </p:spPr>
         <p:txBody>
-          <a:bodyPr wrap="square" lIns="0" tIns="0" rIns="0" bIns="0" rtlCol="0" anchor="ctr"/>
+          <a:bodyPr wrap="none" lIns="0" tIns="0" rIns="0" bIns="0" rtlCol="0" anchor="ctr"/>
           <a:lstStyle/>
           <a:p>
             <a:pPr algn="l" indent="0" marL="0">
@@ -29397,7 +29397,7 @@
           <a:ln/>
         </p:spPr>
         <p:txBody>
-          <a:bodyPr wrap="square" lIns="0" tIns="0" rIns="0" bIns="0" rtlCol="0" anchor="ctr"/>
+          <a:bodyPr wrap="none" lIns="0" tIns="0" rIns="0" bIns="0" rtlCol="0" anchor="ctr"/>
           <a:lstStyle/>
           <a:p>
             <a:pPr algn="l" indent="0" marL="0">
@@ -29495,7 +29495,7 @@
           <a:ln/>
         </p:spPr>
         <p:txBody>
-          <a:bodyPr wrap="square" lIns="0" tIns="0" rIns="0" bIns="0" rtlCol="0" anchor="ctr"/>
+          <a:bodyPr wrap="none" lIns="0" tIns="0" rIns="0" bIns="0" rtlCol="0" anchor="ctr"/>
           <a:lstStyle/>
           <a:p>
             <a:pPr algn="l" indent="0" marL="0">
@@ -29593,7 +29593,7 @@
           <a:ln/>
         </p:spPr>
         <p:txBody>
-          <a:bodyPr wrap="square" lIns="0" tIns="0" rIns="0" bIns="0" rtlCol="0" anchor="ctr"/>
+          <a:bodyPr wrap="none" lIns="0" tIns="0" rIns="0" bIns="0" rtlCol="0" anchor="ctr"/>
           <a:lstStyle/>
           <a:p>
             <a:pPr algn="l" indent="0" marL="0">
@@ -29673,7 +29673,7 @@
         <p:spPr>
           <a:xfrm>
             <a:off x="5067300" y="3414713"/>
-            <a:ext cx="3536442" cy="345281"/>
+            <a:ext cx="3605784" cy="345281"/>
           </a:xfrm>
           <a:prstGeom prst="rect">
             <a:avLst/>
@@ -29756,7 +29756,7 @@
         <p:spPr>
           <a:xfrm>
             <a:off x="5067300" y="3845719"/>
-            <a:ext cx="3536442" cy="345281"/>
+            <a:ext cx="3605784" cy="345281"/>
           </a:xfrm>
           <a:prstGeom prst="rect">
             <a:avLst/>
@@ -29807,7 +29807,7 @@
           <a:ln/>
         </p:spPr>
         <p:txBody>
-          <a:bodyPr wrap="square" lIns="0" tIns="0" rIns="0" bIns="0" rtlCol="0" anchor="ctr"/>
+          <a:bodyPr wrap="none" lIns="0" tIns="0" rIns="0" bIns="0" rtlCol="0" anchor="ctr"/>
           <a:lstStyle/>
           <a:p>
             <a:pPr algn="l" indent="0" marL="0">
@@ -29849,7 +29849,7 @@
           <a:ln/>
         </p:spPr>
         <p:txBody>
-          <a:bodyPr wrap="square" lIns="0" tIns="0" rIns="0" bIns="0" rtlCol="0" anchor="ctr"/>
+          <a:bodyPr wrap="none" lIns="0" tIns="0" rIns="0" bIns="0" rtlCol="0" anchor="ctr"/>
           <a:lstStyle/>
           <a:p>
             <a:pPr algn="r" indent="0" marL="0">

--- a/presentation/AI_Work_Performance_ENG501.pptx
+++ b/presentation/AI_Work_Performance_ENG501.pptx
@@ -116,7 +116,7 @@
   <p:extLst>
     <p:ext uri="{521415D9-36F7-43E2-AB2F-B90AF26B5E84}">
       <p14:sectionLst xmlns:p14="http://schemas.microsoft.com/office/powerpoint/2010/main">
-        <p14:section name="English version: two field experiments on AI, productivity and business performance." id="{a4191d4c-2f5c-4ce6-f622-e5471820d11e}">
+        <p14:section name="English version: two field experiments on AI, productivity and business performance." id="{fd813ca2-37fc-a93e-61f2-48f9a7e71516}">
           <p14:sldIdLst>
             <p14:sldId id="256"/>
             <p14:sldId id="257"/>
@@ -130,7 +130,7 @@
             <p14:sldId id="265"/>
           </p14:sldIdLst>
         </p14:section>
-        <p14:section name="ฉบับภาษาไทย: การทดลองภาคสนามสองชิ้นเรื่อง AI ผลิตภาพ และผลการดำเนินธุรกิจ" id="{b2802288-ed4d-3b8f-cbc6-2dd6fae267ab}">
+        <p14:section name="ฉบับภาษาไทย: การทดลองภาคสนามสองชิ้นเรื่อง AI ผลิตภาพ และผลการดำเนินธุรกิจ" id="{0406d872-9cf5-6b59-1f66-d409e1cc735e}">
           <p14:sldIdLst/>
         </p14:section>
       </p14:sectionLst>
@@ -2275,7 +2275,7 @@
       </p:sp>
       <p:sp>
         <p:nvSpPr>
-          <p:cNvPr id="17" name="!!key1-en-16 b4:pop"/>
+          <p:cNvPr id="17" name="!!key1-en-1"/>
           <p:cNvSpPr/>
           <p:nvPr/>
         </p:nvSpPr>
@@ -2297,7 +2297,7 @@
       </p:sp>
       <p:sp>
         <p:nvSpPr>
-          <p:cNvPr id="18" name="!!key1-en-17 b4:pop"/>
+          <p:cNvPr id="18" name="!!key1-en-2"/>
           <p:cNvSpPr txBox="1"/>
           <p:nvPr/>
         </p:nvSpPr>
@@ -2342,18 +2342,9 @@
   <p:clrMapOvr>
     <a:masterClrMapping/>
   </p:clrMapOvr>
-  <mc:AlternateContent xmlns:mc="http://schemas.openxmlformats.org/markup-compatibility/2006">
-    <mc:Choice xmlns:p159="http://schemas.microsoft.com/office/powerpoint/2015/09/main" Requires="p159">
-      <p:transition xmlns:p14="http://schemas.microsoft.com/office/powerpoint/2010/main" spd="slow" p14:dur="800">
-        <p159:morph option="byObject"/>
-      </p:transition>
-    </mc:Choice>
-    <mc:Fallback>
-      <p:transition spd="med">
-        <p:fade/>
-      </p:transition>
-    </mc:Fallback>
-  </mc:AlternateContent>
+  <p:transition spd="med">
+    <p:fade/>
+  </p:transition>
   <p:timing>
     <p:tnLst>
       <p:par>
@@ -4530,7 +4521,7 @@
       </p:sp>
       <p:sp>
         <p:nvSpPr>
-          <p:cNvPr id="44" name="!!key4-th-43 static"/>
+          <p:cNvPr id="44" name="!!key4-th-1"/>
           <p:cNvSpPr/>
           <p:nvPr/>
         </p:nvSpPr>
@@ -4552,7 +4543,7 @@
       </p:sp>
       <p:sp>
         <p:nvSpPr>
-          <p:cNvPr id="45" name="!!key4-th-44 static"/>
+          <p:cNvPr id="45" name="!!key4-th-2"/>
           <p:cNvSpPr txBox="1"/>
           <p:nvPr/>
         </p:nvSpPr>
@@ -4597,9 +4588,18 @@
   <p:clrMapOvr>
     <a:masterClrMapping/>
   </p:clrMapOvr>
-  <p:transition spd="med">
-    <p:fade/>
-  </p:transition>
+  <mc:AlternateContent xmlns:mc="http://schemas.openxmlformats.org/markup-compatibility/2006">
+    <mc:Choice xmlns:p159="http://schemas.microsoft.com/office/powerpoint/2015/09/main" Requires="p159">
+      <p:transition xmlns:p14="http://schemas.microsoft.com/office/powerpoint/2010/main" spd="slow" p14:dur="800">
+        <p159:morph option="byObject"/>
+      </p:transition>
+    </mc:Choice>
+    <mc:Fallback>
+      <p:transition spd="med">
+        <p:fade/>
+      </p:transition>
+    </mc:Fallback>
+  </mc:AlternateContent>
   <p:timing>
     <p:tnLst>
       <p:par>
@@ -8092,7 +8092,7 @@
       </p:sp>
       <p:sp>
         <p:nvSpPr>
-          <p:cNvPr id="35" name="!!key1-en-34 static"/>
+          <p:cNvPr id="35" name="!!key1-en-1"/>
           <p:cNvSpPr/>
           <p:nvPr/>
         </p:nvSpPr>
@@ -8114,7 +8114,7 @@
       </p:sp>
       <p:sp>
         <p:nvSpPr>
-          <p:cNvPr id="36" name="!!key1-en-35 static"/>
+          <p:cNvPr id="36" name="!!key1-en-2"/>
           <p:cNvSpPr txBox="1"/>
           <p:nvPr/>
         </p:nvSpPr>
@@ -8156,7 +8156,7 @@
       </p:sp>
       <p:sp>
         <p:nvSpPr>
-          <p:cNvPr id="37" name="!!key2-en-36 b6:pop"/>
+          <p:cNvPr id="37" name="!!key2-en-1"/>
           <p:cNvSpPr/>
           <p:nvPr/>
         </p:nvSpPr>
@@ -8178,7 +8178,7 @@
       </p:sp>
       <p:sp>
         <p:nvSpPr>
-          <p:cNvPr id="38" name="!!key2-en-37 b6:pop"/>
+          <p:cNvPr id="38" name="!!key2-en-2"/>
           <p:cNvSpPr txBox="1"/>
           <p:nvPr/>
         </p:nvSpPr>
@@ -11559,7 +11559,7 @@
       </p:sp>
       <p:sp>
         <p:nvSpPr>
-          <p:cNvPr id="38" name="!!key2-en-37 static"/>
+          <p:cNvPr id="38" name="!!key2-en-1"/>
           <p:cNvSpPr/>
           <p:nvPr/>
         </p:nvSpPr>
@@ -11581,7 +11581,7 @@
       </p:sp>
       <p:sp>
         <p:nvSpPr>
-          <p:cNvPr id="39" name="!!key2-en-38 static"/>
+          <p:cNvPr id="39" name="!!key2-en-2"/>
           <p:cNvSpPr txBox="1"/>
           <p:nvPr/>
         </p:nvSpPr>
@@ -11623,7 +11623,7 @@
       </p:sp>
       <p:sp>
         <p:nvSpPr>
-          <p:cNvPr id="40" name="!!key3-en-39 b11:pop"/>
+          <p:cNvPr id="40" name="!!key3-en-1"/>
           <p:cNvSpPr/>
           <p:nvPr/>
         </p:nvSpPr>
@@ -11645,7 +11645,7 @@
       </p:sp>
       <p:sp>
         <p:nvSpPr>
-          <p:cNvPr id="41" name="!!key3-en-40 b11:pop"/>
+          <p:cNvPr id="41" name="!!key3-en-2"/>
           <p:cNvSpPr txBox="1"/>
           <p:nvPr/>
         </p:nvSpPr>
@@ -14796,7 +14796,7 @@
       </p:sp>
       <p:sp>
         <p:nvSpPr>
-          <p:cNvPr id="38" name="!!key3-en-37 static"/>
+          <p:cNvPr id="38" name="!!key3-en-1"/>
           <p:cNvSpPr/>
           <p:nvPr/>
         </p:nvSpPr>
@@ -14818,7 +14818,7 @@
       </p:sp>
       <p:sp>
         <p:nvSpPr>
-          <p:cNvPr id="39" name="!!key3-en-38 static"/>
+          <p:cNvPr id="39" name="!!key3-en-2"/>
           <p:cNvSpPr txBox="1"/>
           <p:nvPr/>
         </p:nvSpPr>
@@ -14860,7 +14860,7 @@
       </p:sp>
       <p:sp>
         <p:nvSpPr>
-          <p:cNvPr id="40" name="!!key4-en-39 b8:pop"/>
+          <p:cNvPr id="40" name="!!key4-en-1"/>
           <p:cNvSpPr/>
           <p:nvPr/>
         </p:nvSpPr>
@@ -14882,7 +14882,7 @@
       </p:sp>
       <p:sp>
         <p:nvSpPr>
-          <p:cNvPr id="41" name="!!key4-en-40 b8:pop"/>
+          <p:cNvPr id="41" name="!!key4-en-2"/>
           <p:cNvSpPr txBox="1"/>
           <p:nvPr/>
         </p:nvSpPr>
@@ -18283,7 +18283,7 @@
       </p:sp>
       <p:sp>
         <p:nvSpPr>
-          <p:cNvPr id="44" name="!!key4-en-43 static"/>
+          <p:cNvPr id="44" name="!!key4-en-1"/>
           <p:cNvSpPr/>
           <p:nvPr/>
         </p:nvSpPr>
@@ -18305,7 +18305,7 @@
       </p:sp>
       <p:sp>
         <p:nvSpPr>
-          <p:cNvPr id="45" name="!!key4-en-44 static"/>
+          <p:cNvPr id="45" name="!!key4-en-2"/>
           <p:cNvSpPr txBox="1"/>
           <p:nvPr/>
         </p:nvSpPr>
@@ -18350,9 +18350,18 @@
   <p:clrMapOvr>
     <a:masterClrMapping/>
   </p:clrMapOvr>
-  <p:transition spd="med">
-    <p:fade/>
-  </p:transition>
+  <mc:AlternateContent xmlns:mc="http://schemas.openxmlformats.org/markup-compatibility/2006">
+    <mc:Choice xmlns:p159="http://schemas.microsoft.com/office/powerpoint/2015/09/main" Requires="p159">
+      <p:transition xmlns:p14="http://schemas.microsoft.com/office/powerpoint/2010/main" spd="slow" p14:dur="800">
+        <p159:morph option="byObject"/>
+      </p:transition>
+    </mc:Choice>
+    <mc:Fallback>
+      <p:transition spd="med">
+        <p:fade/>
+      </p:transition>
+    </mc:Fallback>
+  </mc:AlternateContent>
   <p:timing>
     <p:tnLst>
       <p:par>
@@ -21156,7 +21165,7 @@
       </p:sp>
       <p:sp>
         <p:nvSpPr>
-          <p:cNvPr id="17" name="!!key1-th-16 b4:pop"/>
+          <p:cNvPr id="17" name="!!key1-th-1"/>
           <p:cNvSpPr/>
           <p:nvPr/>
         </p:nvSpPr>
@@ -21178,7 +21187,7 @@
       </p:sp>
       <p:sp>
         <p:nvSpPr>
-          <p:cNvPr id="18" name="!!key1-th-17 b4:pop"/>
+          <p:cNvPr id="18" name="!!key1-th-2"/>
           <p:cNvSpPr txBox="1"/>
           <p:nvPr/>
         </p:nvSpPr>
@@ -21223,18 +21232,9 @@
   <p:clrMapOvr>
     <a:masterClrMapping/>
   </p:clrMapOvr>
-  <mc:AlternateContent xmlns:mc="http://schemas.openxmlformats.org/markup-compatibility/2006">
-    <mc:Choice xmlns:p159="http://schemas.microsoft.com/office/powerpoint/2015/09/main" Requires="p159">
-      <p:transition xmlns:p14="http://schemas.microsoft.com/office/powerpoint/2010/main" spd="slow" p14:dur="800">
-        <p159:morph option="byObject"/>
-      </p:transition>
-    </mc:Choice>
-    <mc:Fallback>
-      <p:transition spd="med">
-        <p:fade/>
-      </p:transition>
-    </mc:Fallback>
-  </mc:AlternateContent>
+  <p:transition spd="med">
+    <p:fade/>
+  </p:transition>
   <p:timing>
     <p:tnLst>
       <p:par>
@@ -23256,7 +23256,7 @@
       </p:sp>
       <p:sp>
         <p:nvSpPr>
-          <p:cNvPr id="35" name="!!key1-th-34 static"/>
+          <p:cNvPr id="35" name="!!key1-th-1"/>
           <p:cNvSpPr/>
           <p:nvPr/>
         </p:nvSpPr>
@@ -23278,7 +23278,7 @@
       </p:sp>
       <p:sp>
         <p:nvSpPr>
-          <p:cNvPr id="36" name="!!key1-th-35 static"/>
+          <p:cNvPr id="36" name="!!key1-th-2"/>
           <p:cNvSpPr txBox="1"/>
           <p:nvPr/>
         </p:nvSpPr>
@@ -23320,7 +23320,7 @@
       </p:sp>
       <p:sp>
         <p:nvSpPr>
-          <p:cNvPr id="37" name="!!key2-th-36 b6:pop"/>
+          <p:cNvPr id="37" name="!!key2-th-1"/>
           <p:cNvSpPr/>
           <p:nvPr/>
         </p:nvSpPr>
@@ -23342,7 +23342,7 @@
       </p:sp>
       <p:sp>
         <p:nvSpPr>
-          <p:cNvPr id="38" name="!!key2-th-37 b6:pop"/>
+          <p:cNvPr id="38" name="!!key2-th-2"/>
           <p:cNvSpPr txBox="1"/>
           <p:nvPr/>
         </p:nvSpPr>
@@ -26706,7 +26706,7 @@
       </p:sp>
       <p:sp>
         <p:nvSpPr>
-          <p:cNvPr id="38" name="!!key2-th-37 static"/>
+          <p:cNvPr id="38" name="!!key2-th-1"/>
           <p:cNvSpPr/>
           <p:nvPr/>
         </p:nvSpPr>
@@ -26728,7 +26728,7 @@
       </p:sp>
       <p:sp>
         <p:nvSpPr>
-          <p:cNvPr id="39" name="!!key2-th-38 static"/>
+          <p:cNvPr id="39" name="!!key2-th-2"/>
           <p:cNvSpPr txBox="1"/>
           <p:nvPr/>
         </p:nvSpPr>
@@ -26770,7 +26770,7 @@
       </p:sp>
       <p:sp>
         <p:nvSpPr>
-          <p:cNvPr id="40" name="!!key3-th-39 b11:pop"/>
+          <p:cNvPr id="40" name="!!key3-th-1"/>
           <p:cNvSpPr/>
           <p:nvPr/>
         </p:nvSpPr>
@@ -26792,7 +26792,7 @@
       </p:sp>
       <p:sp>
         <p:nvSpPr>
-          <p:cNvPr id="41" name="!!key3-th-40 b11:pop"/>
+          <p:cNvPr id="41" name="!!key3-th-2"/>
           <p:cNvSpPr txBox="1"/>
           <p:nvPr/>
         </p:nvSpPr>
@@ -29926,7 +29926,7 @@
       </p:sp>
       <p:sp>
         <p:nvSpPr>
-          <p:cNvPr id="38" name="!!key3-th-37 static"/>
+          <p:cNvPr id="38" name="!!key3-th-1"/>
           <p:cNvSpPr/>
           <p:nvPr/>
         </p:nvSpPr>
@@ -29948,7 +29948,7 @@
       </p:sp>
       <p:sp>
         <p:nvSpPr>
-          <p:cNvPr id="39" name="!!key3-th-38 static"/>
+          <p:cNvPr id="39" name="!!key3-th-2"/>
           <p:cNvSpPr txBox="1"/>
           <p:nvPr/>
         </p:nvSpPr>
@@ -29990,7 +29990,7 @@
       </p:sp>
       <p:sp>
         <p:nvSpPr>
-          <p:cNvPr id="40" name="!!key4-th-39 b8:pop"/>
+          <p:cNvPr id="40" name="!!key4-th-1"/>
           <p:cNvSpPr/>
           <p:nvPr/>
         </p:nvSpPr>
@@ -30012,7 +30012,7 @@
       </p:sp>
       <p:sp>
         <p:nvSpPr>
-          <p:cNvPr id="41" name="!!key4-th-40 b8:pop"/>
+          <p:cNvPr id="41" name="!!key4-th-2"/>
           <p:cNvSpPr txBox="1"/>
           <p:nvPr/>
         </p:nvSpPr>

--- a/presentation/AI_Work_Performance_ENG501.pptx
+++ b/presentation/AI_Work_Performance_ENG501.pptx
@@ -116,7 +116,7 @@
   <p:extLst>
     <p:ext uri="{521415D9-36F7-43E2-AB2F-B90AF26B5E84}">
       <p14:sectionLst xmlns:p14="http://schemas.microsoft.com/office/powerpoint/2010/main">
-        <p14:section name="English version: two field experiments on AI, productivity and business performance." id="{fd813ca2-37fc-a93e-61f2-48f9a7e71516}">
+        <p14:section name="English version: two field experiments on AI, productivity and business performance." id="{e32aae4a-0e1a-c2f2-3e8d-3ef0946ef2e5}">
           <p14:sldIdLst>
             <p14:sldId id="256"/>
             <p14:sldId id="257"/>
@@ -130,7 +130,7 @@
             <p14:sldId id="265"/>
           </p14:sldIdLst>
         </p14:section>
-        <p14:section name="ฉบับภาษาไทย: การทดลองภาคสนามสองชิ้นเรื่อง AI ผลิตภาพ และผลการดำเนินธุรกิจ" id="{0406d872-9cf5-6b59-1f66-d409e1cc735e}">
+        <p14:section name="ฉบับภาษาไทย: การทดลองภาคสนามสองชิ้นเรื่อง AI ผลิตภาพ และผลการดำเนินธุรกิจ" id="{348442ed-0f6e-a732-abd3-243bd4698d0c}">
           <p14:sldIdLst/>
         </p14:section>
       </p14:sectionLst>
@@ -7825,7 +7825,7 @@
       </p:sp>
       <p:pic>
         <p:nvPicPr>
-          <p:cNvPr id="29" name="b4:rise (Jagged line dividing tasks AI does well from tasks it does not)" descr="/home/user/slide-present-en/presentation/webdeck/art/frontier.png">    </p:cNvPr>
+          <p:cNvPr id="29" name="b4:rise (Jagged line dividing tasks AI does well from tasks it does not)" descr="/home/user/slide-present-en/presentation/webdeck/art/frontier-wide.png">    </p:cNvPr>
           <p:cNvPicPr>
             <a:picLocks noChangeAspect="1"/>
           </p:cNvPicPr>
@@ -22989,7 +22989,7 @@
       </p:sp>
       <p:pic>
         <p:nvPicPr>
-          <p:cNvPr id="29" name="b4:rise (เส้นหยักแบ่งงานที่ AI ทำได้ดีกับงานที่ทำได้ไม่ดี)" descr="/home/user/slide-present-en/presentation/webdeck/art/frontier.png">    </p:cNvPr>
+          <p:cNvPr id="29" name="b4:rise (เส้นหยักแบ่งงานที่ AI ทำได้ดีกับงานที่ทำได้ไม่ดี)" descr="/home/user/slide-present-en/presentation/webdeck/art/frontier-wide.png">    </p:cNvPr>
           <p:cNvPicPr>
             <a:picLocks noChangeAspect="1"/>
           </p:cNvPicPr>
